--- a/FYP_RayTracing_Presentation.pptx
+++ b/FYP_RayTracing_Presentation.pptx
@@ -11,6 +11,11 @@
     <p:sldId id="259" r:id="rId10"/>
     <p:sldId id="260" r:id="rId11"/>
     <p:sldId id="261" r:id="rId12"/>
+    <p:sldId id="262" r:id="rId13"/>
+    <p:sldId id="263" r:id="rId14"/>
+    <p:sldId id="264" r:id="rId15"/>
+    <p:sldId id="265" r:id="rId16"/>
+    <p:sldId id="266" r:id="rId17"/>
   </p:sldIdLst>
   <p:sldSz cx="12188952" cy="6858000" type="screen4x3"/>
   <p:notesSz cx="6858000" cy="9144000"/>
@@ -3690,6 +3695,3738 @@
 </p:sld>
 </file>
 
+<file path=ppt/slides/slide10.xml><?xml version="1.0" encoding="utf-8"?>
+<p:sld xmlns:a="http://schemas.openxmlformats.org/drawingml/2006/main" xmlns:p="http://schemas.openxmlformats.org/presentationml/2006/main" xmlns:r="http://schemas.openxmlformats.org/officeDocument/2006/relationships">
+  <p:cSld>
+    <p:bg>
+      <p:bgPr>
+        <a:solidFill>
+          <a:srgbClr val="0D1B2A"/>
+        </a:solidFill>
+        <a:effectLst/>
+      </p:bgPr>
+    </p:bg>
+    <p:spTree>
+      <p:nvGrpSpPr>
+        <p:cNvPr id="1" name=""/>
+        <p:cNvGrpSpPr/>
+        <p:nvPr/>
+      </p:nvGrpSpPr>
+      <p:grpSpPr/>
+      <p:sp>
+        <p:nvSpPr>
+          <p:cNvPr id="2" name="Rectangle 1"/>
+          <p:cNvSpPr/>
+          <p:nvPr/>
+        </p:nvSpPr>
+        <p:spPr>
+          <a:xfrm>
+            <a:off x="0" y="73152"/>
+            <a:ext cx="12188952" cy="54864"/>
+          </a:xfrm>
+          <a:prstGeom prst="rect">
+            <a:avLst/>
+          </a:prstGeom>
+          <a:solidFill>
+            <a:srgbClr val="00B4D8"/>
+          </a:solidFill>
+          <a:ln>
+            <a:noFill/>
+          </a:ln>
+        </p:spPr>
+        <p:style>
+          <a:lnRef idx="1">
+            <a:schemeClr val="accent1"/>
+          </a:lnRef>
+          <a:fillRef idx="3">
+            <a:schemeClr val="accent1"/>
+          </a:fillRef>
+          <a:effectRef idx="2">
+            <a:schemeClr val="accent1"/>
+          </a:effectRef>
+          <a:fontRef idx="minor">
+            <a:schemeClr val="lt1"/>
+          </a:fontRef>
+        </p:style>
+        <p:txBody>
+          <a:bodyPr rtlCol="0" anchor="ctr"/>
+          <a:lstStyle/>
+          <a:p>
+            <a:pPr algn="ctr"/>
+          </a:p>
+        </p:txBody>
+      </p:sp>
+      <p:sp>
+        <p:nvSpPr>
+          <p:cNvPr id="3" name="TextBox 2"/>
+          <p:cNvSpPr txBox="1"/>
+          <p:nvPr/>
+        </p:nvSpPr>
+        <p:spPr>
+          <a:xfrm>
+            <a:off x="320040" y="201168"/>
+            <a:ext cx="3657600" cy="256032"/>
+          </a:xfrm>
+          <a:prstGeom prst="rect">
+            <a:avLst/>
+          </a:prstGeom>
+          <a:noFill/>
+        </p:spPr>
+        <p:txBody>
+          <a:bodyPr wrap="square">
+            <a:spAutoFit/>
+          </a:bodyPr>
+          <a:lstStyle/>
+          <a:p>
+            <a:pPr algn="l"/>
+            <a:r>
+              <a:rPr sz="800" b="1" i="0">
+                <a:solidFill>
+                  <a:srgbClr val="00B4D8"/>
+                </a:solidFill>
+              </a:rPr>
+              <a:t>SCENE PIPELINE</a:t>
+            </a:r>
+          </a:p>
+        </p:txBody>
+      </p:sp>
+      <p:sp>
+        <p:nvSpPr>
+          <p:cNvPr id="4" name="TextBox 3"/>
+          <p:cNvSpPr txBox="1"/>
+          <p:nvPr/>
+        </p:nvSpPr>
+        <p:spPr>
+          <a:xfrm>
+            <a:off x="10972800" y="6492240"/>
+            <a:ext cx="1097280" cy="320040"/>
+          </a:xfrm>
+          <a:prstGeom prst="rect">
+            <a:avLst/>
+          </a:prstGeom>
+          <a:noFill/>
+        </p:spPr>
+        <p:txBody>
+          <a:bodyPr wrap="square">
+            <a:spAutoFit/>
+          </a:bodyPr>
+          <a:lstStyle/>
+          <a:p>
+            <a:pPr algn="r"/>
+            <a:r>
+              <a:rPr sz="900" b="0" i="0">
+                <a:solidFill>
+                  <a:srgbClr val="CAD3DF"/>
+                </a:solidFill>
+              </a:rPr>
+              <a:t>10 / 12</a:t>
+            </a:r>
+          </a:p>
+        </p:txBody>
+      </p:sp>
+      <p:sp>
+        <p:nvSpPr>
+          <p:cNvPr id="5" name="TextBox 4"/>
+          <p:cNvSpPr txBox="1"/>
+          <p:nvPr/>
+        </p:nvSpPr>
+        <p:spPr>
+          <a:xfrm>
+            <a:off x="411480" y="457200"/>
+            <a:ext cx="11430000" cy="640080"/>
+          </a:xfrm>
+          <a:prstGeom prst="rect">
+            <a:avLst/>
+          </a:prstGeom>
+          <a:noFill/>
+        </p:spPr>
+        <p:txBody>
+          <a:bodyPr wrap="square">
+            <a:spAutoFit/>
+          </a:bodyPr>
+          <a:lstStyle/>
+          <a:p>
+            <a:pPr algn="l"/>
+            <a:r>
+              <a:rPr sz="2600" b="1" i="0">
+                <a:solidFill>
+                  <a:srgbClr val="FFFFFF"/>
+                </a:solidFill>
+              </a:rPr>
+              <a:t>Final Scene: scene_v2_infra — How DTM + nDSM Are Merged</a:t>
+            </a:r>
+          </a:p>
+        </p:txBody>
+      </p:sp>
+      <p:sp>
+        <p:nvSpPr>
+          <p:cNvPr id="6" name="Rectangle 5"/>
+          <p:cNvSpPr/>
+          <p:nvPr/>
+        </p:nvSpPr>
+        <p:spPr>
+          <a:xfrm>
+            <a:off x="411480" y="1078992"/>
+            <a:ext cx="11338560" cy="16459"/>
+          </a:xfrm>
+          <a:prstGeom prst="rect">
+            <a:avLst/>
+          </a:prstGeom>
+          <a:solidFill>
+            <a:srgbClr val="1E3A52"/>
+          </a:solidFill>
+          <a:ln>
+            <a:noFill/>
+          </a:ln>
+        </p:spPr>
+        <p:style>
+          <a:lnRef idx="1">
+            <a:schemeClr val="accent1"/>
+          </a:lnRef>
+          <a:fillRef idx="3">
+            <a:schemeClr val="accent1"/>
+          </a:fillRef>
+          <a:effectRef idx="2">
+            <a:schemeClr val="accent1"/>
+          </a:effectRef>
+          <a:fontRef idx="minor">
+            <a:schemeClr val="lt1"/>
+          </a:fontRef>
+        </p:style>
+        <p:txBody>
+          <a:bodyPr rtlCol="0" anchor="ctr"/>
+          <a:lstStyle/>
+          <a:p>
+            <a:pPr algn="ctr"/>
+          </a:p>
+        </p:txBody>
+      </p:sp>
+      <p:sp>
+        <p:nvSpPr>
+          <p:cNvPr id="7" name="Rectangle 6"/>
+          <p:cNvSpPr/>
+          <p:nvPr/>
+        </p:nvSpPr>
+        <p:spPr>
+          <a:xfrm>
+            <a:off x="320040" y="1371600"/>
+            <a:ext cx="54864" cy="685800"/>
+          </a:xfrm>
+          <a:prstGeom prst="rect">
+            <a:avLst/>
+          </a:prstGeom>
+          <a:solidFill>
+            <a:srgbClr val="2DCB7F"/>
+          </a:solidFill>
+          <a:ln>
+            <a:noFill/>
+          </a:ln>
+        </p:spPr>
+        <p:style>
+          <a:lnRef idx="1">
+            <a:schemeClr val="accent1"/>
+          </a:lnRef>
+          <a:fillRef idx="3">
+            <a:schemeClr val="accent1"/>
+          </a:fillRef>
+          <a:effectRef idx="2">
+            <a:schemeClr val="accent1"/>
+          </a:effectRef>
+          <a:fontRef idx="minor">
+            <a:schemeClr val="lt1"/>
+          </a:fontRef>
+        </p:style>
+        <p:txBody>
+          <a:bodyPr rtlCol="0" anchor="ctr"/>
+          <a:lstStyle/>
+          <a:p>
+            <a:pPr algn="ctr"/>
+          </a:p>
+        </p:txBody>
+      </p:sp>
+      <p:sp>
+        <p:nvSpPr>
+          <p:cNvPr id="8" name="Rectangle 7"/>
+          <p:cNvSpPr/>
+          <p:nvPr/>
+        </p:nvSpPr>
+        <p:spPr>
+          <a:xfrm>
+            <a:off x="374904" y="1261872"/>
+            <a:ext cx="6675120" cy="914400"/>
+          </a:xfrm>
+          <a:prstGeom prst="rect">
+            <a:avLst/>
+          </a:prstGeom>
+          <a:solidFill>
+            <a:srgbClr val="112A40"/>
+          </a:solidFill>
+          <a:ln>
+            <a:noFill/>
+          </a:ln>
+        </p:spPr>
+        <p:style>
+          <a:lnRef idx="1">
+            <a:schemeClr val="accent1"/>
+          </a:lnRef>
+          <a:fillRef idx="3">
+            <a:schemeClr val="accent1"/>
+          </a:fillRef>
+          <a:effectRef idx="2">
+            <a:schemeClr val="accent1"/>
+          </a:effectRef>
+          <a:fontRef idx="minor">
+            <a:schemeClr val="lt1"/>
+          </a:fontRef>
+        </p:style>
+        <p:txBody>
+          <a:bodyPr rtlCol="0" anchor="ctr"/>
+          <a:lstStyle/>
+          <a:p>
+            <a:pPr algn="ctr"/>
+          </a:p>
+        </p:txBody>
+      </p:sp>
+      <p:sp>
+        <p:nvSpPr>
+          <p:cNvPr id="9" name="TextBox 8"/>
+          <p:cNvSpPr txBox="1"/>
+          <p:nvPr/>
+        </p:nvSpPr>
+        <p:spPr>
+          <a:xfrm>
+            <a:off x="548640" y="1335024"/>
+            <a:ext cx="2286000" cy="384048"/>
+          </a:xfrm>
+          <a:prstGeom prst="rect">
+            <a:avLst/>
+          </a:prstGeom>
+          <a:noFill/>
+        </p:spPr>
+        <p:txBody>
+          <a:bodyPr wrap="square">
+            <a:spAutoFit/>
+          </a:bodyPr>
+          <a:lstStyle/>
+          <a:p>
+            <a:pPr algn="l"/>
+            <a:r>
+              <a:rPr sz="1200" b="1" i="0">
+                <a:solidFill>
+                  <a:srgbClr val="2DCB7F"/>
+                </a:solidFill>
+              </a:rPr>
+              <a:t>EA LiDAR DTM 1m</a:t>
+            </a:r>
+          </a:p>
+        </p:txBody>
+      </p:sp>
+      <p:sp>
+        <p:nvSpPr>
+          <p:cNvPr id="10" name="TextBox 9"/>
+          <p:cNvSpPr txBox="1"/>
+          <p:nvPr/>
+        </p:nvSpPr>
+        <p:spPr>
+          <a:xfrm>
+            <a:off x="2834640" y="1335024"/>
+            <a:ext cx="4114800" cy="749808"/>
+          </a:xfrm>
+          <a:prstGeom prst="rect">
+            <a:avLst/>
+          </a:prstGeom>
+          <a:noFill/>
+        </p:spPr>
+        <p:txBody>
+          <a:bodyPr wrap="square">
+            <a:spAutoFit/>
+          </a:bodyPr>
+          <a:lstStyle/>
+          <a:p>
+            <a:pPr algn="l"/>
+            <a:r>
+              <a:rPr sz="1000" b="0" i="0">
+                <a:solidFill>
+                  <a:srgbClr val="CAD3DF"/>
+                </a:solidFill>
+              </a:rPr>
+              <a:t>Ground-only elevation raster (GeoTIFF)
+Covered: 11×11 km Nottingham bbox</a:t>
+            </a:r>
+          </a:p>
+        </p:txBody>
+      </p:sp>
+      <p:sp>
+        <p:nvSpPr>
+          <p:cNvPr id="11" name="TextBox 10"/>
+          <p:cNvSpPr txBox="1"/>
+          <p:nvPr/>
+        </p:nvSpPr>
+        <p:spPr>
+          <a:xfrm>
+            <a:off x="3291840" y="2194560"/>
+            <a:ext cx="365760" cy="274320"/>
+          </a:xfrm>
+          <a:prstGeom prst="rect">
+            <a:avLst/>
+          </a:prstGeom>
+          <a:noFill/>
+        </p:spPr>
+        <p:txBody>
+          <a:bodyPr wrap="square">
+            <a:spAutoFit/>
+          </a:bodyPr>
+          <a:lstStyle/>
+          <a:p>
+            <a:pPr algn="ctr"/>
+            <a:r>
+              <a:rPr sz="1000" b="0" i="0">
+                <a:solidFill>
+                  <a:srgbClr val="1E3A52"/>
+                </a:solidFill>
+              </a:rPr>
+              <a:t>▼</a:t>
+            </a:r>
+          </a:p>
+        </p:txBody>
+      </p:sp>
+      <p:sp>
+        <p:nvSpPr>
+          <p:cNvPr id="12" name="Rectangle 11"/>
+          <p:cNvSpPr/>
+          <p:nvPr/>
+        </p:nvSpPr>
+        <p:spPr>
+          <a:xfrm>
+            <a:off x="320040" y="2395728"/>
+            <a:ext cx="54864" cy="685800"/>
+          </a:xfrm>
+          <a:prstGeom prst="rect">
+            <a:avLst/>
+          </a:prstGeom>
+          <a:solidFill>
+            <a:srgbClr val="FF9F1C"/>
+          </a:solidFill>
+          <a:ln>
+            <a:noFill/>
+          </a:ln>
+        </p:spPr>
+        <p:style>
+          <a:lnRef idx="1">
+            <a:schemeClr val="accent1"/>
+          </a:lnRef>
+          <a:fillRef idx="3">
+            <a:schemeClr val="accent1"/>
+          </a:fillRef>
+          <a:effectRef idx="2">
+            <a:schemeClr val="accent1"/>
+          </a:effectRef>
+          <a:fontRef idx="minor">
+            <a:schemeClr val="lt1"/>
+          </a:fontRef>
+        </p:style>
+        <p:txBody>
+          <a:bodyPr rtlCol="0" anchor="ctr"/>
+          <a:lstStyle/>
+          <a:p>
+            <a:pPr algn="ctr"/>
+          </a:p>
+        </p:txBody>
+      </p:sp>
+      <p:sp>
+        <p:nvSpPr>
+          <p:cNvPr id="13" name="Rectangle 12"/>
+          <p:cNvSpPr/>
+          <p:nvPr/>
+        </p:nvSpPr>
+        <p:spPr>
+          <a:xfrm>
+            <a:off x="374904" y="2286000"/>
+            <a:ext cx="6675120" cy="914400"/>
+          </a:xfrm>
+          <a:prstGeom prst="rect">
+            <a:avLst/>
+          </a:prstGeom>
+          <a:solidFill>
+            <a:srgbClr val="112A40"/>
+          </a:solidFill>
+          <a:ln>
+            <a:noFill/>
+          </a:ln>
+        </p:spPr>
+        <p:style>
+          <a:lnRef idx="1">
+            <a:schemeClr val="accent1"/>
+          </a:lnRef>
+          <a:fillRef idx="3">
+            <a:schemeClr val="accent1"/>
+          </a:fillRef>
+          <a:effectRef idx="2">
+            <a:schemeClr val="accent1"/>
+          </a:effectRef>
+          <a:fontRef idx="minor">
+            <a:schemeClr val="lt1"/>
+          </a:fontRef>
+        </p:style>
+        <p:txBody>
+          <a:bodyPr rtlCol="0" anchor="ctr"/>
+          <a:lstStyle/>
+          <a:p>
+            <a:pPr algn="ctr"/>
+          </a:p>
+        </p:txBody>
+      </p:sp>
+      <p:sp>
+        <p:nvSpPr>
+          <p:cNvPr id="14" name="TextBox 13"/>
+          <p:cNvSpPr txBox="1"/>
+          <p:nvPr/>
+        </p:nvSpPr>
+        <p:spPr>
+          <a:xfrm>
+            <a:off x="548640" y="2359152"/>
+            <a:ext cx="2286000" cy="384048"/>
+          </a:xfrm>
+          <a:prstGeom prst="rect">
+            <a:avLst/>
+          </a:prstGeom>
+          <a:noFill/>
+        </p:spPr>
+        <p:txBody>
+          <a:bodyPr wrap="square">
+            <a:spAutoFit/>
+          </a:bodyPr>
+          <a:lstStyle/>
+          <a:p>
+            <a:pPr algn="l"/>
+            <a:r>
+              <a:rPr sz="1200" b="1" i="0">
+                <a:solidFill>
+                  <a:srgbClr val="FF9F1C"/>
+                </a:solidFill>
+              </a:rPr>
+              <a:t>EA LiDAR DSM 1m</a:t>
+            </a:r>
+          </a:p>
+        </p:txBody>
+      </p:sp>
+      <p:sp>
+        <p:nvSpPr>
+          <p:cNvPr id="15" name="TextBox 14"/>
+          <p:cNvSpPr txBox="1"/>
+          <p:nvPr/>
+        </p:nvSpPr>
+        <p:spPr>
+          <a:xfrm>
+            <a:off x="2834640" y="2359152"/>
+            <a:ext cx="4114800" cy="749808"/>
+          </a:xfrm>
+          <a:prstGeom prst="rect">
+            <a:avLst/>
+          </a:prstGeom>
+          <a:noFill/>
+        </p:spPr>
+        <p:txBody>
+          <a:bodyPr wrap="square">
+            <a:spAutoFit/>
+          </a:bodyPr>
+          <a:lstStyle/>
+          <a:p>
+            <a:pPr algn="l"/>
+            <a:r>
+              <a:rPr sz="1000" b="0" i="0">
+                <a:solidFill>
+                  <a:srgbClr val="CAD3DF"/>
+                </a:solidFill>
+              </a:rPr>
+              <a:t>First-return surface raster
+Includes buildings + trees</a:t>
+            </a:r>
+          </a:p>
+        </p:txBody>
+      </p:sp>
+      <p:sp>
+        <p:nvSpPr>
+          <p:cNvPr id="16" name="TextBox 15"/>
+          <p:cNvSpPr txBox="1"/>
+          <p:nvPr/>
+        </p:nvSpPr>
+        <p:spPr>
+          <a:xfrm>
+            <a:off x="3291840" y="3218688"/>
+            <a:ext cx="365760" cy="274320"/>
+          </a:xfrm>
+          <a:prstGeom prst="rect">
+            <a:avLst/>
+          </a:prstGeom>
+          <a:noFill/>
+        </p:spPr>
+        <p:txBody>
+          <a:bodyPr wrap="square">
+            <a:spAutoFit/>
+          </a:bodyPr>
+          <a:lstStyle/>
+          <a:p>
+            <a:pPr algn="ctr"/>
+            <a:r>
+              <a:rPr sz="1000" b="0" i="0">
+                <a:solidFill>
+                  <a:srgbClr val="1E3A52"/>
+                </a:solidFill>
+              </a:rPr>
+              <a:t>▼</a:t>
+            </a:r>
+          </a:p>
+        </p:txBody>
+      </p:sp>
+      <p:sp>
+        <p:nvSpPr>
+          <p:cNvPr id="17" name="Rectangle 16"/>
+          <p:cNvSpPr/>
+          <p:nvPr/>
+        </p:nvSpPr>
+        <p:spPr>
+          <a:xfrm>
+            <a:off x="320040" y="3419856"/>
+            <a:ext cx="54864" cy="685800"/>
+          </a:xfrm>
+          <a:prstGeom prst="rect">
+            <a:avLst/>
+          </a:prstGeom>
+          <a:solidFill>
+            <a:srgbClr val="00B4D8"/>
+          </a:solidFill>
+          <a:ln>
+            <a:noFill/>
+          </a:ln>
+        </p:spPr>
+        <p:style>
+          <a:lnRef idx="1">
+            <a:schemeClr val="accent1"/>
+          </a:lnRef>
+          <a:fillRef idx="3">
+            <a:schemeClr val="accent1"/>
+          </a:fillRef>
+          <a:effectRef idx="2">
+            <a:schemeClr val="accent1"/>
+          </a:effectRef>
+          <a:fontRef idx="minor">
+            <a:schemeClr val="lt1"/>
+          </a:fontRef>
+        </p:style>
+        <p:txBody>
+          <a:bodyPr rtlCol="0" anchor="ctr"/>
+          <a:lstStyle/>
+          <a:p>
+            <a:pPr algn="ctr"/>
+          </a:p>
+        </p:txBody>
+      </p:sp>
+      <p:sp>
+        <p:nvSpPr>
+          <p:cNvPr id="18" name="Rectangle 17"/>
+          <p:cNvSpPr/>
+          <p:nvPr/>
+        </p:nvSpPr>
+        <p:spPr>
+          <a:xfrm>
+            <a:off x="374904" y="3310128"/>
+            <a:ext cx="6675120" cy="914400"/>
+          </a:xfrm>
+          <a:prstGeom prst="rect">
+            <a:avLst/>
+          </a:prstGeom>
+          <a:solidFill>
+            <a:srgbClr val="112A40"/>
+          </a:solidFill>
+          <a:ln>
+            <a:noFill/>
+          </a:ln>
+        </p:spPr>
+        <p:style>
+          <a:lnRef idx="1">
+            <a:schemeClr val="accent1"/>
+          </a:lnRef>
+          <a:fillRef idx="3">
+            <a:schemeClr val="accent1"/>
+          </a:fillRef>
+          <a:effectRef idx="2">
+            <a:schemeClr val="accent1"/>
+          </a:effectRef>
+          <a:fontRef idx="minor">
+            <a:schemeClr val="lt1"/>
+          </a:fontRef>
+        </p:style>
+        <p:txBody>
+          <a:bodyPr rtlCol="0" anchor="ctr"/>
+          <a:lstStyle/>
+          <a:p>
+            <a:pPr algn="ctr"/>
+          </a:p>
+        </p:txBody>
+      </p:sp>
+      <p:sp>
+        <p:nvSpPr>
+          <p:cNvPr id="19" name="TextBox 18"/>
+          <p:cNvSpPr txBox="1"/>
+          <p:nvPr/>
+        </p:nvSpPr>
+        <p:spPr>
+          <a:xfrm>
+            <a:off x="548640" y="3383280"/>
+            <a:ext cx="2286000" cy="384048"/>
+          </a:xfrm>
+          <a:prstGeom prst="rect">
+            <a:avLst/>
+          </a:prstGeom>
+          <a:noFill/>
+        </p:spPr>
+        <p:txBody>
+          <a:bodyPr wrap="square">
+            <a:spAutoFit/>
+          </a:bodyPr>
+          <a:lstStyle/>
+          <a:p>
+            <a:pPr algn="l"/>
+            <a:r>
+              <a:rPr sz="1200" b="1" i="0">
+                <a:solidFill>
+                  <a:srgbClr val="00B4D8"/>
+                </a:solidFill>
+              </a:rPr>
+              <a:t>nDSM = DSM − DTM</a:t>
+            </a:r>
+          </a:p>
+        </p:txBody>
+      </p:sp>
+      <p:sp>
+        <p:nvSpPr>
+          <p:cNvPr id="20" name="TextBox 19"/>
+          <p:cNvSpPr txBox="1"/>
+          <p:nvPr/>
+        </p:nvSpPr>
+        <p:spPr>
+          <a:xfrm>
+            <a:off x="2834640" y="3383280"/>
+            <a:ext cx="4114800" cy="749808"/>
+          </a:xfrm>
+          <a:prstGeom prst="rect">
+            <a:avLst/>
+          </a:prstGeom>
+          <a:noFill/>
+        </p:spPr>
+        <p:txBody>
+          <a:bodyPr wrap="square">
+            <a:spAutoFit/>
+          </a:bodyPr>
+          <a:lstStyle/>
+          <a:p>
+            <a:pPr algn="l"/>
+            <a:r>
+              <a:rPr sz="1000" b="0" i="0">
+                <a:solidFill>
+                  <a:srgbClr val="CAD3DF"/>
+                </a:solidFill>
+              </a:rPr>
+              <a:t>Per-pixel height above ground
+Median filter → remove LiDAR spikes</a:t>
+            </a:r>
+          </a:p>
+        </p:txBody>
+      </p:sp>
+      <p:sp>
+        <p:nvSpPr>
+          <p:cNvPr id="21" name="TextBox 20"/>
+          <p:cNvSpPr txBox="1"/>
+          <p:nvPr/>
+        </p:nvSpPr>
+        <p:spPr>
+          <a:xfrm>
+            <a:off x="3291840" y="4242816"/>
+            <a:ext cx="365760" cy="274320"/>
+          </a:xfrm>
+          <a:prstGeom prst="rect">
+            <a:avLst/>
+          </a:prstGeom>
+          <a:noFill/>
+        </p:spPr>
+        <p:txBody>
+          <a:bodyPr wrap="square">
+            <a:spAutoFit/>
+          </a:bodyPr>
+          <a:lstStyle/>
+          <a:p>
+            <a:pPr algn="ctr"/>
+            <a:r>
+              <a:rPr sz="1000" b="0" i="0">
+                <a:solidFill>
+                  <a:srgbClr val="1E3A52"/>
+                </a:solidFill>
+              </a:rPr>
+              <a:t>▼</a:t>
+            </a:r>
+          </a:p>
+        </p:txBody>
+      </p:sp>
+      <p:sp>
+        <p:nvSpPr>
+          <p:cNvPr id="22" name="Rectangle 21"/>
+          <p:cNvSpPr/>
+          <p:nvPr/>
+        </p:nvSpPr>
+        <p:spPr>
+          <a:xfrm>
+            <a:off x="320040" y="4443984"/>
+            <a:ext cx="54864" cy="685800"/>
+          </a:xfrm>
+          <a:prstGeom prst="rect">
+            <a:avLst/>
+          </a:prstGeom>
+          <a:solidFill>
+            <a:srgbClr val="90E0EF"/>
+          </a:solidFill>
+          <a:ln>
+            <a:noFill/>
+          </a:ln>
+        </p:spPr>
+        <p:style>
+          <a:lnRef idx="1">
+            <a:schemeClr val="accent1"/>
+          </a:lnRef>
+          <a:fillRef idx="3">
+            <a:schemeClr val="accent1"/>
+          </a:fillRef>
+          <a:effectRef idx="2">
+            <a:schemeClr val="accent1"/>
+          </a:effectRef>
+          <a:fontRef idx="minor">
+            <a:schemeClr val="lt1"/>
+          </a:fontRef>
+        </p:style>
+        <p:txBody>
+          <a:bodyPr rtlCol="0" anchor="ctr"/>
+          <a:lstStyle/>
+          <a:p>
+            <a:pPr algn="ctr"/>
+          </a:p>
+        </p:txBody>
+      </p:sp>
+      <p:sp>
+        <p:nvSpPr>
+          <p:cNvPr id="23" name="Rectangle 22"/>
+          <p:cNvSpPr/>
+          <p:nvPr/>
+        </p:nvSpPr>
+        <p:spPr>
+          <a:xfrm>
+            <a:off x="374904" y="4334256"/>
+            <a:ext cx="6675120" cy="914400"/>
+          </a:xfrm>
+          <a:prstGeom prst="rect">
+            <a:avLst/>
+          </a:prstGeom>
+          <a:solidFill>
+            <a:srgbClr val="112A40"/>
+          </a:solidFill>
+          <a:ln>
+            <a:noFill/>
+          </a:ln>
+        </p:spPr>
+        <p:style>
+          <a:lnRef idx="1">
+            <a:schemeClr val="accent1"/>
+          </a:lnRef>
+          <a:fillRef idx="3">
+            <a:schemeClr val="accent1"/>
+          </a:fillRef>
+          <a:effectRef idx="2">
+            <a:schemeClr val="accent1"/>
+          </a:effectRef>
+          <a:fontRef idx="minor">
+            <a:schemeClr val="lt1"/>
+          </a:fontRef>
+        </p:style>
+        <p:txBody>
+          <a:bodyPr rtlCol="0" anchor="ctr"/>
+          <a:lstStyle/>
+          <a:p>
+            <a:pPr algn="ctr"/>
+          </a:p>
+        </p:txBody>
+      </p:sp>
+      <p:sp>
+        <p:nvSpPr>
+          <p:cNvPr id="24" name="TextBox 23"/>
+          <p:cNvSpPr txBox="1"/>
+          <p:nvPr/>
+        </p:nvSpPr>
+        <p:spPr>
+          <a:xfrm>
+            <a:off x="548640" y="4407408"/>
+            <a:ext cx="2286000" cy="384048"/>
+          </a:xfrm>
+          <a:prstGeom prst="rect">
+            <a:avLst/>
+          </a:prstGeom>
+          <a:noFill/>
+        </p:spPr>
+        <p:txBody>
+          <a:bodyPr wrap="square">
+            <a:spAutoFit/>
+          </a:bodyPr>
+          <a:lstStyle/>
+          <a:p>
+            <a:pPr algn="l"/>
+            <a:r>
+              <a:rPr sz="1200" b="1" i="0">
+                <a:solidFill>
+                  <a:srgbClr val="90E0EF"/>
+                </a:solidFill>
+              </a:rPr>
+              <a:t>OSM Footprints</a:t>
+            </a:r>
+          </a:p>
+        </p:txBody>
+      </p:sp>
+      <p:sp>
+        <p:nvSpPr>
+          <p:cNvPr id="25" name="TextBox 24"/>
+          <p:cNvSpPr txBox="1"/>
+          <p:nvPr/>
+        </p:nvSpPr>
+        <p:spPr>
+          <a:xfrm>
+            <a:off x="2834640" y="4407408"/>
+            <a:ext cx="4114800" cy="749808"/>
+          </a:xfrm>
+          <a:prstGeom prst="rect">
+            <a:avLst/>
+          </a:prstGeom>
+          <a:noFill/>
+        </p:spPr>
+        <p:txBody>
+          <a:bodyPr wrap="square">
+            <a:spAutoFit/>
+          </a:bodyPr>
+          <a:lstStyle/>
+          <a:p>
+            <a:pPr algn="l"/>
+            <a:r>
+              <a:rPr sz="1000" b="0" i="0">
+                <a:solidFill>
+                  <a:srgbClr val="CAD3DF"/>
+                </a:solidFill>
+              </a:rPr>
+              <a:t>Building polygons + landuse tags
+Height assigned from nDSM median under footprint</a:t>
+            </a:r>
+          </a:p>
+        </p:txBody>
+      </p:sp>
+      <p:sp>
+        <p:nvSpPr>
+          <p:cNvPr id="26" name="TextBox 25"/>
+          <p:cNvSpPr txBox="1"/>
+          <p:nvPr/>
+        </p:nvSpPr>
+        <p:spPr>
+          <a:xfrm>
+            <a:off x="3291840" y="5266944"/>
+            <a:ext cx="365760" cy="274320"/>
+          </a:xfrm>
+          <a:prstGeom prst="rect">
+            <a:avLst/>
+          </a:prstGeom>
+          <a:noFill/>
+        </p:spPr>
+        <p:txBody>
+          <a:bodyPr wrap="square">
+            <a:spAutoFit/>
+          </a:bodyPr>
+          <a:lstStyle/>
+          <a:p>
+            <a:pPr algn="ctr"/>
+            <a:r>
+              <a:rPr sz="1000" b="0" i="0">
+                <a:solidFill>
+                  <a:srgbClr val="1E3A52"/>
+                </a:solidFill>
+              </a:rPr>
+              <a:t>▼</a:t>
+            </a:r>
+          </a:p>
+        </p:txBody>
+      </p:sp>
+      <p:sp>
+        <p:nvSpPr>
+          <p:cNvPr id="27" name="Rectangle 26"/>
+          <p:cNvSpPr/>
+          <p:nvPr/>
+        </p:nvSpPr>
+        <p:spPr>
+          <a:xfrm>
+            <a:off x="320040" y="5468112"/>
+            <a:ext cx="54864" cy="685800"/>
+          </a:xfrm>
+          <a:prstGeom prst="rect">
+            <a:avLst/>
+          </a:prstGeom>
+          <a:solidFill>
+            <a:srgbClr val="2DCB7F"/>
+          </a:solidFill>
+          <a:ln>
+            <a:noFill/>
+          </a:ln>
+        </p:spPr>
+        <p:style>
+          <a:lnRef idx="1">
+            <a:schemeClr val="accent1"/>
+          </a:lnRef>
+          <a:fillRef idx="3">
+            <a:schemeClr val="accent1"/>
+          </a:fillRef>
+          <a:effectRef idx="2">
+            <a:schemeClr val="accent1"/>
+          </a:effectRef>
+          <a:fontRef idx="minor">
+            <a:schemeClr val="lt1"/>
+          </a:fontRef>
+        </p:style>
+        <p:txBody>
+          <a:bodyPr rtlCol="0" anchor="ctr"/>
+          <a:lstStyle/>
+          <a:p>
+            <a:pPr algn="ctr"/>
+          </a:p>
+        </p:txBody>
+      </p:sp>
+      <p:sp>
+        <p:nvSpPr>
+          <p:cNvPr id="28" name="Rectangle 27"/>
+          <p:cNvSpPr/>
+          <p:nvPr/>
+        </p:nvSpPr>
+        <p:spPr>
+          <a:xfrm>
+            <a:off x="374904" y="5358384"/>
+            <a:ext cx="6675120" cy="914400"/>
+          </a:xfrm>
+          <a:prstGeom prst="rect">
+            <a:avLst/>
+          </a:prstGeom>
+          <a:solidFill>
+            <a:srgbClr val="112A40"/>
+          </a:solidFill>
+          <a:ln>
+            <a:noFill/>
+          </a:ln>
+        </p:spPr>
+        <p:style>
+          <a:lnRef idx="1">
+            <a:schemeClr val="accent1"/>
+          </a:lnRef>
+          <a:fillRef idx="3">
+            <a:schemeClr val="accent1"/>
+          </a:fillRef>
+          <a:effectRef idx="2">
+            <a:schemeClr val="accent1"/>
+          </a:effectRef>
+          <a:fontRef idx="minor">
+            <a:schemeClr val="lt1"/>
+          </a:fontRef>
+        </p:style>
+        <p:txBody>
+          <a:bodyPr rtlCol="0" anchor="ctr"/>
+          <a:lstStyle/>
+          <a:p>
+            <a:pPr algn="ctr"/>
+          </a:p>
+        </p:txBody>
+      </p:sp>
+      <p:sp>
+        <p:nvSpPr>
+          <p:cNvPr id="29" name="TextBox 28"/>
+          <p:cNvSpPr txBox="1"/>
+          <p:nvPr/>
+        </p:nvSpPr>
+        <p:spPr>
+          <a:xfrm>
+            <a:off x="548640" y="5431536"/>
+            <a:ext cx="2286000" cy="384048"/>
+          </a:xfrm>
+          <a:prstGeom prst="rect">
+            <a:avLst/>
+          </a:prstGeom>
+          <a:noFill/>
+        </p:spPr>
+        <p:txBody>
+          <a:bodyPr wrap="square">
+            <a:spAutoFit/>
+          </a:bodyPr>
+          <a:lstStyle/>
+          <a:p>
+            <a:pPr algn="l"/>
+            <a:r>
+              <a:rPr sz="1200" b="1" i="0">
+                <a:solidFill>
+                  <a:srgbClr val="2DCB7F"/>
+                </a:solidFill>
+              </a:rPr>
+              <a:t>scene_v2_infra</a:t>
+            </a:r>
+          </a:p>
+        </p:txBody>
+      </p:sp>
+      <p:sp>
+        <p:nvSpPr>
+          <p:cNvPr id="30" name="TextBox 29"/>
+          <p:cNvSpPr txBox="1"/>
+          <p:nvPr/>
+        </p:nvSpPr>
+        <p:spPr>
+          <a:xfrm>
+            <a:off x="2834640" y="5431536"/>
+            <a:ext cx="4114800" cy="749808"/>
+          </a:xfrm>
+          <a:prstGeom prst="rect">
+            <a:avLst/>
+          </a:prstGeom>
+          <a:noFill/>
+        </p:spPr>
+        <p:txBody>
+          <a:bodyPr wrap="square">
+            <a:spAutoFit/>
+          </a:bodyPr>
+          <a:lstStyle/>
+          <a:p>
+            <a:pPr algn="l"/>
+            <a:r>
+              <a:rPr sz="1000" b="0" i="0">
+                <a:solidFill>
+                  <a:srgbClr val="CAD3DF"/>
+                </a:solidFill>
+              </a:rPr>
+              <a:t>terrain.ply (DTM mesh) + building meshes
++ road/veg/infra + ITU-R P.2040-2 materials</a:t>
+            </a:r>
+          </a:p>
+        </p:txBody>
+      </p:sp>
+      <p:sp>
+        <p:nvSpPr>
+          <p:cNvPr id="31" name="TextBox 30"/>
+          <p:cNvSpPr txBox="1"/>
+          <p:nvPr/>
+        </p:nvSpPr>
+        <p:spPr>
+          <a:xfrm>
+            <a:off x="3291840" y="6291072"/>
+            <a:ext cx="365760" cy="274320"/>
+          </a:xfrm>
+          <a:prstGeom prst="rect">
+            <a:avLst/>
+          </a:prstGeom>
+          <a:noFill/>
+        </p:spPr>
+        <p:txBody>
+          <a:bodyPr wrap="square">
+            <a:spAutoFit/>
+          </a:bodyPr>
+          <a:lstStyle/>
+          <a:p>
+            <a:pPr algn="ctr"/>
+            <a:r>
+              <a:rPr sz="1000" b="0" i="0">
+                <a:solidFill>
+                  <a:srgbClr val="1E3A52"/>
+                </a:solidFill>
+              </a:rPr>
+              <a:t>▼</a:t>
+            </a:r>
+          </a:p>
+        </p:txBody>
+      </p:sp>
+      <p:sp>
+        <p:nvSpPr>
+          <p:cNvPr id="32" name="Rectangle 31"/>
+          <p:cNvSpPr/>
+          <p:nvPr/>
+        </p:nvSpPr>
+        <p:spPr>
+          <a:xfrm>
+            <a:off x="7315200" y="1234440"/>
+            <a:ext cx="4663440" cy="5212080"/>
+          </a:xfrm>
+          <a:prstGeom prst="rect">
+            <a:avLst/>
+          </a:prstGeom>
+          <a:solidFill>
+            <a:srgbClr val="112A40"/>
+          </a:solidFill>
+          <a:ln>
+            <a:noFill/>
+          </a:ln>
+        </p:spPr>
+        <p:style>
+          <a:lnRef idx="1">
+            <a:schemeClr val="accent1"/>
+          </a:lnRef>
+          <a:fillRef idx="3">
+            <a:schemeClr val="accent1"/>
+          </a:fillRef>
+          <a:effectRef idx="2">
+            <a:schemeClr val="accent1"/>
+          </a:effectRef>
+          <a:fontRef idx="minor">
+            <a:schemeClr val="lt1"/>
+          </a:fontRef>
+        </p:style>
+        <p:txBody>
+          <a:bodyPr rtlCol="0" anchor="ctr"/>
+          <a:lstStyle/>
+          <a:p>
+            <a:pPr algn="ctr"/>
+          </a:p>
+        </p:txBody>
+      </p:sp>
+      <p:sp>
+        <p:nvSpPr>
+          <p:cNvPr id="33" name="Rectangle 32"/>
+          <p:cNvSpPr/>
+          <p:nvPr/>
+        </p:nvSpPr>
+        <p:spPr>
+          <a:xfrm>
+            <a:off x="7315200" y="1234440"/>
+            <a:ext cx="4663440" cy="54864"/>
+          </a:xfrm>
+          <a:prstGeom prst="rect">
+            <a:avLst/>
+          </a:prstGeom>
+          <a:solidFill>
+            <a:srgbClr val="00B4D8"/>
+          </a:solidFill>
+          <a:ln>
+            <a:noFill/>
+          </a:ln>
+        </p:spPr>
+        <p:style>
+          <a:lnRef idx="1">
+            <a:schemeClr val="accent1"/>
+          </a:lnRef>
+          <a:fillRef idx="3">
+            <a:schemeClr val="accent1"/>
+          </a:fillRef>
+          <a:effectRef idx="2">
+            <a:schemeClr val="accent1"/>
+          </a:effectRef>
+          <a:fontRef idx="minor">
+            <a:schemeClr val="lt1"/>
+          </a:fontRef>
+        </p:style>
+        <p:txBody>
+          <a:bodyPr rtlCol="0" anchor="ctr"/>
+          <a:lstStyle/>
+          <a:p>
+            <a:pPr algn="ctr"/>
+          </a:p>
+        </p:txBody>
+      </p:sp>
+      <p:sp>
+        <p:nvSpPr>
+          <p:cNvPr id="34" name="TextBox 33"/>
+          <p:cNvSpPr txBox="1"/>
+          <p:nvPr/>
+        </p:nvSpPr>
+        <p:spPr>
+          <a:xfrm>
+            <a:off x="7452360" y="1371600"/>
+            <a:ext cx="4389120" cy="384048"/>
+          </a:xfrm>
+          <a:prstGeom prst="rect">
+            <a:avLst/>
+          </a:prstGeom>
+          <a:noFill/>
+        </p:spPr>
+        <p:txBody>
+          <a:bodyPr wrap="square">
+            <a:spAutoFit/>
+          </a:bodyPr>
+          <a:lstStyle/>
+          <a:p>
+            <a:pPr algn="l"/>
+            <a:r>
+              <a:rPr sz="1200" b="1" i="0">
+                <a:solidFill>
+                  <a:srgbClr val="00B4D8"/>
+                </a:solidFill>
+              </a:rPr>
+              <a:t>What Each Layer Contributes</a:t>
+            </a:r>
+          </a:p>
+        </p:txBody>
+      </p:sp>
+      <p:sp>
+        <p:nvSpPr>
+          <p:cNvPr id="35" name="Rectangle 34"/>
+          <p:cNvSpPr/>
+          <p:nvPr/>
+        </p:nvSpPr>
+        <p:spPr>
+          <a:xfrm>
+            <a:off x="7406640" y="1947671"/>
+            <a:ext cx="36576" cy="658368"/>
+          </a:xfrm>
+          <a:prstGeom prst="rect">
+            <a:avLst/>
+          </a:prstGeom>
+          <a:solidFill>
+            <a:srgbClr val="2DCB7F"/>
+          </a:solidFill>
+          <a:ln>
+            <a:noFill/>
+          </a:ln>
+        </p:spPr>
+        <p:style>
+          <a:lnRef idx="1">
+            <a:schemeClr val="accent1"/>
+          </a:lnRef>
+          <a:fillRef idx="3">
+            <a:schemeClr val="accent1"/>
+          </a:fillRef>
+          <a:effectRef idx="2">
+            <a:schemeClr val="accent1"/>
+          </a:effectRef>
+          <a:fontRef idx="minor">
+            <a:schemeClr val="lt1"/>
+          </a:fontRef>
+        </p:style>
+        <p:txBody>
+          <a:bodyPr rtlCol="0" anchor="ctr"/>
+          <a:lstStyle/>
+          <a:p>
+            <a:pPr algn="ctr"/>
+          </a:p>
+        </p:txBody>
+      </p:sp>
+      <p:sp>
+        <p:nvSpPr>
+          <p:cNvPr id="36" name="TextBox 35"/>
+          <p:cNvSpPr txBox="1"/>
+          <p:nvPr/>
+        </p:nvSpPr>
+        <p:spPr>
+          <a:xfrm>
+            <a:off x="7516368" y="1920239"/>
+            <a:ext cx="1371600" cy="749808"/>
+          </a:xfrm>
+          <a:prstGeom prst="rect">
+            <a:avLst/>
+          </a:prstGeom>
+          <a:noFill/>
+        </p:spPr>
+        <p:txBody>
+          <a:bodyPr wrap="square">
+            <a:spAutoFit/>
+          </a:bodyPr>
+          <a:lstStyle/>
+          <a:p>
+            <a:pPr algn="l"/>
+            <a:r>
+              <a:rPr sz="950" b="1" i="0">
+                <a:solidFill>
+                  <a:srgbClr val="2DCB7F"/>
+                </a:solidFill>
+              </a:rPr>
+              <a:t>DTM terrain</a:t>
+            </a:r>
+          </a:p>
+        </p:txBody>
+      </p:sp>
+      <p:sp>
+        <p:nvSpPr>
+          <p:cNvPr id="37" name="TextBox 36"/>
+          <p:cNvSpPr txBox="1"/>
+          <p:nvPr/>
+        </p:nvSpPr>
+        <p:spPr>
+          <a:xfrm>
+            <a:off x="8887968" y="1920239"/>
+            <a:ext cx="1463040" cy="749808"/>
+          </a:xfrm>
+          <a:prstGeom prst="rect">
+            <a:avLst/>
+          </a:prstGeom>
+          <a:noFill/>
+        </p:spPr>
+        <p:txBody>
+          <a:bodyPr wrap="square">
+            <a:spAutoFit/>
+          </a:bodyPr>
+          <a:lstStyle/>
+          <a:p>
+            <a:pPr algn="l"/>
+            <a:r>
+              <a:rPr sz="950" b="0" i="0">
+                <a:solidFill>
+                  <a:srgbClr val="CAD3DF"/>
+                </a:solidFill>
+              </a:rPr>
+              <a:t>Correct ground Z
+→ RX at real AGL</a:t>
+            </a:r>
+          </a:p>
+        </p:txBody>
+      </p:sp>
+      <p:sp>
+        <p:nvSpPr>
+          <p:cNvPr id="38" name="TextBox 37"/>
+          <p:cNvSpPr txBox="1"/>
+          <p:nvPr/>
+        </p:nvSpPr>
+        <p:spPr>
+          <a:xfrm>
+            <a:off x="10351008" y="1920239"/>
+            <a:ext cx="1508760" cy="749808"/>
+          </a:xfrm>
+          <a:prstGeom prst="rect">
+            <a:avLst/>
+          </a:prstGeom>
+          <a:noFill/>
+        </p:spPr>
+        <p:txBody>
+          <a:bodyPr wrap="square">
+            <a:spAutoFit/>
+          </a:bodyPr>
+          <a:lstStyle/>
+          <a:p>
+            <a:pPr algn="l"/>
+            <a:r>
+              <a:rPr sz="950" b="0" i="0">
+                <a:solidFill>
+                  <a:srgbClr val="2DCB7F"/>
+                </a:solidFill>
+              </a:rPr>
+              <a:t>8–15 dB bias removed</a:t>
+            </a:r>
+          </a:p>
+        </p:txBody>
+      </p:sp>
+      <p:sp>
+        <p:nvSpPr>
+          <p:cNvPr id="39" name="Rectangle 38"/>
+          <p:cNvSpPr/>
+          <p:nvPr/>
+        </p:nvSpPr>
+        <p:spPr>
+          <a:xfrm>
+            <a:off x="7406640" y="2825495"/>
+            <a:ext cx="36576" cy="658368"/>
+          </a:xfrm>
+          <a:prstGeom prst="rect">
+            <a:avLst/>
+          </a:prstGeom>
+          <a:solidFill>
+            <a:srgbClr val="00B4D8"/>
+          </a:solidFill>
+          <a:ln>
+            <a:noFill/>
+          </a:ln>
+        </p:spPr>
+        <p:style>
+          <a:lnRef idx="1">
+            <a:schemeClr val="accent1"/>
+          </a:lnRef>
+          <a:fillRef idx="3">
+            <a:schemeClr val="accent1"/>
+          </a:fillRef>
+          <a:effectRef idx="2">
+            <a:schemeClr val="accent1"/>
+          </a:effectRef>
+          <a:fontRef idx="minor">
+            <a:schemeClr val="lt1"/>
+          </a:fontRef>
+        </p:style>
+        <p:txBody>
+          <a:bodyPr rtlCol="0" anchor="ctr"/>
+          <a:lstStyle/>
+          <a:p>
+            <a:pPr algn="ctr"/>
+          </a:p>
+        </p:txBody>
+      </p:sp>
+      <p:sp>
+        <p:nvSpPr>
+          <p:cNvPr id="40" name="TextBox 39"/>
+          <p:cNvSpPr txBox="1"/>
+          <p:nvPr/>
+        </p:nvSpPr>
+        <p:spPr>
+          <a:xfrm>
+            <a:off x="7516368" y="2798063"/>
+            <a:ext cx="1371600" cy="749808"/>
+          </a:xfrm>
+          <a:prstGeom prst="rect">
+            <a:avLst/>
+          </a:prstGeom>
+          <a:noFill/>
+        </p:spPr>
+        <p:txBody>
+          <a:bodyPr wrap="square">
+            <a:spAutoFit/>
+          </a:bodyPr>
+          <a:lstStyle/>
+          <a:p>
+            <a:pPr algn="l"/>
+            <a:r>
+              <a:rPr sz="950" b="1" i="0">
+                <a:solidFill>
+                  <a:srgbClr val="00B4D8"/>
+                </a:solidFill>
+              </a:rPr>
+              <a:t>nDSM heights</a:t>
+            </a:r>
+          </a:p>
+        </p:txBody>
+      </p:sp>
+      <p:sp>
+        <p:nvSpPr>
+          <p:cNvPr id="41" name="TextBox 40"/>
+          <p:cNvSpPr txBox="1"/>
+          <p:nvPr/>
+        </p:nvSpPr>
+        <p:spPr>
+          <a:xfrm>
+            <a:off x="8887968" y="2798063"/>
+            <a:ext cx="1463040" cy="749808"/>
+          </a:xfrm>
+          <a:prstGeom prst="rect">
+            <a:avLst/>
+          </a:prstGeom>
+          <a:noFill/>
+        </p:spPr>
+        <p:txBody>
+          <a:bodyPr wrap="square">
+            <a:spAutoFit/>
+          </a:bodyPr>
+          <a:lstStyle/>
+          <a:p>
+            <a:pPr algn="l"/>
+            <a:r>
+              <a:rPr sz="950" b="0" i="0">
+                <a:solidFill>
+                  <a:srgbClr val="CAD3DF"/>
+                </a:solidFill>
+              </a:rPr>
+              <a:t>Accurate building
+heights from LiDAR</a:t>
+            </a:r>
+          </a:p>
+        </p:txBody>
+      </p:sp>
+      <p:sp>
+        <p:nvSpPr>
+          <p:cNvPr id="42" name="TextBox 41"/>
+          <p:cNvSpPr txBox="1"/>
+          <p:nvPr/>
+        </p:nvSpPr>
+        <p:spPr>
+          <a:xfrm>
+            <a:off x="10351008" y="2798063"/>
+            <a:ext cx="1508760" cy="749808"/>
+          </a:xfrm>
+          <a:prstGeom prst="rect">
+            <a:avLst/>
+          </a:prstGeom>
+          <a:noFill/>
+        </p:spPr>
+        <p:txBody>
+          <a:bodyPr wrap="square">
+            <a:spAutoFit/>
+          </a:bodyPr>
+          <a:lstStyle/>
+          <a:p>
+            <a:pPr algn="l"/>
+            <a:r>
+              <a:rPr sz="950" b="0" i="0">
+                <a:solidFill>
+                  <a:srgbClr val="2DCB7F"/>
+                </a:solidFill>
+              </a:rPr>
+              <a:t>Correct diffraction angles</a:t>
+            </a:r>
+          </a:p>
+        </p:txBody>
+      </p:sp>
+      <p:sp>
+        <p:nvSpPr>
+          <p:cNvPr id="43" name="Rectangle 42"/>
+          <p:cNvSpPr/>
+          <p:nvPr/>
+        </p:nvSpPr>
+        <p:spPr>
+          <a:xfrm>
+            <a:off x="7406640" y="3703319"/>
+            <a:ext cx="36576" cy="658368"/>
+          </a:xfrm>
+          <a:prstGeom prst="rect">
+            <a:avLst/>
+          </a:prstGeom>
+          <a:solidFill>
+            <a:srgbClr val="90E0EF"/>
+          </a:solidFill>
+          <a:ln>
+            <a:noFill/>
+          </a:ln>
+        </p:spPr>
+        <p:style>
+          <a:lnRef idx="1">
+            <a:schemeClr val="accent1"/>
+          </a:lnRef>
+          <a:fillRef idx="3">
+            <a:schemeClr val="accent1"/>
+          </a:fillRef>
+          <a:effectRef idx="2">
+            <a:schemeClr val="accent1"/>
+          </a:effectRef>
+          <a:fontRef idx="minor">
+            <a:schemeClr val="lt1"/>
+          </a:fontRef>
+        </p:style>
+        <p:txBody>
+          <a:bodyPr rtlCol="0" anchor="ctr"/>
+          <a:lstStyle/>
+          <a:p>
+            <a:pPr algn="ctr"/>
+          </a:p>
+        </p:txBody>
+      </p:sp>
+      <p:sp>
+        <p:nvSpPr>
+          <p:cNvPr id="44" name="TextBox 43"/>
+          <p:cNvSpPr txBox="1"/>
+          <p:nvPr/>
+        </p:nvSpPr>
+        <p:spPr>
+          <a:xfrm>
+            <a:off x="7516368" y="3675887"/>
+            <a:ext cx="1371600" cy="749808"/>
+          </a:xfrm>
+          <a:prstGeom prst="rect">
+            <a:avLst/>
+          </a:prstGeom>
+          <a:noFill/>
+        </p:spPr>
+        <p:txBody>
+          <a:bodyPr wrap="square">
+            <a:spAutoFit/>
+          </a:bodyPr>
+          <a:lstStyle/>
+          <a:p>
+            <a:pPr algn="l"/>
+            <a:r>
+              <a:rPr sz="950" b="1" i="0">
+                <a:solidFill>
+                  <a:srgbClr val="90E0EF"/>
+                </a:solidFill>
+              </a:rPr>
+              <a:t>OSM footprints</a:t>
+            </a:r>
+          </a:p>
+        </p:txBody>
+      </p:sp>
+      <p:sp>
+        <p:nvSpPr>
+          <p:cNvPr id="45" name="TextBox 44"/>
+          <p:cNvSpPr txBox="1"/>
+          <p:nvPr/>
+        </p:nvSpPr>
+        <p:spPr>
+          <a:xfrm>
+            <a:off x="8887968" y="3675887"/>
+            <a:ext cx="1463040" cy="749808"/>
+          </a:xfrm>
+          <a:prstGeom prst="rect">
+            <a:avLst/>
+          </a:prstGeom>
+          <a:noFill/>
+        </p:spPr>
+        <p:txBody>
+          <a:bodyPr wrap="square">
+            <a:spAutoFit/>
+          </a:bodyPr>
+          <a:lstStyle/>
+          <a:p>
+            <a:pPr algn="l"/>
+            <a:r>
+              <a:rPr sz="950" b="0" i="0">
+                <a:solidFill>
+                  <a:srgbClr val="CAD3DF"/>
+                </a:solidFill>
+              </a:rPr>
+              <a:t>Building positions
+and 2D shapes</a:t>
+            </a:r>
+          </a:p>
+        </p:txBody>
+      </p:sp>
+      <p:sp>
+        <p:nvSpPr>
+          <p:cNvPr id="46" name="TextBox 45"/>
+          <p:cNvSpPr txBox="1"/>
+          <p:nvPr/>
+        </p:nvSpPr>
+        <p:spPr>
+          <a:xfrm>
+            <a:off x="10351008" y="3675887"/>
+            <a:ext cx="1508760" cy="749808"/>
+          </a:xfrm>
+          <a:prstGeom prst="rect">
+            <a:avLst/>
+          </a:prstGeom>
+          <a:noFill/>
+        </p:spPr>
+        <p:txBody>
+          <a:bodyPr wrap="square">
+            <a:spAutoFit/>
+          </a:bodyPr>
+          <a:lstStyle/>
+          <a:p>
+            <a:pPr algn="l"/>
+            <a:r>
+              <a:rPr sz="950" b="0" i="0">
+                <a:solidFill>
+                  <a:srgbClr val="2DCB7F"/>
+                </a:solidFill>
+              </a:rPr>
+              <a:t>3D geometry</a:t>
+            </a:r>
+          </a:p>
+        </p:txBody>
+      </p:sp>
+      <p:sp>
+        <p:nvSpPr>
+          <p:cNvPr id="47" name="Rectangle 46"/>
+          <p:cNvSpPr/>
+          <p:nvPr/>
+        </p:nvSpPr>
+        <p:spPr>
+          <a:xfrm>
+            <a:off x="7406640" y="4581143"/>
+            <a:ext cx="36576" cy="658368"/>
+          </a:xfrm>
+          <a:prstGeom prst="rect">
+            <a:avLst/>
+          </a:prstGeom>
+          <a:solidFill>
+            <a:srgbClr val="FF9F1C"/>
+          </a:solidFill>
+          <a:ln>
+            <a:noFill/>
+          </a:ln>
+        </p:spPr>
+        <p:style>
+          <a:lnRef idx="1">
+            <a:schemeClr val="accent1"/>
+          </a:lnRef>
+          <a:fillRef idx="3">
+            <a:schemeClr val="accent1"/>
+          </a:fillRef>
+          <a:effectRef idx="2">
+            <a:schemeClr val="accent1"/>
+          </a:effectRef>
+          <a:fontRef idx="minor">
+            <a:schemeClr val="lt1"/>
+          </a:fontRef>
+        </p:style>
+        <p:txBody>
+          <a:bodyPr rtlCol="0" anchor="ctr"/>
+          <a:lstStyle/>
+          <a:p>
+            <a:pPr algn="ctr"/>
+          </a:p>
+        </p:txBody>
+      </p:sp>
+      <p:sp>
+        <p:nvSpPr>
+          <p:cNvPr id="48" name="TextBox 47"/>
+          <p:cNvSpPr txBox="1"/>
+          <p:nvPr/>
+        </p:nvSpPr>
+        <p:spPr>
+          <a:xfrm>
+            <a:off x="7516368" y="4553711"/>
+            <a:ext cx="1371600" cy="749808"/>
+          </a:xfrm>
+          <a:prstGeom prst="rect">
+            <a:avLst/>
+          </a:prstGeom>
+          <a:noFill/>
+        </p:spPr>
+        <p:txBody>
+          <a:bodyPr wrap="square">
+            <a:spAutoFit/>
+          </a:bodyPr>
+          <a:lstStyle/>
+          <a:p>
+            <a:pPr algn="l"/>
+            <a:r>
+              <a:rPr sz="950" b="1" i="0">
+                <a:solidFill>
+                  <a:srgbClr val="FF9F1C"/>
+                </a:solidFill>
+              </a:rPr>
+              <a:t>ITU materials</a:t>
+            </a:r>
+          </a:p>
+        </p:txBody>
+      </p:sp>
+      <p:sp>
+        <p:nvSpPr>
+          <p:cNvPr id="49" name="TextBox 48"/>
+          <p:cNvSpPr txBox="1"/>
+          <p:nvPr/>
+        </p:nvSpPr>
+        <p:spPr>
+          <a:xfrm>
+            <a:off x="8887968" y="4553711"/>
+            <a:ext cx="1463040" cy="749808"/>
+          </a:xfrm>
+          <a:prstGeom prst="rect">
+            <a:avLst/>
+          </a:prstGeom>
+          <a:noFill/>
+        </p:spPr>
+        <p:txBody>
+          <a:bodyPr wrap="square">
+            <a:spAutoFit/>
+          </a:bodyPr>
+          <a:lstStyle/>
+          <a:p>
+            <a:pPr algn="l"/>
+            <a:r>
+              <a:rPr sz="950" b="0" i="0">
+                <a:solidFill>
+                  <a:srgbClr val="CAD3DF"/>
+                </a:solidFill>
+              </a:rPr>
+              <a:t>EM properties
+per surface type</a:t>
+            </a:r>
+          </a:p>
+        </p:txBody>
+      </p:sp>
+      <p:sp>
+        <p:nvSpPr>
+          <p:cNvPr id="50" name="TextBox 49"/>
+          <p:cNvSpPr txBox="1"/>
+          <p:nvPr/>
+        </p:nvSpPr>
+        <p:spPr>
+          <a:xfrm>
+            <a:off x="10351008" y="4553711"/>
+            <a:ext cx="1508760" cy="749808"/>
+          </a:xfrm>
+          <a:prstGeom prst="rect">
+            <a:avLst/>
+          </a:prstGeom>
+          <a:noFill/>
+        </p:spPr>
+        <p:txBody>
+          <a:bodyPr wrap="square">
+            <a:spAutoFit/>
+          </a:bodyPr>
+          <a:lstStyle/>
+          <a:p>
+            <a:pPr algn="l"/>
+            <a:r>
+              <a:rPr sz="950" b="0" i="0">
+                <a:solidFill>
+                  <a:srgbClr val="2DCB7F"/>
+                </a:solidFill>
+              </a:rPr>
+              <a:t>Physical reflection/scatter</a:t>
+            </a:r>
+          </a:p>
+        </p:txBody>
+      </p:sp>
+    </p:spTree>
+  </p:cSld>
+  <p:clrMapOvr>
+    <a:masterClrMapping/>
+  </p:clrMapOvr>
+</p:sld>
+</file>
+
+<file path=ppt/slides/slide11.xml><?xml version="1.0" encoding="utf-8"?>
+<p:sld xmlns:a="http://schemas.openxmlformats.org/drawingml/2006/main" xmlns:p="http://schemas.openxmlformats.org/presentationml/2006/main" xmlns:r="http://schemas.openxmlformats.org/officeDocument/2006/relationships">
+  <p:cSld>
+    <p:bg>
+      <p:bgPr>
+        <a:solidFill>
+          <a:srgbClr val="0D1B2A"/>
+        </a:solidFill>
+        <a:effectLst/>
+      </p:bgPr>
+    </p:bg>
+    <p:spTree>
+      <p:nvGrpSpPr>
+        <p:cNvPr id="1" name=""/>
+        <p:cNvGrpSpPr/>
+        <p:nvPr/>
+      </p:nvGrpSpPr>
+      <p:grpSpPr/>
+      <p:sp>
+        <p:nvSpPr>
+          <p:cNvPr id="2" name="Rectangle 1"/>
+          <p:cNvSpPr/>
+          <p:nvPr/>
+        </p:nvSpPr>
+        <p:spPr>
+          <a:xfrm>
+            <a:off x="0" y="73152"/>
+            <a:ext cx="12188952" cy="54864"/>
+          </a:xfrm>
+          <a:prstGeom prst="rect">
+            <a:avLst/>
+          </a:prstGeom>
+          <a:solidFill>
+            <a:srgbClr val="00B4D8"/>
+          </a:solidFill>
+          <a:ln>
+            <a:noFill/>
+          </a:ln>
+        </p:spPr>
+        <p:style>
+          <a:lnRef idx="1">
+            <a:schemeClr val="accent1"/>
+          </a:lnRef>
+          <a:fillRef idx="3">
+            <a:schemeClr val="accent1"/>
+          </a:fillRef>
+          <a:effectRef idx="2">
+            <a:schemeClr val="accent1"/>
+          </a:effectRef>
+          <a:fontRef idx="minor">
+            <a:schemeClr val="lt1"/>
+          </a:fontRef>
+        </p:style>
+        <p:txBody>
+          <a:bodyPr rtlCol="0" anchor="ctr"/>
+          <a:lstStyle/>
+          <a:p>
+            <a:pPr algn="ctr"/>
+          </a:p>
+        </p:txBody>
+      </p:sp>
+      <p:sp>
+        <p:nvSpPr>
+          <p:cNvPr id="3" name="TextBox 2"/>
+          <p:cNvSpPr txBox="1"/>
+          <p:nvPr/>
+        </p:nvSpPr>
+        <p:spPr>
+          <a:xfrm>
+            <a:off x="320040" y="201168"/>
+            <a:ext cx="3657600" cy="256032"/>
+          </a:xfrm>
+          <a:prstGeom prst="rect">
+            <a:avLst/>
+          </a:prstGeom>
+          <a:noFill/>
+        </p:spPr>
+        <p:txBody>
+          <a:bodyPr wrap="square">
+            <a:spAutoFit/>
+          </a:bodyPr>
+          <a:lstStyle/>
+          <a:p>
+            <a:pPr algn="l"/>
+            <a:r>
+              <a:rPr sz="800" b="1" i="0">
+                <a:solidFill>
+                  <a:srgbClr val="00B4D8"/>
+                </a:solidFill>
+              </a:rPr>
+              <a:t>RAY TRACING SETUP</a:t>
+            </a:r>
+          </a:p>
+        </p:txBody>
+      </p:sp>
+      <p:sp>
+        <p:nvSpPr>
+          <p:cNvPr id="4" name="TextBox 3"/>
+          <p:cNvSpPr txBox="1"/>
+          <p:nvPr/>
+        </p:nvSpPr>
+        <p:spPr>
+          <a:xfrm>
+            <a:off x="10972800" y="6492240"/>
+            <a:ext cx="1097280" cy="320040"/>
+          </a:xfrm>
+          <a:prstGeom prst="rect">
+            <a:avLst/>
+          </a:prstGeom>
+          <a:noFill/>
+        </p:spPr>
+        <p:txBody>
+          <a:bodyPr wrap="square">
+            <a:spAutoFit/>
+          </a:bodyPr>
+          <a:lstStyle/>
+          <a:p>
+            <a:pPr algn="r"/>
+            <a:r>
+              <a:rPr sz="900" b="0" i="0">
+                <a:solidFill>
+                  <a:srgbClr val="CAD3DF"/>
+                </a:solidFill>
+              </a:rPr>
+              <a:t>11 / 12</a:t>
+            </a:r>
+          </a:p>
+        </p:txBody>
+      </p:sp>
+      <p:sp>
+        <p:nvSpPr>
+          <p:cNvPr id="5" name="TextBox 4"/>
+          <p:cNvSpPr txBox="1"/>
+          <p:nvPr/>
+        </p:nvSpPr>
+        <p:spPr>
+          <a:xfrm>
+            <a:off x="411480" y="457200"/>
+            <a:ext cx="11430000" cy="640080"/>
+          </a:xfrm>
+          <a:prstGeom prst="rect">
+            <a:avLst/>
+          </a:prstGeom>
+          <a:noFill/>
+        </p:spPr>
+        <p:txBody>
+          <a:bodyPr wrap="square">
+            <a:spAutoFit/>
+          </a:bodyPr>
+          <a:lstStyle/>
+          <a:p>
+            <a:pPr algn="l"/>
+            <a:r>
+              <a:rPr sz="2600" b="1" i="0">
+                <a:solidFill>
+                  <a:srgbClr val="FFFFFF"/>
+                </a:solidFill>
+              </a:rPr>
+              <a:t>Ray Tracing Configuration — Mechanisms &amp; Parameters</a:t>
+            </a:r>
+          </a:p>
+        </p:txBody>
+      </p:sp>
+      <p:sp>
+        <p:nvSpPr>
+          <p:cNvPr id="6" name="Rectangle 5"/>
+          <p:cNvSpPr/>
+          <p:nvPr/>
+        </p:nvSpPr>
+        <p:spPr>
+          <a:xfrm>
+            <a:off x="411480" y="1078992"/>
+            <a:ext cx="11338560" cy="16459"/>
+          </a:xfrm>
+          <a:prstGeom prst="rect">
+            <a:avLst/>
+          </a:prstGeom>
+          <a:solidFill>
+            <a:srgbClr val="1E3A52"/>
+          </a:solidFill>
+          <a:ln>
+            <a:noFill/>
+          </a:ln>
+        </p:spPr>
+        <p:style>
+          <a:lnRef idx="1">
+            <a:schemeClr val="accent1"/>
+          </a:lnRef>
+          <a:fillRef idx="3">
+            <a:schemeClr val="accent1"/>
+          </a:fillRef>
+          <a:effectRef idx="2">
+            <a:schemeClr val="accent1"/>
+          </a:effectRef>
+          <a:fontRef idx="minor">
+            <a:schemeClr val="lt1"/>
+          </a:fontRef>
+        </p:style>
+        <p:txBody>
+          <a:bodyPr rtlCol="0" anchor="ctr"/>
+          <a:lstStyle/>
+          <a:p>
+            <a:pPr algn="ctr"/>
+          </a:p>
+        </p:txBody>
+      </p:sp>
+      <p:sp>
+        <p:nvSpPr>
+          <p:cNvPr id="7" name="Rectangle 6"/>
+          <p:cNvSpPr/>
+          <p:nvPr/>
+        </p:nvSpPr>
+        <p:spPr>
+          <a:xfrm>
+            <a:off x="320040" y="1234440"/>
+            <a:ext cx="5394960" cy="5212080"/>
+          </a:xfrm>
+          <a:prstGeom prst="rect">
+            <a:avLst/>
+          </a:prstGeom>
+          <a:solidFill>
+            <a:srgbClr val="112A40"/>
+          </a:solidFill>
+          <a:ln>
+            <a:noFill/>
+          </a:ln>
+        </p:spPr>
+        <p:style>
+          <a:lnRef idx="1">
+            <a:schemeClr val="accent1"/>
+          </a:lnRef>
+          <a:fillRef idx="3">
+            <a:schemeClr val="accent1"/>
+          </a:fillRef>
+          <a:effectRef idx="2">
+            <a:schemeClr val="accent1"/>
+          </a:effectRef>
+          <a:fontRef idx="minor">
+            <a:schemeClr val="lt1"/>
+          </a:fontRef>
+        </p:style>
+        <p:txBody>
+          <a:bodyPr rtlCol="0" anchor="ctr"/>
+          <a:lstStyle/>
+          <a:p>
+            <a:pPr algn="ctr"/>
+          </a:p>
+        </p:txBody>
+      </p:sp>
+      <p:sp>
+        <p:nvSpPr>
+          <p:cNvPr id="8" name="Rectangle 7"/>
+          <p:cNvSpPr/>
+          <p:nvPr/>
+        </p:nvSpPr>
+        <p:spPr>
+          <a:xfrm>
+            <a:off x="320040" y="1234440"/>
+            <a:ext cx="5394960" cy="54864"/>
+          </a:xfrm>
+          <a:prstGeom prst="rect">
+            <a:avLst/>
+          </a:prstGeom>
+          <a:solidFill>
+            <a:srgbClr val="00B4D8"/>
+          </a:solidFill>
+          <a:ln>
+            <a:noFill/>
+          </a:ln>
+        </p:spPr>
+        <p:style>
+          <a:lnRef idx="1">
+            <a:schemeClr val="accent1"/>
+          </a:lnRef>
+          <a:fillRef idx="3">
+            <a:schemeClr val="accent1"/>
+          </a:fillRef>
+          <a:effectRef idx="2">
+            <a:schemeClr val="accent1"/>
+          </a:effectRef>
+          <a:fontRef idx="minor">
+            <a:schemeClr val="lt1"/>
+          </a:fontRef>
+        </p:style>
+        <p:txBody>
+          <a:bodyPr rtlCol="0" anchor="ctr"/>
+          <a:lstStyle/>
+          <a:p>
+            <a:pPr algn="ctr"/>
+          </a:p>
+        </p:txBody>
+      </p:sp>
+      <p:sp>
+        <p:nvSpPr>
+          <p:cNvPr id="9" name="TextBox 8"/>
+          <p:cNvSpPr txBox="1"/>
+          <p:nvPr/>
+        </p:nvSpPr>
+        <p:spPr>
+          <a:xfrm>
+            <a:off x="457200" y="1371600"/>
+            <a:ext cx="5120640" cy="384048"/>
+          </a:xfrm>
+          <a:prstGeom prst="rect">
+            <a:avLst/>
+          </a:prstGeom>
+          <a:noFill/>
+        </p:spPr>
+        <p:txBody>
+          <a:bodyPr wrap="square">
+            <a:spAutoFit/>
+          </a:bodyPr>
+          <a:lstStyle/>
+          <a:p>
+            <a:pPr algn="l"/>
+            <a:r>
+              <a:rPr sz="1300" b="1" i="0">
+                <a:solidFill>
+                  <a:srgbClr val="00B4D8"/>
+                </a:solidFill>
+              </a:rPr>
+              <a:t>Ray Mechanisms</a:t>
+            </a:r>
+          </a:p>
+        </p:txBody>
+      </p:sp>
+      <p:sp>
+        <p:nvSpPr>
+          <p:cNvPr id="10" name="Rectangle 9"/>
+          <p:cNvSpPr/>
+          <p:nvPr/>
+        </p:nvSpPr>
+        <p:spPr>
+          <a:xfrm>
+            <a:off x="502920" y="1965959"/>
+            <a:ext cx="256032" cy="256032"/>
+          </a:xfrm>
+          <a:prstGeom prst="rect">
+            <a:avLst/>
+          </a:prstGeom>
+          <a:solidFill>
+            <a:srgbClr val="2DCB7F"/>
+          </a:solidFill>
+          <a:ln>
+            <a:noFill/>
+          </a:ln>
+        </p:spPr>
+        <p:style>
+          <a:lnRef idx="1">
+            <a:schemeClr val="accent1"/>
+          </a:lnRef>
+          <a:fillRef idx="3">
+            <a:schemeClr val="accent1"/>
+          </a:fillRef>
+          <a:effectRef idx="2">
+            <a:schemeClr val="accent1"/>
+          </a:effectRef>
+          <a:fontRef idx="minor">
+            <a:schemeClr val="lt1"/>
+          </a:fontRef>
+        </p:style>
+        <p:txBody>
+          <a:bodyPr rtlCol="0" anchor="ctr"/>
+          <a:lstStyle/>
+          <a:p>
+            <a:pPr algn="ctr"/>
+          </a:p>
+        </p:txBody>
+      </p:sp>
+      <p:sp>
+        <p:nvSpPr>
+          <p:cNvPr id="11" name="TextBox 10"/>
+          <p:cNvSpPr txBox="1"/>
+          <p:nvPr/>
+        </p:nvSpPr>
+        <p:spPr>
+          <a:xfrm>
+            <a:off x="502920" y="1920239"/>
+            <a:ext cx="274320" cy="320040"/>
+          </a:xfrm>
+          <a:prstGeom prst="rect">
+            <a:avLst/>
+          </a:prstGeom>
+          <a:noFill/>
+        </p:spPr>
+        <p:txBody>
+          <a:bodyPr wrap="square">
+            <a:spAutoFit/>
+          </a:bodyPr>
+          <a:lstStyle/>
+          <a:p>
+            <a:pPr algn="ctr"/>
+            <a:r>
+              <a:rPr sz="1000" b="1" i="0">
+                <a:solidFill>
+                  <a:srgbClr val="0D1B2A"/>
+                </a:solidFill>
+              </a:rPr>
+              <a:t>✔</a:t>
+            </a:r>
+          </a:p>
+        </p:txBody>
+      </p:sp>
+      <p:sp>
+        <p:nvSpPr>
+          <p:cNvPr id="12" name="TextBox 11"/>
+          <p:cNvSpPr txBox="1"/>
+          <p:nvPr/>
+        </p:nvSpPr>
+        <p:spPr>
+          <a:xfrm>
+            <a:off x="868680" y="1901951"/>
+            <a:ext cx="1920240" cy="347472"/>
+          </a:xfrm>
+          <a:prstGeom prst="rect">
+            <a:avLst/>
+          </a:prstGeom>
+          <a:noFill/>
+        </p:spPr>
+        <p:txBody>
+          <a:bodyPr wrap="square">
+            <a:spAutoFit/>
+          </a:bodyPr>
+          <a:lstStyle/>
+          <a:p>
+            <a:pPr algn="l"/>
+            <a:r>
+              <a:rPr sz="1100" b="1" i="0">
+                <a:solidFill>
+                  <a:srgbClr val="FFFFFF"/>
+                </a:solidFill>
+              </a:rPr>
+              <a:t>LOS</a:t>
+            </a:r>
+          </a:p>
+        </p:txBody>
+      </p:sp>
+      <p:sp>
+        <p:nvSpPr>
+          <p:cNvPr id="13" name="TextBox 12"/>
+          <p:cNvSpPr txBox="1"/>
+          <p:nvPr/>
+        </p:nvSpPr>
+        <p:spPr>
+          <a:xfrm>
+            <a:off x="2788920" y="1901951"/>
+            <a:ext cx="2651760" cy="347472"/>
+          </a:xfrm>
+          <a:prstGeom prst="rect">
+            <a:avLst/>
+          </a:prstGeom>
+          <a:noFill/>
+        </p:spPr>
+        <p:txBody>
+          <a:bodyPr wrap="square">
+            <a:spAutoFit/>
+          </a:bodyPr>
+          <a:lstStyle/>
+          <a:p>
+            <a:pPr algn="l"/>
+            <a:r>
+              <a:rPr sz="1000" b="0" i="0">
+                <a:solidFill>
+                  <a:srgbClr val="CAD3DF"/>
+                </a:solidFill>
+              </a:rPr>
+              <a:t>Direct path TX → RX</a:t>
+            </a:r>
+          </a:p>
+        </p:txBody>
+      </p:sp>
+      <p:sp>
+        <p:nvSpPr>
+          <p:cNvPr id="14" name="Rectangle 13"/>
+          <p:cNvSpPr/>
+          <p:nvPr/>
+        </p:nvSpPr>
+        <p:spPr>
+          <a:xfrm>
+            <a:off x="502920" y="2715767"/>
+            <a:ext cx="256032" cy="256032"/>
+          </a:xfrm>
+          <a:prstGeom prst="rect">
+            <a:avLst/>
+          </a:prstGeom>
+          <a:solidFill>
+            <a:srgbClr val="2DCB7F"/>
+          </a:solidFill>
+          <a:ln>
+            <a:noFill/>
+          </a:ln>
+        </p:spPr>
+        <p:style>
+          <a:lnRef idx="1">
+            <a:schemeClr val="accent1"/>
+          </a:lnRef>
+          <a:fillRef idx="3">
+            <a:schemeClr val="accent1"/>
+          </a:fillRef>
+          <a:effectRef idx="2">
+            <a:schemeClr val="accent1"/>
+          </a:effectRef>
+          <a:fontRef idx="minor">
+            <a:schemeClr val="lt1"/>
+          </a:fontRef>
+        </p:style>
+        <p:txBody>
+          <a:bodyPr rtlCol="0" anchor="ctr"/>
+          <a:lstStyle/>
+          <a:p>
+            <a:pPr algn="ctr"/>
+          </a:p>
+        </p:txBody>
+      </p:sp>
+      <p:sp>
+        <p:nvSpPr>
+          <p:cNvPr id="15" name="TextBox 14"/>
+          <p:cNvSpPr txBox="1"/>
+          <p:nvPr/>
+        </p:nvSpPr>
+        <p:spPr>
+          <a:xfrm>
+            <a:off x="502920" y="2670047"/>
+            <a:ext cx="274320" cy="320040"/>
+          </a:xfrm>
+          <a:prstGeom prst="rect">
+            <a:avLst/>
+          </a:prstGeom>
+          <a:noFill/>
+        </p:spPr>
+        <p:txBody>
+          <a:bodyPr wrap="square">
+            <a:spAutoFit/>
+          </a:bodyPr>
+          <a:lstStyle/>
+          <a:p>
+            <a:pPr algn="ctr"/>
+            <a:r>
+              <a:rPr sz="1000" b="1" i="0">
+                <a:solidFill>
+                  <a:srgbClr val="0D1B2A"/>
+                </a:solidFill>
+              </a:rPr>
+              <a:t>✔</a:t>
+            </a:r>
+          </a:p>
+        </p:txBody>
+      </p:sp>
+      <p:sp>
+        <p:nvSpPr>
+          <p:cNvPr id="16" name="TextBox 15"/>
+          <p:cNvSpPr txBox="1"/>
+          <p:nvPr/>
+        </p:nvSpPr>
+        <p:spPr>
+          <a:xfrm>
+            <a:off x="868680" y="2651759"/>
+            <a:ext cx="1920240" cy="347472"/>
+          </a:xfrm>
+          <a:prstGeom prst="rect">
+            <a:avLst/>
+          </a:prstGeom>
+          <a:noFill/>
+        </p:spPr>
+        <p:txBody>
+          <a:bodyPr wrap="square">
+            <a:spAutoFit/>
+          </a:bodyPr>
+          <a:lstStyle/>
+          <a:p>
+            <a:pPr algn="l"/>
+            <a:r>
+              <a:rPr sz="1100" b="1" i="0">
+                <a:solidFill>
+                  <a:srgbClr val="FFFFFF"/>
+                </a:solidFill>
+              </a:rPr>
+              <a:t>Specular Reflection</a:t>
+            </a:r>
+          </a:p>
+        </p:txBody>
+      </p:sp>
+      <p:sp>
+        <p:nvSpPr>
+          <p:cNvPr id="17" name="TextBox 16"/>
+          <p:cNvSpPr txBox="1"/>
+          <p:nvPr/>
+        </p:nvSpPr>
+        <p:spPr>
+          <a:xfrm>
+            <a:off x="2788920" y="2651759"/>
+            <a:ext cx="2651760" cy="347472"/>
+          </a:xfrm>
+          <a:prstGeom prst="rect">
+            <a:avLst/>
+          </a:prstGeom>
+          <a:noFill/>
+        </p:spPr>
+        <p:txBody>
+          <a:bodyPr wrap="square">
+            <a:spAutoFit/>
+          </a:bodyPr>
+          <a:lstStyle/>
+          <a:p>
+            <a:pPr algn="l"/>
+            <a:r>
+              <a:rPr sz="1000" b="0" i="0">
+                <a:solidFill>
+                  <a:srgbClr val="CAD3DF"/>
+                </a:solidFill>
+              </a:rPr>
+              <a:t>Building face bounce</a:t>
+            </a:r>
+          </a:p>
+        </p:txBody>
+      </p:sp>
+      <p:sp>
+        <p:nvSpPr>
+          <p:cNvPr id="18" name="Rectangle 17"/>
+          <p:cNvSpPr/>
+          <p:nvPr/>
+        </p:nvSpPr>
+        <p:spPr>
+          <a:xfrm>
+            <a:off x="502920" y="3465575"/>
+            <a:ext cx="256032" cy="256032"/>
+          </a:xfrm>
+          <a:prstGeom prst="rect">
+            <a:avLst/>
+          </a:prstGeom>
+          <a:solidFill>
+            <a:srgbClr val="2DCB7F"/>
+          </a:solidFill>
+          <a:ln>
+            <a:noFill/>
+          </a:ln>
+        </p:spPr>
+        <p:style>
+          <a:lnRef idx="1">
+            <a:schemeClr val="accent1"/>
+          </a:lnRef>
+          <a:fillRef idx="3">
+            <a:schemeClr val="accent1"/>
+          </a:fillRef>
+          <a:effectRef idx="2">
+            <a:schemeClr val="accent1"/>
+          </a:effectRef>
+          <a:fontRef idx="minor">
+            <a:schemeClr val="lt1"/>
+          </a:fontRef>
+        </p:style>
+        <p:txBody>
+          <a:bodyPr rtlCol="0" anchor="ctr"/>
+          <a:lstStyle/>
+          <a:p>
+            <a:pPr algn="ctr"/>
+          </a:p>
+        </p:txBody>
+      </p:sp>
+      <p:sp>
+        <p:nvSpPr>
+          <p:cNvPr id="19" name="TextBox 18"/>
+          <p:cNvSpPr txBox="1"/>
+          <p:nvPr/>
+        </p:nvSpPr>
+        <p:spPr>
+          <a:xfrm>
+            <a:off x="502920" y="3419855"/>
+            <a:ext cx="274320" cy="320040"/>
+          </a:xfrm>
+          <a:prstGeom prst="rect">
+            <a:avLst/>
+          </a:prstGeom>
+          <a:noFill/>
+        </p:spPr>
+        <p:txBody>
+          <a:bodyPr wrap="square">
+            <a:spAutoFit/>
+          </a:bodyPr>
+          <a:lstStyle/>
+          <a:p>
+            <a:pPr algn="ctr"/>
+            <a:r>
+              <a:rPr sz="1000" b="1" i="0">
+                <a:solidFill>
+                  <a:srgbClr val="0D1B2A"/>
+                </a:solidFill>
+              </a:rPr>
+              <a:t>✔</a:t>
+            </a:r>
+          </a:p>
+        </p:txBody>
+      </p:sp>
+      <p:sp>
+        <p:nvSpPr>
+          <p:cNvPr id="20" name="TextBox 19"/>
+          <p:cNvSpPr txBox="1"/>
+          <p:nvPr/>
+        </p:nvSpPr>
+        <p:spPr>
+          <a:xfrm>
+            <a:off x="868680" y="3401567"/>
+            <a:ext cx="1920240" cy="347472"/>
+          </a:xfrm>
+          <a:prstGeom prst="rect">
+            <a:avLst/>
+          </a:prstGeom>
+          <a:noFill/>
+        </p:spPr>
+        <p:txBody>
+          <a:bodyPr wrap="square">
+            <a:spAutoFit/>
+          </a:bodyPr>
+          <a:lstStyle/>
+          <a:p>
+            <a:pPr algn="l"/>
+            <a:r>
+              <a:rPr sz="1100" b="1" i="0">
+                <a:solidFill>
+                  <a:srgbClr val="FFFFFF"/>
+                </a:solidFill>
+              </a:rPr>
+              <a:t>Diffraction</a:t>
+            </a:r>
+          </a:p>
+        </p:txBody>
+      </p:sp>
+      <p:sp>
+        <p:nvSpPr>
+          <p:cNvPr id="21" name="TextBox 20"/>
+          <p:cNvSpPr txBox="1"/>
+          <p:nvPr/>
+        </p:nvSpPr>
+        <p:spPr>
+          <a:xfrm>
+            <a:off x="2788920" y="3401567"/>
+            <a:ext cx="2651760" cy="347472"/>
+          </a:xfrm>
+          <a:prstGeom prst="rect">
+            <a:avLst/>
+          </a:prstGeom>
+          <a:noFill/>
+        </p:spPr>
+        <p:txBody>
+          <a:bodyPr wrap="square">
+            <a:spAutoFit/>
+          </a:bodyPr>
+          <a:lstStyle/>
+          <a:p>
+            <a:pPr algn="l"/>
+            <a:r>
+              <a:rPr sz="1000" b="0" i="0">
+                <a:solidFill>
+                  <a:srgbClr val="CAD3DF"/>
+                </a:solidFill>
+              </a:rPr>
+              <a:t>Over rooftops / wedge edges</a:t>
+            </a:r>
+          </a:p>
+        </p:txBody>
+      </p:sp>
+      <p:sp>
+        <p:nvSpPr>
+          <p:cNvPr id="22" name="Rectangle 21"/>
+          <p:cNvSpPr/>
+          <p:nvPr/>
+        </p:nvSpPr>
+        <p:spPr>
+          <a:xfrm>
+            <a:off x="502920" y="4215383"/>
+            <a:ext cx="256032" cy="256032"/>
+          </a:xfrm>
+          <a:prstGeom prst="rect">
+            <a:avLst/>
+          </a:prstGeom>
+          <a:solidFill>
+            <a:srgbClr val="2DCB7F"/>
+          </a:solidFill>
+          <a:ln>
+            <a:noFill/>
+          </a:ln>
+        </p:spPr>
+        <p:style>
+          <a:lnRef idx="1">
+            <a:schemeClr val="accent1"/>
+          </a:lnRef>
+          <a:fillRef idx="3">
+            <a:schemeClr val="accent1"/>
+          </a:fillRef>
+          <a:effectRef idx="2">
+            <a:schemeClr val="accent1"/>
+          </a:effectRef>
+          <a:fontRef idx="minor">
+            <a:schemeClr val="lt1"/>
+          </a:fontRef>
+        </p:style>
+        <p:txBody>
+          <a:bodyPr rtlCol="0" anchor="ctr"/>
+          <a:lstStyle/>
+          <a:p>
+            <a:pPr algn="ctr"/>
+          </a:p>
+        </p:txBody>
+      </p:sp>
+      <p:sp>
+        <p:nvSpPr>
+          <p:cNvPr id="23" name="TextBox 22"/>
+          <p:cNvSpPr txBox="1"/>
+          <p:nvPr/>
+        </p:nvSpPr>
+        <p:spPr>
+          <a:xfrm>
+            <a:off x="502920" y="4169663"/>
+            <a:ext cx="274320" cy="320040"/>
+          </a:xfrm>
+          <a:prstGeom prst="rect">
+            <a:avLst/>
+          </a:prstGeom>
+          <a:noFill/>
+        </p:spPr>
+        <p:txBody>
+          <a:bodyPr wrap="square">
+            <a:spAutoFit/>
+          </a:bodyPr>
+          <a:lstStyle/>
+          <a:p>
+            <a:pPr algn="ctr"/>
+            <a:r>
+              <a:rPr sz="1000" b="1" i="0">
+                <a:solidFill>
+                  <a:srgbClr val="0D1B2A"/>
+                </a:solidFill>
+              </a:rPr>
+              <a:t>✔</a:t>
+            </a:r>
+          </a:p>
+        </p:txBody>
+      </p:sp>
+      <p:sp>
+        <p:nvSpPr>
+          <p:cNvPr id="24" name="TextBox 23"/>
+          <p:cNvSpPr txBox="1"/>
+          <p:nvPr/>
+        </p:nvSpPr>
+        <p:spPr>
+          <a:xfrm>
+            <a:off x="868680" y="4151375"/>
+            <a:ext cx="1920240" cy="347472"/>
+          </a:xfrm>
+          <a:prstGeom prst="rect">
+            <a:avLst/>
+          </a:prstGeom>
+          <a:noFill/>
+        </p:spPr>
+        <p:txBody>
+          <a:bodyPr wrap="square">
+            <a:spAutoFit/>
+          </a:bodyPr>
+          <a:lstStyle/>
+          <a:p>
+            <a:pPr algn="l"/>
+            <a:r>
+              <a:rPr sz="1100" b="1" i="0">
+                <a:solidFill>
+                  <a:srgbClr val="FFFFFF"/>
+                </a:solidFill>
+              </a:rPr>
+              <a:t>Edge Diffraction</a:t>
+            </a:r>
+          </a:p>
+        </p:txBody>
+      </p:sp>
+      <p:sp>
+        <p:nvSpPr>
+          <p:cNvPr id="25" name="TextBox 24"/>
+          <p:cNvSpPr txBox="1"/>
+          <p:nvPr/>
+        </p:nvSpPr>
+        <p:spPr>
+          <a:xfrm>
+            <a:off x="2788920" y="4151375"/>
+            <a:ext cx="2651760" cy="347472"/>
+          </a:xfrm>
+          <a:prstGeom prst="rect">
+            <a:avLst/>
+          </a:prstGeom>
+          <a:noFill/>
+        </p:spPr>
+        <p:txBody>
+          <a:bodyPr wrap="square">
+            <a:spAutoFit/>
+          </a:bodyPr>
+          <a:lstStyle/>
+          <a:p>
+            <a:pPr algn="l"/>
+            <a:r>
+              <a:rPr sz="1000" b="0" i="0">
+                <a:solidFill>
+                  <a:srgbClr val="CAD3DF"/>
+                </a:solidFill>
+              </a:rPr>
+              <a:t>Around building corners — dominant NLOS</a:t>
+            </a:r>
+          </a:p>
+        </p:txBody>
+      </p:sp>
+      <p:sp>
+        <p:nvSpPr>
+          <p:cNvPr id="26" name="Rectangle 25"/>
+          <p:cNvSpPr/>
+          <p:nvPr/>
+        </p:nvSpPr>
+        <p:spPr>
+          <a:xfrm>
+            <a:off x="502920" y="4965191"/>
+            <a:ext cx="256032" cy="256032"/>
+          </a:xfrm>
+          <a:prstGeom prst="rect">
+            <a:avLst/>
+          </a:prstGeom>
+          <a:solidFill>
+            <a:srgbClr val="2DCB7F"/>
+          </a:solidFill>
+          <a:ln>
+            <a:noFill/>
+          </a:ln>
+        </p:spPr>
+        <p:style>
+          <a:lnRef idx="1">
+            <a:schemeClr val="accent1"/>
+          </a:lnRef>
+          <a:fillRef idx="3">
+            <a:schemeClr val="accent1"/>
+          </a:fillRef>
+          <a:effectRef idx="2">
+            <a:schemeClr val="accent1"/>
+          </a:effectRef>
+          <a:fontRef idx="minor">
+            <a:schemeClr val="lt1"/>
+          </a:fontRef>
+        </p:style>
+        <p:txBody>
+          <a:bodyPr rtlCol="0" anchor="ctr"/>
+          <a:lstStyle/>
+          <a:p>
+            <a:pPr algn="ctr"/>
+          </a:p>
+        </p:txBody>
+      </p:sp>
+      <p:sp>
+        <p:nvSpPr>
+          <p:cNvPr id="27" name="TextBox 26"/>
+          <p:cNvSpPr txBox="1"/>
+          <p:nvPr/>
+        </p:nvSpPr>
+        <p:spPr>
+          <a:xfrm>
+            <a:off x="502920" y="4919471"/>
+            <a:ext cx="274320" cy="320040"/>
+          </a:xfrm>
+          <a:prstGeom prst="rect">
+            <a:avLst/>
+          </a:prstGeom>
+          <a:noFill/>
+        </p:spPr>
+        <p:txBody>
+          <a:bodyPr wrap="square">
+            <a:spAutoFit/>
+          </a:bodyPr>
+          <a:lstStyle/>
+          <a:p>
+            <a:pPr algn="ctr"/>
+            <a:r>
+              <a:rPr sz="1000" b="1" i="0">
+                <a:solidFill>
+                  <a:srgbClr val="0D1B2A"/>
+                </a:solidFill>
+              </a:rPr>
+              <a:t>✔</a:t>
+            </a:r>
+          </a:p>
+        </p:txBody>
+      </p:sp>
+      <p:sp>
+        <p:nvSpPr>
+          <p:cNvPr id="28" name="TextBox 27"/>
+          <p:cNvSpPr txBox="1"/>
+          <p:nvPr/>
+        </p:nvSpPr>
+        <p:spPr>
+          <a:xfrm>
+            <a:off x="868680" y="4901183"/>
+            <a:ext cx="1920240" cy="347472"/>
+          </a:xfrm>
+          <a:prstGeom prst="rect">
+            <a:avLst/>
+          </a:prstGeom>
+          <a:noFill/>
+        </p:spPr>
+        <p:txBody>
+          <a:bodyPr wrap="square">
+            <a:spAutoFit/>
+          </a:bodyPr>
+          <a:lstStyle/>
+          <a:p>
+            <a:pPr algn="l"/>
+            <a:r>
+              <a:rPr sz="1100" b="1" i="0">
+                <a:solidFill>
+                  <a:srgbClr val="FFFFFF"/>
+                </a:solidFill>
+              </a:rPr>
+              <a:t>Scattering</a:t>
+            </a:r>
+          </a:p>
+        </p:txBody>
+      </p:sp>
+      <p:sp>
+        <p:nvSpPr>
+          <p:cNvPr id="29" name="TextBox 28"/>
+          <p:cNvSpPr txBox="1"/>
+          <p:nvPr/>
+        </p:nvSpPr>
+        <p:spPr>
+          <a:xfrm>
+            <a:off x="2788920" y="4901183"/>
+            <a:ext cx="2651760" cy="347472"/>
+          </a:xfrm>
+          <a:prstGeom prst="rect">
+            <a:avLst/>
+          </a:prstGeom>
+          <a:noFill/>
+        </p:spPr>
+        <p:txBody>
+          <a:bodyPr wrap="square">
+            <a:spAutoFit/>
+          </a:bodyPr>
+          <a:lstStyle/>
+          <a:p>
+            <a:pPr algn="l"/>
+            <a:r>
+              <a:rPr sz="1000" b="0" i="0">
+                <a:solidFill>
+                  <a:srgbClr val="CAD3DF"/>
+                </a:solidFill>
+              </a:rPr>
+              <a:t>Lambertian rough surface diffuse</a:t>
+            </a:r>
+          </a:p>
+        </p:txBody>
+      </p:sp>
+      <p:sp>
+        <p:nvSpPr>
+          <p:cNvPr id="30" name="Rectangle 29"/>
+          <p:cNvSpPr/>
+          <p:nvPr/>
+        </p:nvSpPr>
+        <p:spPr>
+          <a:xfrm>
+            <a:off x="320040" y="5760720"/>
+            <a:ext cx="5394960" cy="685800"/>
+          </a:xfrm>
+          <a:prstGeom prst="rect">
+            <a:avLst/>
+          </a:prstGeom>
+          <a:solidFill>
+            <a:srgbClr val="112A40"/>
+          </a:solidFill>
+          <a:ln>
+            <a:noFill/>
+          </a:ln>
+        </p:spPr>
+        <p:style>
+          <a:lnRef idx="1">
+            <a:schemeClr val="accent1"/>
+          </a:lnRef>
+          <a:fillRef idx="3">
+            <a:schemeClr val="accent1"/>
+          </a:fillRef>
+          <a:effectRef idx="2">
+            <a:schemeClr val="accent1"/>
+          </a:effectRef>
+          <a:fontRef idx="minor">
+            <a:schemeClr val="lt1"/>
+          </a:fontRef>
+        </p:style>
+        <p:txBody>
+          <a:bodyPr rtlCol="0" anchor="ctr"/>
+          <a:lstStyle/>
+          <a:p>
+            <a:pPr algn="ctr"/>
+          </a:p>
+        </p:txBody>
+      </p:sp>
+      <p:sp>
+        <p:nvSpPr>
+          <p:cNvPr id="31" name="TextBox 30"/>
+          <p:cNvSpPr txBox="1"/>
+          <p:nvPr/>
+        </p:nvSpPr>
+        <p:spPr>
+          <a:xfrm>
+            <a:off x="457200" y="5833872"/>
+            <a:ext cx="5120640" cy="548640"/>
+          </a:xfrm>
+          <a:prstGeom prst="rect">
+            <a:avLst/>
+          </a:prstGeom>
+          <a:noFill/>
+        </p:spPr>
+        <p:txBody>
+          <a:bodyPr wrap="square">
+            <a:spAutoFit/>
+          </a:bodyPr>
+          <a:lstStyle/>
+          <a:p>
+            <a:pPr algn="l"/>
+            <a:r>
+              <a:rPr sz="1000" b="0" i="1">
+                <a:solidFill>
+                  <a:srgbClr val="90E0EF"/>
+                </a:solidFill>
+              </a:rPr>
+              <a:t>72% of rays are diffraction — edge diffraction is the dominant
+propagation mechanism in urban Nottingham NLOS at 915 MHz</a:t>
+            </a:r>
+          </a:p>
+        </p:txBody>
+      </p:sp>
+      <p:sp>
+        <p:nvSpPr>
+          <p:cNvPr id="32" name="Rectangle 31"/>
+          <p:cNvSpPr/>
+          <p:nvPr/>
+        </p:nvSpPr>
+        <p:spPr>
+          <a:xfrm>
+            <a:off x="5943600" y="1234440"/>
+            <a:ext cx="5943600" cy="5212080"/>
+          </a:xfrm>
+          <a:prstGeom prst="rect">
+            <a:avLst/>
+          </a:prstGeom>
+          <a:solidFill>
+            <a:srgbClr val="112A40"/>
+          </a:solidFill>
+          <a:ln>
+            <a:noFill/>
+          </a:ln>
+        </p:spPr>
+        <p:style>
+          <a:lnRef idx="1">
+            <a:schemeClr val="accent1"/>
+          </a:lnRef>
+          <a:fillRef idx="3">
+            <a:schemeClr val="accent1"/>
+          </a:fillRef>
+          <a:effectRef idx="2">
+            <a:schemeClr val="accent1"/>
+          </a:effectRef>
+          <a:fontRef idx="minor">
+            <a:schemeClr val="lt1"/>
+          </a:fontRef>
+        </p:style>
+        <p:txBody>
+          <a:bodyPr rtlCol="0" anchor="ctr"/>
+          <a:lstStyle/>
+          <a:p>
+            <a:pPr algn="ctr"/>
+          </a:p>
+        </p:txBody>
+      </p:sp>
+      <p:sp>
+        <p:nvSpPr>
+          <p:cNvPr id="33" name="Rectangle 32"/>
+          <p:cNvSpPr/>
+          <p:nvPr/>
+        </p:nvSpPr>
+        <p:spPr>
+          <a:xfrm>
+            <a:off x="5943600" y="1234440"/>
+            <a:ext cx="5943600" cy="54864"/>
+          </a:xfrm>
+          <a:prstGeom prst="rect">
+            <a:avLst/>
+          </a:prstGeom>
+          <a:solidFill>
+            <a:srgbClr val="FF9F1C"/>
+          </a:solidFill>
+          <a:ln>
+            <a:noFill/>
+          </a:ln>
+        </p:spPr>
+        <p:style>
+          <a:lnRef idx="1">
+            <a:schemeClr val="accent1"/>
+          </a:lnRef>
+          <a:fillRef idx="3">
+            <a:schemeClr val="accent1"/>
+          </a:fillRef>
+          <a:effectRef idx="2">
+            <a:schemeClr val="accent1"/>
+          </a:effectRef>
+          <a:fontRef idx="minor">
+            <a:schemeClr val="lt1"/>
+          </a:fontRef>
+        </p:style>
+        <p:txBody>
+          <a:bodyPr rtlCol="0" anchor="ctr"/>
+          <a:lstStyle/>
+          <a:p>
+            <a:pPr algn="ctr"/>
+          </a:p>
+        </p:txBody>
+      </p:sp>
+      <p:sp>
+        <p:nvSpPr>
+          <p:cNvPr id="34" name="TextBox 33"/>
+          <p:cNvSpPr txBox="1"/>
+          <p:nvPr/>
+        </p:nvSpPr>
+        <p:spPr>
+          <a:xfrm>
+            <a:off x="6080760" y="1371600"/>
+            <a:ext cx="5669280" cy="384048"/>
+          </a:xfrm>
+          <a:prstGeom prst="rect">
+            <a:avLst/>
+          </a:prstGeom>
+          <a:noFill/>
+        </p:spPr>
+        <p:txBody>
+          <a:bodyPr wrap="square">
+            <a:spAutoFit/>
+          </a:bodyPr>
+          <a:lstStyle/>
+          <a:p>
+            <a:pPr algn="l"/>
+            <a:r>
+              <a:rPr sz="1300" b="1" i="0">
+                <a:solidFill>
+                  <a:srgbClr val="FF9F1C"/>
+                </a:solidFill>
+              </a:rPr>
+              <a:t>Solver Parameters</a:t>
+            </a:r>
+          </a:p>
+        </p:txBody>
+      </p:sp>
+      <p:sp>
+        <p:nvSpPr>
+          <p:cNvPr id="35" name="TextBox 34"/>
+          <p:cNvSpPr txBox="1"/>
+          <p:nvPr/>
+        </p:nvSpPr>
+        <p:spPr>
+          <a:xfrm>
+            <a:off x="6080760" y="1874519"/>
+            <a:ext cx="2286000" cy="384048"/>
+          </a:xfrm>
+          <a:prstGeom prst="rect">
+            <a:avLst/>
+          </a:prstGeom>
+          <a:noFill/>
+        </p:spPr>
+        <p:txBody>
+          <a:bodyPr wrap="square">
+            <a:spAutoFit/>
+          </a:bodyPr>
+          <a:lstStyle/>
+          <a:p>
+            <a:pPr algn="l"/>
+            <a:r>
+              <a:rPr sz="1000" b="1" i="0">
+                <a:solidFill>
+                  <a:srgbClr val="90E0EF"/>
+                </a:solidFill>
+              </a:rPr>
+              <a:t>Frequency</a:t>
+            </a:r>
+          </a:p>
+        </p:txBody>
+      </p:sp>
+      <p:sp>
+        <p:nvSpPr>
+          <p:cNvPr id="36" name="TextBox 35"/>
+          <p:cNvSpPr txBox="1"/>
+          <p:nvPr/>
+        </p:nvSpPr>
+        <p:spPr>
+          <a:xfrm>
+            <a:off x="8366760" y="1874519"/>
+            <a:ext cx="3383280" cy="384048"/>
+          </a:xfrm>
+          <a:prstGeom prst="rect">
+            <a:avLst/>
+          </a:prstGeom>
+          <a:noFill/>
+        </p:spPr>
+        <p:txBody>
+          <a:bodyPr wrap="square">
+            <a:spAutoFit/>
+          </a:bodyPr>
+          <a:lstStyle/>
+          <a:p>
+            <a:pPr algn="l"/>
+            <a:r>
+              <a:rPr sz="1000" b="0" i="0">
+                <a:solidFill>
+                  <a:srgbClr val="FFFFFF"/>
+                </a:solidFill>
+              </a:rPr>
+              <a:t>915.95 MHz</a:t>
+            </a:r>
+          </a:p>
+        </p:txBody>
+      </p:sp>
+      <p:sp>
+        <p:nvSpPr>
+          <p:cNvPr id="37" name="TextBox 36"/>
+          <p:cNvSpPr txBox="1"/>
+          <p:nvPr/>
+        </p:nvSpPr>
+        <p:spPr>
+          <a:xfrm>
+            <a:off x="6080760" y="2350007"/>
+            <a:ext cx="2286000" cy="384048"/>
+          </a:xfrm>
+          <a:prstGeom prst="rect">
+            <a:avLst/>
+          </a:prstGeom>
+          <a:noFill/>
+        </p:spPr>
+        <p:txBody>
+          <a:bodyPr wrap="square">
+            <a:spAutoFit/>
+          </a:bodyPr>
+          <a:lstStyle/>
+          <a:p>
+            <a:pPr algn="l"/>
+            <a:r>
+              <a:rPr sz="1000" b="1" i="0">
+                <a:solidFill>
+                  <a:srgbClr val="90E0EF"/>
+                </a:solidFill>
+              </a:rPr>
+              <a:t>MAX_DEPTH</a:t>
+            </a:r>
+          </a:p>
+        </p:txBody>
+      </p:sp>
+      <p:sp>
+        <p:nvSpPr>
+          <p:cNvPr id="38" name="TextBox 37"/>
+          <p:cNvSpPr txBox="1"/>
+          <p:nvPr/>
+        </p:nvSpPr>
+        <p:spPr>
+          <a:xfrm>
+            <a:off x="8366760" y="2350007"/>
+            <a:ext cx="3383280" cy="384048"/>
+          </a:xfrm>
+          <a:prstGeom prst="rect">
+            <a:avLst/>
+          </a:prstGeom>
+          <a:noFill/>
+        </p:spPr>
+        <p:txBody>
+          <a:bodyPr wrap="square">
+            <a:spAutoFit/>
+          </a:bodyPr>
+          <a:lstStyle/>
+          <a:p>
+            <a:pPr algn="l"/>
+            <a:r>
+              <a:rPr sz="1000" b="0" i="0">
+                <a:solidFill>
+                  <a:srgbClr val="FFFFFF"/>
+                </a:solidFill>
+              </a:rPr>
+              <a:t>7  (up to 7 bounces)</a:t>
+            </a:r>
+          </a:p>
+        </p:txBody>
+      </p:sp>
+      <p:sp>
+        <p:nvSpPr>
+          <p:cNvPr id="39" name="TextBox 38"/>
+          <p:cNvSpPr txBox="1"/>
+          <p:nvPr/>
+        </p:nvSpPr>
+        <p:spPr>
+          <a:xfrm>
+            <a:off x="6080760" y="2825495"/>
+            <a:ext cx="2286000" cy="384048"/>
+          </a:xfrm>
+          <a:prstGeom prst="rect">
+            <a:avLst/>
+          </a:prstGeom>
+          <a:noFill/>
+        </p:spPr>
+        <p:txBody>
+          <a:bodyPr wrap="square">
+            <a:spAutoFit/>
+          </a:bodyPr>
+          <a:lstStyle/>
+          <a:p>
+            <a:pPr algn="l"/>
+            <a:r>
+              <a:rPr sz="1000" b="1" i="0">
+                <a:solidFill>
+                  <a:srgbClr val="90E0EF"/>
+                </a:solidFill>
+              </a:rPr>
+              <a:t>NUM_SAMPLES</a:t>
+            </a:r>
+          </a:p>
+        </p:txBody>
+      </p:sp>
+      <p:sp>
+        <p:nvSpPr>
+          <p:cNvPr id="40" name="TextBox 39"/>
+          <p:cNvSpPr txBox="1"/>
+          <p:nvPr/>
+        </p:nvSpPr>
+        <p:spPr>
+          <a:xfrm>
+            <a:off x="8366760" y="2825495"/>
+            <a:ext cx="3383280" cy="384048"/>
+          </a:xfrm>
+          <a:prstGeom prst="rect">
+            <a:avLst/>
+          </a:prstGeom>
+          <a:noFill/>
+        </p:spPr>
+        <p:txBody>
+          <a:bodyPr wrap="square">
+            <a:spAutoFit/>
+          </a:bodyPr>
+          <a:lstStyle/>
+          <a:p>
+            <a:pPr algn="l"/>
+            <a:r>
+              <a:rPr sz="1000" b="0" i="0">
+                <a:solidFill>
+                  <a:srgbClr val="FFFFFF"/>
+                </a:solidFill>
+              </a:rPr>
+              <a:t>10 000 000  (NVLabs approach)</a:t>
+            </a:r>
+          </a:p>
+        </p:txBody>
+      </p:sp>
+      <p:sp>
+        <p:nvSpPr>
+          <p:cNvPr id="41" name="TextBox 40"/>
+          <p:cNvSpPr txBox="1"/>
+          <p:nvPr/>
+        </p:nvSpPr>
+        <p:spPr>
+          <a:xfrm>
+            <a:off x="6080760" y="3300983"/>
+            <a:ext cx="2286000" cy="384048"/>
+          </a:xfrm>
+          <a:prstGeom prst="rect">
+            <a:avLst/>
+          </a:prstGeom>
+          <a:noFill/>
+        </p:spPr>
+        <p:txBody>
+          <a:bodyPr wrap="square">
+            <a:spAutoFit/>
+          </a:bodyPr>
+          <a:lstStyle/>
+          <a:p>
+            <a:pPr algn="l"/>
+            <a:r>
+              <a:rPr sz="1000" b="1" i="0">
+                <a:solidFill>
+                  <a:srgbClr val="90E0EF"/>
+                </a:solidFill>
+              </a:rPr>
+              <a:t>TX height</a:t>
+            </a:r>
+          </a:p>
+        </p:txBody>
+      </p:sp>
+      <p:sp>
+        <p:nvSpPr>
+          <p:cNvPr id="42" name="TextBox 41"/>
+          <p:cNvSpPr txBox="1"/>
+          <p:nvPr/>
+        </p:nvSpPr>
+        <p:spPr>
+          <a:xfrm>
+            <a:off x="8366760" y="3300983"/>
+            <a:ext cx="3383280" cy="384048"/>
+          </a:xfrm>
+          <a:prstGeom prst="rect">
+            <a:avLst/>
+          </a:prstGeom>
+          <a:noFill/>
+        </p:spPr>
+        <p:txBody>
+          <a:bodyPr wrap="square">
+            <a:spAutoFit/>
+          </a:bodyPr>
+          <a:lstStyle/>
+          <a:p>
+            <a:pPr algn="l"/>
+            <a:r>
+              <a:rPr sz="1000" b="0" i="0">
+                <a:solidFill>
+                  <a:srgbClr val="FFFFFF"/>
+                </a:solidFill>
+              </a:rPr>
+              <a:t>17 m AGL  (mast)</a:t>
+            </a:r>
+          </a:p>
+        </p:txBody>
+      </p:sp>
+      <p:sp>
+        <p:nvSpPr>
+          <p:cNvPr id="43" name="TextBox 42"/>
+          <p:cNvSpPr txBox="1"/>
+          <p:nvPr/>
+        </p:nvSpPr>
+        <p:spPr>
+          <a:xfrm>
+            <a:off x="6080760" y="3776471"/>
+            <a:ext cx="2286000" cy="384048"/>
+          </a:xfrm>
+          <a:prstGeom prst="rect">
+            <a:avLst/>
+          </a:prstGeom>
+          <a:noFill/>
+        </p:spPr>
+        <p:txBody>
+          <a:bodyPr wrap="square">
+            <a:spAutoFit/>
+          </a:bodyPr>
+          <a:lstStyle/>
+          <a:p>
+            <a:pPr algn="l"/>
+            <a:r>
+              <a:rPr sz="1000" b="1" i="0">
+                <a:solidFill>
+                  <a:srgbClr val="90E0EF"/>
+                </a:solidFill>
+              </a:rPr>
+              <a:t>RX height</a:t>
+            </a:r>
+          </a:p>
+        </p:txBody>
+      </p:sp>
+      <p:sp>
+        <p:nvSpPr>
+          <p:cNvPr id="44" name="TextBox 43"/>
+          <p:cNvSpPr txBox="1"/>
+          <p:nvPr/>
+        </p:nvSpPr>
+        <p:spPr>
+          <a:xfrm>
+            <a:off x="8366760" y="3776471"/>
+            <a:ext cx="3383280" cy="384048"/>
+          </a:xfrm>
+          <a:prstGeom prst="rect">
+            <a:avLst/>
+          </a:prstGeom>
+          <a:noFill/>
+        </p:spPr>
+        <p:txBody>
+          <a:bodyPr wrap="square">
+            <a:spAutoFit/>
+          </a:bodyPr>
+          <a:lstStyle/>
+          <a:p>
+            <a:pPr algn="l"/>
+            <a:r>
+              <a:rPr sz="1000" b="0" i="0">
+                <a:solidFill>
+                  <a:srgbClr val="FFFFFF"/>
+                </a:solidFill>
+              </a:rPr>
+              <a:t>1.5 m AGL  (IoT device)</a:t>
+            </a:r>
+          </a:p>
+        </p:txBody>
+      </p:sp>
+      <p:sp>
+        <p:nvSpPr>
+          <p:cNvPr id="45" name="TextBox 44"/>
+          <p:cNvSpPr txBox="1"/>
+          <p:nvPr/>
+        </p:nvSpPr>
+        <p:spPr>
+          <a:xfrm>
+            <a:off x="6080760" y="4251959"/>
+            <a:ext cx="2286000" cy="384048"/>
+          </a:xfrm>
+          <a:prstGeom prst="rect">
+            <a:avLst/>
+          </a:prstGeom>
+          <a:noFill/>
+        </p:spPr>
+        <p:txBody>
+          <a:bodyPr wrap="square">
+            <a:spAutoFit/>
+          </a:bodyPr>
+          <a:lstStyle/>
+          <a:p>
+            <a:pPr algn="l"/>
+            <a:r>
+              <a:rPr sz="1000" b="1" i="0">
+                <a:solidFill>
+                  <a:srgbClr val="90E0EF"/>
+                </a:solidFill>
+              </a:rPr>
+              <a:t>TX antenna</a:t>
+            </a:r>
+          </a:p>
+        </p:txBody>
+      </p:sp>
+      <p:sp>
+        <p:nvSpPr>
+          <p:cNvPr id="46" name="TextBox 45"/>
+          <p:cNvSpPr txBox="1"/>
+          <p:nvPr/>
+        </p:nvSpPr>
+        <p:spPr>
+          <a:xfrm>
+            <a:off x="8366760" y="4251959"/>
+            <a:ext cx="3383280" cy="384048"/>
+          </a:xfrm>
+          <a:prstGeom prst="rect">
+            <a:avLst/>
+          </a:prstGeom>
+          <a:noFill/>
+        </p:spPr>
+        <p:txBody>
+          <a:bodyPr wrap="square">
+            <a:spAutoFit/>
+          </a:bodyPr>
+          <a:lstStyle/>
+          <a:p>
+            <a:pPr algn="l"/>
+            <a:r>
+              <a:rPr sz="1000" b="0" i="0">
+                <a:solidFill>
+                  <a:srgbClr val="FFFFFF"/>
+                </a:solidFill>
+              </a:rPr>
+              <a:t>Dipole — donut pattern</a:t>
+            </a:r>
+          </a:p>
+        </p:txBody>
+      </p:sp>
+      <p:sp>
+        <p:nvSpPr>
+          <p:cNvPr id="47" name="TextBox 46"/>
+          <p:cNvSpPr txBox="1"/>
+          <p:nvPr/>
+        </p:nvSpPr>
+        <p:spPr>
+          <a:xfrm>
+            <a:off x="6080760" y="4727447"/>
+            <a:ext cx="2286000" cy="384048"/>
+          </a:xfrm>
+          <a:prstGeom prst="rect">
+            <a:avLst/>
+          </a:prstGeom>
+          <a:noFill/>
+        </p:spPr>
+        <p:txBody>
+          <a:bodyPr wrap="square">
+            <a:spAutoFit/>
+          </a:bodyPr>
+          <a:lstStyle/>
+          <a:p>
+            <a:pPr algn="l"/>
+            <a:r>
+              <a:rPr sz="1000" b="1" i="0">
+                <a:solidFill>
+                  <a:srgbClr val="90E0EF"/>
+                </a:solidFill>
+              </a:rPr>
+              <a:t>RX antenna</a:t>
+            </a:r>
+          </a:p>
+        </p:txBody>
+      </p:sp>
+      <p:sp>
+        <p:nvSpPr>
+          <p:cNvPr id="48" name="TextBox 47"/>
+          <p:cNvSpPr txBox="1"/>
+          <p:nvPr/>
+        </p:nvSpPr>
+        <p:spPr>
+          <a:xfrm>
+            <a:off x="8366760" y="4727447"/>
+            <a:ext cx="3383280" cy="384048"/>
+          </a:xfrm>
+          <a:prstGeom prst="rect">
+            <a:avLst/>
+          </a:prstGeom>
+          <a:noFill/>
+        </p:spPr>
+        <p:txBody>
+          <a:bodyPr wrap="square">
+            <a:spAutoFit/>
+          </a:bodyPr>
+          <a:lstStyle/>
+          <a:p>
+            <a:pPr algn="l"/>
+            <a:r>
+              <a:rPr sz="1000" b="0" i="0">
+                <a:solidFill>
+                  <a:srgbClr val="FFFFFF"/>
+                </a:solidFill>
+              </a:rPr>
+              <a:t>Isotropic</a:t>
+            </a:r>
+          </a:p>
+        </p:txBody>
+      </p:sp>
+      <p:sp>
+        <p:nvSpPr>
+          <p:cNvPr id="49" name="TextBox 48"/>
+          <p:cNvSpPr txBox="1"/>
+          <p:nvPr/>
+        </p:nvSpPr>
+        <p:spPr>
+          <a:xfrm>
+            <a:off x="6080760" y="5202935"/>
+            <a:ext cx="2286000" cy="384048"/>
+          </a:xfrm>
+          <a:prstGeom prst="rect">
+            <a:avLst/>
+          </a:prstGeom>
+          <a:noFill/>
+        </p:spPr>
+        <p:txBody>
+          <a:bodyPr wrap="square">
+            <a:spAutoFit/>
+          </a:bodyPr>
+          <a:lstStyle/>
+          <a:p>
+            <a:pPr algn="l"/>
+            <a:r>
+              <a:rPr sz="1000" b="1" i="0">
+                <a:solidFill>
+                  <a:srgbClr val="90E0EF"/>
+                </a:solidFill>
+              </a:rPr>
+              <a:t>Noise floor</a:t>
+            </a:r>
+          </a:p>
+        </p:txBody>
+      </p:sp>
+      <p:sp>
+        <p:nvSpPr>
+          <p:cNvPr id="50" name="TextBox 49"/>
+          <p:cNvSpPr txBox="1"/>
+          <p:nvPr/>
+        </p:nvSpPr>
+        <p:spPr>
+          <a:xfrm>
+            <a:off x="8366760" y="5202935"/>
+            <a:ext cx="3383280" cy="384048"/>
+          </a:xfrm>
+          <a:prstGeom prst="rect">
+            <a:avLst/>
+          </a:prstGeom>
+          <a:noFill/>
+        </p:spPr>
+        <p:txBody>
+          <a:bodyPr wrap="square">
+            <a:spAutoFit/>
+          </a:bodyPr>
+          <a:lstStyle/>
+          <a:p>
+            <a:pPr algn="l"/>
+            <a:r>
+              <a:rPr sz="1000" b="0" i="0">
+                <a:solidFill>
+                  <a:srgbClr val="FFFFFF"/>
+                </a:solidFill>
+              </a:rPr>
+              <a:t>−124 dBm</a:t>
+            </a:r>
+          </a:p>
+        </p:txBody>
+      </p:sp>
+      <p:sp>
+        <p:nvSpPr>
+          <p:cNvPr id="51" name="TextBox 50"/>
+          <p:cNvSpPr txBox="1"/>
+          <p:nvPr/>
+        </p:nvSpPr>
+        <p:spPr>
+          <a:xfrm>
+            <a:off x="6080760" y="5678423"/>
+            <a:ext cx="2286000" cy="384048"/>
+          </a:xfrm>
+          <a:prstGeom prst="rect">
+            <a:avLst/>
+          </a:prstGeom>
+          <a:noFill/>
+        </p:spPr>
+        <p:txBody>
+          <a:bodyPr wrap="square">
+            <a:spAutoFit/>
+          </a:bodyPr>
+          <a:lstStyle/>
+          <a:p>
+            <a:pPr algn="l"/>
+            <a:r>
+              <a:rPr sz="1000" b="1" i="0">
+                <a:solidFill>
+                  <a:srgbClr val="90E0EF"/>
+                </a:solidFill>
+              </a:rPr>
+              <a:t>BATCH</a:t>
+            </a:r>
+          </a:p>
+        </p:txBody>
+      </p:sp>
+      <p:sp>
+        <p:nvSpPr>
+          <p:cNvPr id="52" name="TextBox 51"/>
+          <p:cNvSpPr txBox="1"/>
+          <p:nvPr/>
+        </p:nvSpPr>
+        <p:spPr>
+          <a:xfrm>
+            <a:off x="8366760" y="5678423"/>
+            <a:ext cx="3383280" cy="384048"/>
+          </a:xfrm>
+          <a:prstGeom prst="rect">
+            <a:avLst/>
+          </a:prstGeom>
+          <a:noFill/>
+        </p:spPr>
+        <p:txBody>
+          <a:bodyPr wrap="square">
+            <a:spAutoFit/>
+          </a:bodyPr>
+          <a:lstStyle/>
+          <a:p>
+            <a:pPr algn="l"/>
+            <a:r>
+              <a:rPr sz="1000" b="0" i="0">
+                <a:solidFill>
+                  <a:srgbClr val="FFFFFF"/>
+                </a:solidFill>
+              </a:rPr>
+              <a:t>1 receiver per solve (NVLabs)</a:t>
+            </a:r>
+          </a:p>
+        </p:txBody>
+      </p:sp>
+    </p:spTree>
+  </p:cSld>
+  <p:clrMapOvr>
+    <a:masterClrMapping/>
+  </p:clrMapOvr>
+</p:sld>
+</file>
+
 <file path=ppt/slides/slide2.xml><?xml version="1.0" encoding="utf-8"?>
 <p:sld xmlns:a="http://schemas.openxmlformats.org/drawingml/2006/main" xmlns:p="http://schemas.openxmlformats.org/presentationml/2006/main" xmlns:r="http://schemas.openxmlformats.org/officeDocument/2006/relationships">
   <p:cSld>
@@ -10672,6 +14409,4999 @@
                 </a:solidFill>
               </a:rPr>
               <a:t>   Harder to inspect individual buildings</a:t>
+            </a:r>
+          </a:p>
+        </p:txBody>
+      </p:sp>
+    </p:spTree>
+  </p:cSld>
+  <p:clrMapOvr>
+    <a:masterClrMapping/>
+  </p:clrMapOvr>
+</p:sld>
+</file>
+
+<file path=ppt/slides/slide7.xml><?xml version="1.0" encoding="utf-8"?>
+<p:sld xmlns:a="http://schemas.openxmlformats.org/drawingml/2006/main" xmlns:p="http://schemas.openxmlformats.org/presentationml/2006/main" xmlns:r="http://schemas.openxmlformats.org/officeDocument/2006/relationships">
+  <p:cSld>
+    <p:bg>
+      <p:bgPr>
+        <a:solidFill>
+          <a:srgbClr val="0D1B2A"/>
+        </a:solidFill>
+        <a:effectLst/>
+      </p:bgPr>
+    </p:bg>
+    <p:spTree>
+      <p:nvGrpSpPr>
+        <p:cNvPr id="1" name=""/>
+        <p:cNvGrpSpPr/>
+        <p:nvPr/>
+      </p:nvGrpSpPr>
+      <p:grpSpPr/>
+      <p:sp>
+        <p:nvSpPr>
+          <p:cNvPr id="2" name="Rectangle 1"/>
+          <p:cNvSpPr/>
+          <p:nvPr/>
+        </p:nvSpPr>
+        <p:spPr>
+          <a:xfrm>
+            <a:off x="0" y="73152"/>
+            <a:ext cx="12188952" cy="54864"/>
+          </a:xfrm>
+          <a:prstGeom prst="rect">
+            <a:avLst/>
+          </a:prstGeom>
+          <a:solidFill>
+            <a:srgbClr val="00B4D8"/>
+          </a:solidFill>
+          <a:ln>
+            <a:noFill/>
+          </a:ln>
+        </p:spPr>
+        <p:style>
+          <a:lnRef idx="1">
+            <a:schemeClr val="accent1"/>
+          </a:lnRef>
+          <a:fillRef idx="3">
+            <a:schemeClr val="accent1"/>
+          </a:fillRef>
+          <a:effectRef idx="2">
+            <a:schemeClr val="accent1"/>
+          </a:effectRef>
+          <a:fontRef idx="minor">
+            <a:schemeClr val="lt1"/>
+          </a:fontRef>
+        </p:style>
+        <p:txBody>
+          <a:bodyPr rtlCol="0" anchor="ctr"/>
+          <a:lstStyle/>
+          <a:p>
+            <a:pPr algn="ctr"/>
+          </a:p>
+        </p:txBody>
+      </p:sp>
+      <p:sp>
+        <p:nvSpPr>
+          <p:cNvPr id="3" name="TextBox 2"/>
+          <p:cNvSpPr txBox="1"/>
+          <p:nvPr/>
+        </p:nvSpPr>
+        <p:spPr>
+          <a:xfrm>
+            <a:off x="320040" y="201168"/>
+            <a:ext cx="3657600" cy="256032"/>
+          </a:xfrm>
+          <a:prstGeom prst="rect">
+            <a:avLst/>
+          </a:prstGeom>
+          <a:noFill/>
+        </p:spPr>
+        <p:txBody>
+          <a:bodyPr wrap="square">
+            <a:spAutoFit/>
+          </a:bodyPr>
+          <a:lstStyle/>
+          <a:p>
+            <a:pPr algn="l"/>
+            <a:r>
+              <a:rPr sz="800" b="1" i="0">
+                <a:solidFill>
+                  <a:srgbClr val="00B4D8"/>
+                </a:solidFill>
+              </a:rPr>
+              <a:t>ERROR SOURCES</a:t>
+            </a:r>
+          </a:p>
+        </p:txBody>
+      </p:sp>
+      <p:sp>
+        <p:nvSpPr>
+          <p:cNvPr id="4" name="TextBox 3"/>
+          <p:cNvSpPr txBox="1"/>
+          <p:nvPr/>
+        </p:nvSpPr>
+        <p:spPr>
+          <a:xfrm>
+            <a:off x="10972800" y="6492240"/>
+            <a:ext cx="1097280" cy="320040"/>
+          </a:xfrm>
+          <a:prstGeom prst="rect">
+            <a:avLst/>
+          </a:prstGeom>
+          <a:noFill/>
+        </p:spPr>
+        <p:txBody>
+          <a:bodyPr wrap="square">
+            <a:spAutoFit/>
+          </a:bodyPr>
+          <a:lstStyle/>
+          <a:p>
+            <a:pPr algn="r"/>
+            <a:r>
+              <a:rPr sz="900" b="0" i="0">
+                <a:solidFill>
+                  <a:srgbClr val="CAD3DF"/>
+                </a:solidFill>
+              </a:rPr>
+              <a:t>7 / 12</a:t>
+            </a:r>
+          </a:p>
+        </p:txBody>
+      </p:sp>
+      <p:sp>
+        <p:nvSpPr>
+          <p:cNvPr id="5" name="TextBox 4"/>
+          <p:cNvSpPr txBox="1"/>
+          <p:nvPr/>
+        </p:nvSpPr>
+        <p:spPr>
+          <a:xfrm>
+            <a:off x="411480" y="457200"/>
+            <a:ext cx="11430000" cy="640080"/>
+          </a:xfrm>
+          <a:prstGeom prst="rect">
+            <a:avLst/>
+          </a:prstGeom>
+          <a:noFill/>
+        </p:spPr>
+        <p:txBody>
+          <a:bodyPr wrap="square">
+            <a:spAutoFit/>
+          </a:bodyPr>
+          <a:lstStyle/>
+          <a:p>
+            <a:pPr algn="l"/>
+            <a:r>
+              <a:rPr sz="2600" b="1" i="0">
+                <a:solidFill>
+                  <a:srgbClr val="FFFFFF"/>
+                </a:solidFill>
+              </a:rPr>
+              <a:t>Known Error Sources — Building Heights &amp; Terrain Geometry</a:t>
+            </a:r>
+          </a:p>
+        </p:txBody>
+      </p:sp>
+      <p:sp>
+        <p:nvSpPr>
+          <p:cNvPr id="6" name="Rectangle 5"/>
+          <p:cNvSpPr/>
+          <p:nvPr/>
+        </p:nvSpPr>
+        <p:spPr>
+          <a:xfrm>
+            <a:off x="411480" y="1078992"/>
+            <a:ext cx="11338560" cy="16459"/>
+          </a:xfrm>
+          <a:prstGeom prst="rect">
+            <a:avLst/>
+          </a:prstGeom>
+          <a:solidFill>
+            <a:srgbClr val="1E3A52"/>
+          </a:solidFill>
+          <a:ln>
+            <a:noFill/>
+          </a:ln>
+        </p:spPr>
+        <p:style>
+          <a:lnRef idx="1">
+            <a:schemeClr val="accent1"/>
+          </a:lnRef>
+          <a:fillRef idx="3">
+            <a:schemeClr val="accent1"/>
+          </a:fillRef>
+          <a:effectRef idx="2">
+            <a:schemeClr val="accent1"/>
+          </a:effectRef>
+          <a:fontRef idx="minor">
+            <a:schemeClr val="lt1"/>
+          </a:fontRef>
+        </p:style>
+        <p:txBody>
+          <a:bodyPr rtlCol="0" anchor="ctr"/>
+          <a:lstStyle/>
+          <a:p>
+            <a:pPr algn="ctr"/>
+          </a:p>
+        </p:txBody>
+      </p:sp>
+      <p:sp>
+        <p:nvSpPr>
+          <p:cNvPr id="7" name="Rectangle 6"/>
+          <p:cNvSpPr/>
+          <p:nvPr/>
+        </p:nvSpPr>
+        <p:spPr>
+          <a:xfrm>
+            <a:off x="320040" y="1188720"/>
+            <a:ext cx="5486400" cy="2606040"/>
+          </a:xfrm>
+          <a:prstGeom prst="rect">
+            <a:avLst/>
+          </a:prstGeom>
+          <a:solidFill>
+            <a:srgbClr val="112A40"/>
+          </a:solidFill>
+          <a:ln>
+            <a:noFill/>
+          </a:ln>
+        </p:spPr>
+        <p:style>
+          <a:lnRef idx="1">
+            <a:schemeClr val="accent1"/>
+          </a:lnRef>
+          <a:fillRef idx="3">
+            <a:schemeClr val="accent1"/>
+          </a:fillRef>
+          <a:effectRef idx="2">
+            <a:schemeClr val="accent1"/>
+          </a:effectRef>
+          <a:fontRef idx="minor">
+            <a:schemeClr val="lt1"/>
+          </a:fontRef>
+        </p:style>
+        <p:txBody>
+          <a:bodyPr rtlCol="0" anchor="ctr"/>
+          <a:lstStyle/>
+          <a:p>
+            <a:pPr algn="ctr"/>
+          </a:p>
+        </p:txBody>
+      </p:sp>
+      <p:sp>
+        <p:nvSpPr>
+          <p:cNvPr id="8" name="Rectangle 7"/>
+          <p:cNvSpPr/>
+          <p:nvPr/>
+        </p:nvSpPr>
+        <p:spPr>
+          <a:xfrm>
+            <a:off x="320040" y="1188720"/>
+            <a:ext cx="5486400" cy="54864"/>
+          </a:xfrm>
+          <a:prstGeom prst="rect">
+            <a:avLst/>
+          </a:prstGeom>
+          <a:solidFill>
+            <a:srgbClr val="FF9F1C"/>
+          </a:solidFill>
+          <a:ln>
+            <a:noFill/>
+          </a:ln>
+        </p:spPr>
+        <p:style>
+          <a:lnRef idx="1">
+            <a:schemeClr val="accent1"/>
+          </a:lnRef>
+          <a:fillRef idx="3">
+            <a:schemeClr val="accent1"/>
+          </a:fillRef>
+          <a:effectRef idx="2">
+            <a:schemeClr val="accent1"/>
+          </a:effectRef>
+          <a:fontRef idx="minor">
+            <a:schemeClr val="lt1"/>
+          </a:fontRef>
+        </p:style>
+        <p:txBody>
+          <a:bodyPr rtlCol="0" anchor="ctr"/>
+          <a:lstStyle/>
+          <a:p>
+            <a:pPr algn="ctr"/>
+          </a:p>
+        </p:txBody>
+      </p:sp>
+      <p:sp>
+        <p:nvSpPr>
+          <p:cNvPr id="9" name="TextBox 8"/>
+          <p:cNvSpPr txBox="1"/>
+          <p:nvPr/>
+        </p:nvSpPr>
+        <p:spPr>
+          <a:xfrm>
+            <a:off x="457200" y="1298448"/>
+            <a:ext cx="5212080" cy="365760"/>
+          </a:xfrm>
+          <a:prstGeom prst="rect">
+            <a:avLst/>
+          </a:prstGeom>
+          <a:noFill/>
+        </p:spPr>
+        <p:txBody>
+          <a:bodyPr wrap="square">
+            <a:spAutoFit/>
+          </a:bodyPr>
+          <a:lstStyle/>
+          <a:p>
+            <a:pPr algn="l"/>
+            <a:r>
+              <a:rPr sz="1200" b="1" i="0">
+                <a:solidFill>
+                  <a:srgbClr val="FF9F1C"/>
+                </a:solidFill>
+              </a:rPr>
+              <a:t>Building Height Problem — Both Scenes</a:t>
+            </a:r>
+          </a:p>
+        </p:txBody>
+      </p:sp>
+      <p:sp>
+        <p:nvSpPr>
+          <p:cNvPr id="10" name="TextBox 9"/>
+          <p:cNvSpPr txBox="1"/>
+          <p:nvPr/>
+        </p:nvSpPr>
+        <p:spPr>
+          <a:xfrm>
+            <a:off x="457200" y="1755648"/>
+            <a:ext cx="1554480" cy="347472"/>
+          </a:xfrm>
+          <a:prstGeom prst="rect">
+            <a:avLst/>
+          </a:prstGeom>
+          <a:noFill/>
+        </p:spPr>
+        <p:txBody>
+          <a:bodyPr wrap="square">
+            <a:spAutoFit/>
+          </a:bodyPr>
+          <a:lstStyle/>
+          <a:p>
+            <a:pPr algn="l"/>
+            <a:r>
+              <a:rPr sz="950" b="1" i="0">
+                <a:solidFill>
+                  <a:srgbClr val="90E0EF"/>
+                </a:solidFill>
+              </a:rPr>
+              <a:t>OSM height tag</a:t>
+            </a:r>
+          </a:p>
+        </p:txBody>
+      </p:sp>
+      <p:sp>
+        <p:nvSpPr>
+          <p:cNvPr id="11" name="TextBox 10"/>
+          <p:cNvSpPr txBox="1"/>
+          <p:nvPr/>
+        </p:nvSpPr>
+        <p:spPr>
+          <a:xfrm>
+            <a:off x="2011680" y="1755648"/>
+            <a:ext cx="2103120" cy="347472"/>
+          </a:xfrm>
+          <a:prstGeom prst="rect">
+            <a:avLst/>
+          </a:prstGeom>
+          <a:noFill/>
+        </p:spPr>
+        <p:txBody>
+          <a:bodyPr wrap="square">
+            <a:spAutoFit/>
+          </a:bodyPr>
+          <a:lstStyle/>
+          <a:p>
+            <a:pPr algn="l"/>
+            <a:r>
+              <a:rPr sz="950" b="0" i="0">
+                <a:solidFill>
+                  <a:srgbClr val="CAD3DF"/>
+                </a:solidFill>
+              </a:rPr>
+              <a:t>Only ~30% of buildings have it</a:t>
+            </a:r>
+          </a:p>
+        </p:txBody>
+      </p:sp>
+      <p:sp>
+        <p:nvSpPr>
+          <p:cNvPr id="12" name="TextBox 11"/>
+          <p:cNvSpPr txBox="1"/>
+          <p:nvPr/>
+        </p:nvSpPr>
+        <p:spPr>
+          <a:xfrm>
+            <a:off x="4114800" y="1755648"/>
+            <a:ext cx="1554480" cy="347472"/>
+          </a:xfrm>
+          <a:prstGeom prst="rect">
+            <a:avLst/>
+          </a:prstGeom>
+          <a:noFill/>
+        </p:spPr>
+        <p:txBody>
+          <a:bodyPr wrap="square">
+            <a:spAutoFit/>
+          </a:bodyPr>
+          <a:lstStyle/>
+          <a:p>
+            <a:pPr algn="l"/>
+            <a:r>
+              <a:rPr sz="950" b="0" i="0">
+                <a:solidFill>
+                  <a:srgbClr val="FF4D6D"/>
+                </a:solidFill>
+              </a:rPr>
+              <a:t>70% use estimate</a:t>
+            </a:r>
+          </a:p>
+        </p:txBody>
+      </p:sp>
+      <p:sp>
+        <p:nvSpPr>
+          <p:cNvPr id="13" name="TextBox 12"/>
+          <p:cNvSpPr txBox="1"/>
+          <p:nvPr/>
+        </p:nvSpPr>
+        <p:spPr>
+          <a:xfrm>
+            <a:off x="457200" y="2139696"/>
+            <a:ext cx="1554480" cy="347472"/>
+          </a:xfrm>
+          <a:prstGeom prst="rect">
+            <a:avLst/>
+          </a:prstGeom>
+          <a:noFill/>
+        </p:spPr>
+        <p:txBody>
+          <a:bodyPr wrap="square">
+            <a:spAutoFit/>
+          </a:bodyPr>
+          <a:lstStyle/>
+          <a:p>
+            <a:pPr algn="l"/>
+            <a:r>
+              <a:rPr sz="950" b="1" i="0">
+                <a:solidFill>
+                  <a:srgbClr val="90E0EF"/>
+                </a:solidFill>
+              </a:rPr>
+              <a:t>building:levels tag</a:t>
+            </a:r>
+          </a:p>
+        </p:txBody>
+      </p:sp>
+      <p:sp>
+        <p:nvSpPr>
+          <p:cNvPr id="14" name="TextBox 13"/>
+          <p:cNvSpPr txBox="1"/>
+          <p:nvPr/>
+        </p:nvSpPr>
+        <p:spPr>
+          <a:xfrm>
+            <a:off x="2011680" y="2139696"/>
+            <a:ext cx="2103120" cy="347472"/>
+          </a:xfrm>
+          <a:prstGeom prst="rect">
+            <a:avLst/>
+          </a:prstGeom>
+          <a:noFill/>
+        </p:spPr>
+        <p:txBody>
+          <a:bodyPr wrap="square">
+            <a:spAutoFit/>
+          </a:bodyPr>
+          <a:lstStyle/>
+          <a:p>
+            <a:pPr algn="l"/>
+            <a:r>
+              <a:rPr sz="950" b="0" i="0">
+                <a:solidFill>
+                  <a:srgbClr val="CAD3DF"/>
+                </a:solidFill>
+              </a:rPr>
+              <a:t>height = levels × 3 m</a:t>
+            </a:r>
+          </a:p>
+        </p:txBody>
+      </p:sp>
+      <p:sp>
+        <p:nvSpPr>
+          <p:cNvPr id="15" name="TextBox 14"/>
+          <p:cNvSpPr txBox="1"/>
+          <p:nvPr/>
+        </p:nvSpPr>
+        <p:spPr>
+          <a:xfrm>
+            <a:off x="4114800" y="2139696"/>
+            <a:ext cx="1554480" cy="347472"/>
+          </a:xfrm>
+          <a:prstGeom prst="rect">
+            <a:avLst/>
+          </a:prstGeom>
+          <a:noFill/>
+        </p:spPr>
+        <p:txBody>
+          <a:bodyPr wrap="square">
+            <a:spAutoFit/>
+          </a:bodyPr>
+          <a:lstStyle/>
+          <a:p>
+            <a:pPr algn="l"/>
+            <a:r>
+              <a:rPr sz="950" b="0" i="0">
+                <a:solidFill>
+                  <a:srgbClr val="FF4D6D"/>
+                </a:solidFill>
+              </a:rPr>
+              <a:t>Wrong for mixed-use</a:t>
+            </a:r>
+          </a:p>
+        </p:txBody>
+      </p:sp>
+      <p:sp>
+        <p:nvSpPr>
+          <p:cNvPr id="16" name="TextBox 15"/>
+          <p:cNvSpPr txBox="1"/>
+          <p:nvPr/>
+        </p:nvSpPr>
+        <p:spPr>
+          <a:xfrm>
+            <a:off x="457200" y="2523744"/>
+            <a:ext cx="1554480" cy="347472"/>
+          </a:xfrm>
+          <a:prstGeom prst="rect">
+            <a:avLst/>
+          </a:prstGeom>
+          <a:noFill/>
+        </p:spPr>
+        <p:txBody>
+          <a:bodyPr wrap="square">
+            <a:spAutoFit/>
+          </a:bodyPr>
+          <a:lstStyle/>
+          <a:p>
+            <a:pPr algn="l"/>
+            <a:r>
+              <a:rPr sz="950" b="1" i="0">
+                <a:solidFill>
+                  <a:srgbClr val="90E0EF"/>
+                </a:solidFill>
+              </a:rPr>
+              <a:t>No tag</a:t>
+            </a:r>
+          </a:p>
+        </p:txBody>
+      </p:sp>
+      <p:sp>
+        <p:nvSpPr>
+          <p:cNvPr id="17" name="TextBox 16"/>
+          <p:cNvSpPr txBox="1"/>
+          <p:nvPr/>
+        </p:nvSpPr>
+        <p:spPr>
+          <a:xfrm>
+            <a:off x="2011680" y="2523744"/>
+            <a:ext cx="2103120" cy="347472"/>
+          </a:xfrm>
+          <a:prstGeom prst="rect">
+            <a:avLst/>
+          </a:prstGeom>
+          <a:noFill/>
+        </p:spPr>
+        <p:txBody>
+          <a:bodyPr wrap="square">
+            <a:spAutoFit/>
+          </a:bodyPr>
+          <a:lstStyle/>
+          <a:p>
+            <a:pPr algn="l"/>
+            <a:r>
+              <a:rPr sz="950" b="0" i="0">
+                <a:solidFill>
+                  <a:srgbClr val="CAD3DF"/>
+                </a:solidFill>
+              </a:rPr>
+              <a:t>Default 8 m applied</a:t>
+            </a:r>
+          </a:p>
+        </p:txBody>
+      </p:sp>
+      <p:sp>
+        <p:nvSpPr>
+          <p:cNvPr id="18" name="TextBox 17"/>
+          <p:cNvSpPr txBox="1"/>
+          <p:nvPr/>
+        </p:nvSpPr>
+        <p:spPr>
+          <a:xfrm>
+            <a:off x="4114800" y="2523744"/>
+            <a:ext cx="1554480" cy="347472"/>
+          </a:xfrm>
+          <a:prstGeom prst="rect">
+            <a:avLst/>
+          </a:prstGeom>
+          <a:noFill/>
+        </p:spPr>
+        <p:txBody>
+          <a:bodyPr wrap="square">
+            <a:spAutoFit/>
+          </a:bodyPr>
+          <a:lstStyle/>
+          <a:p>
+            <a:pPr algn="l"/>
+            <a:r>
+              <a:rPr sz="950" b="0" i="0">
+                <a:solidFill>
+                  <a:srgbClr val="FF4D6D"/>
+                </a:solidFill>
+              </a:rPr>
+              <a:t>Underestimates tall buildings</a:t>
+            </a:r>
+          </a:p>
+        </p:txBody>
+      </p:sp>
+      <p:sp>
+        <p:nvSpPr>
+          <p:cNvPr id="19" name="TextBox 18"/>
+          <p:cNvSpPr txBox="1"/>
+          <p:nvPr/>
+        </p:nvSpPr>
+        <p:spPr>
+          <a:xfrm>
+            <a:off x="457200" y="2907792"/>
+            <a:ext cx="1554480" cy="347472"/>
+          </a:xfrm>
+          <a:prstGeom prst="rect">
+            <a:avLst/>
+          </a:prstGeom>
+          <a:noFill/>
+        </p:spPr>
+        <p:txBody>
+          <a:bodyPr wrap="square">
+            <a:spAutoFit/>
+          </a:bodyPr>
+          <a:lstStyle/>
+          <a:p>
+            <a:pPr algn="l"/>
+            <a:r>
+              <a:rPr sz="950" b="1" i="0">
+                <a:solidFill>
+                  <a:srgbClr val="90E0EF"/>
+                </a:solidFill>
+              </a:rPr>
+              <a:t>Industrial/warehouse</a:t>
+            </a:r>
+          </a:p>
+        </p:txBody>
+      </p:sp>
+      <p:sp>
+        <p:nvSpPr>
+          <p:cNvPr id="20" name="TextBox 19"/>
+          <p:cNvSpPr txBox="1"/>
+          <p:nvPr/>
+        </p:nvSpPr>
+        <p:spPr>
+          <a:xfrm>
+            <a:off x="2011680" y="2907792"/>
+            <a:ext cx="2103120" cy="347472"/>
+          </a:xfrm>
+          <a:prstGeom prst="rect">
+            <a:avLst/>
+          </a:prstGeom>
+          <a:noFill/>
+        </p:spPr>
+        <p:txBody>
+          <a:bodyPr wrap="square">
+            <a:spAutoFit/>
+          </a:bodyPr>
+          <a:lstStyle/>
+          <a:p>
+            <a:pPr algn="l"/>
+            <a:r>
+              <a:rPr sz="950" b="0" i="0">
+                <a:solidFill>
+                  <a:srgbClr val="CAD3DF"/>
+                </a:solidFill>
+              </a:rPr>
+              <a:t>Tagged as residential</a:t>
+            </a:r>
+          </a:p>
+        </p:txBody>
+      </p:sp>
+      <p:sp>
+        <p:nvSpPr>
+          <p:cNvPr id="21" name="TextBox 20"/>
+          <p:cNvSpPr txBox="1"/>
+          <p:nvPr/>
+        </p:nvSpPr>
+        <p:spPr>
+          <a:xfrm>
+            <a:off x="4114800" y="2907792"/>
+            <a:ext cx="1554480" cy="347472"/>
+          </a:xfrm>
+          <a:prstGeom prst="rect">
+            <a:avLst/>
+          </a:prstGeom>
+          <a:noFill/>
+        </p:spPr>
+        <p:txBody>
+          <a:bodyPr wrap="square">
+            <a:spAutoFit/>
+          </a:bodyPr>
+          <a:lstStyle/>
+          <a:p>
+            <a:pPr algn="l"/>
+            <a:r>
+              <a:rPr sz="950" b="0" i="0">
+                <a:solidFill>
+                  <a:srgbClr val="FF4D6D"/>
+                </a:solidFill>
+              </a:rPr>
+              <a:t>Wrong shadowing</a:t>
+            </a:r>
+          </a:p>
+        </p:txBody>
+      </p:sp>
+      <p:sp>
+        <p:nvSpPr>
+          <p:cNvPr id="22" name="TextBox 21"/>
+          <p:cNvSpPr txBox="1"/>
+          <p:nvPr/>
+        </p:nvSpPr>
+        <p:spPr>
+          <a:xfrm>
+            <a:off x="457200" y="3337560"/>
+            <a:ext cx="5212080" cy="320040"/>
+          </a:xfrm>
+          <a:prstGeom prst="rect">
+            <a:avLst/>
+          </a:prstGeom>
+          <a:noFill/>
+        </p:spPr>
+        <p:txBody>
+          <a:bodyPr wrap="square">
+            <a:spAutoFit/>
+          </a:bodyPr>
+          <a:lstStyle/>
+          <a:p>
+            <a:pPr algn="l"/>
+            <a:r>
+              <a:rPr sz="1000" b="0" i="1">
+                <a:solidFill>
+                  <a:srgbClr val="FF9F1C"/>
+                </a:solidFill>
+              </a:rPr>
+              <a:t>→ Wrong building heights = wrong diffraction angles = wrong path loss</a:t>
+            </a:r>
+          </a:p>
+        </p:txBody>
+      </p:sp>
+      <p:sp>
+        <p:nvSpPr>
+          <p:cNvPr id="23" name="Rectangle 22"/>
+          <p:cNvSpPr/>
+          <p:nvPr/>
+        </p:nvSpPr>
+        <p:spPr>
+          <a:xfrm>
+            <a:off x="320040" y="3931920"/>
+            <a:ext cx="5394960" cy="2560320"/>
+          </a:xfrm>
+          <a:prstGeom prst="rect">
+            <a:avLst/>
+          </a:prstGeom>
+          <a:solidFill>
+            <a:srgbClr val="112A40"/>
+          </a:solidFill>
+          <a:ln>
+            <a:noFill/>
+          </a:ln>
+        </p:spPr>
+        <p:style>
+          <a:lnRef idx="1">
+            <a:schemeClr val="accent1"/>
+          </a:lnRef>
+          <a:fillRef idx="3">
+            <a:schemeClr val="accent1"/>
+          </a:fillRef>
+          <a:effectRef idx="2">
+            <a:schemeClr val="accent1"/>
+          </a:effectRef>
+          <a:fontRef idx="minor">
+            <a:schemeClr val="lt1"/>
+          </a:fontRef>
+        </p:style>
+        <p:txBody>
+          <a:bodyPr rtlCol="0" anchor="ctr"/>
+          <a:lstStyle/>
+          <a:p>
+            <a:pPr algn="ctr"/>
+          </a:p>
+        </p:txBody>
+      </p:sp>
+      <p:sp>
+        <p:nvSpPr>
+          <p:cNvPr id="24" name="Rectangle 23"/>
+          <p:cNvSpPr/>
+          <p:nvPr/>
+        </p:nvSpPr>
+        <p:spPr>
+          <a:xfrm>
+            <a:off x="320040" y="3931920"/>
+            <a:ext cx="5394960" cy="54864"/>
+          </a:xfrm>
+          <a:prstGeom prst="rect">
+            <a:avLst/>
+          </a:prstGeom>
+          <a:solidFill>
+            <a:srgbClr val="FF4D6D"/>
+          </a:solidFill>
+          <a:ln>
+            <a:noFill/>
+          </a:ln>
+        </p:spPr>
+        <p:style>
+          <a:lnRef idx="1">
+            <a:schemeClr val="accent1"/>
+          </a:lnRef>
+          <a:fillRef idx="3">
+            <a:schemeClr val="accent1"/>
+          </a:fillRef>
+          <a:effectRef idx="2">
+            <a:schemeClr val="accent1"/>
+          </a:effectRef>
+          <a:fontRef idx="minor">
+            <a:schemeClr val="lt1"/>
+          </a:fontRef>
+        </p:style>
+        <p:txBody>
+          <a:bodyPr rtlCol="0" anchor="ctr"/>
+          <a:lstStyle/>
+          <a:p>
+            <a:pPr algn="ctr"/>
+          </a:p>
+        </p:txBody>
+      </p:sp>
+      <p:sp>
+        <p:nvSpPr>
+          <p:cNvPr id="25" name="TextBox 24"/>
+          <p:cNvSpPr txBox="1"/>
+          <p:nvPr/>
+        </p:nvSpPr>
+        <p:spPr>
+          <a:xfrm>
+            <a:off x="457200" y="4041648"/>
+            <a:ext cx="5120640" cy="365760"/>
+          </a:xfrm>
+          <a:prstGeom prst="rect">
+            <a:avLst/>
+          </a:prstGeom>
+          <a:noFill/>
+        </p:spPr>
+        <p:txBody>
+          <a:bodyPr wrap="square">
+            <a:spAutoFit/>
+          </a:bodyPr>
+          <a:lstStyle/>
+          <a:p>
+            <a:pPr algn="l"/>
+            <a:r>
+              <a:rPr sz="1200" b="1" i="0">
+                <a:solidFill>
+                  <a:srgbClr val="FF4D6D"/>
+                </a:solidFill>
+              </a:rPr>
+              <a:t>Flat Terrain Errors (Sionna v1)</a:t>
+            </a:r>
+          </a:p>
+        </p:txBody>
+      </p:sp>
+      <p:sp>
+        <p:nvSpPr>
+          <p:cNvPr id="26" name="TextBox 25"/>
+          <p:cNvSpPr txBox="1"/>
+          <p:nvPr/>
+        </p:nvSpPr>
+        <p:spPr>
+          <a:xfrm>
+            <a:off x="457200" y="4498848"/>
+            <a:ext cx="1371600" cy="347472"/>
+          </a:xfrm>
+          <a:prstGeom prst="rect">
+            <a:avLst/>
+          </a:prstGeom>
+          <a:noFill/>
+        </p:spPr>
+        <p:txBody>
+          <a:bodyPr wrap="square">
+            <a:spAutoFit/>
+          </a:bodyPr>
+          <a:lstStyle/>
+          <a:p>
+            <a:pPr algn="l"/>
+            <a:r>
+              <a:rPr sz="950" b="1" i="0">
+                <a:solidFill>
+                  <a:srgbClr val="90E0EF"/>
+                </a:solidFill>
+              </a:rPr>
+              <a:t>Terrain missing</a:t>
+            </a:r>
+          </a:p>
+        </p:txBody>
+      </p:sp>
+      <p:sp>
+        <p:nvSpPr>
+          <p:cNvPr id="27" name="TextBox 26"/>
+          <p:cNvSpPr txBox="1"/>
+          <p:nvPr/>
+        </p:nvSpPr>
+        <p:spPr>
+          <a:xfrm>
+            <a:off x="1828800" y="4498848"/>
+            <a:ext cx="2011680" cy="347472"/>
+          </a:xfrm>
+          <a:prstGeom prst="rect">
+            <a:avLst/>
+          </a:prstGeom>
+          <a:noFill/>
+        </p:spPr>
+        <p:txBody>
+          <a:bodyPr wrap="square">
+            <a:spAutoFit/>
+          </a:bodyPr>
+          <a:lstStyle/>
+          <a:p>
+            <a:pPr algn="l"/>
+            <a:r>
+              <a:rPr sz="950" b="0" i="0">
+                <a:solidFill>
+                  <a:srgbClr val="CAD3DF"/>
+                </a:solidFill>
+              </a:rPr>
+              <a:t>All buildings on z=0</a:t>
+            </a:r>
+          </a:p>
+        </p:txBody>
+      </p:sp>
+      <p:sp>
+        <p:nvSpPr>
+          <p:cNvPr id="28" name="TextBox 27"/>
+          <p:cNvSpPr txBox="1"/>
+          <p:nvPr/>
+        </p:nvSpPr>
+        <p:spPr>
+          <a:xfrm>
+            <a:off x="3840480" y="4498848"/>
+            <a:ext cx="1737360" cy="347472"/>
+          </a:xfrm>
+          <a:prstGeom prst="rect">
+            <a:avLst/>
+          </a:prstGeom>
+          <a:noFill/>
+        </p:spPr>
+        <p:txBody>
+          <a:bodyPr wrap="square">
+            <a:spAutoFit/>
+          </a:bodyPr>
+          <a:lstStyle/>
+          <a:p>
+            <a:pPr algn="l"/>
+            <a:r>
+              <a:rPr sz="950" b="0" i="0">
+                <a:solidFill>
+                  <a:srgbClr val="FF4D6D"/>
+                </a:solidFill>
+              </a:rPr>
+              <a:t>+8–15 dB overestimate 300–1500 m</a:t>
+            </a:r>
+          </a:p>
+        </p:txBody>
+      </p:sp>
+      <p:sp>
+        <p:nvSpPr>
+          <p:cNvPr id="29" name="TextBox 28"/>
+          <p:cNvSpPr txBox="1"/>
+          <p:nvPr/>
+        </p:nvSpPr>
+        <p:spPr>
+          <a:xfrm>
+            <a:off x="457200" y="4882896"/>
+            <a:ext cx="1371600" cy="347472"/>
+          </a:xfrm>
+          <a:prstGeom prst="rect">
+            <a:avLst/>
+          </a:prstGeom>
+          <a:noFill/>
+        </p:spPr>
+        <p:txBody>
+          <a:bodyPr wrap="square">
+            <a:spAutoFit/>
+          </a:bodyPr>
+          <a:lstStyle/>
+          <a:p>
+            <a:pPr algn="l"/>
+            <a:r>
+              <a:rPr sz="950" b="1" i="0">
+                <a:solidFill>
+                  <a:srgbClr val="90E0EF"/>
+                </a:solidFill>
+              </a:rPr>
+              <a:t>Ground reflection</a:t>
+            </a:r>
+          </a:p>
+        </p:txBody>
+      </p:sp>
+      <p:sp>
+        <p:nvSpPr>
+          <p:cNvPr id="30" name="TextBox 29"/>
+          <p:cNvSpPr txBox="1"/>
+          <p:nvPr/>
+        </p:nvSpPr>
+        <p:spPr>
+          <a:xfrm>
+            <a:off x="1828800" y="4882896"/>
+            <a:ext cx="2011680" cy="347472"/>
+          </a:xfrm>
+          <a:prstGeom prst="rect">
+            <a:avLst/>
+          </a:prstGeom>
+          <a:noFill/>
+        </p:spPr>
+        <p:txBody>
+          <a:bodyPr wrap="square">
+            <a:spAutoFit/>
+          </a:bodyPr>
+          <a:lstStyle/>
+          <a:p>
+            <a:pPr algn="l"/>
+            <a:r>
+              <a:rPr sz="950" b="0" i="0">
+                <a:solidFill>
+                  <a:srgbClr val="CAD3DF"/>
+                </a:solidFill>
+              </a:rPr>
+              <a:t>Flat plane — wrong angle</a:t>
+            </a:r>
+          </a:p>
+        </p:txBody>
+      </p:sp>
+      <p:sp>
+        <p:nvSpPr>
+          <p:cNvPr id="31" name="TextBox 30"/>
+          <p:cNvSpPr txBox="1"/>
+          <p:nvPr/>
+        </p:nvSpPr>
+        <p:spPr>
+          <a:xfrm>
+            <a:off x="3840480" y="4882896"/>
+            <a:ext cx="1737360" cy="347472"/>
+          </a:xfrm>
+          <a:prstGeom prst="rect">
+            <a:avLst/>
+          </a:prstGeom>
+          <a:noFill/>
+        </p:spPr>
+        <p:txBody>
+          <a:bodyPr wrap="square">
+            <a:spAutoFit/>
+          </a:bodyPr>
+          <a:lstStyle/>
+          <a:p>
+            <a:pPr algn="l"/>
+            <a:r>
+              <a:rPr sz="950" b="0" i="0">
+                <a:solidFill>
+                  <a:srgbClr val="FF4D6D"/>
+                </a:solidFill>
+              </a:rPr>
+              <a:t>~3–5 dB additional bias</a:t>
+            </a:r>
+          </a:p>
+        </p:txBody>
+      </p:sp>
+      <p:sp>
+        <p:nvSpPr>
+          <p:cNvPr id="32" name="TextBox 31"/>
+          <p:cNvSpPr txBox="1"/>
+          <p:nvPr/>
+        </p:nvSpPr>
+        <p:spPr>
+          <a:xfrm>
+            <a:off x="457200" y="5266944"/>
+            <a:ext cx="1371600" cy="347472"/>
+          </a:xfrm>
+          <a:prstGeom prst="rect">
+            <a:avLst/>
+          </a:prstGeom>
+          <a:noFill/>
+        </p:spPr>
+        <p:txBody>
+          <a:bodyPr wrap="square">
+            <a:spAutoFit/>
+          </a:bodyPr>
+          <a:lstStyle/>
+          <a:p>
+            <a:pPr algn="l"/>
+            <a:r>
+              <a:rPr sz="950" b="1" i="0">
+                <a:solidFill>
+                  <a:srgbClr val="90E0EF"/>
+                </a:solidFill>
+              </a:rPr>
+              <a:t>RX height</a:t>
+            </a:r>
+          </a:p>
+        </p:txBody>
+      </p:sp>
+      <p:sp>
+        <p:nvSpPr>
+          <p:cNvPr id="33" name="TextBox 32"/>
+          <p:cNvSpPr txBox="1"/>
+          <p:nvPr/>
+        </p:nvSpPr>
+        <p:spPr>
+          <a:xfrm>
+            <a:off x="1828800" y="5266944"/>
+            <a:ext cx="2011680" cy="347472"/>
+          </a:xfrm>
+          <a:prstGeom prst="rect">
+            <a:avLst/>
+          </a:prstGeom>
+          <a:noFill/>
+        </p:spPr>
+        <p:txBody>
+          <a:bodyPr wrap="square">
+            <a:spAutoFit/>
+          </a:bodyPr>
+          <a:lstStyle/>
+          <a:p>
+            <a:pPr algn="l"/>
+            <a:r>
+              <a:rPr sz="950" b="0" i="0">
+                <a:solidFill>
+                  <a:srgbClr val="CAD3DF"/>
+                </a:solidFill>
+              </a:rPr>
+              <a:t>1.5 m above z=0, not real ground</a:t>
+            </a:r>
+          </a:p>
+        </p:txBody>
+      </p:sp>
+      <p:sp>
+        <p:nvSpPr>
+          <p:cNvPr id="34" name="TextBox 33"/>
+          <p:cNvSpPr txBox="1"/>
+          <p:nvPr/>
+        </p:nvSpPr>
+        <p:spPr>
+          <a:xfrm>
+            <a:off x="3840480" y="5266944"/>
+            <a:ext cx="1737360" cy="347472"/>
+          </a:xfrm>
+          <a:prstGeom prst="rect">
+            <a:avLst/>
+          </a:prstGeom>
+          <a:noFill/>
+        </p:spPr>
+        <p:txBody>
+          <a:bodyPr wrap="square">
+            <a:spAutoFit/>
+          </a:bodyPr>
+          <a:lstStyle/>
+          <a:p>
+            <a:pPr algn="l"/>
+            <a:r>
+              <a:rPr sz="950" b="0" i="0">
+                <a:solidFill>
+                  <a:srgbClr val="FF4D6D"/>
+                </a:solidFill>
+              </a:rPr>
+              <a:t>Some RX inside terrain</a:t>
+            </a:r>
+          </a:p>
+        </p:txBody>
+      </p:sp>
+      <p:sp>
+        <p:nvSpPr>
+          <p:cNvPr id="35" name="Rectangle 34"/>
+          <p:cNvSpPr/>
+          <p:nvPr/>
+        </p:nvSpPr>
+        <p:spPr>
+          <a:xfrm>
+            <a:off x="5943600" y="1188720"/>
+            <a:ext cx="5943600" cy="2606040"/>
+          </a:xfrm>
+          <a:prstGeom prst="rect">
+            <a:avLst/>
+          </a:prstGeom>
+          <a:solidFill>
+            <a:srgbClr val="112A40"/>
+          </a:solidFill>
+          <a:ln>
+            <a:noFill/>
+          </a:ln>
+        </p:spPr>
+        <p:style>
+          <a:lnRef idx="1">
+            <a:schemeClr val="accent1"/>
+          </a:lnRef>
+          <a:fillRef idx="3">
+            <a:schemeClr val="accent1"/>
+          </a:fillRef>
+          <a:effectRef idx="2">
+            <a:schemeClr val="accent1"/>
+          </a:effectRef>
+          <a:fontRef idx="minor">
+            <a:schemeClr val="lt1"/>
+          </a:fontRef>
+        </p:style>
+        <p:txBody>
+          <a:bodyPr rtlCol="0" anchor="ctr"/>
+          <a:lstStyle/>
+          <a:p>
+            <a:pPr algn="ctr"/>
+          </a:p>
+        </p:txBody>
+      </p:sp>
+      <p:sp>
+        <p:nvSpPr>
+          <p:cNvPr id="36" name="Rectangle 35"/>
+          <p:cNvSpPr/>
+          <p:nvPr/>
+        </p:nvSpPr>
+        <p:spPr>
+          <a:xfrm>
+            <a:off x="5943600" y="1188720"/>
+            <a:ext cx="5943600" cy="54864"/>
+          </a:xfrm>
+          <a:prstGeom prst="rect">
+            <a:avLst/>
+          </a:prstGeom>
+          <a:solidFill>
+            <a:srgbClr val="2DCB7F"/>
+          </a:solidFill>
+          <a:ln>
+            <a:noFill/>
+          </a:ln>
+        </p:spPr>
+        <p:style>
+          <a:lnRef idx="1">
+            <a:schemeClr val="accent1"/>
+          </a:lnRef>
+          <a:fillRef idx="3">
+            <a:schemeClr val="accent1"/>
+          </a:fillRef>
+          <a:effectRef idx="2">
+            <a:schemeClr val="accent1"/>
+          </a:effectRef>
+          <a:fontRef idx="minor">
+            <a:schemeClr val="lt1"/>
+          </a:fontRef>
+        </p:style>
+        <p:txBody>
+          <a:bodyPr rtlCol="0" anchor="ctr"/>
+          <a:lstStyle/>
+          <a:p>
+            <a:pPr algn="ctr"/>
+          </a:p>
+        </p:txBody>
+      </p:sp>
+      <p:sp>
+        <p:nvSpPr>
+          <p:cNvPr id="37" name="TextBox 36"/>
+          <p:cNvSpPr txBox="1"/>
+          <p:nvPr/>
+        </p:nvSpPr>
+        <p:spPr>
+          <a:xfrm>
+            <a:off x="6080760" y="1298448"/>
+            <a:ext cx="5669280" cy="365760"/>
+          </a:xfrm>
+          <a:prstGeom prst="rect">
+            <a:avLst/>
+          </a:prstGeom>
+          <a:noFill/>
+        </p:spPr>
+        <p:txBody>
+          <a:bodyPr wrap="square">
+            <a:spAutoFit/>
+          </a:bodyPr>
+          <a:lstStyle/>
+          <a:p>
+            <a:pPr algn="l"/>
+            <a:r>
+              <a:rPr sz="1200" b="1" i="0">
+                <a:solidFill>
+                  <a:srgbClr val="2DCB7F"/>
+                </a:solidFill>
+              </a:rPr>
+              <a:t>DEM Terrain Errors (Sionna v2)</a:t>
+            </a:r>
+          </a:p>
+        </p:txBody>
+      </p:sp>
+      <p:sp>
+        <p:nvSpPr>
+          <p:cNvPr id="38" name="TextBox 37"/>
+          <p:cNvSpPr txBox="1"/>
+          <p:nvPr/>
+        </p:nvSpPr>
+        <p:spPr>
+          <a:xfrm>
+            <a:off x="6080760" y="1755648"/>
+            <a:ext cx="1554480" cy="347472"/>
+          </a:xfrm>
+          <a:prstGeom prst="rect">
+            <a:avLst/>
+          </a:prstGeom>
+          <a:noFill/>
+        </p:spPr>
+        <p:txBody>
+          <a:bodyPr wrap="square">
+            <a:spAutoFit/>
+          </a:bodyPr>
+          <a:lstStyle/>
+          <a:p>
+            <a:pPr algn="l"/>
+            <a:r>
+              <a:rPr sz="950" b="1" i="0">
+                <a:solidFill>
+                  <a:srgbClr val="90E0EF"/>
+                </a:solidFill>
+              </a:rPr>
+              <a:t>Building heights</a:t>
+            </a:r>
+          </a:p>
+        </p:txBody>
+      </p:sp>
+      <p:sp>
+        <p:nvSpPr>
+          <p:cNvPr id="39" name="TextBox 38"/>
+          <p:cNvSpPr txBox="1"/>
+          <p:nvPr/>
+        </p:nvSpPr>
+        <p:spPr>
+          <a:xfrm>
+            <a:off x="7635240" y="1755648"/>
+            <a:ext cx="2560320" cy="347472"/>
+          </a:xfrm>
+          <a:prstGeom prst="rect">
+            <a:avLst/>
+          </a:prstGeom>
+          <a:noFill/>
+        </p:spPr>
+        <p:txBody>
+          <a:bodyPr wrap="square">
+            <a:spAutoFit/>
+          </a:bodyPr>
+          <a:lstStyle/>
+          <a:p>
+            <a:pPr algn="l"/>
+            <a:r>
+              <a:rPr sz="950" b="0" i="0">
+                <a:solidFill>
+                  <a:srgbClr val="CAD3DF"/>
+                </a:solidFill>
+              </a:rPr>
+              <a:t>DEM fixes ground Z, not building tops</a:t>
+            </a:r>
+          </a:p>
+        </p:txBody>
+      </p:sp>
+      <p:sp>
+        <p:nvSpPr>
+          <p:cNvPr id="40" name="TextBox 39"/>
+          <p:cNvSpPr txBox="1"/>
+          <p:nvPr/>
+        </p:nvSpPr>
+        <p:spPr>
+          <a:xfrm>
+            <a:off x="10195560" y="1755648"/>
+            <a:ext cx="1554480" cy="347472"/>
+          </a:xfrm>
+          <a:prstGeom prst="rect">
+            <a:avLst/>
+          </a:prstGeom>
+          <a:noFill/>
+        </p:spPr>
+        <p:txBody>
+          <a:bodyPr wrap="square">
+            <a:spAutoFit/>
+          </a:bodyPr>
+          <a:lstStyle/>
+          <a:p>
+            <a:pPr algn="l"/>
+            <a:r>
+              <a:rPr sz="950" b="0" i="0">
+                <a:solidFill>
+                  <a:srgbClr val="FF9F1C"/>
+                </a:solidFill>
+              </a:rPr>
+              <a:t>Residual ±3–8 dB</a:t>
+            </a:r>
+          </a:p>
+        </p:txBody>
+      </p:sp>
+      <p:sp>
+        <p:nvSpPr>
+          <p:cNvPr id="41" name="TextBox 40"/>
+          <p:cNvSpPr txBox="1"/>
+          <p:nvPr/>
+        </p:nvSpPr>
+        <p:spPr>
+          <a:xfrm>
+            <a:off x="6080760" y="2139696"/>
+            <a:ext cx="1554480" cy="347472"/>
+          </a:xfrm>
+          <a:prstGeom prst="rect">
+            <a:avLst/>
+          </a:prstGeom>
+          <a:noFill/>
+        </p:spPr>
+        <p:txBody>
+          <a:bodyPr wrap="square">
+            <a:spAutoFit/>
+          </a:bodyPr>
+          <a:lstStyle/>
+          <a:p>
+            <a:pPr algn="l"/>
+            <a:r>
+              <a:rPr sz="950" b="1" i="0">
+                <a:solidFill>
+                  <a:srgbClr val="90E0EF"/>
+                </a:solidFill>
+              </a:rPr>
+              <a:t>DEM resolution</a:t>
+            </a:r>
+          </a:p>
+        </p:txBody>
+      </p:sp>
+      <p:sp>
+        <p:nvSpPr>
+          <p:cNvPr id="42" name="TextBox 41"/>
+          <p:cNvSpPr txBox="1"/>
+          <p:nvPr/>
+        </p:nvSpPr>
+        <p:spPr>
+          <a:xfrm>
+            <a:off x="7635240" y="2139696"/>
+            <a:ext cx="2560320" cy="347472"/>
+          </a:xfrm>
+          <a:prstGeom prst="rect">
+            <a:avLst/>
+          </a:prstGeom>
+          <a:noFill/>
+        </p:spPr>
+        <p:txBody>
+          <a:bodyPr wrap="square">
+            <a:spAutoFit/>
+          </a:bodyPr>
+          <a:lstStyle/>
+          <a:p>
+            <a:pPr algn="l"/>
+            <a:r>
+              <a:rPr sz="950" b="0" i="0">
+                <a:solidFill>
+                  <a:srgbClr val="CAD3DF"/>
+                </a:solidFill>
+              </a:rPr>
+              <a:t>2 m — small walls/hedges missed</a:t>
+            </a:r>
+          </a:p>
+        </p:txBody>
+      </p:sp>
+      <p:sp>
+        <p:nvSpPr>
+          <p:cNvPr id="43" name="TextBox 42"/>
+          <p:cNvSpPr txBox="1"/>
+          <p:nvPr/>
+        </p:nvSpPr>
+        <p:spPr>
+          <a:xfrm>
+            <a:off x="10195560" y="2139696"/>
+            <a:ext cx="1554480" cy="347472"/>
+          </a:xfrm>
+          <a:prstGeom prst="rect">
+            <a:avLst/>
+          </a:prstGeom>
+          <a:noFill/>
+        </p:spPr>
+        <p:txBody>
+          <a:bodyPr wrap="square">
+            <a:spAutoFit/>
+          </a:bodyPr>
+          <a:lstStyle/>
+          <a:p>
+            <a:pPr algn="l"/>
+            <a:r>
+              <a:rPr sz="950" b="0" i="0">
+                <a:solidFill>
+                  <a:srgbClr val="FF9F1C"/>
+                </a:solidFill>
+              </a:rPr>
+              <a:t>Minor</a:t>
+            </a:r>
+          </a:p>
+        </p:txBody>
+      </p:sp>
+      <p:sp>
+        <p:nvSpPr>
+          <p:cNvPr id="44" name="TextBox 43"/>
+          <p:cNvSpPr txBox="1"/>
+          <p:nvPr/>
+        </p:nvSpPr>
+        <p:spPr>
+          <a:xfrm>
+            <a:off x="6080760" y="2523744"/>
+            <a:ext cx="1554480" cy="347472"/>
+          </a:xfrm>
+          <a:prstGeom prst="rect">
+            <a:avLst/>
+          </a:prstGeom>
+          <a:noFill/>
+        </p:spPr>
+        <p:txBody>
+          <a:bodyPr wrap="square">
+            <a:spAutoFit/>
+          </a:bodyPr>
+          <a:lstStyle/>
+          <a:p>
+            <a:pPr algn="l"/>
+            <a:r>
+              <a:rPr sz="950" b="1" i="0">
+                <a:solidFill>
+                  <a:srgbClr val="90E0EF"/>
+                </a:solidFill>
+              </a:rPr>
+              <a:t>Roof geometry</a:t>
+            </a:r>
+          </a:p>
+        </p:txBody>
+      </p:sp>
+      <p:sp>
+        <p:nvSpPr>
+          <p:cNvPr id="45" name="TextBox 44"/>
+          <p:cNvSpPr txBox="1"/>
+          <p:nvPr/>
+        </p:nvSpPr>
+        <p:spPr>
+          <a:xfrm>
+            <a:off x="7635240" y="2523744"/>
+            <a:ext cx="2560320" cy="347472"/>
+          </a:xfrm>
+          <a:prstGeom prst="rect">
+            <a:avLst/>
+          </a:prstGeom>
+          <a:noFill/>
+        </p:spPr>
+        <p:txBody>
+          <a:bodyPr wrap="square">
+            <a:spAutoFit/>
+          </a:bodyPr>
+          <a:lstStyle/>
+          <a:p>
+            <a:pPr algn="l"/>
+            <a:r>
+              <a:rPr sz="950" b="0" i="0">
+                <a:solidFill>
+                  <a:srgbClr val="CAD3DF"/>
+                </a:solidFill>
+              </a:rPr>
+              <a:t>Flat-roof box — no pitched roofs</a:t>
+            </a:r>
+          </a:p>
+        </p:txBody>
+      </p:sp>
+      <p:sp>
+        <p:nvSpPr>
+          <p:cNvPr id="46" name="TextBox 45"/>
+          <p:cNvSpPr txBox="1"/>
+          <p:nvPr/>
+        </p:nvSpPr>
+        <p:spPr>
+          <a:xfrm>
+            <a:off x="10195560" y="2523744"/>
+            <a:ext cx="1554480" cy="347472"/>
+          </a:xfrm>
+          <a:prstGeom prst="rect">
+            <a:avLst/>
+          </a:prstGeom>
+          <a:noFill/>
+        </p:spPr>
+        <p:txBody>
+          <a:bodyPr wrap="square">
+            <a:spAutoFit/>
+          </a:bodyPr>
+          <a:lstStyle/>
+          <a:p>
+            <a:pPr algn="l"/>
+            <a:r>
+              <a:rPr sz="950" b="0" i="0">
+                <a:solidFill>
+                  <a:srgbClr val="FF9F1C"/>
+                </a:solidFill>
+              </a:rPr>
+              <a:t>Diffraction angle error</a:t>
+            </a:r>
+          </a:p>
+        </p:txBody>
+      </p:sp>
+      <p:sp>
+        <p:nvSpPr>
+          <p:cNvPr id="47" name="Rectangle 46"/>
+          <p:cNvSpPr/>
+          <p:nvPr/>
+        </p:nvSpPr>
+        <p:spPr>
+          <a:xfrm>
+            <a:off x="5943600" y="3931920"/>
+            <a:ext cx="5943600" cy="2560320"/>
+          </a:xfrm>
+          <a:prstGeom prst="rect">
+            <a:avLst/>
+          </a:prstGeom>
+          <a:solidFill>
+            <a:srgbClr val="112A40"/>
+          </a:solidFill>
+          <a:ln>
+            <a:noFill/>
+          </a:ln>
+        </p:spPr>
+        <p:style>
+          <a:lnRef idx="1">
+            <a:schemeClr val="accent1"/>
+          </a:lnRef>
+          <a:fillRef idx="3">
+            <a:schemeClr val="accent1"/>
+          </a:fillRef>
+          <a:effectRef idx="2">
+            <a:schemeClr val="accent1"/>
+          </a:effectRef>
+          <a:fontRef idx="minor">
+            <a:schemeClr val="lt1"/>
+          </a:fontRef>
+        </p:style>
+        <p:txBody>
+          <a:bodyPr rtlCol="0" anchor="ctr"/>
+          <a:lstStyle/>
+          <a:p>
+            <a:pPr algn="ctr"/>
+          </a:p>
+        </p:txBody>
+      </p:sp>
+      <p:sp>
+        <p:nvSpPr>
+          <p:cNvPr id="48" name="Rectangle 47"/>
+          <p:cNvSpPr/>
+          <p:nvPr/>
+        </p:nvSpPr>
+        <p:spPr>
+          <a:xfrm>
+            <a:off x="5943600" y="3931920"/>
+            <a:ext cx="5943600" cy="54864"/>
+          </a:xfrm>
+          <a:prstGeom prst="rect">
+            <a:avLst/>
+          </a:prstGeom>
+          <a:solidFill>
+            <a:srgbClr val="00B4D8"/>
+          </a:solidFill>
+          <a:ln>
+            <a:noFill/>
+          </a:ln>
+        </p:spPr>
+        <p:style>
+          <a:lnRef idx="1">
+            <a:schemeClr val="accent1"/>
+          </a:lnRef>
+          <a:fillRef idx="3">
+            <a:schemeClr val="accent1"/>
+          </a:fillRef>
+          <a:effectRef idx="2">
+            <a:schemeClr val="accent1"/>
+          </a:effectRef>
+          <a:fontRef idx="minor">
+            <a:schemeClr val="lt1"/>
+          </a:fontRef>
+        </p:style>
+        <p:txBody>
+          <a:bodyPr rtlCol="0" anchor="ctr"/>
+          <a:lstStyle/>
+          <a:p>
+            <a:pPr algn="ctr"/>
+          </a:p>
+        </p:txBody>
+      </p:sp>
+      <p:sp>
+        <p:nvSpPr>
+          <p:cNvPr id="49" name="TextBox 48"/>
+          <p:cNvSpPr txBox="1"/>
+          <p:nvPr/>
+        </p:nvSpPr>
+        <p:spPr>
+          <a:xfrm>
+            <a:off x="6080760" y="4041648"/>
+            <a:ext cx="5669280" cy="365760"/>
+          </a:xfrm>
+          <a:prstGeom prst="rect">
+            <a:avLst/>
+          </a:prstGeom>
+          <a:noFill/>
+        </p:spPr>
+        <p:txBody>
+          <a:bodyPr wrap="square">
+            <a:spAutoFit/>
+          </a:bodyPr>
+          <a:lstStyle/>
+          <a:p>
+            <a:pPr algn="l"/>
+            <a:r>
+              <a:rPr sz="1200" b="1" i="0">
+                <a:solidFill>
+                  <a:srgbClr val="00B4D8"/>
+                </a:solidFill>
+              </a:rPr>
+              <a:t>Key Takeaway</a:t>
+            </a:r>
+          </a:p>
+        </p:txBody>
+      </p:sp>
+      <p:sp>
+        <p:nvSpPr>
+          <p:cNvPr id="50" name="TextBox 49"/>
+          <p:cNvSpPr txBox="1"/>
+          <p:nvPr/>
+        </p:nvSpPr>
+        <p:spPr>
+          <a:xfrm>
+            <a:off x="6080760" y="4480560"/>
+            <a:ext cx="5669280" cy="1645920"/>
+          </a:xfrm>
+          <a:prstGeom prst="rect">
+            <a:avLst/>
+          </a:prstGeom>
+          <a:noFill/>
+        </p:spPr>
+        <p:txBody>
+          <a:bodyPr wrap="square">
+            <a:spAutoFit/>
+          </a:bodyPr>
+          <a:lstStyle/>
+          <a:p>
+            <a:pPr algn="l"/>
+            <a:r>
+              <a:rPr sz="1100" b="0" i="0">
+                <a:solidFill>
+                  <a:srgbClr val="CAD3DF"/>
+                </a:solidFill>
+              </a:rPr>
+              <a:t>Flat terrain: dominant error is missing hills → systematic bias
+DEM terrain: dominant error is building height estimation → random scatter
+Both improve with material calibration — but building height is a hard geometric limit</a:t>
+            </a:r>
+          </a:p>
+        </p:txBody>
+      </p:sp>
+    </p:spTree>
+  </p:cSld>
+  <p:clrMapOvr>
+    <a:masterClrMapping/>
+  </p:clrMapOvr>
+</p:sld>
+</file>
+
+<file path=ppt/slides/slide8.xml><?xml version="1.0" encoding="utf-8"?>
+<p:sld xmlns:a="http://schemas.openxmlformats.org/drawingml/2006/main" xmlns:p="http://schemas.openxmlformats.org/presentationml/2006/main" xmlns:r="http://schemas.openxmlformats.org/officeDocument/2006/relationships">
+  <p:cSld>
+    <p:bg>
+      <p:bgPr>
+        <a:solidFill>
+          <a:srgbClr val="0D1B2A"/>
+        </a:solidFill>
+        <a:effectLst/>
+      </p:bgPr>
+    </p:bg>
+    <p:spTree>
+      <p:nvGrpSpPr>
+        <p:cNvPr id="1" name=""/>
+        <p:cNvGrpSpPr/>
+        <p:nvPr/>
+      </p:nvGrpSpPr>
+      <p:grpSpPr/>
+      <p:sp>
+        <p:nvSpPr>
+          <p:cNvPr id="2" name="Rectangle 1"/>
+          <p:cNvSpPr/>
+          <p:nvPr/>
+        </p:nvSpPr>
+        <p:spPr>
+          <a:xfrm>
+            <a:off x="0" y="73152"/>
+            <a:ext cx="12188952" cy="54864"/>
+          </a:xfrm>
+          <a:prstGeom prst="rect">
+            <a:avLst/>
+          </a:prstGeom>
+          <a:solidFill>
+            <a:srgbClr val="00B4D8"/>
+          </a:solidFill>
+          <a:ln>
+            <a:noFill/>
+          </a:ln>
+        </p:spPr>
+        <p:style>
+          <a:lnRef idx="1">
+            <a:schemeClr val="accent1"/>
+          </a:lnRef>
+          <a:fillRef idx="3">
+            <a:schemeClr val="accent1"/>
+          </a:fillRef>
+          <a:effectRef idx="2">
+            <a:schemeClr val="accent1"/>
+          </a:effectRef>
+          <a:fontRef idx="minor">
+            <a:schemeClr val="lt1"/>
+          </a:fontRef>
+        </p:style>
+        <p:txBody>
+          <a:bodyPr rtlCol="0" anchor="ctr"/>
+          <a:lstStyle/>
+          <a:p>
+            <a:pPr algn="ctr"/>
+          </a:p>
+        </p:txBody>
+      </p:sp>
+      <p:sp>
+        <p:nvSpPr>
+          <p:cNvPr id="3" name="TextBox 2"/>
+          <p:cNvSpPr txBox="1"/>
+          <p:nvPr/>
+        </p:nvSpPr>
+        <p:spPr>
+          <a:xfrm>
+            <a:off x="320040" y="201168"/>
+            <a:ext cx="3657600" cy="256032"/>
+          </a:xfrm>
+          <a:prstGeom prst="rect">
+            <a:avLst/>
+          </a:prstGeom>
+          <a:noFill/>
+        </p:spPr>
+        <p:txBody>
+          <a:bodyPr wrap="square">
+            <a:spAutoFit/>
+          </a:bodyPr>
+          <a:lstStyle/>
+          <a:p>
+            <a:pPr algn="l"/>
+            <a:r>
+              <a:rPr sz="800" b="1" i="0">
+                <a:solidFill>
+                  <a:srgbClr val="00B4D8"/>
+                </a:solidFill>
+              </a:rPr>
+              <a:t>ELEVATION DATA</a:t>
+            </a:r>
+          </a:p>
+        </p:txBody>
+      </p:sp>
+      <p:sp>
+        <p:nvSpPr>
+          <p:cNvPr id="4" name="TextBox 3"/>
+          <p:cNvSpPr txBox="1"/>
+          <p:nvPr/>
+        </p:nvSpPr>
+        <p:spPr>
+          <a:xfrm>
+            <a:off x="10972800" y="6492240"/>
+            <a:ext cx="1097280" cy="320040"/>
+          </a:xfrm>
+          <a:prstGeom prst="rect">
+            <a:avLst/>
+          </a:prstGeom>
+          <a:noFill/>
+        </p:spPr>
+        <p:txBody>
+          <a:bodyPr wrap="square">
+            <a:spAutoFit/>
+          </a:bodyPr>
+          <a:lstStyle/>
+          <a:p>
+            <a:pPr algn="r"/>
+            <a:r>
+              <a:rPr sz="900" b="0" i="0">
+                <a:solidFill>
+                  <a:srgbClr val="CAD3DF"/>
+                </a:solidFill>
+              </a:rPr>
+              <a:t>8 / 12</a:t>
+            </a:r>
+          </a:p>
+        </p:txBody>
+      </p:sp>
+      <p:sp>
+        <p:nvSpPr>
+          <p:cNvPr id="5" name="TextBox 4"/>
+          <p:cNvSpPr txBox="1"/>
+          <p:nvPr/>
+        </p:nvSpPr>
+        <p:spPr>
+          <a:xfrm>
+            <a:off x="411480" y="457200"/>
+            <a:ext cx="11430000" cy="640080"/>
+          </a:xfrm>
+          <a:prstGeom prst="rect">
+            <a:avLst/>
+          </a:prstGeom>
+          <a:noFill/>
+        </p:spPr>
+        <p:txBody>
+          <a:bodyPr wrap="square">
+            <a:spAutoFit/>
+          </a:bodyPr>
+          <a:lstStyle/>
+          <a:p>
+            <a:pPr algn="l"/>
+            <a:r>
+              <a:rPr sz="2800" b="1" i="0">
+                <a:solidFill>
+                  <a:srgbClr val="FFFFFF"/>
+                </a:solidFill>
+              </a:rPr>
+              <a:t>Elevation Data Sources — DTM, DSM &amp; nDSM</a:t>
+            </a:r>
+          </a:p>
+        </p:txBody>
+      </p:sp>
+      <p:sp>
+        <p:nvSpPr>
+          <p:cNvPr id="6" name="Rectangle 5"/>
+          <p:cNvSpPr/>
+          <p:nvPr/>
+        </p:nvSpPr>
+        <p:spPr>
+          <a:xfrm>
+            <a:off x="411480" y="1078992"/>
+            <a:ext cx="11338560" cy="16459"/>
+          </a:xfrm>
+          <a:prstGeom prst="rect">
+            <a:avLst/>
+          </a:prstGeom>
+          <a:solidFill>
+            <a:srgbClr val="1E3A52"/>
+          </a:solidFill>
+          <a:ln>
+            <a:noFill/>
+          </a:ln>
+        </p:spPr>
+        <p:style>
+          <a:lnRef idx="1">
+            <a:schemeClr val="accent1"/>
+          </a:lnRef>
+          <a:fillRef idx="3">
+            <a:schemeClr val="accent1"/>
+          </a:fillRef>
+          <a:effectRef idx="2">
+            <a:schemeClr val="accent1"/>
+          </a:effectRef>
+          <a:fontRef idx="minor">
+            <a:schemeClr val="lt1"/>
+          </a:fontRef>
+        </p:style>
+        <p:txBody>
+          <a:bodyPr rtlCol="0" anchor="ctr"/>
+          <a:lstStyle/>
+          <a:p>
+            <a:pPr algn="ctr"/>
+          </a:p>
+        </p:txBody>
+      </p:sp>
+      <p:sp>
+        <p:nvSpPr>
+          <p:cNvPr id="7" name="Rectangle 6"/>
+          <p:cNvSpPr/>
+          <p:nvPr/>
+        </p:nvSpPr>
+        <p:spPr>
+          <a:xfrm>
+            <a:off x="274320" y="1234440"/>
+            <a:ext cx="3749039" cy="5212080"/>
+          </a:xfrm>
+          <a:prstGeom prst="rect">
+            <a:avLst/>
+          </a:prstGeom>
+          <a:solidFill>
+            <a:srgbClr val="112A40"/>
+          </a:solidFill>
+          <a:ln>
+            <a:noFill/>
+          </a:ln>
+        </p:spPr>
+        <p:style>
+          <a:lnRef idx="1">
+            <a:schemeClr val="accent1"/>
+          </a:lnRef>
+          <a:fillRef idx="3">
+            <a:schemeClr val="accent1"/>
+          </a:fillRef>
+          <a:effectRef idx="2">
+            <a:schemeClr val="accent1"/>
+          </a:effectRef>
+          <a:fontRef idx="minor">
+            <a:schemeClr val="lt1"/>
+          </a:fontRef>
+        </p:style>
+        <p:txBody>
+          <a:bodyPr rtlCol="0" anchor="ctr"/>
+          <a:lstStyle/>
+          <a:p>
+            <a:pPr algn="ctr"/>
+          </a:p>
+        </p:txBody>
+      </p:sp>
+      <p:sp>
+        <p:nvSpPr>
+          <p:cNvPr id="8" name="Rectangle 7"/>
+          <p:cNvSpPr/>
+          <p:nvPr/>
+        </p:nvSpPr>
+        <p:spPr>
+          <a:xfrm>
+            <a:off x="274320" y="1234440"/>
+            <a:ext cx="3749039" cy="64008"/>
+          </a:xfrm>
+          <a:prstGeom prst="rect">
+            <a:avLst/>
+          </a:prstGeom>
+          <a:solidFill>
+            <a:srgbClr val="2DCB7F"/>
+          </a:solidFill>
+          <a:ln>
+            <a:noFill/>
+          </a:ln>
+        </p:spPr>
+        <p:style>
+          <a:lnRef idx="1">
+            <a:schemeClr val="accent1"/>
+          </a:lnRef>
+          <a:fillRef idx="3">
+            <a:schemeClr val="accent1"/>
+          </a:fillRef>
+          <a:effectRef idx="2">
+            <a:schemeClr val="accent1"/>
+          </a:effectRef>
+          <a:fontRef idx="minor">
+            <a:schemeClr val="lt1"/>
+          </a:fontRef>
+        </p:style>
+        <p:txBody>
+          <a:bodyPr rtlCol="0" anchor="ctr"/>
+          <a:lstStyle/>
+          <a:p>
+            <a:pPr algn="ctr"/>
+          </a:p>
+        </p:txBody>
+      </p:sp>
+      <p:sp>
+        <p:nvSpPr>
+          <p:cNvPr id="9" name="TextBox 8"/>
+          <p:cNvSpPr txBox="1"/>
+          <p:nvPr/>
+        </p:nvSpPr>
+        <p:spPr>
+          <a:xfrm>
+            <a:off x="438912" y="1371600"/>
+            <a:ext cx="3749039" cy="502920"/>
+          </a:xfrm>
+          <a:prstGeom prst="rect">
+            <a:avLst/>
+          </a:prstGeom>
+          <a:noFill/>
+        </p:spPr>
+        <p:txBody>
+          <a:bodyPr wrap="square">
+            <a:spAutoFit/>
+          </a:bodyPr>
+          <a:lstStyle/>
+          <a:p>
+            <a:pPr algn="l"/>
+            <a:r>
+              <a:rPr sz="2200" b="1" i="0">
+                <a:solidFill>
+                  <a:srgbClr val="2DCB7F"/>
+                </a:solidFill>
+              </a:rPr>
+              <a:t>DTM</a:t>
+            </a:r>
+          </a:p>
+        </p:txBody>
+      </p:sp>
+      <p:sp>
+        <p:nvSpPr>
+          <p:cNvPr id="10" name="TextBox 9"/>
+          <p:cNvSpPr txBox="1"/>
+          <p:nvPr/>
+        </p:nvSpPr>
+        <p:spPr>
+          <a:xfrm>
+            <a:off x="438912" y="1874519"/>
+            <a:ext cx="3520439" cy="365760"/>
+          </a:xfrm>
+          <a:prstGeom prst="rect">
+            <a:avLst/>
+          </a:prstGeom>
+          <a:noFill/>
+        </p:spPr>
+        <p:txBody>
+          <a:bodyPr wrap="square">
+            <a:spAutoFit/>
+          </a:bodyPr>
+          <a:lstStyle/>
+          <a:p>
+            <a:pPr algn="l"/>
+            <a:r>
+              <a:rPr sz="1000" b="0" i="1">
+                <a:solidFill>
+                  <a:srgbClr val="CAD3DF"/>
+                </a:solidFill>
+              </a:rPr>
+              <a:t>Digital Terrain Model</a:t>
+            </a:r>
+          </a:p>
+        </p:txBody>
+      </p:sp>
+      <p:sp>
+        <p:nvSpPr>
+          <p:cNvPr id="11" name="Rectangle 10"/>
+          <p:cNvSpPr/>
+          <p:nvPr/>
+        </p:nvSpPr>
+        <p:spPr>
+          <a:xfrm>
+            <a:off x="438912" y="2267712"/>
+            <a:ext cx="3428999" cy="16459"/>
+          </a:xfrm>
+          <a:prstGeom prst="rect">
+            <a:avLst/>
+          </a:prstGeom>
+          <a:solidFill>
+            <a:srgbClr val="1E3A52"/>
+          </a:solidFill>
+          <a:ln>
+            <a:noFill/>
+          </a:ln>
+        </p:spPr>
+        <p:style>
+          <a:lnRef idx="1">
+            <a:schemeClr val="accent1"/>
+          </a:lnRef>
+          <a:fillRef idx="3">
+            <a:schemeClr val="accent1"/>
+          </a:fillRef>
+          <a:effectRef idx="2">
+            <a:schemeClr val="accent1"/>
+          </a:effectRef>
+          <a:fontRef idx="minor">
+            <a:schemeClr val="lt1"/>
+          </a:fontRef>
+        </p:style>
+        <p:txBody>
+          <a:bodyPr rtlCol="0" anchor="ctr"/>
+          <a:lstStyle/>
+          <a:p>
+            <a:pPr algn="ctr"/>
+          </a:p>
+        </p:txBody>
+      </p:sp>
+      <p:sp>
+        <p:nvSpPr>
+          <p:cNvPr id="12" name="TextBox 11"/>
+          <p:cNvSpPr txBox="1"/>
+          <p:nvPr/>
+        </p:nvSpPr>
+        <p:spPr>
+          <a:xfrm>
+            <a:off x="438912" y="2377440"/>
+            <a:ext cx="1097280" cy="685800"/>
+          </a:xfrm>
+          <a:prstGeom prst="rect">
+            <a:avLst/>
+          </a:prstGeom>
+          <a:noFill/>
+        </p:spPr>
+        <p:txBody>
+          <a:bodyPr wrap="square">
+            <a:spAutoFit/>
+          </a:bodyPr>
+          <a:lstStyle/>
+          <a:p>
+            <a:pPr algn="l"/>
+            <a:r>
+              <a:rPr sz="950" b="1" i="0">
+                <a:solidFill>
+                  <a:srgbClr val="90E0EF"/>
+                </a:solidFill>
+              </a:rPr>
+              <a:t>Captures</a:t>
+            </a:r>
+          </a:p>
+        </p:txBody>
+      </p:sp>
+      <p:sp>
+        <p:nvSpPr>
+          <p:cNvPr id="13" name="TextBox 12"/>
+          <p:cNvSpPr txBox="1"/>
+          <p:nvPr/>
+        </p:nvSpPr>
+        <p:spPr>
+          <a:xfrm>
+            <a:off x="1536192" y="2377440"/>
+            <a:ext cx="2331719" cy="685800"/>
+          </a:xfrm>
+          <a:prstGeom prst="rect">
+            <a:avLst/>
+          </a:prstGeom>
+          <a:noFill/>
+        </p:spPr>
+        <p:txBody>
+          <a:bodyPr wrap="square">
+            <a:spAutoFit/>
+          </a:bodyPr>
+          <a:lstStyle/>
+          <a:p>
+            <a:pPr algn="l"/>
+            <a:r>
+              <a:rPr sz="950" b="0" i="0">
+                <a:solidFill>
+                  <a:srgbClr val="CAD3DF"/>
+                </a:solidFill>
+              </a:rPr>
+              <a:t>Bare earth only
+(ground, roads, rivers)</a:t>
+            </a:r>
+          </a:p>
+        </p:txBody>
+      </p:sp>
+      <p:sp>
+        <p:nvSpPr>
+          <p:cNvPr id="14" name="TextBox 13"/>
+          <p:cNvSpPr txBox="1"/>
+          <p:nvPr/>
+        </p:nvSpPr>
+        <p:spPr>
+          <a:xfrm>
+            <a:off x="438912" y="3090672"/>
+            <a:ext cx="1097280" cy="685800"/>
+          </a:xfrm>
+          <a:prstGeom prst="rect">
+            <a:avLst/>
+          </a:prstGeom>
+          <a:noFill/>
+        </p:spPr>
+        <p:txBody>
+          <a:bodyPr wrap="square">
+            <a:spAutoFit/>
+          </a:bodyPr>
+          <a:lstStyle/>
+          <a:p>
+            <a:pPr algn="l"/>
+            <a:r>
+              <a:rPr sz="950" b="1" i="0">
+                <a:solidFill>
+                  <a:srgbClr val="90E0EF"/>
+                </a:solidFill>
+              </a:rPr>
+              <a:t>Source</a:t>
+            </a:r>
+          </a:p>
+        </p:txBody>
+      </p:sp>
+      <p:sp>
+        <p:nvSpPr>
+          <p:cNvPr id="15" name="TextBox 14"/>
+          <p:cNvSpPr txBox="1"/>
+          <p:nvPr/>
+        </p:nvSpPr>
+        <p:spPr>
+          <a:xfrm>
+            <a:off x="1536192" y="3090672"/>
+            <a:ext cx="2331719" cy="685800"/>
+          </a:xfrm>
+          <a:prstGeom prst="rect">
+            <a:avLst/>
+          </a:prstGeom>
+          <a:noFill/>
+        </p:spPr>
+        <p:txBody>
+          <a:bodyPr wrap="square">
+            <a:spAutoFit/>
+          </a:bodyPr>
+          <a:lstStyle/>
+          <a:p>
+            <a:pPr algn="l"/>
+            <a:r>
+              <a:rPr sz="950" b="0" i="0">
+                <a:solidFill>
+                  <a:srgbClr val="CAD3DF"/>
+                </a:solidFill>
+              </a:rPr>
+              <a:t>EA LiDAR 1m
+(last / ground returns)</a:t>
+            </a:r>
+          </a:p>
+        </p:txBody>
+      </p:sp>
+      <p:sp>
+        <p:nvSpPr>
+          <p:cNvPr id="16" name="TextBox 15"/>
+          <p:cNvSpPr txBox="1"/>
+          <p:nvPr/>
+        </p:nvSpPr>
+        <p:spPr>
+          <a:xfrm>
+            <a:off x="438912" y="3803904"/>
+            <a:ext cx="1097280" cy="685800"/>
+          </a:xfrm>
+          <a:prstGeom prst="rect">
+            <a:avLst/>
+          </a:prstGeom>
+          <a:noFill/>
+        </p:spPr>
+        <p:txBody>
+          <a:bodyPr wrap="square">
+            <a:spAutoFit/>
+          </a:bodyPr>
+          <a:lstStyle/>
+          <a:p>
+            <a:pPr algn="l"/>
+            <a:r>
+              <a:rPr sz="950" b="1" i="0">
+                <a:solidFill>
+                  <a:srgbClr val="90E0EF"/>
+                </a:solidFill>
+              </a:rPr>
+              <a:t>Use in scene</a:t>
+            </a:r>
+          </a:p>
+        </p:txBody>
+      </p:sp>
+      <p:sp>
+        <p:nvSpPr>
+          <p:cNvPr id="17" name="TextBox 16"/>
+          <p:cNvSpPr txBox="1"/>
+          <p:nvPr/>
+        </p:nvSpPr>
+        <p:spPr>
+          <a:xfrm>
+            <a:off x="1536192" y="3803904"/>
+            <a:ext cx="2331719" cy="685800"/>
+          </a:xfrm>
+          <a:prstGeom prst="rect">
+            <a:avLst/>
+          </a:prstGeom>
+          <a:noFill/>
+        </p:spPr>
+        <p:txBody>
+          <a:bodyPr wrap="square">
+            <a:spAutoFit/>
+          </a:bodyPr>
+          <a:lstStyle/>
+          <a:p>
+            <a:pPr algn="l"/>
+            <a:r>
+              <a:rPr sz="950" b="0" i="0">
+                <a:solidFill>
+                  <a:srgbClr val="CAD3DF"/>
+                </a:solidFill>
+              </a:rPr>
+              <a:t>Terrain mesh PLY
+→ correct RX ground Z</a:t>
+            </a:r>
+          </a:p>
+        </p:txBody>
+      </p:sp>
+      <p:sp>
+        <p:nvSpPr>
+          <p:cNvPr id="18" name="TextBox 17"/>
+          <p:cNvSpPr txBox="1"/>
+          <p:nvPr/>
+        </p:nvSpPr>
+        <p:spPr>
+          <a:xfrm>
+            <a:off x="438912" y="4517136"/>
+            <a:ext cx="1097280" cy="685800"/>
+          </a:xfrm>
+          <a:prstGeom prst="rect">
+            <a:avLst/>
+          </a:prstGeom>
+          <a:noFill/>
+        </p:spPr>
+        <p:txBody>
+          <a:bodyPr wrap="square">
+            <a:spAutoFit/>
+          </a:bodyPr>
+          <a:lstStyle/>
+          <a:p>
+            <a:pPr algn="l"/>
+            <a:r>
+              <a:rPr sz="950" b="1" i="0">
+                <a:solidFill>
+                  <a:srgbClr val="90E0EF"/>
+                </a:solidFill>
+              </a:rPr>
+              <a:t>Limitation</a:t>
+            </a:r>
+          </a:p>
+        </p:txBody>
+      </p:sp>
+      <p:sp>
+        <p:nvSpPr>
+          <p:cNvPr id="19" name="TextBox 18"/>
+          <p:cNvSpPr txBox="1"/>
+          <p:nvPr/>
+        </p:nvSpPr>
+        <p:spPr>
+          <a:xfrm>
+            <a:off x="1536192" y="4517136"/>
+            <a:ext cx="2331719" cy="685800"/>
+          </a:xfrm>
+          <a:prstGeom prst="rect">
+            <a:avLst/>
+          </a:prstGeom>
+          <a:noFill/>
+        </p:spPr>
+        <p:txBody>
+          <a:bodyPr wrap="square">
+            <a:spAutoFit/>
+          </a:bodyPr>
+          <a:lstStyle/>
+          <a:p>
+            <a:pPr algn="l"/>
+            <a:r>
+              <a:rPr sz="950" b="0" i="0">
+                <a:solidFill>
+                  <a:srgbClr val="CAD3DF"/>
+                </a:solidFill>
+              </a:rPr>
+              <a:t>No buildings or trees</a:t>
+            </a:r>
+          </a:p>
+        </p:txBody>
+      </p:sp>
+      <p:sp>
+        <p:nvSpPr>
+          <p:cNvPr id="20" name="Rectangle 19"/>
+          <p:cNvSpPr/>
+          <p:nvPr/>
+        </p:nvSpPr>
+        <p:spPr>
+          <a:xfrm>
+            <a:off x="4123943" y="1234440"/>
+            <a:ext cx="3749039" cy="5212080"/>
+          </a:xfrm>
+          <a:prstGeom prst="rect">
+            <a:avLst/>
+          </a:prstGeom>
+          <a:solidFill>
+            <a:srgbClr val="112A40"/>
+          </a:solidFill>
+          <a:ln>
+            <a:noFill/>
+          </a:ln>
+        </p:spPr>
+        <p:style>
+          <a:lnRef idx="1">
+            <a:schemeClr val="accent1"/>
+          </a:lnRef>
+          <a:fillRef idx="3">
+            <a:schemeClr val="accent1"/>
+          </a:fillRef>
+          <a:effectRef idx="2">
+            <a:schemeClr val="accent1"/>
+          </a:effectRef>
+          <a:fontRef idx="minor">
+            <a:schemeClr val="lt1"/>
+          </a:fontRef>
+        </p:style>
+        <p:txBody>
+          <a:bodyPr rtlCol="0" anchor="ctr"/>
+          <a:lstStyle/>
+          <a:p>
+            <a:pPr algn="ctr"/>
+          </a:p>
+        </p:txBody>
+      </p:sp>
+      <p:sp>
+        <p:nvSpPr>
+          <p:cNvPr id="21" name="Rectangle 20"/>
+          <p:cNvSpPr/>
+          <p:nvPr/>
+        </p:nvSpPr>
+        <p:spPr>
+          <a:xfrm>
+            <a:off x="4123943" y="1234440"/>
+            <a:ext cx="3749039" cy="64008"/>
+          </a:xfrm>
+          <a:prstGeom prst="rect">
+            <a:avLst/>
+          </a:prstGeom>
+          <a:solidFill>
+            <a:srgbClr val="FF9F1C"/>
+          </a:solidFill>
+          <a:ln>
+            <a:noFill/>
+          </a:ln>
+        </p:spPr>
+        <p:style>
+          <a:lnRef idx="1">
+            <a:schemeClr val="accent1"/>
+          </a:lnRef>
+          <a:fillRef idx="3">
+            <a:schemeClr val="accent1"/>
+          </a:fillRef>
+          <a:effectRef idx="2">
+            <a:schemeClr val="accent1"/>
+          </a:effectRef>
+          <a:fontRef idx="minor">
+            <a:schemeClr val="lt1"/>
+          </a:fontRef>
+        </p:style>
+        <p:txBody>
+          <a:bodyPr rtlCol="0" anchor="ctr"/>
+          <a:lstStyle/>
+          <a:p>
+            <a:pPr algn="ctr"/>
+          </a:p>
+        </p:txBody>
+      </p:sp>
+      <p:sp>
+        <p:nvSpPr>
+          <p:cNvPr id="22" name="TextBox 21"/>
+          <p:cNvSpPr txBox="1"/>
+          <p:nvPr/>
+        </p:nvSpPr>
+        <p:spPr>
+          <a:xfrm>
+            <a:off x="4288535" y="1371600"/>
+            <a:ext cx="3749039" cy="502920"/>
+          </a:xfrm>
+          <a:prstGeom prst="rect">
+            <a:avLst/>
+          </a:prstGeom>
+          <a:noFill/>
+        </p:spPr>
+        <p:txBody>
+          <a:bodyPr wrap="square">
+            <a:spAutoFit/>
+          </a:bodyPr>
+          <a:lstStyle/>
+          <a:p>
+            <a:pPr algn="l"/>
+            <a:r>
+              <a:rPr sz="2200" b="1" i="0">
+                <a:solidFill>
+                  <a:srgbClr val="FF9F1C"/>
+                </a:solidFill>
+              </a:rPr>
+              <a:t>DSM</a:t>
+            </a:r>
+          </a:p>
+        </p:txBody>
+      </p:sp>
+      <p:sp>
+        <p:nvSpPr>
+          <p:cNvPr id="23" name="TextBox 22"/>
+          <p:cNvSpPr txBox="1"/>
+          <p:nvPr/>
+        </p:nvSpPr>
+        <p:spPr>
+          <a:xfrm>
+            <a:off x="4288535" y="1874519"/>
+            <a:ext cx="3520439" cy="365760"/>
+          </a:xfrm>
+          <a:prstGeom prst="rect">
+            <a:avLst/>
+          </a:prstGeom>
+          <a:noFill/>
+        </p:spPr>
+        <p:txBody>
+          <a:bodyPr wrap="square">
+            <a:spAutoFit/>
+          </a:bodyPr>
+          <a:lstStyle/>
+          <a:p>
+            <a:pPr algn="l"/>
+            <a:r>
+              <a:rPr sz="1000" b="0" i="1">
+                <a:solidFill>
+                  <a:srgbClr val="CAD3DF"/>
+                </a:solidFill>
+              </a:rPr>
+              <a:t>Digital Surface Model</a:t>
+            </a:r>
+          </a:p>
+        </p:txBody>
+      </p:sp>
+      <p:sp>
+        <p:nvSpPr>
+          <p:cNvPr id="24" name="Rectangle 23"/>
+          <p:cNvSpPr/>
+          <p:nvPr/>
+        </p:nvSpPr>
+        <p:spPr>
+          <a:xfrm>
+            <a:off x="4288535" y="2267712"/>
+            <a:ext cx="3428999" cy="16459"/>
+          </a:xfrm>
+          <a:prstGeom prst="rect">
+            <a:avLst/>
+          </a:prstGeom>
+          <a:solidFill>
+            <a:srgbClr val="1E3A52"/>
+          </a:solidFill>
+          <a:ln>
+            <a:noFill/>
+          </a:ln>
+        </p:spPr>
+        <p:style>
+          <a:lnRef idx="1">
+            <a:schemeClr val="accent1"/>
+          </a:lnRef>
+          <a:fillRef idx="3">
+            <a:schemeClr val="accent1"/>
+          </a:fillRef>
+          <a:effectRef idx="2">
+            <a:schemeClr val="accent1"/>
+          </a:effectRef>
+          <a:fontRef idx="minor">
+            <a:schemeClr val="lt1"/>
+          </a:fontRef>
+        </p:style>
+        <p:txBody>
+          <a:bodyPr rtlCol="0" anchor="ctr"/>
+          <a:lstStyle/>
+          <a:p>
+            <a:pPr algn="ctr"/>
+          </a:p>
+        </p:txBody>
+      </p:sp>
+      <p:sp>
+        <p:nvSpPr>
+          <p:cNvPr id="25" name="TextBox 24"/>
+          <p:cNvSpPr txBox="1"/>
+          <p:nvPr/>
+        </p:nvSpPr>
+        <p:spPr>
+          <a:xfrm>
+            <a:off x="4288535" y="2377440"/>
+            <a:ext cx="1097280" cy="685800"/>
+          </a:xfrm>
+          <a:prstGeom prst="rect">
+            <a:avLst/>
+          </a:prstGeom>
+          <a:noFill/>
+        </p:spPr>
+        <p:txBody>
+          <a:bodyPr wrap="square">
+            <a:spAutoFit/>
+          </a:bodyPr>
+          <a:lstStyle/>
+          <a:p>
+            <a:pPr algn="l"/>
+            <a:r>
+              <a:rPr sz="950" b="1" i="0">
+                <a:solidFill>
+                  <a:srgbClr val="90E0EF"/>
+                </a:solidFill>
+              </a:rPr>
+              <a:t>Captures</a:t>
+            </a:r>
+          </a:p>
+        </p:txBody>
+      </p:sp>
+      <p:sp>
+        <p:nvSpPr>
+          <p:cNvPr id="26" name="TextBox 25"/>
+          <p:cNvSpPr txBox="1"/>
+          <p:nvPr/>
+        </p:nvSpPr>
+        <p:spPr>
+          <a:xfrm>
+            <a:off x="5385815" y="2377440"/>
+            <a:ext cx="2331719" cy="685800"/>
+          </a:xfrm>
+          <a:prstGeom prst="rect">
+            <a:avLst/>
+          </a:prstGeom>
+          <a:noFill/>
+        </p:spPr>
+        <p:txBody>
+          <a:bodyPr wrap="square">
+            <a:spAutoFit/>
+          </a:bodyPr>
+          <a:lstStyle/>
+          <a:p>
+            <a:pPr algn="l"/>
+            <a:r>
+              <a:rPr sz="950" b="0" i="0">
+                <a:solidFill>
+                  <a:srgbClr val="CAD3DF"/>
+                </a:solidFill>
+              </a:rPr>
+              <a:t>Everything — ground +
+buildings + trees</a:t>
+            </a:r>
+          </a:p>
+        </p:txBody>
+      </p:sp>
+      <p:sp>
+        <p:nvSpPr>
+          <p:cNvPr id="27" name="TextBox 26"/>
+          <p:cNvSpPr txBox="1"/>
+          <p:nvPr/>
+        </p:nvSpPr>
+        <p:spPr>
+          <a:xfrm>
+            <a:off x="4288535" y="3090672"/>
+            <a:ext cx="1097280" cy="685800"/>
+          </a:xfrm>
+          <a:prstGeom prst="rect">
+            <a:avLst/>
+          </a:prstGeom>
+          <a:noFill/>
+        </p:spPr>
+        <p:txBody>
+          <a:bodyPr wrap="square">
+            <a:spAutoFit/>
+          </a:bodyPr>
+          <a:lstStyle/>
+          <a:p>
+            <a:pPr algn="l"/>
+            <a:r>
+              <a:rPr sz="950" b="1" i="0">
+                <a:solidFill>
+                  <a:srgbClr val="90E0EF"/>
+                </a:solidFill>
+              </a:rPr>
+              <a:t>Source</a:t>
+            </a:r>
+          </a:p>
+        </p:txBody>
+      </p:sp>
+      <p:sp>
+        <p:nvSpPr>
+          <p:cNvPr id="28" name="TextBox 27"/>
+          <p:cNvSpPr txBox="1"/>
+          <p:nvPr/>
+        </p:nvSpPr>
+        <p:spPr>
+          <a:xfrm>
+            <a:off x="5385815" y="3090672"/>
+            <a:ext cx="2331719" cy="685800"/>
+          </a:xfrm>
+          <a:prstGeom prst="rect">
+            <a:avLst/>
+          </a:prstGeom>
+          <a:noFill/>
+        </p:spPr>
+        <p:txBody>
+          <a:bodyPr wrap="square">
+            <a:spAutoFit/>
+          </a:bodyPr>
+          <a:lstStyle/>
+          <a:p>
+            <a:pPr algn="l"/>
+            <a:r>
+              <a:rPr sz="950" b="0" i="0">
+                <a:solidFill>
+                  <a:srgbClr val="CAD3DF"/>
+                </a:solidFill>
+              </a:rPr>
+              <a:t>EA LiDAR 1m
+(first returns)</a:t>
+            </a:r>
+          </a:p>
+        </p:txBody>
+      </p:sp>
+      <p:sp>
+        <p:nvSpPr>
+          <p:cNvPr id="29" name="TextBox 28"/>
+          <p:cNvSpPr txBox="1"/>
+          <p:nvPr/>
+        </p:nvSpPr>
+        <p:spPr>
+          <a:xfrm>
+            <a:off x="4288535" y="3803904"/>
+            <a:ext cx="1097280" cy="685800"/>
+          </a:xfrm>
+          <a:prstGeom prst="rect">
+            <a:avLst/>
+          </a:prstGeom>
+          <a:noFill/>
+        </p:spPr>
+        <p:txBody>
+          <a:bodyPr wrap="square">
+            <a:spAutoFit/>
+          </a:bodyPr>
+          <a:lstStyle/>
+          <a:p>
+            <a:pPr algn="l"/>
+            <a:r>
+              <a:rPr sz="950" b="1" i="0">
+                <a:solidFill>
+                  <a:srgbClr val="90E0EF"/>
+                </a:solidFill>
+              </a:rPr>
+              <a:t>Use in scene</a:t>
+            </a:r>
+          </a:p>
+        </p:txBody>
+      </p:sp>
+      <p:sp>
+        <p:nvSpPr>
+          <p:cNvPr id="30" name="TextBox 29"/>
+          <p:cNvSpPr txBox="1"/>
+          <p:nvPr/>
+        </p:nvSpPr>
+        <p:spPr>
+          <a:xfrm>
+            <a:off x="5385815" y="3803904"/>
+            <a:ext cx="2331719" cy="685800"/>
+          </a:xfrm>
+          <a:prstGeom prst="rect">
+            <a:avLst/>
+          </a:prstGeom>
+          <a:noFill/>
+        </p:spPr>
+        <p:txBody>
+          <a:bodyPr wrap="square">
+            <a:spAutoFit/>
+          </a:bodyPr>
+          <a:lstStyle/>
+          <a:p>
+            <a:pPr algn="l"/>
+            <a:r>
+              <a:rPr sz="950" b="0" i="0">
+                <a:solidFill>
+                  <a:srgbClr val="CAD3DF"/>
+                </a:solidFill>
+              </a:rPr>
+              <a:t>Building height
+estimation</a:t>
+            </a:r>
+          </a:p>
+        </p:txBody>
+      </p:sp>
+      <p:sp>
+        <p:nvSpPr>
+          <p:cNvPr id="31" name="TextBox 30"/>
+          <p:cNvSpPr txBox="1"/>
+          <p:nvPr/>
+        </p:nvSpPr>
+        <p:spPr>
+          <a:xfrm>
+            <a:off x="4288535" y="4517136"/>
+            <a:ext cx="1097280" cy="685800"/>
+          </a:xfrm>
+          <a:prstGeom prst="rect">
+            <a:avLst/>
+          </a:prstGeom>
+          <a:noFill/>
+        </p:spPr>
+        <p:txBody>
+          <a:bodyPr wrap="square">
+            <a:spAutoFit/>
+          </a:bodyPr>
+          <a:lstStyle/>
+          <a:p>
+            <a:pPr algn="l"/>
+            <a:r>
+              <a:rPr sz="950" b="1" i="0">
+                <a:solidFill>
+                  <a:srgbClr val="90E0EF"/>
+                </a:solidFill>
+              </a:rPr>
+              <a:t>Limitation</a:t>
+            </a:r>
+          </a:p>
+        </p:txBody>
+      </p:sp>
+      <p:sp>
+        <p:nvSpPr>
+          <p:cNvPr id="32" name="TextBox 31"/>
+          <p:cNvSpPr txBox="1"/>
+          <p:nvPr/>
+        </p:nvSpPr>
+        <p:spPr>
+          <a:xfrm>
+            <a:off x="5385815" y="4517136"/>
+            <a:ext cx="2331719" cy="685800"/>
+          </a:xfrm>
+          <a:prstGeom prst="rect">
+            <a:avLst/>
+          </a:prstGeom>
+          <a:noFill/>
+        </p:spPr>
+        <p:txBody>
+          <a:bodyPr wrap="square">
+            <a:spAutoFit/>
+          </a:bodyPr>
+          <a:lstStyle/>
+          <a:p>
+            <a:pPr algn="l"/>
+            <a:r>
+              <a:rPr sz="950" b="0" i="0">
+                <a:solidFill>
+                  <a:srgbClr val="CAD3DF"/>
+                </a:solidFill>
+              </a:rPr>
+              <a:t>Cannot separate building
+from terrain directly</a:t>
+            </a:r>
+          </a:p>
+        </p:txBody>
+      </p:sp>
+      <p:sp>
+        <p:nvSpPr>
+          <p:cNvPr id="33" name="Rectangle 32"/>
+          <p:cNvSpPr/>
+          <p:nvPr/>
+        </p:nvSpPr>
+        <p:spPr>
+          <a:xfrm>
+            <a:off x="7973566" y="1234440"/>
+            <a:ext cx="3749039" cy="5212080"/>
+          </a:xfrm>
+          <a:prstGeom prst="rect">
+            <a:avLst/>
+          </a:prstGeom>
+          <a:solidFill>
+            <a:srgbClr val="112A40"/>
+          </a:solidFill>
+          <a:ln>
+            <a:noFill/>
+          </a:ln>
+        </p:spPr>
+        <p:style>
+          <a:lnRef idx="1">
+            <a:schemeClr val="accent1"/>
+          </a:lnRef>
+          <a:fillRef idx="3">
+            <a:schemeClr val="accent1"/>
+          </a:fillRef>
+          <a:effectRef idx="2">
+            <a:schemeClr val="accent1"/>
+          </a:effectRef>
+          <a:fontRef idx="minor">
+            <a:schemeClr val="lt1"/>
+          </a:fontRef>
+        </p:style>
+        <p:txBody>
+          <a:bodyPr rtlCol="0" anchor="ctr"/>
+          <a:lstStyle/>
+          <a:p>
+            <a:pPr algn="ctr"/>
+          </a:p>
+        </p:txBody>
+      </p:sp>
+      <p:sp>
+        <p:nvSpPr>
+          <p:cNvPr id="34" name="Rectangle 33"/>
+          <p:cNvSpPr/>
+          <p:nvPr/>
+        </p:nvSpPr>
+        <p:spPr>
+          <a:xfrm>
+            <a:off x="7973566" y="1234440"/>
+            <a:ext cx="3749039" cy="64008"/>
+          </a:xfrm>
+          <a:prstGeom prst="rect">
+            <a:avLst/>
+          </a:prstGeom>
+          <a:solidFill>
+            <a:srgbClr val="00B4D8"/>
+          </a:solidFill>
+          <a:ln>
+            <a:noFill/>
+          </a:ln>
+        </p:spPr>
+        <p:style>
+          <a:lnRef idx="1">
+            <a:schemeClr val="accent1"/>
+          </a:lnRef>
+          <a:fillRef idx="3">
+            <a:schemeClr val="accent1"/>
+          </a:fillRef>
+          <a:effectRef idx="2">
+            <a:schemeClr val="accent1"/>
+          </a:effectRef>
+          <a:fontRef idx="minor">
+            <a:schemeClr val="lt1"/>
+          </a:fontRef>
+        </p:style>
+        <p:txBody>
+          <a:bodyPr rtlCol="0" anchor="ctr"/>
+          <a:lstStyle/>
+          <a:p>
+            <a:pPr algn="ctr"/>
+          </a:p>
+        </p:txBody>
+      </p:sp>
+      <p:sp>
+        <p:nvSpPr>
+          <p:cNvPr id="35" name="TextBox 34"/>
+          <p:cNvSpPr txBox="1"/>
+          <p:nvPr/>
+        </p:nvSpPr>
+        <p:spPr>
+          <a:xfrm>
+            <a:off x="8138158" y="1371600"/>
+            <a:ext cx="3749039" cy="502920"/>
+          </a:xfrm>
+          <a:prstGeom prst="rect">
+            <a:avLst/>
+          </a:prstGeom>
+          <a:noFill/>
+        </p:spPr>
+        <p:txBody>
+          <a:bodyPr wrap="square">
+            <a:spAutoFit/>
+          </a:bodyPr>
+          <a:lstStyle/>
+          <a:p>
+            <a:pPr algn="l"/>
+            <a:r>
+              <a:rPr sz="2200" b="1" i="0">
+                <a:solidFill>
+                  <a:srgbClr val="00B4D8"/>
+                </a:solidFill>
+              </a:rPr>
+              <a:t>nDSM</a:t>
+            </a:r>
+          </a:p>
+        </p:txBody>
+      </p:sp>
+      <p:sp>
+        <p:nvSpPr>
+          <p:cNvPr id="36" name="TextBox 35"/>
+          <p:cNvSpPr txBox="1"/>
+          <p:nvPr/>
+        </p:nvSpPr>
+        <p:spPr>
+          <a:xfrm>
+            <a:off x="8138158" y="1874519"/>
+            <a:ext cx="3520439" cy="365760"/>
+          </a:xfrm>
+          <a:prstGeom prst="rect">
+            <a:avLst/>
+          </a:prstGeom>
+          <a:noFill/>
+        </p:spPr>
+        <p:txBody>
+          <a:bodyPr wrap="square">
+            <a:spAutoFit/>
+          </a:bodyPr>
+          <a:lstStyle/>
+          <a:p>
+            <a:pPr algn="l"/>
+            <a:r>
+              <a:rPr sz="1000" b="0" i="1">
+                <a:solidFill>
+                  <a:srgbClr val="CAD3DF"/>
+                </a:solidFill>
+              </a:rPr>
+              <a:t>Normalised DSM = DSM − DTM</a:t>
+            </a:r>
+          </a:p>
+        </p:txBody>
+      </p:sp>
+      <p:sp>
+        <p:nvSpPr>
+          <p:cNvPr id="37" name="Rectangle 36"/>
+          <p:cNvSpPr/>
+          <p:nvPr/>
+        </p:nvSpPr>
+        <p:spPr>
+          <a:xfrm>
+            <a:off x="8138158" y="2267712"/>
+            <a:ext cx="3428999" cy="16459"/>
+          </a:xfrm>
+          <a:prstGeom prst="rect">
+            <a:avLst/>
+          </a:prstGeom>
+          <a:solidFill>
+            <a:srgbClr val="1E3A52"/>
+          </a:solidFill>
+          <a:ln>
+            <a:noFill/>
+          </a:ln>
+        </p:spPr>
+        <p:style>
+          <a:lnRef idx="1">
+            <a:schemeClr val="accent1"/>
+          </a:lnRef>
+          <a:fillRef idx="3">
+            <a:schemeClr val="accent1"/>
+          </a:fillRef>
+          <a:effectRef idx="2">
+            <a:schemeClr val="accent1"/>
+          </a:effectRef>
+          <a:fontRef idx="minor">
+            <a:schemeClr val="lt1"/>
+          </a:fontRef>
+        </p:style>
+        <p:txBody>
+          <a:bodyPr rtlCol="0" anchor="ctr"/>
+          <a:lstStyle/>
+          <a:p>
+            <a:pPr algn="ctr"/>
+          </a:p>
+        </p:txBody>
+      </p:sp>
+      <p:sp>
+        <p:nvSpPr>
+          <p:cNvPr id="38" name="TextBox 37"/>
+          <p:cNvSpPr txBox="1"/>
+          <p:nvPr/>
+        </p:nvSpPr>
+        <p:spPr>
+          <a:xfrm>
+            <a:off x="8138158" y="2377440"/>
+            <a:ext cx="1097280" cy="685800"/>
+          </a:xfrm>
+          <a:prstGeom prst="rect">
+            <a:avLst/>
+          </a:prstGeom>
+          <a:noFill/>
+        </p:spPr>
+        <p:txBody>
+          <a:bodyPr wrap="square">
+            <a:spAutoFit/>
+          </a:bodyPr>
+          <a:lstStyle/>
+          <a:p>
+            <a:pPr algn="l"/>
+            <a:r>
+              <a:rPr sz="950" b="1" i="0">
+                <a:solidFill>
+                  <a:srgbClr val="90E0EF"/>
+                </a:solidFill>
+              </a:rPr>
+              <a:t>Captures</a:t>
+            </a:r>
+          </a:p>
+        </p:txBody>
+      </p:sp>
+      <p:sp>
+        <p:nvSpPr>
+          <p:cNvPr id="39" name="TextBox 38"/>
+          <p:cNvSpPr txBox="1"/>
+          <p:nvPr/>
+        </p:nvSpPr>
+        <p:spPr>
+          <a:xfrm>
+            <a:off x="9235438" y="2377440"/>
+            <a:ext cx="2331719" cy="685800"/>
+          </a:xfrm>
+          <a:prstGeom prst="rect">
+            <a:avLst/>
+          </a:prstGeom>
+          <a:noFill/>
+        </p:spPr>
+        <p:txBody>
+          <a:bodyPr wrap="square">
+            <a:spAutoFit/>
+          </a:bodyPr>
+          <a:lstStyle/>
+          <a:p>
+            <a:pPr algn="l"/>
+            <a:r>
+              <a:rPr sz="950" b="0" i="0">
+                <a:solidFill>
+                  <a:srgbClr val="CAD3DF"/>
+                </a:solidFill>
+              </a:rPr>
+              <a:t>Height of objects
+ABOVE ground only</a:t>
+            </a:r>
+          </a:p>
+        </p:txBody>
+      </p:sp>
+      <p:sp>
+        <p:nvSpPr>
+          <p:cNvPr id="40" name="TextBox 39"/>
+          <p:cNvSpPr txBox="1"/>
+          <p:nvPr/>
+        </p:nvSpPr>
+        <p:spPr>
+          <a:xfrm>
+            <a:off x="8138158" y="3090672"/>
+            <a:ext cx="1097280" cy="685800"/>
+          </a:xfrm>
+          <a:prstGeom prst="rect">
+            <a:avLst/>
+          </a:prstGeom>
+          <a:noFill/>
+        </p:spPr>
+        <p:txBody>
+          <a:bodyPr wrap="square">
+            <a:spAutoFit/>
+          </a:bodyPr>
+          <a:lstStyle/>
+          <a:p>
+            <a:pPr algn="l"/>
+            <a:r>
+              <a:rPr sz="950" b="1" i="0">
+                <a:solidFill>
+                  <a:srgbClr val="90E0EF"/>
+                </a:solidFill>
+              </a:rPr>
+              <a:t>Source</a:t>
+            </a:r>
+          </a:p>
+        </p:txBody>
+      </p:sp>
+      <p:sp>
+        <p:nvSpPr>
+          <p:cNvPr id="41" name="TextBox 40"/>
+          <p:cNvSpPr txBox="1"/>
+          <p:nvPr/>
+        </p:nvSpPr>
+        <p:spPr>
+          <a:xfrm>
+            <a:off x="9235438" y="3090672"/>
+            <a:ext cx="2331719" cy="685800"/>
+          </a:xfrm>
+          <a:prstGeom prst="rect">
+            <a:avLst/>
+          </a:prstGeom>
+          <a:noFill/>
+        </p:spPr>
+        <p:txBody>
+          <a:bodyPr wrap="square">
+            <a:spAutoFit/>
+          </a:bodyPr>
+          <a:lstStyle/>
+          <a:p>
+            <a:pPr algn="l"/>
+            <a:r>
+              <a:rPr sz="950" b="0" i="0">
+                <a:solidFill>
+                  <a:srgbClr val="CAD3DF"/>
+                </a:solidFill>
+              </a:rPr>
+              <a:t>Derived: DSM − DTM</a:t>
+            </a:r>
+          </a:p>
+        </p:txBody>
+      </p:sp>
+      <p:sp>
+        <p:nvSpPr>
+          <p:cNvPr id="42" name="TextBox 41"/>
+          <p:cNvSpPr txBox="1"/>
+          <p:nvPr/>
+        </p:nvSpPr>
+        <p:spPr>
+          <a:xfrm>
+            <a:off x="8138158" y="3803904"/>
+            <a:ext cx="1097280" cy="685800"/>
+          </a:xfrm>
+          <a:prstGeom prst="rect">
+            <a:avLst/>
+          </a:prstGeom>
+          <a:noFill/>
+        </p:spPr>
+        <p:txBody>
+          <a:bodyPr wrap="square">
+            <a:spAutoFit/>
+          </a:bodyPr>
+          <a:lstStyle/>
+          <a:p>
+            <a:pPr algn="l"/>
+            <a:r>
+              <a:rPr sz="950" b="1" i="0">
+                <a:solidFill>
+                  <a:srgbClr val="90E0EF"/>
+                </a:solidFill>
+              </a:rPr>
+              <a:t>Use in scene</a:t>
+            </a:r>
+          </a:p>
+        </p:txBody>
+      </p:sp>
+      <p:sp>
+        <p:nvSpPr>
+          <p:cNvPr id="43" name="TextBox 42"/>
+          <p:cNvSpPr txBox="1"/>
+          <p:nvPr/>
+        </p:nvSpPr>
+        <p:spPr>
+          <a:xfrm>
+            <a:off x="9235438" y="3803904"/>
+            <a:ext cx="2331719" cy="685800"/>
+          </a:xfrm>
+          <a:prstGeom prst="rect">
+            <a:avLst/>
+          </a:prstGeom>
+          <a:noFill/>
+        </p:spPr>
+        <p:txBody>
+          <a:bodyPr wrap="square">
+            <a:spAutoFit/>
+          </a:bodyPr>
+          <a:lstStyle/>
+          <a:p>
+            <a:pPr algn="l"/>
+            <a:r>
+              <a:rPr sz="950" b="0" i="0">
+                <a:solidFill>
+                  <a:srgbClr val="CAD3DF"/>
+                </a:solidFill>
+              </a:rPr>
+              <a:t>Accurate per-building
+AGL height from LiDAR</a:t>
+            </a:r>
+          </a:p>
+        </p:txBody>
+      </p:sp>
+      <p:sp>
+        <p:nvSpPr>
+          <p:cNvPr id="44" name="TextBox 43"/>
+          <p:cNvSpPr txBox="1"/>
+          <p:nvPr/>
+        </p:nvSpPr>
+        <p:spPr>
+          <a:xfrm>
+            <a:off x="8138158" y="4517136"/>
+            <a:ext cx="1097280" cy="685800"/>
+          </a:xfrm>
+          <a:prstGeom prst="rect">
+            <a:avLst/>
+          </a:prstGeom>
+          <a:noFill/>
+        </p:spPr>
+        <p:txBody>
+          <a:bodyPr wrap="square">
+            <a:spAutoFit/>
+          </a:bodyPr>
+          <a:lstStyle/>
+          <a:p>
+            <a:pPr algn="l"/>
+            <a:r>
+              <a:rPr sz="950" b="1" i="0">
+                <a:solidFill>
+                  <a:srgbClr val="90E0EF"/>
+                </a:solidFill>
+              </a:rPr>
+              <a:t>Limitation</a:t>
+            </a:r>
+          </a:p>
+        </p:txBody>
+      </p:sp>
+      <p:sp>
+        <p:nvSpPr>
+          <p:cNvPr id="45" name="TextBox 44"/>
+          <p:cNvSpPr txBox="1"/>
+          <p:nvPr/>
+        </p:nvSpPr>
+        <p:spPr>
+          <a:xfrm>
+            <a:off x="9235438" y="4517136"/>
+            <a:ext cx="2331719" cy="685800"/>
+          </a:xfrm>
+          <a:prstGeom prst="rect">
+            <a:avLst/>
+          </a:prstGeom>
+          <a:noFill/>
+        </p:spPr>
+        <p:txBody>
+          <a:bodyPr wrap="square">
+            <a:spAutoFit/>
+          </a:bodyPr>
+          <a:lstStyle/>
+          <a:p>
+            <a:pPr algn="l"/>
+            <a:r>
+              <a:rPr sz="950" b="0" i="0">
+                <a:solidFill>
+                  <a:srgbClr val="CAD3DF"/>
+                </a:solidFill>
+              </a:rPr>
+              <a:t>Requires both DTM
+&amp; DSM</a:t>
+            </a:r>
+          </a:p>
+        </p:txBody>
+      </p:sp>
+      <p:sp>
+        <p:nvSpPr>
+          <p:cNvPr id="46" name="Rectangle 45"/>
+          <p:cNvSpPr/>
+          <p:nvPr/>
+        </p:nvSpPr>
+        <p:spPr>
+          <a:xfrm>
+            <a:off x="3474720" y="5989320"/>
+            <a:ext cx="5212080" cy="530352"/>
+          </a:xfrm>
+          <a:prstGeom prst="rect">
+            <a:avLst/>
+          </a:prstGeom>
+          <a:solidFill>
+            <a:srgbClr val="112A40"/>
+          </a:solidFill>
+          <a:ln>
+            <a:noFill/>
+          </a:ln>
+        </p:spPr>
+        <p:style>
+          <a:lnRef idx="1">
+            <a:schemeClr val="accent1"/>
+          </a:lnRef>
+          <a:fillRef idx="3">
+            <a:schemeClr val="accent1"/>
+          </a:fillRef>
+          <a:effectRef idx="2">
+            <a:schemeClr val="accent1"/>
+          </a:effectRef>
+          <a:fontRef idx="minor">
+            <a:schemeClr val="lt1"/>
+          </a:fontRef>
+        </p:style>
+        <p:txBody>
+          <a:bodyPr rtlCol="0" anchor="ctr"/>
+          <a:lstStyle/>
+          <a:p>
+            <a:pPr algn="ctr"/>
+          </a:p>
+        </p:txBody>
+      </p:sp>
+      <p:sp>
+        <p:nvSpPr>
+          <p:cNvPr id="47" name="Rectangle 46"/>
+          <p:cNvSpPr/>
+          <p:nvPr/>
+        </p:nvSpPr>
+        <p:spPr>
+          <a:xfrm>
+            <a:off x="3474720" y="5989320"/>
+            <a:ext cx="5212080" cy="36576"/>
+          </a:xfrm>
+          <a:prstGeom prst="rect">
+            <a:avLst/>
+          </a:prstGeom>
+          <a:solidFill>
+            <a:srgbClr val="00B4D8"/>
+          </a:solidFill>
+          <a:ln>
+            <a:noFill/>
+          </a:ln>
+        </p:spPr>
+        <p:style>
+          <a:lnRef idx="1">
+            <a:schemeClr val="accent1"/>
+          </a:lnRef>
+          <a:fillRef idx="3">
+            <a:schemeClr val="accent1"/>
+          </a:fillRef>
+          <a:effectRef idx="2">
+            <a:schemeClr val="accent1"/>
+          </a:effectRef>
+          <a:fontRef idx="minor">
+            <a:schemeClr val="lt1"/>
+          </a:fontRef>
+        </p:style>
+        <p:txBody>
+          <a:bodyPr rtlCol="0" anchor="ctr"/>
+          <a:lstStyle/>
+          <a:p>
+            <a:pPr algn="ctr"/>
+          </a:p>
+        </p:txBody>
+      </p:sp>
+      <p:sp>
+        <p:nvSpPr>
+          <p:cNvPr id="48" name="TextBox 47"/>
+          <p:cNvSpPr txBox="1"/>
+          <p:nvPr/>
+        </p:nvSpPr>
+        <p:spPr>
+          <a:xfrm>
+            <a:off x="3657600" y="6062472"/>
+            <a:ext cx="4846320" cy="365760"/>
+          </a:xfrm>
+          <a:prstGeom prst="rect">
+            <a:avLst/>
+          </a:prstGeom>
+          <a:noFill/>
+        </p:spPr>
+        <p:txBody>
+          <a:bodyPr wrap="square">
+            <a:spAutoFit/>
+          </a:bodyPr>
+          <a:lstStyle/>
+          <a:p>
+            <a:pPr algn="ctr"/>
+            <a:r>
+              <a:rPr sz="1200" b="1" i="0">
+                <a:solidFill>
+                  <a:srgbClr val="FFFFFF"/>
+                </a:solidFill>
+              </a:rPr>
+              <a:t>nDSM = DSM − DTM   →   object height above ground (buildings, trees)</a:t>
+            </a:r>
+          </a:p>
+        </p:txBody>
+      </p:sp>
+    </p:spTree>
+  </p:cSld>
+  <p:clrMapOvr>
+    <a:masterClrMapping/>
+  </p:clrMapOvr>
+</p:sld>
+</file>
+
+<file path=ppt/slides/slide9.xml><?xml version="1.0" encoding="utf-8"?>
+<p:sld xmlns:a="http://schemas.openxmlformats.org/drawingml/2006/main" xmlns:p="http://schemas.openxmlformats.org/presentationml/2006/main" xmlns:r="http://schemas.openxmlformats.org/officeDocument/2006/relationships">
+  <p:cSld>
+    <p:bg>
+      <p:bgPr>
+        <a:solidFill>
+          <a:srgbClr val="0D1B2A"/>
+        </a:solidFill>
+        <a:effectLst/>
+      </p:bgPr>
+    </p:bg>
+    <p:spTree>
+      <p:nvGrpSpPr>
+        <p:cNvPr id="1" name=""/>
+        <p:cNvGrpSpPr/>
+        <p:nvPr/>
+      </p:nvGrpSpPr>
+      <p:grpSpPr/>
+      <p:sp>
+        <p:nvSpPr>
+          <p:cNvPr id="2" name="Rectangle 1"/>
+          <p:cNvSpPr/>
+          <p:nvPr/>
+        </p:nvSpPr>
+        <p:spPr>
+          <a:xfrm>
+            <a:off x="0" y="73152"/>
+            <a:ext cx="12188952" cy="54864"/>
+          </a:xfrm>
+          <a:prstGeom prst="rect">
+            <a:avLst/>
+          </a:prstGeom>
+          <a:solidFill>
+            <a:srgbClr val="00B4D8"/>
+          </a:solidFill>
+          <a:ln>
+            <a:noFill/>
+          </a:ln>
+        </p:spPr>
+        <p:style>
+          <a:lnRef idx="1">
+            <a:schemeClr val="accent1"/>
+          </a:lnRef>
+          <a:fillRef idx="3">
+            <a:schemeClr val="accent1"/>
+          </a:fillRef>
+          <a:effectRef idx="2">
+            <a:schemeClr val="accent1"/>
+          </a:effectRef>
+          <a:fontRef idx="minor">
+            <a:schemeClr val="lt1"/>
+          </a:fontRef>
+        </p:style>
+        <p:txBody>
+          <a:bodyPr rtlCol="0" anchor="ctr"/>
+          <a:lstStyle/>
+          <a:p>
+            <a:pPr algn="ctr"/>
+          </a:p>
+        </p:txBody>
+      </p:sp>
+      <p:sp>
+        <p:nvSpPr>
+          <p:cNvPr id="3" name="TextBox 2"/>
+          <p:cNvSpPr txBox="1"/>
+          <p:nvPr/>
+        </p:nvSpPr>
+        <p:spPr>
+          <a:xfrm>
+            <a:off x="320040" y="201168"/>
+            <a:ext cx="3657600" cy="256032"/>
+          </a:xfrm>
+          <a:prstGeom prst="rect">
+            <a:avLst/>
+          </a:prstGeom>
+          <a:noFill/>
+        </p:spPr>
+        <p:txBody>
+          <a:bodyPr wrap="square">
+            <a:spAutoFit/>
+          </a:bodyPr>
+          <a:lstStyle/>
+          <a:p>
+            <a:pPr algn="l"/>
+            <a:r>
+              <a:rPr sz="800" b="1" i="0">
+                <a:solidFill>
+                  <a:srgbClr val="00B4D8"/>
+                </a:solidFill>
+              </a:rPr>
+              <a:t>RESULTS COMPARISON</a:t>
+            </a:r>
+          </a:p>
+        </p:txBody>
+      </p:sp>
+      <p:sp>
+        <p:nvSpPr>
+          <p:cNvPr id="4" name="TextBox 3"/>
+          <p:cNvSpPr txBox="1"/>
+          <p:nvPr/>
+        </p:nvSpPr>
+        <p:spPr>
+          <a:xfrm>
+            <a:off x="10972800" y="6492240"/>
+            <a:ext cx="1097280" cy="320040"/>
+          </a:xfrm>
+          <a:prstGeom prst="rect">
+            <a:avLst/>
+          </a:prstGeom>
+          <a:noFill/>
+        </p:spPr>
+        <p:txBody>
+          <a:bodyPr wrap="square">
+            <a:spAutoFit/>
+          </a:bodyPr>
+          <a:lstStyle/>
+          <a:p>
+            <a:pPr algn="r"/>
+            <a:r>
+              <a:rPr sz="900" b="0" i="0">
+                <a:solidFill>
+                  <a:srgbClr val="CAD3DF"/>
+                </a:solidFill>
+              </a:rPr>
+              <a:t>9 / 12</a:t>
+            </a:r>
+          </a:p>
+        </p:txBody>
+      </p:sp>
+      <p:sp>
+        <p:nvSpPr>
+          <p:cNvPr id="5" name="TextBox 4"/>
+          <p:cNvSpPr txBox="1"/>
+          <p:nvPr/>
+        </p:nvSpPr>
+        <p:spPr>
+          <a:xfrm>
+            <a:off x="411480" y="457200"/>
+            <a:ext cx="11430000" cy="640080"/>
+          </a:xfrm>
+          <a:prstGeom prst="rect">
+            <a:avLst/>
+          </a:prstGeom>
+          <a:noFill/>
+        </p:spPr>
+        <p:txBody>
+          <a:bodyPr wrap="square">
+            <a:spAutoFit/>
+          </a:bodyPr>
+          <a:lstStyle/>
+          <a:p>
+            <a:pPr algn="l"/>
+            <a:r>
+              <a:rPr sz="2600" b="1" i="0">
+                <a:solidFill>
+                  <a:srgbClr val="FFFFFF"/>
+                </a:solidFill>
+              </a:rPr>
+              <a:t>RMSE Results — Flat / DTM / nDSM Scene Comparison</a:t>
+            </a:r>
+          </a:p>
+        </p:txBody>
+      </p:sp>
+      <p:sp>
+        <p:nvSpPr>
+          <p:cNvPr id="6" name="Rectangle 5"/>
+          <p:cNvSpPr/>
+          <p:nvPr/>
+        </p:nvSpPr>
+        <p:spPr>
+          <a:xfrm>
+            <a:off x="411480" y="1078992"/>
+            <a:ext cx="11338560" cy="16459"/>
+          </a:xfrm>
+          <a:prstGeom prst="rect">
+            <a:avLst/>
+          </a:prstGeom>
+          <a:solidFill>
+            <a:srgbClr val="1E3A52"/>
+          </a:solidFill>
+          <a:ln>
+            <a:noFill/>
+          </a:ln>
+        </p:spPr>
+        <p:style>
+          <a:lnRef idx="1">
+            <a:schemeClr val="accent1"/>
+          </a:lnRef>
+          <a:fillRef idx="3">
+            <a:schemeClr val="accent1"/>
+          </a:fillRef>
+          <a:effectRef idx="2">
+            <a:schemeClr val="accent1"/>
+          </a:effectRef>
+          <a:fontRef idx="minor">
+            <a:schemeClr val="lt1"/>
+          </a:fontRef>
+        </p:style>
+        <p:txBody>
+          <a:bodyPr rtlCol="0" anchor="ctr"/>
+          <a:lstStyle/>
+          <a:p>
+            <a:pPr algn="ctr"/>
+          </a:p>
+        </p:txBody>
+      </p:sp>
+      <p:sp>
+        <p:nvSpPr>
+          <p:cNvPr id="7" name="TextBox 6"/>
+          <p:cNvSpPr txBox="1"/>
+          <p:nvPr/>
+        </p:nvSpPr>
+        <p:spPr>
+          <a:xfrm>
+            <a:off x="320040" y="1325880"/>
+            <a:ext cx="1920240" cy="347472"/>
+          </a:xfrm>
+          <a:prstGeom prst="rect">
+            <a:avLst/>
+          </a:prstGeom>
+          <a:noFill/>
+        </p:spPr>
+        <p:txBody>
+          <a:bodyPr wrap="square">
+            <a:spAutoFit/>
+          </a:bodyPr>
+          <a:lstStyle/>
+          <a:p>
+            <a:pPr algn="l"/>
+            <a:r>
+              <a:rPr sz="1000" b="1" i="0">
+                <a:solidFill>
+                  <a:srgbClr val="90E0EF"/>
+                </a:solidFill>
+              </a:rPr>
+              <a:t>Scene Config</a:t>
+            </a:r>
+          </a:p>
+        </p:txBody>
+      </p:sp>
+      <p:sp>
+        <p:nvSpPr>
+          <p:cNvPr id="8" name="TextBox 7"/>
+          <p:cNvSpPr txBox="1"/>
+          <p:nvPr/>
+        </p:nvSpPr>
+        <p:spPr>
+          <a:xfrm>
+            <a:off x="2331720" y="1325880"/>
+            <a:ext cx="1737360" cy="347472"/>
+          </a:xfrm>
+          <a:prstGeom prst="rect">
+            <a:avLst/>
+          </a:prstGeom>
+          <a:noFill/>
+        </p:spPr>
+        <p:txBody>
+          <a:bodyPr wrap="square">
+            <a:spAutoFit/>
+          </a:bodyPr>
+          <a:lstStyle/>
+          <a:p>
+            <a:pPr algn="l"/>
+            <a:r>
+              <a:rPr sz="1000" b="1" i="0">
+                <a:solidFill>
+                  <a:srgbClr val="90E0EF"/>
+                </a:solidFill>
+              </a:rPr>
+              <a:t>Terrain</a:t>
+            </a:r>
+          </a:p>
+        </p:txBody>
+      </p:sp>
+      <p:sp>
+        <p:nvSpPr>
+          <p:cNvPr id="9" name="TextBox 8"/>
+          <p:cNvSpPr txBox="1"/>
+          <p:nvPr/>
+        </p:nvSpPr>
+        <p:spPr>
+          <a:xfrm>
+            <a:off x="4160520" y="1325880"/>
+            <a:ext cx="2468880" cy="347472"/>
+          </a:xfrm>
+          <a:prstGeom prst="rect">
+            <a:avLst/>
+          </a:prstGeom>
+          <a:noFill/>
+        </p:spPr>
+        <p:txBody>
+          <a:bodyPr wrap="square">
+            <a:spAutoFit/>
+          </a:bodyPr>
+          <a:lstStyle/>
+          <a:p>
+            <a:pPr algn="l"/>
+            <a:r>
+              <a:rPr sz="1000" b="1" i="0">
+                <a:solidFill>
+                  <a:srgbClr val="90E0EF"/>
+                </a:solidFill>
+              </a:rPr>
+              <a:t>Building Heights</a:t>
+            </a:r>
+          </a:p>
+        </p:txBody>
+      </p:sp>
+      <p:sp>
+        <p:nvSpPr>
+          <p:cNvPr id="10" name="TextBox 9"/>
+          <p:cNvSpPr txBox="1"/>
+          <p:nvPr/>
+        </p:nvSpPr>
+        <p:spPr>
+          <a:xfrm>
+            <a:off x="6720840" y="1325880"/>
+            <a:ext cx="1005840" cy="347472"/>
+          </a:xfrm>
+          <a:prstGeom prst="rect">
+            <a:avLst/>
+          </a:prstGeom>
+          <a:noFill/>
+        </p:spPr>
+        <p:txBody>
+          <a:bodyPr wrap="square">
+            <a:spAutoFit/>
+          </a:bodyPr>
+          <a:lstStyle/>
+          <a:p>
+            <a:pPr algn="l"/>
+            <a:r>
+              <a:rPr sz="1000" b="1" i="0">
+                <a:solidFill>
+                  <a:srgbClr val="90E0EF"/>
+                </a:solidFill>
+              </a:rPr>
+              <a:t>RMSE</a:t>
+            </a:r>
+          </a:p>
+        </p:txBody>
+      </p:sp>
+      <p:sp>
+        <p:nvSpPr>
+          <p:cNvPr id="11" name="TextBox 10"/>
+          <p:cNvSpPr txBox="1"/>
+          <p:nvPr/>
+        </p:nvSpPr>
+        <p:spPr>
+          <a:xfrm>
+            <a:off x="7818120" y="1325880"/>
+            <a:ext cx="822960" cy="347472"/>
+          </a:xfrm>
+          <a:prstGeom prst="rect">
+            <a:avLst/>
+          </a:prstGeom>
+          <a:noFill/>
+        </p:spPr>
+        <p:txBody>
+          <a:bodyPr wrap="square">
+            <a:spAutoFit/>
+          </a:bodyPr>
+          <a:lstStyle/>
+          <a:p>
+            <a:pPr algn="l"/>
+            <a:r>
+              <a:rPr sz="1000" b="1" i="0">
+                <a:solidFill>
+                  <a:srgbClr val="90E0EF"/>
+                </a:solidFill>
+              </a:rPr>
+              <a:t>Bias</a:t>
+            </a:r>
+          </a:p>
+        </p:txBody>
+      </p:sp>
+      <p:sp>
+        <p:nvSpPr>
+          <p:cNvPr id="12" name="TextBox 11"/>
+          <p:cNvSpPr txBox="1"/>
+          <p:nvPr/>
+        </p:nvSpPr>
+        <p:spPr>
+          <a:xfrm>
+            <a:off x="8732520" y="1325880"/>
+            <a:ext cx="3291840" cy="347472"/>
+          </a:xfrm>
+          <a:prstGeom prst="rect">
+            <a:avLst/>
+          </a:prstGeom>
+          <a:noFill/>
+        </p:spPr>
+        <p:txBody>
+          <a:bodyPr wrap="square">
+            <a:spAutoFit/>
+          </a:bodyPr>
+          <a:lstStyle/>
+          <a:p>
+            <a:pPr algn="l"/>
+            <a:r>
+              <a:rPr sz="1000" b="1" i="0">
+                <a:solidFill>
+                  <a:srgbClr val="90E0EF"/>
+                </a:solidFill>
+              </a:rPr>
+              <a:t>Key Issue</a:t>
+            </a:r>
+          </a:p>
+        </p:txBody>
+      </p:sp>
+      <p:sp>
+        <p:nvSpPr>
+          <p:cNvPr id="13" name="Rectangle 12"/>
+          <p:cNvSpPr/>
+          <p:nvPr/>
+        </p:nvSpPr>
+        <p:spPr>
+          <a:xfrm>
+            <a:off x="320040" y="1691640"/>
+            <a:ext cx="11704320" cy="16459"/>
+          </a:xfrm>
+          <a:prstGeom prst="rect">
+            <a:avLst/>
+          </a:prstGeom>
+          <a:solidFill>
+            <a:srgbClr val="1E3A52"/>
+          </a:solidFill>
+          <a:ln>
+            <a:noFill/>
+          </a:ln>
+        </p:spPr>
+        <p:style>
+          <a:lnRef idx="1">
+            <a:schemeClr val="accent1"/>
+          </a:lnRef>
+          <a:fillRef idx="3">
+            <a:schemeClr val="accent1"/>
+          </a:fillRef>
+          <a:effectRef idx="2">
+            <a:schemeClr val="accent1"/>
+          </a:effectRef>
+          <a:fontRef idx="minor">
+            <a:schemeClr val="lt1"/>
+          </a:fontRef>
+        </p:style>
+        <p:txBody>
+          <a:bodyPr rtlCol="0" anchor="ctr"/>
+          <a:lstStyle/>
+          <a:p>
+            <a:pPr algn="ctr"/>
+          </a:p>
+        </p:txBody>
+      </p:sp>
+      <p:sp>
+        <p:nvSpPr>
+          <p:cNvPr id="14" name="Rectangle 13"/>
+          <p:cNvSpPr/>
+          <p:nvPr/>
+        </p:nvSpPr>
+        <p:spPr>
+          <a:xfrm>
+            <a:off x="320040" y="1828800"/>
+            <a:ext cx="45720" cy="1188720"/>
+          </a:xfrm>
+          <a:prstGeom prst="rect">
+            <a:avLst/>
+          </a:prstGeom>
+          <a:solidFill>
+            <a:srgbClr val="FF4D6D"/>
+          </a:solidFill>
+          <a:ln>
+            <a:noFill/>
+          </a:ln>
+        </p:spPr>
+        <p:style>
+          <a:lnRef idx="1">
+            <a:schemeClr val="accent1"/>
+          </a:lnRef>
+          <a:fillRef idx="3">
+            <a:schemeClr val="accent1"/>
+          </a:fillRef>
+          <a:effectRef idx="2">
+            <a:schemeClr val="accent1"/>
+          </a:effectRef>
+          <a:fontRef idx="minor">
+            <a:schemeClr val="lt1"/>
+          </a:fontRef>
+        </p:style>
+        <p:txBody>
+          <a:bodyPr rtlCol="0" anchor="ctr"/>
+          <a:lstStyle/>
+          <a:p>
+            <a:pPr algn="ctr"/>
+          </a:p>
+        </p:txBody>
+      </p:sp>
+      <p:sp>
+        <p:nvSpPr>
+          <p:cNvPr id="15" name="Rectangle 14"/>
+          <p:cNvSpPr/>
+          <p:nvPr/>
+        </p:nvSpPr>
+        <p:spPr>
+          <a:xfrm>
+            <a:off x="365760" y="1828800"/>
+            <a:ext cx="11612880" cy="1188720"/>
+          </a:xfrm>
+          <a:prstGeom prst="rect">
+            <a:avLst/>
+          </a:prstGeom>
+          <a:solidFill>
+            <a:srgbClr val="112A40"/>
+          </a:solidFill>
+          <a:ln>
+            <a:noFill/>
+          </a:ln>
+        </p:spPr>
+        <p:style>
+          <a:lnRef idx="1">
+            <a:schemeClr val="accent1"/>
+          </a:lnRef>
+          <a:fillRef idx="3">
+            <a:schemeClr val="accent1"/>
+          </a:fillRef>
+          <a:effectRef idx="2">
+            <a:schemeClr val="accent1"/>
+          </a:effectRef>
+          <a:fontRef idx="minor">
+            <a:schemeClr val="lt1"/>
+          </a:fontRef>
+        </p:style>
+        <p:txBody>
+          <a:bodyPr rtlCol="0" anchor="ctr"/>
+          <a:lstStyle/>
+          <a:p>
+            <a:pPr algn="ctr"/>
+          </a:p>
+        </p:txBody>
+      </p:sp>
+      <p:sp>
+        <p:nvSpPr>
+          <p:cNvPr id="16" name="TextBox 15"/>
+          <p:cNvSpPr txBox="1"/>
+          <p:nvPr/>
+        </p:nvSpPr>
+        <p:spPr>
+          <a:xfrm>
+            <a:off x="393192" y="2057400"/>
+            <a:ext cx="1920240" cy="1188720"/>
+          </a:xfrm>
+          <a:prstGeom prst="rect">
+            <a:avLst/>
+          </a:prstGeom>
+          <a:noFill/>
+        </p:spPr>
+        <p:txBody>
+          <a:bodyPr wrap="square">
+            <a:spAutoFit/>
+          </a:bodyPr>
+          <a:lstStyle/>
+          <a:p>
+            <a:pPr algn="l"/>
+            <a:r>
+              <a:rPr sz="1000" b="1" i="0">
+                <a:solidFill>
+                  <a:srgbClr val="FF4D6D"/>
+                </a:solidFill>
+              </a:rPr>
+              <a:t>Flat z=0
+(Sionna v1)</a:t>
+            </a:r>
+          </a:p>
+        </p:txBody>
+      </p:sp>
+      <p:sp>
+        <p:nvSpPr>
+          <p:cNvPr id="17" name="TextBox 16"/>
+          <p:cNvSpPr txBox="1"/>
+          <p:nvPr/>
+        </p:nvSpPr>
+        <p:spPr>
+          <a:xfrm>
+            <a:off x="2331720" y="2057400"/>
+            <a:ext cx="1737360" cy="1188720"/>
+          </a:xfrm>
+          <a:prstGeom prst="rect">
+            <a:avLst/>
+          </a:prstGeom>
+          <a:noFill/>
+        </p:spPr>
+        <p:txBody>
+          <a:bodyPr wrap="square">
+            <a:spAutoFit/>
+          </a:bodyPr>
+          <a:lstStyle/>
+          <a:p>
+            <a:pPr algn="l"/>
+            <a:r>
+              <a:rPr sz="950" b="0" i="0">
+                <a:solidFill>
+                  <a:srgbClr val="CAD3DF"/>
+                </a:solidFill>
+              </a:rPr>
+              <a:t>None — z=0 plane</a:t>
+            </a:r>
+          </a:p>
+        </p:txBody>
+      </p:sp>
+      <p:sp>
+        <p:nvSpPr>
+          <p:cNvPr id="18" name="TextBox 17"/>
+          <p:cNvSpPr txBox="1"/>
+          <p:nvPr/>
+        </p:nvSpPr>
+        <p:spPr>
+          <a:xfrm>
+            <a:off x="4160520" y="2057400"/>
+            <a:ext cx="2468880" cy="1188720"/>
+          </a:xfrm>
+          <a:prstGeom prst="rect">
+            <a:avLst/>
+          </a:prstGeom>
+          <a:noFill/>
+        </p:spPr>
+        <p:txBody>
+          <a:bodyPr wrap="square">
+            <a:spAutoFit/>
+          </a:bodyPr>
+          <a:lstStyle/>
+          <a:p>
+            <a:pPr algn="l"/>
+            <a:r>
+              <a:rPr sz="950" b="0" i="0">
+                <a:solidFill>
+                  <a:srgbClr val="CAD3DF"/>
+                </a:solidFill>
+              </a:rPr>
+              <a:t>OSM estimate / default 8 m</a:t>
+            </a:r>
+          </a:p>
+        </p:txBody>
+      </p:sp>
+      <p:sp>
+        <p:nvSpPr>
+          <p:cNvPr id="19" name="TextBox 18"/>
+          <p:cNvSpPr txBox="1"/>
+          <p:nvPr/>
+        </p:nvSpPr>
+        <p:spPr>
+          <a:xfrm>
+            <a:off x="6720840" y="2057400"/>
+            <a:ext cx="1005840" cy="1188720"/>
+          </a:xfrm>
+          <a:prstGeom prst="rect">
+            <a:avLst/>
+          </a:prstGeom>
+          <a:noFill/>
+        </p:spPr>
+        <p:txBody>
+          <a:bodyPr wrap="square">
+            <a:spAutoFit/>
+          </a:bodyPr>
+          <a:lstStyle/>
+          <a:p>
+            <a:pPr algn="ctr"/>
+            <a:r>
+              <a:rPr sz="1400" b="1" i="0">
+                <a:solidFill>
+                  <a:srgbClr val="FF4D6D"/>
+                </a:solidFill>
+              </a:rPr>
+              <a:t>19.6 dB</a:t>
+            </a:r>
+          </a:p>
+        </p:txBody>
+      </p:sp>
+      <p:sp>
+        <p:nvSpPr>
+          <p:cNvPr id="20" name="TextBox 19"/>
+          <p:cNvSpPr txBox="1"/>
+          <p:nvPr/>
+        </p:nvSpPr>
+        <p:spPr>
+          <a:xfrm>
+            <a:off x="7818120" y="2057400"/>
+            <a:ext cx="822960" cy="1188720"/>
+          </a:xfrm>
+          <a:prstGeom prst="rect">
+            <a:avLst/>
+          </a:prstGeom>
+          <a:noFill/>
+        </p:spPr>
+        <p:txBody>
+          <a:bodyPr wrap="square">
+            <a:spAutoFit/>
+          </a:bodyPr>
+          <a:lstStyle/>
+          <a:p>
+            <a:pPr algn="ctr"/>
+            <a:r>
+              <a:rPr sz="1100" b="0" i="0">
+                <a:solidFill>
+                  <a:srgbClr val="FFFFFF"/>
+                </a:solidFill>
+              </a:rPr>
+              <a:t>−4.4 dB</a:t>
+            </a:r>
+          </a:p>
+        </p:txBody>
+      </p:sp>
+      <p:sp>
+        <p:nvSpPr>
+          <p:cNvPr id="21" name="TextBox 20"/>
+          <p:cNvSpPr txBox="1"/>
+          <p:nvPr/>
+        </p:nvSpPr>
+        <p:spPr>
+          <a:xfrm>
+            <a:off x="8732520" y="1993392"/>
+            <a:ext cx="3291840" cy="1188720"/>
+          </a:xfrm>
+          <a:prstGeom prst="rect">
+            <a:avLst/>
+          </a:prstGeom>
+          <a:noFill/>
+        </p:spPr>
+        <p:txBody>
+          <a:bodyPr wrap="square">
+            <a:spAutoFit/>
+          </a:bodyPr>
+          <a:lstStyle/>
+          <a:p>
+            <a:pPr algn="l"/>
+            <a:r>
+              <a:rPr sz="950" b="0" i="0">
+                <a:solidFill>
+                  <a:srgbClr val="CAD3DF"/>
+                </a:solidFill>
+              </a:rPr>
+              <a:t>Missing hills → +8–15 dB overestimate
+at 300–1500 m</a:t>
+            </a:r>
+          </a:p>
+        </p:txBody>
+      </p:sp>
+      <p:sp>
+        <p:nvSpPr>
+          <p:cNvPr id="22" name="Rectangle 21"/>
+          <p:cNvSpPr/>
+          <p:nvPr/>
+        </p:nvSpPr>
+        <p:spPr>
+          <a:xfrm>
+            <a:off x="320040" y="3127248"/>
+            <a:ext cx="45720" cy="1188720"/>
+          </a:xfrm>
+          <a:prstGeom prst="rect">
+            <a:avLst/>
+          </a:prstGeom>
+          <a:solidFill>
+            <a:srgbClr val="FF9F1C"/>
+          </a:solidFill>
+          <a:ln>
+            <a:noFill/>
+          </a:ln>
+        </p:spPr>
+        <p:style>
+          <a:lnRef idx="1">
+            <a:schemeClr val="accent1"/>
+          </a:lnRef>
+          <a:fillRef idx="3">
+            <a:schemeClr val="accent1"/>
+          </a:fillRef>
+          <a:effectRef idx="2">
+            <a:schemeClr val="accent1"/>
+          </a:effectRef>
+          <a:fontRef idx="minor">
+            <a:schemeClr val="lt1"/>
+          </a:fontRef>
+        </p:style>
+        <p:txBody>
+          <a:bodyPr rtlCol="0" anchor="ctr"/>
+          <a:lstStyle/>
+          <a:p>
+            <a:pPr algn="ctr"/>
+          </a:p>
+        </p:txBody>
+      </p:sp>
+      <p:sp>
+        <p:nvSpPr>
+          <p:cNvPr id="23" name="Rectangle 22"/>
+          <p:cNvSpPr/>
+          <p:nvPr/>
+        </p:nvSpPr>
+        <p:spPr>
+          <a:xfrm>
+            <a:off x="365760" y="3127248"/>
+            <a:ext cx="11612880" cy="1188720"/>
+          </a:xfrm>
+          <a:prstGeom prst="rect">
+            <a:avLst/>
+          </a:prstGeom>
+          <a:solidFill>
+            <a:srgbClr val="112A40"/>
+          </a:solidFill>
+          <a:ln>
+            <a:noFill/>
+          </a:ln>
+        </p:spPr>
+        <p:style>
+          <a:lnRef idx="1">
+            <a:schemeClr val="accent1"/>
+          </a:lnRef>
+          <a:fillRef idx="3">
+            <a:schemeClr val="accent1"/>
+          </a:fillRef>
+          <a:effectRef idx="2">
+            <a:schemeClr val="accent1"/>
+          </a:effectRef>
+          <a:fontRef idx="minor">
+            <a:schemeClr val="lt1"/>
+          </a:fontRef>
+        </p:style>
+        <p:txBody>
+          <a:bodyPr rtlCol="0" anchor="ctr"/>
+          <a:lstStyle/>
+          <a:p>
+            <a:pPr algn="ctr"/>
+          </a:p>
+        </p:txBody>
+      </p:sp>
+      <p:sp>
+        <p:nvSpPr>
+          <p:cNvPr id="24" name="TextBox 23"/>
+          <p:cNvSpPr txBox="1"/>
+          <p:nvPr/>
+        </p:nvSpPr>
+        <p:spPr>
+          <a:xfrm>
+            <a:off x="393192" y="3355848"/>
+            <a:ext cx="1920240" cy="1188720"/>
+          </a:xfrm>
+          <a:prstGeom prst="rect">
+            <a:avLst/>
+          </a:prstGeom>
+          <a:noFill/>
+        </p:spPr>
+        <p:txBody>
+          <a:bodyPr wrap="square">
+            <a:spAutoFit/>
+          </a:bodyPr>
+          <a:lstStyle/>
+          <a:p>
+            <a:pPr algn="l"/>
+            <a:r>
+              <a:rPr sz="1000" b="1" i="0">
+                <a:solidFill>
+                  <a:srgbClr val="FF9F1C"/>
+                </a:solidFill>
+              </a:rPr>
+              <a:t>DTM terrain
+(Sionna v2)</a:t>
+            </a:r>
+          </a:p>
+        </p:txBody>
+      </p:sp>
+      <p:sp>
+        <p:nvSpPr>
+          <p:cNvPr id="25" name="TextBox 24"/>
+          <p:cNvSpPr txBox="1"/>
+          <p:nvPr/>
+        </p:nvSpPr>
+        <p:spPr>
+          <a:xfrm>
+            <a:off x="2331720" y="3355848"/>
+            <a:ext cx="1737360" cy="1188720"/>
+          </a:xfrm>
+          <a:prstGeom prst="rect">
+            <a:avLst/>
+          </a:prstGeom>
+          <a:noFill/>
+        </p:spPr>
+        <p:txBody>
+          <a:bodyPr wrap="square">
+            <a:spAutoFit/>
+          </a:bodyPr>
+          <a:lstStyle/>
+          <a:p>
+            <a:pPr algn="l"/>
+            <a:r>
+              <a:rPr sz="950" b="0" i="0">
+                <a:solidFill>
+                  <a:srgbClr val="CAD3DF"/>
+                </a:solidFill>
+              </a:rPr>
+              <a:t>EA LiDAR DTM ✅</a:t>
+            </a:r>
+          </a:p>
+        </p:txBody>
+      </p:sp>
+      <p:sp>
+        <p:nvSpPr>
+          <p:cNvPr id="26" name="TextBox 25"/>
+          <p:cNvSpPr txBox="1"/>
+          <p:nvPr/>
+        </p:nvSpPr>
+        <p:spPr>
+          <a:xfrm>
+            <a:off x="4160520" y="3355848"/>
+            <a:ext cx="2468880" cy="1188720"/>
+          </a:xfrm>
+          <a:prstGeom prst="rect">
+            <a:avLst/>
+          </a:prstGeom>
+          <a:noFill/>
+        </p:spPr>
+        <p:txBody>
+          <a:bodyPr wrap="square">
+            <a:spAutoFit/>
+          </a:bodyPr>
+          <a:lstStyle/>
+          <a:p>
+            <a:pPr algn="l"/>
+            <a:r>
+              <a:rPr sz="950" b="0" i="0">
+                <a:solidFill>
+                  <a:srgbClr val="CAD3DF"/>
+                </a:solidFill>
+              </a:rPr>
+              <a:t>OSM floor count / default 8 m</a:t>
+            </a:r>
+          </a:p>
+        </p:txBody>
+      </p:sp>
+      <p:sp>
+        <p:nvSpPr>
+          <p:cNvPr id="27" name="TextBox 26"/>
+          <p:cNvSpPr txBox="1"/>
+          <p:nvPr/>
+        </p:nvSpPr>
+        <p:spPr>
+          <a:xfrm>
+            <a:off x="6720840" y="3355848"/>
+            <a:ext cx="1005840" cy="1188720"/>
+          </a:xfrm>
+          <a:prstGeom prst="rect">
+            <a:avLst/>
+          </a:prstGeom>
+          <a:noFill/>
+        </p:spPr>
+        <p:txBody>
+          <a:bodyPr wrap="square">
+            <a:spAutoFit/>
+          </a:bodyPr>
+          <a:lstStyle/>
+          <a:p>
+            <a:pPr algn="ctr"/>
+            <a:r>
+              <a:rPr sz="1400" b="1" i="0">
+                <a:solidFill>
+                  <a:srgbClr val="FF9F1C"/>
+                </a:solidFill>
+              </a:rPr>
+              <a:t>14.1 dB</a:t>
+            </a:r>
+          </a:p>
+        </p:txBody>
+      </p:sp>
+      <p:sp>
+        <p:nvSpPr>
+          <p:cNvPr id="28" name="TextBox 27"/>
+          <p:cNvSpPr txBox="1"/>
+          <p:nvPr/>
+        </p:nvSpPr>
+        <p:spPr>
+          <a:xfrm>
+            <a:off x="7818120" y="3355848"/>
+            <a:ext cx="822960" cy="1188720"/>
+          </a:xfrm>
+          <a:prstGeom prst="rect">
+            <a:avLst/>
+          </a:prstGeom>
+          <a:noFill/>
+        </p:spPr>
+        <p:txBody>
+          <a:bodyPr wrap="square">
+            <a:spAutoFit/>
+          </a:bodyPr>
+          <a:lstStyle/>
+          <a:p>
+            <a:pPr algn="ctr"/>
+            <a:r>
+              <a:rPr sz="1100" b="0" i="0">
+                <a:solidFill>
+                  <a:srgbClr val="FFFFFF"/>
+                </a:solidFill>
+              </a:rPr>
+              <a:t>~0 dB</a:t>
+            </a:r>
+          </a:p>
+        </p:txBody>
+      </p:sp>
+      <p:sp>
+        <p:nvSpPr>
+          <p:cNvPr id="29" name="TextBox 28"/>
+          <p:cNvSpPr txBox="1"/>
+          <p:nvPr/>
+        </p:nvSpPr>
+        <p:spPr>
+          <a:xfrm>
+            <a:off x="8732520" y="3291840"/>
+            <a:ext cx="3291840" cy="1188720"/>
+          </a:xfrm>
+          <a:prstGeom prst="rect">
+            <a:avLst/>
+          </a:prstGeom>
+          <a:noFill/>
+        </p:spPr>
+        <p:txBody>
+          <a:bodyPr wrap="square">
+            <a:spAutoFit/>
+          </a:bodyPr>
+          <a:lstStyle/>
+          <a:p>
+            <a:pPr algn="l"/>
+            <a:r>
+              <a:rPr sz="950" b="0" i="0">
+                <a:solidFill>
+                  <a:srgbClr val="CAD3DF"/>
+                </a:solidFill>
+              </a:rPr>
+              <a:t>Building height estimation
+still introduces ±3–8 dB scatter</a:t>
+            </a:r>
+          </a:p>
+        </p:txBody>
+      </p:sp>
+      <p:sp>
+        <p:nvSpPr>
+          <p:cNvPr id="30" name="Rectangle 29"/>
+          <p:cNvSpPr/>
+          <p:nvPr/>
+        </p:nvSpPr>
+        <p:spPr>
+          <a:xfrm>
+            <a:off x="320040" y="4425696"/>
+            <a:ext cx="45720" cy="1188720"/>
+          </a:xfrm>
+          <a:prstGeom prst="rect">
+            <a:avLst/>
+          </a:prstGeom>
+          <a:solidFill>
+            <a:srgbClr val="00B4D8"/>
+          </a:solidFill>
+          <a:ln>
+            <a:noFill/>
+          </a:ln>
+        </p:spPr>
+        <p:style>
+          <a:lnRef idx="1">
+            <a:schemeClr val="accent1"/>
+          </a:lnRef>
+          <a:fillRef idx="3">
+            <a:schemeClr val="accent1"/>
+          </a:fillRef>
+          <a:effectRef idx="2">
+            <a:schemeClr val="accent1"/>
+          </a:effectRef>
+          <a:fontRef idx="minor">
+            <a:schemeClr val="lt1"/>
+          </a:fontRef>
+        </p:style>
+        <p:txBody>
+          <a:bodyPr rtlCol="0" anchor="ctr"/>
+          <a:lstStyle/>
+          <a:p>
+            <a:pPr algn="ctr"/>
+          </a:p>
+        </p:txBody>
+      </p:sp>
+      <p:sp>
+        <p:nvSpPr>
+          <p:cNvPr id="31" name="Rectangle 30"/>
+          <p:cNvSpPr/>
+          <p:nvPr/>
+        </p:nvSpPr>
+        <p:spPr>
+          <a:xfrm>
+            <a:off x="365760" y="4425696"/>
+            <a:ext cx="11612880" cy="1188720"/>
+          </a:xfrm>
+          <a:prstGeom prst="rect">
+            <a:avLst/>
+          </a:prstGeom>
+          <a:solidFill>
+            <a:srgbClr val="112A40"/>
+          </a:solidFill>
+          <a:ln>
+            <a:noFill/>
+          </a:ln>
+        </p:spPr>
+        <p:style>
+          <a:lnRef idx="1">
+            <a:schemeClr val="accent1"/>
+          </a:lnRef>
+          <a:fillRef idx="3">
+            <a:schemeClr val="accent1"/>
+          </a:fillRef>
+          <a:effectRef idx="2">
+            <a:schemeClr val="accent1"/>
+          </a:effectRef>
+          <a:fontRef idx="minor">
+            <a:schemeClr val="lt1"/>
+          </a:fontRef>
+        </p:style>
+        <p:txBody>
+          <a:bodyPr rtlCol="0" anchor="ctr"/>
+          <a:lstStyle/>
+          <a:p>
+            <a:pPr algn="ctr"/>
+          </a:p>
+        </p:txBody>
+      </p:sp>
+      <p:sp>
+        <p:nvSpPr>
+          <p:cNvPr id="32" name="TextBox 31"/>
+          <p:cNvSpPr txBox="1"/>
+          <p:nvPr/>
+        </p:nvSpPr>
+        <p:spPr>
+          <a:xfrm>
+            <a:off x="393192" y="4654296"/>
+            <a:ext cx="1920240" cy="1188720"/>
+          </a:xfrm>
+          <a:prstGeom prst="rect">
+            <a:avLst/>
+          </a:prstGeom>
+          <a:noFill/>
+        </p:spPr>
+        <p:txBody>
+          <a:bodyPr wrap="square">
+            <a:spAutoFit/>
+          </a:bodyPr>
+          <a:lstStyle/>
+          <a:p>
+            <a:pPr algn="l"/>
+            <a:r>
+              <a:rPr sz="1000" b="1" i="0">
+                <a:solidFill>
+                  <a:srgbClr val="00B4D8"/>
+                </a:solidFill>
+              </a:rPr>
+              <a:t>nDSM heights
+(2.8–6 GHz)</a:t>
+            </a:r>
+          </a:p>
+        </p:txBody>
+      </p:sp>
+      <p:sp>
+        <p:nvSpPr>
+          <p:cNvPr id="33" name="TextBox 32"/>
+          <p:cNvSpPr txBox="1"/>
+          <p:nvPr/>
+        </p:nvSpPr>
+        <p:spPr>
+          <a:xfrm>
+            <a:off x="2331720" y="4654296"/>
+            <a:ext cx="1737360" cy="1188720"/>
+          </a:xfrm>
+          <a:prstGeom prst="rect">
+            <a:avLst/>
+          </a:prstGeom>
+          <a:noFill/>
+        </p:spPr>
+        <p:txBody>
+          <a:bodyPr wrap="square">
+            <a:spAutoFit/>
+          </a:bodyPr>
+          <a:lstStyle/>
+          <a:p>
+            <a:pPr algn="l"/>
+            <a:r>
+              <a:rPr sz="950" b="0" i="0">
+                <a:solidFill>
+                  <a:srgbClr val="CAD3DF"/>
+                </a:solidFill>
+              </a:rPr>
+              <a:t>EA LiDAR DTM ✅</a:t>
+            </a:r>
+          </a:p>
+        </p:txBody>
+      </p:sp>
+      <p:sp>
+        <p:nvSpPr>
+          <p:cNvPr id="34" name="TextBox 33"/>
+          <p:cNvSpPr txBox="1"/>
+          <p:nvPr/>
+        </p:nvSpPr>
+        <p:spPr>
+          <a:xfrm>
+            <a:off x="4160520" y="4654296"/>
+            <a:ext cx="2468880" cy="1188720"/>
+          </a:xfrm>
+          <a:prstGeom prst="rect">
+            <a:avLst/>
+          </a:prstGeom>
+          <a:noFill/>
+        </p:spPr>
+        <p:txBody>
+          <a:bodyPr wrap="square">
+            <a:spAutoFit/>
+          </a:bodyPr>
+          <a:lstStyle/>
+          <a:p>
+            <a:pPr algn="l"/>
+            <a:r>
+              <a:rPr sz="950" b="0" i="0">
+                <a:solidFill>
+                  <a:srgbClr val="CAD3DF"/>
+                </a:solidFill>
+              </a:rPr>
+              <a:t>LiDAR nDSM (accurate AGL)</a:t>
+            </a:r>
+          </a:p>
+        </p:txBody>
+      </p:sp>
+      <p:sp>
+        <p:nvSpPr>
+          <p:cNvPr id="35" name="TextBox 34"/>
+          <p:cNvSpPr txBox="1"/>
+          <p:nvPr/>
+        </p:nvSpPr>
+        <p:spPr>
+          <a:xfrm>
+            <a:off x="6720840" y="4654296"/>
+            <a:ext cx="1005840" cy="1188720"/>
+          </a:xfrm>
+          <a:prstGeom prst="rect">
+            <a:avLst/>
+          </a:prstGeom>
+          <a:noFill/>
+        </p:spPr>
+        <p:txBody>
+          <a:bodyPr wrap="square">
+            <a:spAutoFit/>
+          </a:bodyPr>
+          <a:lstStyle/>
+          <a:p>
+            <a:pPr algn="ctr"/>
+            <a:r>
+              <a:rPr sz="1400" b="1" i="0">
+                <a:solidFill>
+                  <a:srgbClr val="00B4D8"/>
+                </a:solidFill>
+              </a:rPr>
+              <a:t>Used in
+2.8 GHz scene</a:t>
+            </a:r>
+          </a:p>
+        </p:txBody>
+      </p:sp>
+      <p:sp>
+        <p:nvSpPr>
+          <p:cNvPr id="36" name="TextBox 35"/>
+          <p:cNvSpPr txBox="1"/>
+          <p:nvPr/>
+        </p:nvSpPr>
+        <p:spPr>
+          <a:xfrm>
+            <a:off x="7818120" y="4654296"/>
+            <a:ext cx="822960" cy="1188720"/>
+          </a:xfrm>
+          <a:prstGeom prst="rect">
+            <a:avLst/>
+          </a:prstGeom>
+          <a:noFill/>
+        </p:spPr>
+        <p:txBody>
+          <a:bodyPr wrap="square">
+            <a:spAutoFit/>
+          </a:bodyPr>
+          <a:lstStyle/>
+          <a:p>
+            <a:pPr algn="ctr"/>
+            <a:r>
+              <a:rPr sz="1100" b="0" i="0">
+                <a:solidFill>
+                  <a:srgbClr val="FFFFFF"/>
+                </a:solidFill>
+              </a:rPr>
+              <a:t>—</a:t>
+            </a:r>
+          </a:p>
+        </p:txBody>
+      </p:sp>
+      <p:sp>
+        <p:nvSpPr>
+          <p:cNvPr id="37" name="TextBox 36"/>
+          <p:cNvSpPr txBox="1"/>
+          <p:nvPr/>
+        </p:nvSpPr>
+        <p:spPr>
+          <a:xfrm>
+            <a:off x="8732520" y="4590288"/>
+            <a:ext cx="3291840" cy="1188720"/>
+          </a:xfrm>
+          <a:prstGeom prst="rect">
+            <a:avLst/>
+          </a:prstGeom>
+          <a:noFill/>
+        </p:spPr>
+        <p:txBody>
+          <a:bodyPr wrap="square">
+            <a:spAutoFit/>
+          </a:bodyPr>
+          <a:lstStyle/>
+          <a:p>
+            <a:pPr algn="l"/>
+            <a:r>
+              <a:rPr sz="950" b="0" i="0">
+                <a:solidFill>
+                  <a:srgbClr val="CAD3DF"/>
+                </a:solidFill>
+              </a:rPr>
+              <a:t>Rooftop equip added —
+only valid at higher frequencies</a:t>
+            </a:r>
+          </a:p>
+        </p:txBody>
+      </p:sp>
+      <p:sp>
+        <p:nvSpPr>
+          <p:cNvPr id="38" name="Rectangle 37"/>
+          <p:cNvSpPr/>
+          <p:nvPr/>
+        </p:nvSpPr>
+        <p:spPr>
+          <a:xfrm>
+            <a:off x="320040" y="5577840"/>
+            <a:ext cx="11612880" cy="868680"/>
+          </a:xfrm>
+          <a:prstGeom prst="rect">
+            <a:avLst/>
+          </a:prstGeom>
+          <a:solidFill>
+            <a:srgbClr val="112A40"/>
+          </a:solidFill>
+          <a:ln>
+            <a:noFill/>
+          </a:ln>
+        </p:spPr>
+        <p:style>
+          <a:lnRef idx="1">
+            <a:schemeClr val="accent1"/>
+          </a:lnRef>
+          <a:fillRef idx="3">
+            <a:schemeClr val="accent1"/>
+          </a:fillRef>
+          <a:effectRef idx="2">
+            <a:schemeClr val="accent1"/>
+          </a:effectRef>
+          <a:fontRef idx="minor">
+            <a:schemeClr val="lt1"/>
+          </a:fontRef>
+        </p:style>
+        <p:txBody>
+          <a:bodyPr rtlCol="0" anchor="ctr"/>
+          <a:lstStyle/>
+          <a:p>
+            <a:pPr algn="ctr"/>
+          </a:p>
+        </p:txBody>
+      </p:sp>
+      <p:sp>
+        <p:nvSpPr>
+          <p:cNvPr id="39" name="Rectangle 38"/>
+          <p:cNvSpPr/>
+          <p:nvPr/>
+        </p:nvSpPr>
+        <p:spPr>
+          <a:xfrm>
+            <a:off x="320040" y="5577840"/>
+            <a:ext cx="11612880" cy="45720"/>
+          </a:xfrm>
+          <a:prstGeom prst="rect">
+            <a:avLst/>
+          </a:prstGeom>
+          <a:solidFill>
+            <a:srgbClr val="2DCB7F"/>
+          </a:solidFill>
+          <a:ln>
+            <a:noFill/>
+          </a:ln>
+        </p:spPr>
+        <p:style>
+          <a:lnRef idx="1">
+            <a:schemeClr val="accent1"/>
+          </a:lnRef>
+          <a:fillRef idx="3">
+            <a:schemeClr val="accent1"/>
+          </a:fillRef>
+          <a:effectRef idx="2">
+            <a:schemeClr val="accent1"/>
+          </a:effectRef>
+          <a:fontRef idx="minor">
+            <a:schemeClr val="lt1"/>
+          </a:fontRef>
+        </p:style>
+        <p:txBody>
+          <a:bodyPr rtlCol="0" anchor="ctr"/>
+          <a:lstStyle/>
+          <a:p>
+            <a:pPr algn="ctr"/>
+          </a:p>
+        </p:txBody>
+      </p:sp>
+      <p:sp>
+        <p:nvSpPr>
+          <p:cNvPr id="40" name="TextBox 39"/>
+          <p:cNvSpPr txBox="1"/>
+          <p:nvPr/>
+        </p:nvSpPr>
+        <p:spPr>
+          <a:xfrm>
+            <a:off x="548640" y="5687568"/>
+            <a:ext cx="11155680" cy="640080"/>
+          </a:xfrm>
+          <a:prstGeom prst="rect">
+            <a:avLst/>
+          </a:prstGeom>
+          <a:noFill/>
+        </p:spPr>
+        <p:txBody>
+          <a:bodyPr wrap="square">
+            <a:spAutoFit/>
+          </a:bodyPr>
+          <a:lstStyle/>
+          <a:p>
+            <a:pPr algn="l"/>
+            <a:r>
+              <a:rPr sz="1100" b="0" i="0">
+                <a:solidFill>
+                  <a:srgbClr val="FFFFFF"/>
+                </a:solidFill>
+              </a:rPr>
+              <a:t>Key Finding:  DTM terrain alone reduces RMSE by 5.5 dB (19.6 → 14.1 dB).  Bias drops from −4.4 dB → ~0 dB.  Terrain is essential — building height remains the next bottleneck.</a:t>
             </a:r>
           </a:p>
         </p:txBody>

--- a/FYP_RayTracing_Presentation.pptx
+++ b/FYP_RayTracing_Presentation.pptx
@@ -16,6 +16,8 @@
     <p:sldId id="264" r:id="rId15"/>
     <p:sldId id="265" r:id="rId16"/>
     <p:sldId id="266" r:id="rId17"/>
+    <p:sldId id="267" r:id="rId18"/>
+    <p:sldId id="268" r:id="rId19"/>
   </p:sldIdLst>
   <p:sldSz cx="12188952" cy="6858000" type="screen4x3"/>
   <p:notesSz cx="6858000" cy="9144000"/>
@@ -7415,6 +7417,5346 @@
                 </a:solidFill>
               </a:rPr>
               <a:t>1 receiver per solve (NVLabs)</a:t>
+            </a:r>
+          </a:p>
+        </p:txBody>
+      </p:sp>
+    </p:spTree>
+  </p:cSld>
+  <p:clrMapOvr>
+    <a:masterClrMapping/>
+  </p:clrMapOvr>
+</p:sld>
+</file>
+
+<file path=ppt/slides/slide12.xml><?xml version="1.0" encoding="utf-8"?>
+<p:sld xmlns:a="http://schemas.openxmlformats.org/drawingml/2006/main" xmlns:p="http://schemas.openxmlformats.org/presentationml/2006/main" xmlns:r="http://schemas.openxmlformats.org/officeDocument/2006/relationships">
+  <p:cSld>
+    <p:bg>
+      <p:bgPr>
+        <a:solidFill>
+          <a:srgbClr val="0D1B2A"/>
+        </a:solidFill>
+        <a:effectLst/>
+      </p:bgPr>
+    </p:bg>
+    <p:spTree>
+      <p:nvGrpSpPr>
+        <p:cNvPr id="1" name=""/>
+        <p:cNvGrpSpPr/>
+        <p:nvPr/>
+      </p:nvGrpSpPr>
+      <p:grpSpPr/>
+      <p:sp>
+        <p:nvSpPr>
+          <p:cNvPr id="2" name="Rectangle 1"/>
+          <p:cNvSpPr/>
+          <p:nvPr/>
+        </p:nvSpPr>
+        <p:spPr>
+          <a:xfrm>
+            <a:off x="0" y="73152"/>
+            <a:ext cx="12188952" cy="54864"/>
+          </a:xfrm>
+          <a:prstGeom prst="rect">
+            <a:avLst/>
+          </a:prstGeom>
+          <a:solidFill>
+            <a:srgbClr val="00B4D8"/>
+          </a:solidFill>
+          <a:ln>
+            <a:noFill/>
+          </a:ln>
+        </p:spPr>
+        <p:style>
+          <a:lnRef idx="1">
+            <a:schemeClr val="accent1"/>
+          </a:lnRef>
+          <a:fillRef idx="3">
+            <a:schemeClr val="accent1"/>
+          </a:fillRef>
+          <a:effectRef idx="2">
+            <a:schemeClr val="accent1"/>
+          </a:effectRef>
+          <a:fontRef idx="minor">
+            <a:schemeClr val="lt1"/>
+          </a:fontRef>
+        </p:style>
+        <p:txBody>
+          <a:bodyPr rtlCol="0" anchor="ctr"/>
+          <a:lstStyle/>
+          <a:p>
+            <a:pPr algn="ctr"/>
+          </a:p>
+        </p:txBody>
+      </p:sp>
+      <p:sp>
+        <p:nvSpPr>
+          <p:cNvPr id="3" name="TextBox 2"/>
+          <p:cNvSpPr txBox="1"/>
+          <p:nvPr/>
+        </p:nvSpPr>
+        <p:spPr>
+          <a:xfrm>
+            <a:off x="320040" y="201168"/>
+            <a:ext cx="3657600" cy="256032"/>
+          </a:xfrm>
+          <a:prstGeom prst="rect">
+            <a:avLst/>
+          </a:prstGeom>
+          <a:noFill/>
+        </p:spPr>
+        <p:txBody>
+          <a:bodyPr wrap="square">
+            <a:spAutoFit/>
+          </a:bodyPr>
+          <a:lstStyle/>
+          <a:p>
+            <a:pPr algn="l"/>
+            <a:r>
+              <a:rPr sz="800" b="1" i="0">
+                <a:solidFill>
+                  <a:srgbClr val="00B4D8"/>
+                </a:solidFill>
+              </a:rPr>
+              <a:t>OSM FEATURES</a:t>
+            </a:r>
+          </a:p>
+        </p:txBody>
+      </p:sp>
+      <p:sp>
+        <p:nvSpPr>
+          <p:cNvPr id="4" name="TextBox 3"/>
+          <p:cNvSpPr txBox="1"/>
+          <p:nvPr/>
+        </p:nvSpPr>
+        <p:spPr>
+          <a:xfrm>
+            <a:off x="10972800" y="6492240"/>
+            <a:ext cx="1097280" cy="320040"/>
+          </a:xfrm>
+          <a:prstGeom prst="rect">
+            <a:avLst/>
+          </a:prstGeom>
+          <a:noFill/>
+        </p:spPr>
+        <p:txBody>
+          <a:bodyPr wrap="square">
+            <a:spAutoFit/>
+          </a:bodyPr>
+          <a:lstStyle/>
+          <a:p>
+            <a:pPr algn="r"/>
+            <a:r>
+              <a:rPr sz="900" b="0" i="0">
+                <a:solidFill>
+                  <a:srgbClr val="CAD3DF"/>
+                </a:solidFill>
+              </a:rPr>
+              <a:t>12 / 12</a:t>
+            </a:r>
+          </a:p>
+        </p:txBody>
+      </p:sp>
+      <p:sp>
+        <p:nvSpPr>
+          <p:cNvPr id="5" name="TextBox 4"/>
+          <p:cNvSpPr txBox="1"/>
+          <p:nvPr/>
+        </p:nvSpPr>
+        <p:spPr>
+          <a:xfrm>
+            <a:off x="411480" y="457200"/>
+            <a:ext cx="11430000" cy="640080"/>
+          </a:xfrm>
+          <a:prstGeom prst="rect">
+            <a:avLst/>
+          </a:prstGeom>
+          <a:noFill/>
+        </p:spPr>
+        <p:txBody>
+          <a:bodyPr wrap="square">
+            <a:spAutoFit/>
+          </a:bodyPr>
+          <a:lstStyle/>
+          <a:p>
+            <a:pPr algn="l"/>
+            <a:r>
+              <a:rPr sz="2600" b="1" i="0">
+                <a:solidFill>
+                  <a:srgbClr val="FFFFFF"/>
+                </a:solidFill>
+              </a:rPr>
+              <a:t>OSM Features Downloaded — Role in Propagation Physics</a:t>
+            </a:r>
+          </a:p>
+        </p:txBody>
+      </p:sp>
+      <p:sp>
+        <p:nvSpPr>
+          <p:cNvPr id="6" name="Rectangle 5"/>
+          <p:cNvSpPr/>
+          <p:nvPr/>
+        </p:nvSpPr>
+        <p:spPr>
+          <a:xfrm>
+            <a:off x="411480" y="1078992"/>
+            <a:ext cx="11338560" cy="16459"/>
+          </a:xfrm>
+          <a:prstGeom prst="rect">
+            <a:avLst/>
+          </a:prstGeom>
+          <a:solidFill>
+            <a:srgbClr val="1E3A52"/>
+          </a:solidFill>
+          <a:ln>
+            <a:noFill/>
+          </a:ln>
+        </p:spPr>
+        <p:style>
+          <a:lnRef idx="1">
+            <a:schemeClr val="accent1"/>
+          </a:lnRef>
+          <a:fillRef idx="3">
+            <a:schemeClr val="accent1"/>
+          </a:fillRef>
+          <a:effectRef idx="2">
+            <a:schemeClr val="accent1"/>
+          </a:effectRef>
+          <a:fontRef idx="minor">
+            <a:schemeClr val="lt1"/>
+          </a:fontRef>
+        </p:style>
+        <p:txBody>
+          <a:bodyPr rtlCol="0" anchor="ctr"/>
+          <a:lstStyle/>
+          <a:p>
+            <a:pPr algn="ctr"/>
+          </a:p>
+        </p:txBody>
+      </p:sp>
+      <p:sp>
+        <p:nvSpPr>
+          <p:cNvPr id="7" name="Rectangle 6"/>
+          <p:cNvSpPr/>
+          <p:nvPr/>
+        </p:nvSpPr>
+        <p:spPr>
+          <a:xfrm>
+            <a:off x="320040" y="1234440"/>
+            <a:ext cx="5577840" cy="5212080"/>
+          </a:xfrm>
+          <a:prstGeom prst="rect">
+            <a:avLst/>
+          </a:prstGeom>
+          <a:solidFill>
+            <a:srgbClr val="112A40"/>
+          </a:solidFill>
+          <a:ln>
+            <a:noFill/>
+          </a:ln>
+        </p:spPr>
+        <p:style>
+          <a:lnRef idx="1">
+            <a:schemeClr val="accent1"/>
+          </a:lnRef>
+          <a:fillRef idx="3">
+            <a:schemeClr val="accent1"/>
+          </a:fillRef>
+          <a:effectRef idx="2">
+            <a:schemeClr val="accent1"/>
+          </a:effectRef>
+          <a:fontRef idx="minor">
+            <a:schemeClr val="lt1"/>
+          </a:fontRef>
+        </p:style>
+        <p:txBody>
+          <a:bodyPr rtlCol="0" anchor="ctr"/>
+          <a:lstStyle/>
+          <a:p>
+            <a:pPr algn="ctr"/>
+          </a:p>
+        </p:txBody>
+      </p:sp>
+      <p:sp>
+        <p:nvSpPr>
+          <p:cNvPr id="8" name="Rectangle 7"/>
+          <p:cNvSpPr/>
+          <p:nvPr/>
+        </p:nvSpPr>
+        <p:spPr>
+          <a:xfrm>
+            <a:off x="320040" y="1234440"/>
+            <a:ext cx="5577840" cy="54864"/>
+          </a:xfrm>
+          <a:prstGeom prst="rect">
+            <a:avLst/>
+          </a:prstGeom>
+          <a:solidFill>
+            <a:srgbClr val="00B4D8"/>
+          </a:solidFill>
+          <a:ln>
+            <a:noFill/>
+          </a:ln>
+        </p:spPr>
+        <p:style>
+          <a:lnRef idx="1">
+            <a:schemeClr val="accent1"/>
+          </a:lnRef>
+          <a:fillRef idx="3">
+            <a:schemeClr val="accent1"/>
+          </a:fillRef>
+          <a:effectRef idx="2">
+            <a:schemeClr val="accent1"/>
+          </a:effectRef>
+          <a:fontRef idx="minor">
+            <a:schemeClr val="lt1"/>
+          </a:fontRef>
+        </p:style>
+        <p:txBody>
+          <a:bodyPr rtlCol="0" anchor="ctr"/>
+          <a:lstStyle/>
+          <a:p>
+            <a:pPr algn="ctr"/>
+          </a:p>
+        </p:txBody>
+      </p:sp>
+      <p:sp>
+        <p:nvSpPr>
+          <p:cNvPr id="9" name="TextBox 8"/>
+          <p:cNvSpPr txBox="1"/>
+          <p:nvPr/>
+        </p:nvSpPr>
+        <p:spPr>
+          <a:xfrm>
+            <a:off x="457200" y="1371600"/>
+            <a:ext cx="5303520" cy="365760"/>
+          </a:xfrm>
+          <a:prstGeom prst="rect">
+            <a:avLst/>
+          </a:prstGeom>
+          <a:noFill/>
+        </p:spPr>
+        <p:txBody>
+          <a:bodyPr wrap="square">
+            <a:spAutoFit/>
+          </a:bodyPr>
+          <a:lstStyle/>
+          <a:p>
+            <a:pPr algn="l"/>
+            <a:r>
+              <a:rPr sz="1200" b="1" i="0">
+                <a:solidFill>
+                  <a:srgbClr val="00B4D8"/>
+                </a:solidFill>
+              </a:rPr>
+              <a:t>Feature Classes Downloaded</a:t>
+            </a:r>
+          </a:p>
+        </p:txBody>
+      </p:sp>
+      <p:sp>
+        <p:nvSpPr>
+          <p:cNvPr id="10" name="Rectangle 9"/>
+          <p:cNvSpPr/>
+          <p:nvPr/>
+        </p:nvSpPr>
+        <p:spPr>
+          <a:xfrm>
+            <a:off x="411480" y="1956815"/>
+            <a:ext cx="36576" cy="274320"/>
+          </a:xfrm>
+          <a:prstGeom prst="rect">
+            <a:avLst/>
+          </a:prstGeom>
+          <a:solidFill>
+            <a:srgbClr val="00B4D8"/>
+          </a:solidFill>
+          <a:ln>
+            <a:noFill/>
+          </a:ln>
+        </p:spPr>
+        <p:style>
+          <a:lnRef idx="1">
+            <a:schemeClr val="accent1"/>
+          </a:lnRef>
+          <a:fillRef idx="3">
+            <a:schemeClr val="accent1"/>
+          </a:fillRef>
+          <a:effectRef idx="2">
+            <a:schemeClr val="accent1"/>
+          </a:effectRef>
+          <a:fontRef idx="minor">
+            <a:schemeClr val="lt1"/>
+          </a:fontRef>
+        </p:style>
+        <p:txBody>
+          <a:bodyPr rtlCol="0" anchor="ctr"/>
+          <a:lstStyle/>
+          <a:p>
+            <a:pPr algn="ctr"/>
+          </a:p>
+        </p:txBody>
+      </p:sp>
+      <p:sp>
+        <p:nvSpPr>
+          <p:cNvPr id="11" name="TextBox 10"/>
+          <p:cNvSpPr txBox="1"/>
+          <p:nvPr/>
+        </p:nvSpPr>
+        <p:spPr>
+          <a:xfrm>
+            <a:off x="502920" y="1874519"/>
+            <a:ext cx="1417320" cy="384048"/>
+          </a:xfrm>
+          <a:prstGeom prst="rect">
+            <a:avLst/>
+          </a:prstGeom>
+          <a:noFill/>
+        </p:spPr>
+        <p:txBody>
+          <a:bodyPr wrap="square">
+            <a:spAutoFit/>
+          </a:bodyPr>
+          <a:lstStyle/>
+          <a:p>
+            <a:pPr algn="l"/>
+            <a:r>
+              <a:rPr sz="950" b="1" i="0">
+                <a:solidFill>
+                  <a:srgbClr val="00B4D8"/>
+                </a:solidFill>
+              </a:rPr>
+              <a:t>Buildings</a:t>
+            </a:r>
+          </a:p>
+        </p:txBody>
+      </p:sp>
+      <p:sp>
+        <p:nvSpPr>
+          <p:cNvPr id="12" name="TextBox 11"/>
+          <p:cNvSpPr txBox="1"/>
+          <p:nvPr/>
+        </p:nvSpPr>
+        <p:spPr>
+          <a:xfrm>
+            <a:off x="1920240" y="1874519"/>
+            <a:ext cx="1737360" cy="384048"/>
+          </a:xfrm>
+          <a:prstGeom prst="rect">
+            <a:avLst/>
+          </a:prstGeom>
+          <a:noFill/>
+        </p:spPr>
+        <p:txBody>
+          <a:bodyPr wrap="square">
+            <a:spAutoFit/>
+          </a:bodyPr>
+          <a:lstStyle/>
+          <a:p>
+            <a:pPr algn="l"/>
+            <a:r>
+              <a:rPr sz="850" b="0" i="1">
+                <a:solidFill>
+                  <a:srgbClr val="CAD3DF"/>
+                </a:solidFill>
+              </a:rPr>
+              <a:t>building=*</a:t>
+            </a:r>
+          </a:p>
+        </p:txBody>
+      </p:sp>
+      <p:sp>
+        <p:nvSpPr>
+          <p:cNvPr id="13" name="TextBox 12"/>
+          <p:cNvSpPr txBox="1"/>
+          <p:nvPr/>
+        </p:nvSpPr>
+        <p:spPr>
+          <a:xfrm>
+            <a:off x="3657600" y="1874519"/>
+            <a:ext cx="594360" cy="384048"/>
+          </a:xfrm>
+          <a:prstGeom prst="rect">
+            <a:avLst/>
+          </a:prstGeom>
+          <a:noFill/>
+        </p:spPr>
+        <p:txBody>
+          <a:bodyPr wrap="square">
+            <a:spAutoFit/>
+          </a:bodyPr>
+          <a:lstStyle/>
+          <a:p>
+            <a:pPr algn="ctr"/>
+            <a:r>
+              <a:rPr sz="950" b="0" i="0">
+                <a:solidFill>
+                  <a:srgbClr val="FFFFFF"/>
+                </a:solidFill>
+              </a:rPr>
+              <a:t>52 248</a:t>
+            </a:r>
+          </a:p>
+        </p:txBody>
+      </p:sp>
+      <p:sp>
+        <p:nvSpPr>
+          <p:cNvPr id="14" name="TextBox 13"/>
+          <p:cNvSpPr txBox="1"/>
+          <p:nvPr/>
+        </p:nvSpPr>
+        <p:spPr>
+          <a:xfrm>
+            <a:off x="4251960" y="1874519"/>
+            <a:ext cx="1508760" cy="384048"/>
+          </a:xfrm>
+          <a:prstGeom prst="rect">
+            <a:avLst/>
+          </a:prstGeom>
+          <a:noFill/>
+        </p:spPr>
+        <p:txBody>
+          <a:bodyPr wrap="square">
+            <a:spAutoFit/>
+          </a:bodyPr>
+          <a:lstStyle/>
+          <a:p>
+            <a:pPr algn="l"/>
+            <a:r>
+              <a:rPr sz="900" b="0" i="0">
+                <a:solidFill>
+                  <a:srgbClr val="90E0EF"/>
+                </a:solidFill>
+              </a:rPr>
+              <a:t>Brick/Concrete/Glass/Metal/Wood</a:t>
+            </a:r>
+          </a:p>
+        </p:txBody>
+      </p:sp>
+      <p:sp>
+        <p:nvSpPr>
+          <p:cNvPr id="15" name="Rectangle 14"/>
+          <p:cNvSpPr/>
+          <p:nvPr/>
+        </p:nvSpPr>
+        <p:spPr>
+          <a:xfrm>
+            <a:off x="411480" y="2432303"/>
+            <a:ext cx="36576" cy="274320"/>
+          </a:xfrm>
+          <a:prstGeom prst="rect">
+            <a:avLst/>
+          </a:prstGeom>
+          <a:solidFill>
+            <a:srgbClr val="CAD3DF"/>
+          </a:solidFill>
+          <a:ln>
+            <a:noFill/>
+          </a:ln>
+        </p:spPr>
+        <p:style>
+          <a:lnRef idx="1">
+            <a:schemeClr val="accent1"/>
+          </a:lnRef>
+          <a:fillRef idx="3">
+            <a:schemeClr val="accent1"/>
+          </a:fillRef>
+          <a:effectRef idx="2">
+            <a:schemeClr val="accent1"/>
+          </a:effectRef>
+          <a:fontRef idx="minor">
+            <a:schemeClr val="lt1"/>
+          </a:fontRef>
+        </p:style>
+        <p:txBody>
+          <a:bodyPr rtlCol="0" anchor="ctr"/>
+          <a:lstStyle/>
+          <a:p>
+            <a:pPr algn="ctr"/>
+          </a:p>
+        </p:txBody>
+      </p:sp>
+      <p:sp>
+        <p:nvSpPr>
+          <p:cNvPr id="16" name="TextBox 15"/>
+          <p:cNvSpPr txBox="1"/>
+          <p:nvPr/>
+        </p:nvSpPr>
+        <p:spPr>
+          <a:xfrm>
+            <a:off x="502920" y="2350007"/>
+            <a:ext cx="1417320" cy="384048"/>
+          </a:xfrm>
+          <a:prstGeom prst="rect">
+            <a:avLst/>
+          </a:prstGeom>
+          <a:noFill/>
+        </p:spPr>
+        <p:txBody>
+          <a:bodyPr wrap="square">
+            <a:spAutoFit/>
+          </a:bodyPr>
+          <a:lstStyle/>
+          <a:p>
+            <a:pPr algn="l"/>
+            <a:r>
+              <a:rPr sz="950" b="1" i="0">
+                <a:solidFill>
+                  <a:srgbClr val="CAD3DF"/>
+                </a:solidFill>
+              </a:rPr>
+              <a:t>Roads</a:t>
+            </a:r>
+          </a:p>
+        </p:txBody>
+      </p:sp>
+      <p:sp>
+        <p:nvSpPr>
+          <p:cNvPr id="17" name="TextBox 16"/>
+          <p:cNvSpPr txBox="1"/>
+          <p:nvPr/>
+        </p:nvSpPr>
+        <p:spPr>
+          <a:xfrm>
+            <a:off x="1920240" y="2350007"/>
+            <a:ext cx="1737360" cy="384048"/>
+          </a:xfrm>
+          <a:prstGeom prst="rect">
+            <a:avLst/>
+          </a:prstGeom>
+          <a:noFill/>
+        </p:spPr>
+        <p:txBody>
+          <a:bodyPr wrap="square">
+            <a:spAutoFit/>
+          </a:bodyPr>
+          <a:lstStyle/>
+          <a:p>
+            <a:pPr algn="l"/>
+            <a:r>
+              <a:rPr sz="850" b="0" i="1">
+                <a:solidFill>
+                  <a:srgbClr val="CAD3DF"/>
+                </a:solidFill>
+              </a:rPr>
+              <a:t>highway=*</a:t>
+            </a:r>
+          </a:p>
+        </p:txBody>
+      </p:sp>
+      <p:sp>
+        <p:nvSpPr>
+          <p:cNvPr id="18" name="TextBox 17"/>
+          <p:cNvSpPr txBox="1"/>
+          <p:nvPr/>
+        </p:nvSpPr>
+        <p:spPr>
+          <a:xfrm>
+            <a:off x="3657600" y="2350007"/>
+            <a:ext cx="594360" cy="384048"/>
+          </a:xfrm>
+          <a:prstGeom prst="rect">
+            <a:avLst/>
+          </a:prstGeom>
+          <a:noFill/>
+        </p:spPr>
+        <p:txBody>
+          <a:bodyPr wrap="square">
+            <a:spAutoFit/>
+          </a:bodyPr>
+          <a:lstStyle/>
+          <a:p>
+            <a:pPr algn="ctr"/>
+            <a:r>
+              <a:rPr sz="950" b="0" i="0">
+                <a:solidFill>
+                  <a:srgbClr val="FFFFFF"/>
+                </a:solidFill>
+              </a:rPr>
+              <a:t>Full net</a:t>
+            </a:r>
+          </a:p>
+        </p:txBody>
+      </p:sp>
+      <p:sp>
+        <p:nvSpPr>
+          <p:cNvPr id="19" name="TextBox 18"/>
+          <p:cNvSpPr txBox="1"/>
+          <p:nvPr/>
+        </p:nvSpPr>
+        <p:spPr>
+          <a:xfrm>
+            <a:off x="4251960" y="2350007"/>
+            <a:ext cx="1508760" cy="384048"/>
+          </a:xfrm>
+          <a:prstGeom prst="rect">
+            <a:avLst/>
+          </a:prstGeom>
+          <a:noFill/>
+        </p:spPr>
+        <p:txBody>
+          <a:bodyPr wrap="square">
+            <a:spAutoFit/>
+          </a:bodyPr>
+          <a:lstStyle/>
+          <a:p>
+            <a:pPr algn="l"/>
+            <a:r>
+              <a:rPr sz="900" b="0" i="0">
+                <a:solidFill>
+                  <a:srgbClr val="90E0EF"/>
+                </a:solidFill>
+              </a:rPr>
+              <a:t>Asphalt</a:t>
+            </a:r>
+          </a:p>
+        </p:txBody>
+      </p:sp>
+      <p:sp>
+        <p:nvSpPr>
+          <p:cNvPr id="20" name="Rectangle 19"/>
+          <p:cNvSpPr/>
+          <p:nvPr/>
+        </p:nvSpPr>
+        <p:spPr>
+          <a:xfrm>
+            <a:off x="411480" y="2907791"/>
+            <a:ext cx="36576" cy="274320"/>
+          </a:xfrm>
+          <a:prstGeom prst="rect">
+            <a:avLst/>
+          </a:prstGeom>
+          <a:solidFill>
+            <a:srgbClr val="2DCB7F"/>
+          </a:solidFill>
+          <a:ln>
+            <a:noFill/>
+          </a:ln>
+        </p:spPr>
+        <p:style>
+          <a:lnRef idx="1">
+            <a:schemeClr val="accent1"/>
+          </a:lnRef>
+          <a:fillRef idx="3">
+            <a:schemeClr val="accent1"/>
+          </a:fillRef>
+          <a:effectRef idx="2">
+            <a:schemeClr val="accent1"/>
+          </a:effectRef>
+          <a:fontRef idx="minor">
+            <a:schemeClr val="lt1"/>
+          </a:fontRef>
+        </p:style>
+        <p:txBody>
+          <a:bodyPr rtlCol="0" anchor="ctr"/>
+          <a:lstStyle/>
+          <a:p>
+            <a:pPr algn="ctr"/>
+          </a:p>
+        </p:txBody>
+      </p:sp>
+      <p:sp>
+        <p:nvSpPr>
+          <p:cNvPr id="21" name="TextBox 20"/>
+          <p:cNvSpPr txBox="1"/>
+          <p:nvPr/>
+        </p:nvSpPr>
+        <p:spPr>
+          <a:xfrm>
+            <a:off x="502920" y="2825495"/>
+            <a:ext cx="1417320" cy="384048"/>
+          </a:xfrm>
+          <a:prstGeom prst="rect">
+            <a:avLst/>
+          </a:prstGeom>
+          <a:noFill/>
+        </p:spPr>
+        <p:txBody>
+          <a:bodyPr wrap="square">
+            <a:spAutoFit/>
+          </a:bodyPr>
+          <a:lstStyle/>
+          <a:p>
+            <a:pPr algn="l"/>
+            <a:r>
+              <a:rPr sz="950" b="1" i="0">
+                <a:solidFill>
+                  <a:srgbClr val="2DCB7F"/>
+                </a:solidFill>
+              </a:rPr>
+              <a:t>Trees/Vegetation</a:t>
+            </a:r>
+          </a:p>
+        </p:txBody>
+      </p:sp>
+      <p:sp>
+        <p:nvSpPr>
+          <p:cNvPr id="22" name="TextBox 21"/>
+          <p:cNvSpPr txBox="1"/>
+          <p:nvPr/>
+        </p:nvSpPr>
+        <p:spPr>
+          <a:xfrm>
+            <a:off x="1920240" y="2825495"/>
+            <a:ext cx="1737360" cy="384048"/>
+          </a:xfrm>
+          <a:prstGeom prst="rect">
+            <a:avLst/>
+          </a:prstGeom>
+          <a:noFill/>
+        </p:spPr>
+        <p:txBody>
+          <a:bodyPr wrap="square">
+            <a:spAutoFit/>
+          </a:bodyPr>
+          <a:lstStyle/>
+          <a:p>
+            <a:pPr algn="l"/>
+            <a:r>
+              <a:rPr sz="850" b="0" i="1">
+                <a:solidFill>
+                  <a:srgbClr val="CAD3DF"/>
+                </a:solidFill>
+              </a:rPr>
+              <a:t>natural=tree, landuse=forest</a:t>
+            </a:r>
+          </a:p>
+        </p:txBody>
+      </p:sp>
+      <p:sp>
+        <p:nvSpPr>
+          <p:cNvPr id="23" name="TextBox 22"/>
+          <p:cNvSpPr txBox="1"/>
+          <p:nvPr/>
+        </p:nvSpPr>
+        <p:spPr>
+          <a:xfrm>
+            <a:off x="3657600" y="2825495"/>
+            <a:ext cx="594360" cy="384048"/>
+          </a:xfrm>
+          <a:prstGeom prst="rect">
+            <a:avLst/>
+          </a:prstGeom>
+          <a:noFill/>
+        </p:spPr>
+        <p:txBody>
+          <a:bodyPr wrap="square">
+            <a:spAutoFit/>
+          </a:bodyPr>
+          <a:lstStyle/>
+          <a:p>
+            <a:pPr algn="ctr"/>
+            <a:r>
+              <a:rPr sz="950" b="0" i="0">
+                <a:solidFill>
+                  <a:srgbClr val="FFFFFF"/>
+                </a:solidFill>
+              </a:rPr>
+              <a:t>~273</a:t>
+            </a:r>
+          </a:p>
+        </p:txBody>
+      </p:sp>
+      <p:sp>
+        <p:nvSpPr>
+          <p:cNvPr id="24" name="TextBox 23"/>
+          <p:cNvSpPr txBox="1"/>
+          <p:nvPr/>
+        </p:nvSpPr>
+        <p:spPr>
+          <a:xfrm>
+            <a:off x="4251960" y="2825495"/>
+            <a:ext cx="1508760" cy="384048"/>
+          </a:xfrm>
+          <a:prstGeom prst="rect">
+            <a:avLst/>
+          </a:prstGeom>
+          <a:noFill/>
+        </p:spPr>
+        <p:txBody>
+          <a:bodyPr wrap="square">
+            <a:spAutoFit/>
+          </a:bodyPr>
+          <a:lstStyle/>
+          <a:p>
+            <a:pPr algn="l"/>
+            <a:r>
+              <a:rPr sz="900" b="0" i="0">
+                <a:solidFill>
+                  <a:srgbClr val="90E0EF"/>
+                </a:solidFill>
+              </a:rPr>
+              <a:t>Vegetation</a:t>
+            </a:r>
+          </a:p>
+        </p:txBody>
+      </p:sp>
+      <p:sp>
+        <p:nvSpPr>
+          <p:cNvPr id="25" name="Rectangle 24"/>
+          <p:cNvSpPr/>
+          <p:nvPr/>
+        </p:nvSpPr>
+        <p:spPr>
+          <a:xfrm>
+            <a:off x="411480" y="3383279"/>
+            <a:ext cx="36576" cy="274320"/>
+          </a:xfrm>
+          <a:prstGeom prst="rect">
+            <a:avLst/>
+          </a:prstGeom>
+          <a:solidFill>
+            <a:srgbClr val="FF9F1C"/>
+          </a:solidFill>
+          <a:ln>
+            <a:noFill/>
+          </a:ln>
+        </p:spPr>
+        <p:style>
+          <a:lnRef idx="1">
+            <a:schemeClr val="accent1"/>
+          </a:lnRef>
+          <a:fillRef idx="3">
+            <a:schemeClr val="accent1"/>
+          </a:fillRef>
+          <a:effectRef idx="2">
+            <a:schemeClr val="accent1"/>
+          </a:effectRef>
+          <a:fontRef idx="minor">
+            <a:schemeClr val="lt1"/>
+          </a:fontRef>
+        </p:style>
+        <p:txBody>
+          <a:bodyPr rtlCol="0" anchor="ctr"/>
+          <a:lstStyle/>
+          <a:p>
+            <a:pPr algn="ctr"/>
+          </a:p>
+        </p:txBody>
+      </p:sp>
+      <p:sp>
+        <p:nvSpPr>
+          <p:cNvPr id="26" name="TextBox 25"/>
+          <p:cNvSpPr txBox="1"/>
+          <p:nvPr/>
+        </p:nvSpPr>
+        <p:spPr>
+          <a:xfrm>
+            <a:off x="502920" y="3300983"/>
+            <a:ext cx="1417320" cy="384048"/>
+          </a:xfrm>
+          <a:prstGeom prst="rect">
+            <a:avLst/>
+          </a:prstGeom>
+          <a:noFill/>
+        </p:spPr>
+        <p:txBody>
+          <a:bodyPr wrap="square">
+            <a:spAutoFit/>
+          </a:bodyPr>
+          <a:lstStyle/>
+          <a:p>
+            <a:pPr algn="l"/>
+            <a:r>
+              <a:rPr sz="950" b="1" i="0">
+                <a:solidFill>
+                  <a:srgbClr val="FF9F1C"/>
+                </a:solidFill>
+              </a:rPr>
+              <a:t>Masts/Towers</a:t>
+            </a:r>
+          </a:p>
+        </p:txBody>
+      </p:sp>
+      <p:sp>
+        <p:nvSpPr>
+          <p:cNvPr id="27" name="TextBox 26"/>
+          <p:cNvSpPr txBox="1"/>
+          <p:nvPr/>
+        </p:nvSpPr>
+        <p:spPr>
+          <a:xfrm>
+            <a:off x="1920240" y="3300983"/>
+            <a:ext cx="1737360" cy="384048"/>
+          </a:xfrm>
+          <a:prstGeom prst="rect">
+            <a:avLst/>
+          </a:prstGeom>
+          <a:noFill/>
+        </p:spPr>
+        <p:txBody>
+          <a:bodyPr wrap="square">
+            <a:spAutoFit/>
+          </a:bodyPr>
+          <a:lstStyle/>
+          <a:p>
+            <a:pPr algn="l"/>
+            <a:r>
+              <a:rPr sz="850" b="0" i="1">
+                <a:solidFill>
+                  <a:srgbClr val="CAD3DF"/>
+                </a:solidFill>
+              </a:rPr>
+              <a:t>man_made=mast/tower</a:t>
+            </a:r>
+          </a:p>
+        </p:txBody>
+      </p:sp>
+      <p:sp>
+        <p:nvSpPr>
+          <p:cNvPr id="28" name="TextBox 27"/>
+          <p:cNvSpPr txBox="1"/>
+          <p:nvPr/>
+        </p:nvSpPr>
+        <p:spPr>
+          <a:xfrm>
+            <a:off x="3657600" y="3300983"/>
+            <a:ext cx="594360" cy="384048"/>
+          </a:xfrm>
+          <a:prstGeom prst="rect">
+            <a:avLst/>
+          </a:prstGeom>
+          <a:noFill/>
+        </p:spPr>
+        <p:txBody>
+          <a:bodyPr wrap="square">
+            <a:spAutoFit/>
+          </a:bodyPr>
+          <a:lstStyle/>
+          <a:p>
+            <a:pPr algn="ctr"/>
+            <a:r>
+              <a:rPr sz="950" b="0" i="0">
+                <a:solidFill>
+                  <a:srgbClr val="FFFFFF"/>
+                </a:solidFill>
+              </a:rPr>
+              <a:t>100s</a:t>
+            </a:r>
+          </a:p>
+        </p:txBody>
+      </p:sp>
+      <p:sp>
+        <p:nvSpPr>
+          <p:cNvPr id="29" name="TextBox 28"/>
+          <p:cNvSpPr txBox="1"/>
+          <p:nvPr/>
+        </p:nvSpPr>
+        <p:spPr>
+          <a:xfrm>
+            <a:off x="4251960" y="3300983"/>
+            <a:ext cx="1508760" cy="384048"/>
+          </a:xfrm>
+          <a:prstGeom prst="rect">
+            <a:avLst/>
+          </a:prstGeom>
+          <a:noFill/>
+        </p:spPr>
+        <p:txBody>
+          <a:bodyPr wrap="square">
+            <a:spAutoFit/>
+          </a:bodyPr>
+          <a:lstStyle/>
+          <a:p>
+            <a:pPr algn="l"/>
+            <a:r>
+              <a:rPr sz="900" b="0" i="0">
+                <a:solidFill>
+                  <a:srgbClr val="90E0EF"/>
+                </a:solidFill>
+              </a:rPr>
+              <a:t>Metal</a:t>
+            </a:r>
+          </a:p>
+        </p:txBody>
+      </p:sp>
+      <p:sp>
+        <p:nvSpPr>
+          <p:cNvPr id="30" name="Rectangle 29"/>
+          <p:cNvSpPr/>
+          <p:nvPr/>
+        </p:nvSpPr>
+        <p:spPr>
+          <a:xfrm>
+            <a:off x="411480" y="3858767"/>
+            <a:ext cx="36576" cy="274320"/>
+          </a:xfrm>
+          <a:prstGeom prst="rect">
+            <a:avLst/>
+          </a:prstGeom>
+          <a:solidFill>
+            <a:srgbClr val="FF9F1C"/>
+          </a:solidFill>
+          <a:ln>
+            <a:noFill/>
+          </a:ln>
+        </p:spPr>
+        <p:style>
+          <a:lnRef idx="1">
+            <a:schemeClr val="accent1"/>
+          </a:lnRef>
+          <a:fillRef idx="3">
+            <a:schemeClr val="accent1"/>
+          </a:fillRef>
+          <a:effectRef idx="2">
+            <a:schemeClr val="accent1"/>
+          </a:effectRef>
+          <a:fontRef idx="minor">
+            <a:schemeClr val="lt1"/>
+          </a:fontRef>
+        </p:style>
+        <p:txBody>
+          <a:bodyPr rtlCol="0" anchor="ctr"/>
+          <a:lstStyle/>
+          <a:p>
+            <a:pPr algn="ctr"/>
+          </a:p>
+        </p:txBody>
+      </p:sp>
+      <p:sp>
+        <p:nvSpPr>
+          <p:cNvPr id="31" name="TextBox 30"/>
+          <p:cNvSpPr txBox="1"/>
+          <p:nvPr/>
+        </p:nvSpPr>
+        <p:spPr>
+          <a:xfrm>
+            <a:off x="502920" y="3776471"/>
+            <a:ext cx="1417320" cy="384048"/>
+          </a:xfrm>
+          <a:prstGeom prst="rect">
+            <a:avLst/>
+          </a:prstGeom>
+          <a:noFill/>
+        </p:spPr>
+        <p:txBody>
+          <a:bodyPr wrap="square">
+            <a:spAutoFit/>
+          </a:bodyPr>
+          <a:lstStyle/>
+          <a:p>
+            <a:pPr algn="l"/>
+            <a:r>
+              <a:rPr sz="950" b="1" i="0">
+                <a:solidFill>
+                  <a:srgbClr val="FF9F1C"/>
+                </a:solidFill>
+              </a:rPr>
+              <a:t>Power pylons</a:t>
+            </a:r>
+          </a:p>
+        </p:txBody>
+      </p:sp>
+      <p:sp>
+        <p:nvSpPr>
+          <p:cNvPr id="32" name="TextBox 31"/>
+          <p:cNvSpPr txBox="1"/>
+          <p:nvPr/>
+        </p:nvSpPr>
+        <p:spPr>
+          <a:xfrm>
+            <a:off x="1920240" y="3776471"/>
+            <a:ext cx="1737360" cy="384048"/>
+          </a:xfrm>
+          <a:prstGeom prst="rect">
+            <a:avLst/>
+          </a:prstGeom>
+          <a:noFill/>
+        </p:spPr>
+        <p:txBody>
+          <a:bodyPr wrap="square">
+            <a:spAutoFit/>
+          </a:bodyPr>
+          <a:lstStyle/>
+          <a:p>
+            <a:pPr algn="l"/>
+            <a:r>
+              <a:rPr sz="850" b="0" i="1">
+                <a:solidFill>
+                  <a:srgbClr val="CAD3DF"/>
+                </a:solidFill>
+              </a:rPr>
+              <a:t>power=tower</a:t>
+            </a:r>
+          </a:p>
+        </p:txBody>
+      </p:sp>
+      <p:sp>
+        <p:nvSpPr>
+          <p:cNvPr id="33" name="TextBox 32"/>
+          <p:cNvSpPr txBox="1"/>
+          <p:nvPr/>
+        </p:nvSpPr>
+        <p:spPr>
+          <a:xfrm>
+            <a:off x="3657600" y="3776471"/>
+            <a:ext cx="594360" cy="384048"/>
+          </a:xfrm>
+          <a:prstGeom prst="rect">
+            <a:avLst/>
+          </a:prstGeom>
+          <a:noFill/>
+        </p:spPr>
+        <p:txBody>
+          <a:bodyPr wrap="square">
+            <a:spAutoFit/>
+          </a:bodyPr>
+          <a:lstStyle/>
+          <a:p>
+            <a:pPr algn="ctr"/>
+            <a:r>
+              <a:rPr sz="950" b="0" i="0">
+                <a:solidFill>
+                  <a:srgbClr val="FFFFFF"/>
+                </a:solidFill>
+              </a:rPr>
+              <a:t>100s</a:t>
+            </a:r>
+          </a:p>
+        </p:txBody>
+      </p:sp>
+      <p:sp>
+        <p:nvSpPr>
+          <p:cNvPr id="34" name="TextBox 33"/>
+          <p:cNvSpPr txBox="1"/>
+          <p:nvPr/>
+        </p:nvSpPr>
+        <p:spPr>
+          <a:xfrm>
+            <a:off x="4251960" y="3776471"/>
+            <a:ext cx="1508760" cy="384048"/>
+          </a:xfrm>
+          <a:prstGeom prst="rect">
+            <a:avLst/>
+          </a:prstGeom>
+          <a:noFill/>
+        </p:spPr>
+        <p:txBody>
+          <a:bodyPr wrap="square">
+            <a:spAutoFit/>
+          </a:bodyPr>
+          <a:lstStyle/>
+          <a:p>
+            <a:pPr algn="l"/>
+            <a:r>
+              <a:rPr sz="900" b="0" i="0">
+                <a:solidFill>
+                  <a:srgbClr val="90E0EF"/>
+                </a:solidFill>
+              </a:rPr>
+              <a:t>Metal</a:t>
+            </a:r>
+          </a:p>
+        </p:txBody>
+      </p:sp>
+      <p:sp>
+        <p:nvSpPr>
+          <p:cNvPr id="35" name="Rectangle 34"/>
+          <p:cNvSpPr/>
+          <p:nvPr/>
+        </p:nvSpPr>
+        <p:spPr>
+          <a:xfrm>
+            <a:off x="411480" y="4334255"/>
+            <a:ext cx="36576" cy="274320"/>
+          </a:xfrm>
+          <a:prstGeom prst="rect">
+            <a:avLst/>
+          </a:prstGeom>
+          <a:solidFill>
+            <a:srgbClr val="FF4D6D"/>
+          </a:solidFill>
+          <a:ln>
+            <a:noFill/>
+          </a:ln>
+        </p:spPr>
+        <p:style>
+          <a:lnRef idx="1">
+            <a:schemeClr val="accent1"/>
+          </a:lnRef>
+          <a:fillRef idx="3">
+            <a:schemeClr val="accent1"/>
+          </a:fillRef>
+          <a:effectRef idx="2">
+            <a:schemeClr val="accent1"/>
+          </a:effectRef>
+          <a:fontRef idx="minor">
+            <a:schemeClr val="lt1"/>
+          </a:fontRef>
+        </p:style>
+        <p:txBody>
+          <a:bodyPr rtlCol="0" anchor="ctr"/>
+          <a:lstStyle/>
+          <a:p>
+            <a:pPr algn="ctr"/>
+          </a:p>
+        </p:txBody>
+      </p:sp>
+      <p:sp>
+        <p:nvSpPr>
+          <p:cNvPr id="36" name="TextBox 35"/>
+          <p:cNvSpPr txBox="1"/>
+          <p:nvPr/>
+        </p:nvSpPr>
+        <p:spPr>
+          <a:xfrm>
+            <a:off x="502920" y="4251959"/>
+            <a:ext cx="1417320" cy="384048"/>
+          </a:xfrm>
+          <a:prstGeom prst="rect">
+            <a:avLst/>
+          </a:prstGeom>
+          <a:noFill/>
+        </p:spPr>
+        <p:txBody>
+          <a:bodyPr wrap="square">
+            <a:spAutoFit/>
+          </a:bodyPr>
+          <a:lstStyle/>
+          <a:p>
+            <a:pPr algn="l"/>
+            <a:r>
+              <a:rPr sz="950" b="1" i="0">
+                <a:solidFill>
+                  <a:srgbClr val="FF4D6D"/>
+                </a:solidFill>
+              </a:rPr>
+              <a:t>Railways</a:t>
+            </a:r>
+          </a:p>
+        </p:txBody>
+      </p:sp>
+      <p:sp>
+        <p:nvSpPr>
+          <p:cNvPr id="37" name="TextBox 36"/>
+          <p:cNvSpPr txBox="1"/>
+          <p:nvPr/>
+        </p:nvSpPr>
+        <p:spPr>
+          <a:xfrm>
+            <a:off x="1920240" y="4251959"/>
+            <a:ext cx="1737360" cy="384048"/>
+          </a:xfrm>
+          <a:prstGeom prst="rect">
+            <a:avLst/>
+          </a:prstGeom>
+          <a:noFill/>
+        </p:spPr>
+        <p:txBody>
+          <a:bodyPr wrap="square">
+            <a:spAutoFit/>
+          </a:bodyPr>
+          <a:lstStyle/>
+          <a:p>
+            <a:pPr algn="l"/>
+            <a:r>
+              <a:rPr sz="850" b="0" i="1">
+                <a:solidFill>
+                  <a:srgbClr val="CAD3DF"/>
+                </a:solidFill>
+              </a:rPr>
+              <a:t>railway=rail</a:t>
+            </a:r>
+          </a:p>
+        </p:txBody>
+      </p:sp>
+      <p:sp>
+        <p:nvSpPr>
+          <p:cNvPr id="38" name="TextBox 37"/>
+          <p:cNvSpPr txBox="1"/>
+          <p:nvPr/>
+        </p:nvSpPr>
+        <p:spPr>
+          <a:xfrm>
+            <a:off x="3657600" y="4251959"/>
+            <a:ext cx="594360" cy="384048"/>
+          </a:xfrm>
+          <a:prstGeom prst="rect">
+            <a:avLst/>
+          </a:prstGeom>
+          <a:noFill/>
+        </p:spPr>
+        <p:txBody>
+          <a:bodyPr wrap="square">
+            <a:spAutoFit/>
+          </a:bodyPr>
+          <a:lstStyle/>
+          <a:p>
+            <a:pPr algn="ctr"/>
+            <a:r>
+              <a:rPr sz="950" b="0" i="0">
+                <a:solidFill>
+                  <a:srgbClr val="FFFFFF"/>
+                </a:solidFill>
+              </a:rPr>
+              <a:t>Full net</a:t>
+            </a:r>
+          </a:p>
+        </p:txBody>
+      </p:sp>
+      <p:sp>
+        <p:nvSpPr>
+          <p:cNvPr id="39" name="TextBox 38"/>
+          <p:cNvSpPr txBox="1"/>
+          <p:nvPr/>
+        </p:nvSpPr>
+        <p:spPr>
+          <a:xfrm>
+            <a:off x="4251960" y="4251959"/>
+            <a:ext cx="1508760" cy="384048"/>
+          </a:xfrm>
+          <a:prstGeom prst="rect">
+            <a:avLst/>
+          </a:prstGeom>
+          <a:noFill/>
+        </p:spPr>
+        <p:txBody>
+          <a:bodyPr wrap="square">
+            <a:spAutoFit/>
+          </a:bodyPr>
+          <a:lstStyle/>
+          <a:p>
+            <a:pPr algn="l"/>
+            <a:r>
+              <a:rPr sz="900" b="0" i="0">
+                <a:solidFill>
+                  <a:srgbClr val="90E0EF"/>
+                </a:solidFill>
+              </a:rPr>
+              <a:t>Metal</a:t>
+            </a:r>
+          </a:p>
+        </p:txBody>
+      </p:sp>
+      <p:sp>
+        <p:nvSpPr>
+          <p:cNvPr id="40" name="Rectangle 39"/>
+          <p:cNvSpPr/>
+          <p:nvPr/>
+        </p:nvSpPr>
+        <p:spPr>
+          <a:xfrm>
+            <a:off x="411480" y="4809743"/>
+            <a:ext cx="36576" cy="274320"/>
+          </a:xfrm>
+          <a:prstGeom prst="rect">
+            <a:avLst/>
+          </a:prstGeom>
+          <a:solidFill>
+            <a:srgbClr val="CAD3DF"/>
+          </a:solidFill>
+          <a:ln>
+            <a:noFill/>
+          </a:ln>
+        </p:spPr>
+        <p:style>
+          <a:lnRef idx="1">
+            <a:schemeClr val="accent1"/>
+          </a:lnRef>
+          <a:fillRef idx="3">
+            <a:schemeClr val="accent1"/>
+          </a:fillRef>
+          <a:effectRef idx="2">
+            <a:schemeClr val="accent1"/>
+          </a:effectRef>
+          <a:fontRef idx="minor">
+            <a:schemeClr val="lt1"/>
+          </a:fontRef>
+        </p:style>
+        <p:txBody>
+          <a:bodyPr rtlCol="0" anchor="ctr"/>
+          <a:lstStyle/>
+          <a:p>
+            <a:pPr algn="ctr"/>
+          </a:p>
+        </p:txBody>
+      </p:sp>
+      <p:sp>
+        <p:nvSpPr>
+          <p:cNvPr id="41" name="TextBox 40"/>
+          <p:cNvSpPr txBox="1"/>
+          <p:nvPr/>
+        </p:nvSpPr>
+        <p:spPr>
+          <a:xfrm>
+            <a:off x="502920" y="4727447"/>
+            <a:ext cx="1417320" cy="384048"/>
+          </a:xfrm>
+          <a:prstGeom prst="rect">
+            <a:avLst/>
+          </a:prstGeom>
+          <a:noFill/>
+        </p:spPr>
+        <p:txBody>
+          <a:bodyPr wrap="square">
+            <a:spAutoFit/>
+          </a:bodyPr>
+          <a:lstStyle/>
+          <a:p>
+            <a:pPr algn="l"/>
+            <a:r>
+              <a:rPr sz="950" b="1" i="0">
+                <a:solidFill>
+                  <a:srgbClr val="CAD3DF"/>
+                </a:solidFill>
+              </a:rPr>
+              <a:t>Water bodies</a:t>
+            </a:r>
+          </a:p>
+        </p:txBody>
+      </p:sp>
+      <p:sp>
+        <p:nvSpPr>
+          <p:cNvPr id="42" name="TextBox 41"/>
+          <p:cNvSpPr txBox="1"/>
+          <p:nvPr/>
+        </p:nvSpPr>
+        <p:spPr>
+          <a:xfrm>
+            <a:off x="1920240" y="4727447"/>
+            <a:ext cx="1737360" cy="384048"/>
+          </a:xfrm>
+          <a:prstGeom prst="rect">
+            <a:avLst/>
+          </a:prstGeom>
+          <a:noFill/>
+        </p:spPr>
+        <p:txBody>
+          <a:bodyPr wrap="square">
+            <a:spAutoFit/>
+          </a:bodyPr>
+          <a:lstStyle/>
+          <a:p>
+            <a:pPr algn="l"/>
+            <a:r>
+              <a:rPr sz="850" b="0" i="1">
+                <a:solidFill>
+                  <a:srgbClr val="CAD3DF"/>
+                </a:solidFill>
+              </a:rPr>
+              <a:t>natural=water, waterway=*</a:t>
+            </a:r>
+          </a:p>
+        </p:txBody>
+      </p:sp>
+      <p:sp>
+        <p:nvSpPr>
+          <p:cNvPr id="43" name="TextBox 42"/>
+          <p:cNvSpPr txBox="1"/>
+          <p:nvPr/>
+        </p:nvSpPr>
+        <p:spPr>
+          <a:xfrm>
+            <a:off x="3657600" y="4727447"/>
+            <a:ext cx="594360" cy="384048"/>
+          </a:xfrm>
+          <a:prstGeom prst="rect">
+            <a:avLst/>
+          </a:prstGeom>
+          <a:noFill/>
+        </p:spPr>
+        <p:txBody>
+          <a:bodyPr wrap="square">
+            <a:spAutoFit/>
+          </a:bodyPr>
+          <a:lstStyle/>
+          <a:p>
+            <a:pPr algn="ctr"/>
+            <a:r>
+              <a:rPr sz="950" b="0" i="0">
+                <a:solidFill>
+                  <a:srgbClr val="FFFFFF"/>
+                </a:solidFill>
+              </a:rPr>
+              <a:t>Polygons</a:t>
+            </a:r>
+          </a:p>
+        </p:txBody>
+      </p:sp>
+      <p:sp>
+        <p:nvSpPr>
+          <p:cNvPr id="44" name="TextBox 43"/>
+          <p:cNvSpPr txBox="1"/>
+          <p:nvPr/>
+        </p:nvSpPr>
+        <p:spPr>
+          <a:xfrm>
+            <a:off x="4251960" y="4727447"/>
+            <a:ext cx="1508760" cy="384048"/>
+          </a:xfrm>
+          <a:prstGeom prst="rect">
+            <a:avLst/>
+          </a:prstGeom>
+          <a:noFill/>
+        </p:spPr>
+        <p:txBody>
+          <a:bodyPr wrap="square">
+            <a:spAutoFit/>
+          </a:bodyPr>
+          <a:lstStyle/>
+          <a:p>
+            <a:pPr algn="l"/>
+            <a:r>
+              <a:rPr sz="900" b="0" i="0">
+                <a:solidFill>
+                  <a:srgbClr val="90E0EF"/>
+                </a:solidFill>
+              </a:rPr>
+              <a:t>Water</a:t>
+            </a:r>
+          </a:p>
+        </p:txBody>
+      </p:sp>
+      <p:sp>
+        <p:nvSpPr>
+          <p:cNvPr id="45" name="Rectangle 44"/>
+          <p:cNvSpPr/>
+          <p:nvPr/>
+        </p:nvSpPr>
+        <p:spPr>
+          <a:xfrm>
+            <a:off x="411480" y="5285231"/>
+            <a:ext cx="36576" cy="274320"/>
+          </a:xfrm>
+          <a:prstGeom prst="rect">
+            <a:avLst/>
+          </a:prstGeom>
+          <a:solidFill>
+            <a:srgbClr val="CAD3DF"/>
+          </a:solidFill>
+          <a:ln>
+            <a:noFill/>
+          </a:ln>
+        </p:spPr>
+        <p:style>
+          <a:lnRef idx="1">
+            <a:schemeClr val="accent1"/>
+          </a:lnRef>
+          <a:fillRef idx="3">
+            <a:schemeClr val="accent1"/>
+          </a:fillRef>
+          <a:effectRef idx="2">
+            <a:schemeClr val="accent1"/>
+          </a:effectRef>
+          <a:fontRef idx="minor">
+            <a:schemeClr val="lt1"/>
+          </a:fontRef>
+        </p:style>
+        <p:txBody>
+          <a:bodyPr rtlCol="0" anchor="ctr"/>
+          <a:lstStyle/>
+          <a:p>
+            <a:pPr algn="ctr"/>
+          </a:p>
+        </p:txBody>
+      </p:sp>
+      <p:sp>
+        <p:nvSpPr>
+          <p:cNvPr id="46" name="TextBox 45"/>
+          <p:cNvSpPr txBox="1"/>
+          <p:nvPr/>
+        </p:nvSpPr>
+        <p:spPr>
+          <a:xfrm>
+            <a:off x="502920" y="5202935"/>
+            <a:ext cx="1417320" cy="384048"/>
+          </a:xfrm>
+          <a:prstGeom prst="rect">
+            <a:avLst/>
+          </a:prstGeom>
+          <a:noFill/>
+        </p:spPr>
+        <p:txBody>
+          <a:bodyPr wrap="square">
+            <a:spAutoFit/>
+          </a:bodyPr>
+          <a:lstStyle/>
+          <a:p>
+            <a:pPr algn="l"/>
+            <a:r>
+              <a:rPr sz="950" b="1" i="0">
+                <a:solidFill>
+                  <a:srgbClr val="CAD3DF"/>
+                </a:solidFill>
+              </a:rPr>
+              <a:t>Barriers/embank.</a:t>
+            </a:r>
+          </a:p>
+        </p:txBody>
+      </p:sp>
+      <p:sp>
+        <p:nvSpPr>
+          <p:cNvPr id="47" name="TextBox 46"/>
+          <p:cNvSpPr txBox="1"/>
+          <p:nvPr/>
+        </p:nvSpPr>
+        <p:spPr>
+          <a:xfrm>
+            <a:off x="1920240" y="5202935"/>
+            <a:ext cx="1737360" cy="384048"/>
+          </a:xfrm>
+          <a:prstGeom prst="rect">
+            <a:avLst/>
+          </a:prstGeom>
+          <a:noFill/>
+        </p:spPr>
+        <p:txBody>
+          <a:bodyPr wrap="square">
+            <a:spAutoFit/>
+          </a:bodyPr>
+          <a:lstStyle/>
+          <a:p>
+            <a:pPr algn="l"/>
+            <a:r>
+              <a:rPr sz="850" b="0" i="1">
+                <a:solidFill>
+                  <a:srgbClr val="CAD3DF"/>
+                </a:solidFill>
+              </a:rPr>
+              <a:t>barrier=*, embankment</a:t>
+            </a:r>
+          </a:p>
+        </p:txBody>
+      </p:sp>
+      <p:sp>
+        <p:nvSpPr>
+          <p:cNvPr id="48" name="TextBox 47"/>
+          <p:cNvSpPr txBox="1"/>
+          <p:nvPr/>
+        </p:nvSpPr>
+        <p:spPr>
+          <a:xfrm>
+            <a:off x="3657600" y="5202935"/>
+            <a:ext cx="594360" cy="384048"/>
+          </a:xfrm>
+          <a:prstGeom prst="rect">
+            <a:avLst/>
+          </a:prstGeom>
+          <a:noFill/>
+        </p:spPr>
+        <p:txBody>
+          <a:bodyPr wrap="square">
+            <a:spAutoFit/>
+          </a:bodyPr>
+          <a:lstStyle/>
+          <a:p>
+            <a:pPr algn="ctr"/>
+            <a:r>
+              <a:rPr sz="950" b="0" i="0">
+                <a:solidFill>
+                  <a:srgbClr val="FFFFFF"/>
+                </a:solidFill>
+              </a:rPr>
+              <a:t>Many</a:t>
+            </a:r>
+          </a:p>
+        </p:txBody>
+      </p:sp>
+      <p:sp>
+        <p:nvSpPr>
+          <p:cNvPr id="49" name="TextBox 48"/>
+          <p:cNvSpPr txBox="1"/>
+          <p:nvPr/>
+        </p:nvSpPr>
+        <p:spPr>
+          <a:xfrm>
+            <a:off x="4251960" y="5202935"/>
+            <a:ext cx="1508760" cy="384048"/>
+          </a:xfrm>
+          <a:prstGeom prst="rect">
+            <a:avLst/>
+          </a:prstGeom>
+          <a:noFill/>
+        </p:spPr>
+        <p:txBody>
+          <a:bodyPr wrap="square">
+            <a:spAutoFit/>
+          </a:bodyPr>
+          <a:lstStyle/>
+          <a:p>
+            <a:pPr algn="l"/>
+            <a:r>
+              <a:rPr sz="900" b="0" i="0">
+                <a:solidFill>
+                  <a:srgbClr val="90E0EF"/>
+                </a:solidFill>
+              </a:rPr>
+              <a:t>Concrete</a:t>
+            </a:r>
+          </a:p>
+        </p:txBody>
+      </p:sp>
+      <p:sp>
+        <p:nvSpPr>
+          <p:cNvPr id="50" name="Rectangle 49"/>
+          <p:cNvSpPr/>
+          <p:nvPr/>
+        </p:nvSpPr>
+        <p:spPr>
+          <a:xfrm>
+            <a:off x="411480" y="5760719"/>
+            <a:ext cx="36576" cy="274320"/>
+          </a:xfrm>
+          <a:prstGeom prst="rect">
+            <a:avLst/>
+          </a:prstGeom>
+          <a:solidFill>
+            <a:srgbClr val="CAD3DF"/>
+          </a:solidFill>
+          <a:ln>
+            <a:noFill/>
+          </a:ln>
+        </p:spPr>
+        <p:style>
+          <a:lnRef idx="1">
+            <a:schemeClr val="accent1"/>
+          </a:lnRef>
+          <a:fillRef idx="3">
+            <a:schemeClr val="accent1"/>
+          </a:fillRef>
+          <a:effectRef idx="2">
+            <a:schemeClr val="accent1"/>
+          </a:effectRef>
+          <a:fontRef idx="minor">
+            <a:schemeClr val="lt1"/>
+          </a:fontRef>
+        </p:style>
+        <p:txBody>
+          <a:bodyPr rtlCol="0" anchor="ctr"/>
+          <a:lstStyle/>
+          <a:p>
+            <a:pPr algn="ctr"/>
+          </a:p>
+        </p:txBody>
+      </p:sp>
+      <p:sp>
+        <p:nvSpPr>
+          <p:cNvPr id="51" name="TextBox 50"/>
+          <p:cNvSpPr txBox="1"/>
+          <p:nvPr/>
+        </p:nvSpPr>
+        <p:spPr>
+          <a:xfrm>
+            <a:off x="502920" y="5678423"/>
+            <a:ext cx="1417320" cy="384048"/>
+          </a:xfrm>
+          <a:prstGeom prst="rect">
+            <a:avLst/>
+          </a:prstGeom>
+          <a:noFill/>
+        </p:spPr>
+        <p:txBody>
+          <a:bodyPr wrap="square">
+            <a:spAutoFit/>
+          </a:bodyPr>
+          <a:lstStyle/>
+          <a:p>
+            <a:pPr algn="l"/>
+            <a:r>
+              <a:rPr sz="950" b="1" i="0">
+                <a:solidFill>
+                  <a:srgbClr val="CAD3DF"/>
+                </a:solidFill>
+              </a:rPr>
+              <a:t>Car parks</a:t>
+            </a:r>
+          </a:p>
+        </p:txBody>
+      </p:sp>
+      <p:sp>
+        <p:nvSpPr>
+          <p:cNvPr id="52" name="TextBox 51"/>
+          <p:cNvSpPr txBox="1"/>
+          <p:nvPr/>
+        </p:nvSpPr>
+        <p:spPr>
+          <a:xfrm>
+            <a:off x="1920240" y="5678423"/>
+            <a:ext cx="1737360" cy="384048"/>
+          </a:xfrm>
+          <a:prstGeom prst="rect">
+            <a:avLst/>
+          </a:prstGeom>
+          <a:noFill/>
+        </p:spPr>
+        <p:txBody>
+          <a:bodyPr wrap="square">
+            <a:spAutoFit/>
+          </a:bodyPr>
+          <a:lstStyle/>
+          <a:p>
+            <a:pPr algn="l"/>
+            <a:r>
+              <a:rPr sz="850" b="0" i="1">
+                <a:solidFill>
+                  <a:srgbClr val="CAD3DF"/>
+                </a:solidFill>
+              </a:rPr>
+              <a:t>amenity=parking</a:t>
+            </a:r>
+          </a:p>
+        </p:txBody>
+      </p:sp>
+      <p:sp>
+        <p:nvSpPr>
+          <p:cNvPr id="53" name="TextBox 52"/>
+          <p:cNvSpPr txBox="1"/>
+          <p:nvPr/>
+        </p:nvSpPr>
+        <p:spPr>
+          <a:xfrm>
+            <a:off x="3657600" y="5678423"/>
+            <a:ext cx="594360" cy="384048"/>
+          </a:xfrm>
+          <a:prstGeom prst="rect">
+            <a:avLst/>
+          </a:prstGeom>
+          <a:noFill/>
+        </p:spPr>
+        <p:txBody>
+          <a:bodyPr wrap="square">
+            <a:spAutoFit/>
+          </a:bodyPr>
+          <a:lstStyle/>
+          <a:p>
+            <a:pPr algn="ctr"/>
+            <a:r>
+              <a:rPr sz="950" b="0" i="0">
+                <a:solidFill>
+                  <a:srgbClr val="FFFFFF"/>
+                </a:solidFill>
+              </a:rPr>
+              <a:t>Many</a:t>
+            </a:r>
+          </a:p>
+        </p:txBody>
+      </p:sp>
+      <p:sp>
+        <p:nvSpPr>
+          <p:cNvPr id="54" name="TextBox 53"/>
+          <p:cNvSpPr txBox="1"/>
+          <p:nvPr/>
+        </p:nvSpPr>
+        <p:spPr>
+          <a:xfrm>
+            <a:off x="4251960" y="5678423"/>
+            <a:ext cx="1508760" cy="384048"/>
+          </a:xfrm>
+          <a:prstGeom prst="rect">
+            <a:avLst/>
+          </a:prstGeom>
+          <a:noFill/>
+        </p:spPr>
+        <p:txBody>
+          <a:bodyPr wrap="square">
+            <a:spAutoFit/>
+          </a:bodyPr>
+          <a:lstStyle/>
+          <a:p>
+            <a:pPr algn="l"/>
+            <a:r>
+              <a:rPr sz="900" b="0" i="0">
+                <a:solidFill>
+                  <a:srgbClr val="90E0EF"/>
+                </a:solidFill>
+              </a:rPr>
+              <a:t>Concrete</a:t>
+            </a:r>
+          </a:p>
+        </p:txBody>
+      </p:sp>
+      <p:sp>
+        <p:nvSpPr>
+          <p:cNvPr id="55" name="Rectangle 54"/>
+          <p:cNvSpPr/>
+          <p:nvPr/>
+        </p:nvSpPr>
+        <p:spPr>
+          <a:xfrm>
+            <a:off x="6035040" y="1234440"/>
+            <a:ext cx="5897880" cy="5212080"/>
+          </a:xfrm>
+          <a:prstGeom prst="rect">
+            <a:avLst/>
+          </a:prstGeom>
+          <a:solidFill>
+            <a:srgbClr val="112A40"/>
+          </a:solidFill>
+          <a:ln>
+            <a:noFill/>
+          </a:ln>
+        </p:spPr>
+        <p:style>
+          <a:lnRef idx="1">
+            <a:schemeClr val="accent1"/>
+          </a:lnRef>
+          <a:fillRef idx="3">
+            <a:schemeClr val="accent1"/>
+          </a:fillRef>
+          <a:effectRef idx="2">
+            <a:schemeClr val="accent1"/>
+          </a:effectRef>
+          <a:fontRef idx="minor">
+            <a:schemeClr val="lt1"/>
+          </a:fontRef>
+        </p:style>
+        <p:txBody>
+          <a:bodyPr rtlCol="0" anchor="ctr"/>
+          <a:lstStyle/>
+          <a:p>
+            <a:pPr algn="ctr"/>
+          </a:p>
+        </p:txBody>
+      </p:sp>
+      <p:sp>
+        <p:nvSpPr>
+          <p:cNvPr id="56" name="Rectangle 55"/>
+          <p:cNvSpPr/>
+          <p:nvPr/>
+        </p:nvSpPr>
+        <p:spPr>
+          <a:xfrm>
+            <a:off x="6035040" y="1234440"/>
+            <a:ext cx="5897880" cy="54864"/>
+          </a:xfrm>
+          <a:prstGeom prst="rect">
+            <a:avLst/>
+          </a:prstGeom>
+          <a:solidFill>
+            <a:srgbClr val="FF9F1C"/>
+          </a:solidFill>
+          <a:ln>
+            <a:noFill/>
+          </a:ln>
+        </p:spPr>
+        <p:style>
+          <a:lnRef idx="1">
+            <a:schemeClr val="accent1"/>
+          </a:lnRef>
+          <a:fillRef idx="3">
+            <a:schemeClr val="accent1"/>
+          </a:fillRef>
+          <a:effectRef idx="2">
+            <a:schemeClr val="accent1"/>
+          </a:effectRef>
+          <a:fontRef idx="minor">
+            <a:schemeClr val="lt1"/>
+          </a:fontRef>
+        </p:style>
+        <p:txBody>
+          <a:bodyPr rtlCol="0" anchor="ctr"/>
+          <a:lstStyle/>
+          <a:p>
+            <a:pPr algn="ctr"/>
+          </a:p>
+        </p:txBody>
+      </p:sp>
+      <p:sp>
+        <p:nvSpPr>
+          <p:cNvPr id="57" name="TextBox 56"/>
+          <p:cNvSpPr txBox="1"/>
+          <p:nvPr/>
+        </p:nvSpPr>
+        <p:spPr>
+          <a:xfrm>
+            <a:off x="6172200" y="1371600"/>
+            <a:ext cx="5577840" cy="365760"/>
+          </a:xfrm>
+          <a:prstGeom prst="rect">
+            <a:avLst/>
+          </a:prstGeom>
+          <a:noFill/>
+        </p:spPr>
+        <p:txBody>
+          <a:bodyPr wrap="square">
+            <a:spAutoFit/>
+          </a:bodyPr>
+          <a:lstStyle/>
+          <a:p>
+            <a:pPr algn="l"/>
+            <a:r>
+              <a:rPr sz="1200" b="1" i="0">
+                <a:solidFill>
+                  <a:srgbClr val="FF9F1C"/>
+                </a:solidFill>
+              </a:rPr>
+              <a:t>Propagation Impact per Feature</a:t>
+            </a:r>
+          </a:p>
+        </p:txBody>
+      </p:sp>
+      <p:sp>
+        <p:nvSpPr>
+          <p:cNvPr id="58" name="Rectangle 57"/>
+          <p:cNvSpPr/>
+          <p:nvPr/>
+        </p:nvSpPr>
+        <p:spPr>
+          <a:xfrm>
+            <a:off x="6126480" y="1956815"/>
+            <a:ext cx="36576" cy="274320"/>
+          </a:xfrm>
+          <a:prstGeom prst="rect">
+            <a:avLst/>
+          </a:prstGeom>
+          <a:solidFill>
+            <a:srgbClr val="00B4D8"/>
+          </a:solidFill>
+          <a:ln>
+            <a:noFill/>
+          </a:ln>
+        </p:spPr>
+        <p:style>
+          <a:lnRef idx="1">
+            <a:schemeClr val="accent1"/>
+          </a:lnRef>
+          <a:fillRef idx="3">
+            <a:schemeClr val="accent1"/>
+          </a:fillRef>
+          <a:effectRef idx="2">
+            <a:schemeClr val="accent1"/>
+          </a:effectRef>
+          <a:fontRef idx="minor">
+            <a:schemeClr val="lt1"/>
+          </a:fontRef>
+        </p:style>
+        <p:txBody>
+          <a:bodyPr rtlCol="0" anchor="ctr"/>
+          <a:lstStyle/>
+          <a:p>
+            <a:pPr algn="ctr"/>
+          </a:p>
+        </p:txBody>
+      </p:sp>
+      <p:sp>
+        <p:nvSpPr>
+          <p:cNvPr id="59" name="TextBox 58"/>
+          <p:cNvSpPr txBox="1"/>
+          <p:nvPr/>
+        </p:nvSpPr>
+        <p:spPr>
+          <a:xfrm>
+            <a:off x="6236208" y="1874519"/>
+            <a:ext cx="1371600" cy="384048"/>
+          </a:xfrm>
+          <a:prstGeom prst="rect">
+            <a:avLst/>
+          </a:prstGeom>
+          <a:noFill/>
+        </p:spPr>
+        <p:txBody>
+          <a:bodyPr wrap="square">
+            <a:spAutoFit/>
+          </a:bodyPr>
+          <a:lstStyle/>
+          <a:p>
+            <a:pPr algn="l"/>
+            <a:r>
+              <a:rPr sz="950" b="1" i="0">
+                <a:solidFill>
+                  <a:srgbClr val="00B4D8"/>
+                </a:solidFill>
+              </a:rPr>
+              <a:t>Buildings</a:t>
+            </a:r>
+          </a:p>
+        </p:txBody>
+      </p:sp>
+      <p:sp>
+        <p:nvSpPr>
+          <p:cNvPr id="60" name="TextBox 59"/>
+          <p:cNvSpPr txBox="1"/>
+          <p:nvPr/>
+        </p:nvSpPr>
+        <p:spPr>
+          <a:xfrm>
+            <a:off x="7607808" y="1874519"/>
+            <a:ext cx="3200400" cy="384048"/>
+          </a:xfrm>
+          <a:prstGeom prst="rect">
+            <a:avLst/>
+          </a:prstGeom>
+          <a:noFill/>
+        </p:spPr>
+        <p:txBody>
+          <a:bodyPr wrap="square">
+            <a:spAutoFit/>
+          </a:bodyPr>
+          <a:lstStyle/>
+          <a:p>
+            <a:pPr algn="l"/>
+            <a:r>
+              <a:rPr sz="900" b="0" i="0">
+                <a:solidFill>
+                  <a:srgbClr val="CAD3DF"/>
+                </a:solidFill>
+              </a:rPr>
+              <a:t>Diffraction + reflection — dominant NLOS loss</a:t>
+            </a:r>
+          </a:p>
+        </p:txBody>
+      </p:sp>
+      <p:sp>
+        <p:nvSpPr>
+          <p:cNvPr id="61" name="TextBox 60"/>
+          <p:cNvSpPr txBox="1"/>
+          <p:nvPr/>
+        </p:nvSpPr>
+        <p:spPr>
+          <a:xfrm>
+            <a:off x="10808208" y="1874519"/>
+            <a:ext cx="1005840" cy="384048"/>
+          </a:xfrm>
+          <a:prstGeom prst="rect">
+            <a:avLst/>
+          </a:prstGeom>
+          <a:noFill/>
+        </p:spPr>
+        <p:txBody>
+          <a:bodyPr wrap="square">
+            <a:spAutoFit/>
+          </a:bodyPr>
+          <a:lstStyle/>
+          <a:p>
+            <a:pPr algn="r"/>
+            <a:r>
+              <a:rPr sz="950" b="1" i="0">
+                <a:solidFill>
+                  <a:srgbClr val="00B4D8"/>
+                </a:solidFill>
+              </a:rPr>
+              <a:t>Primary</a:t>
+            </a:r>
+          </a:p>
+        </p:txBody>
+      </p:sp>
+      <p:sp>
+        <p:nvSpPr>
+          <p:cNvPr id="62" name="Rectangle 61"/>
+          <p:cNvSpPr/>
+          <p:nvPr/>
+        </p:nvSpPr>
+        <p:spPr>
+          <a:xfrm>
+            <a:off x="6126480" y="2578607"/>
+            <a:ext cx="36576" cy="274320"/>
+          </a:xfrm>
+          <a:prstGeom prst="rect">
+            <a:avLst/>
+          </a:prstGeom>
+          <a:solidFill>
+            <a:srgbClr val="FF9F1C"/>
+          </a:solidFill>
+          <a:ln>
+            <a:noFill/>
+          </a:ln>
+        </p:spPr>
+        <p:style>
+          <a:lnRef idx="1">
+            <a:schemeClr val="accent1"/>
+          </a:lnRef>
+          <a:fillRef idx="3">
+            <a:schemeClr val="accent1"/>
+          </a:fillRef>
+          <a:effectRef idx="2">
+            <a:schemeClr val="accent1"/>
+          </a:effectRef>
+          <a:fontRef idx="minor">
+            <a:schemeClr val="lt1"/>
+          </a:fontRef>
+        </p:style>
+        <p:txBody>
+          <a:bodyPr rtlCol="0" anchor="ctr"/>
+          <a:lstStyle/>
+          <a:p>
+            <a:pPr algn="ctr"/>
+          </a:p>
+        </p:txBody>
+      </p:sp>
+      <p:sp>
+        <p:nvSpPr>
+          <p:cNvPr id="63" name="TextBox 62"/>
+          <p:cNvSpPr txBox="1"/>
+          <p:nvPr/>
+        </p:nvSpPr>
+        <p:spPr>
+          <a:xfrm>
+            <a:off x="6236208" y="2496311"/>
+            <a:ext cx="1371600" cy="384048"/>
+          </a:xfrm>
+          <a:prstGeom prst="rect">
+            <a:avLst/>
+          </a:prstGeom>
+          <a:noFill/>
+        </p:spPr>
+        <p:txBody>
+          <a:bodyPr wrap="square">
+            <a:spAutoFit/>
+          </a:bodyPr>
+          <a:lstStyle/>
+          <a:p>
+            <a:pPr algn="l"/>
+            <a:r>
+              <a:rPr sz="950" b="1" i="0">
+                <a:solidFill>
+                  <a:srgbClr val="FF9F1C"/>
+                </a:solidFill>
+              </a:rPr>
+              <a:t>Metal masts</a:t>
+            </a:r>
+          </a:p>
+        </p:txBody>
+      </p:sp>
+      <p:sp>
+        <p:nvSpPr>
+          <p:cNvPr id="64" name="TextBox 63"/>
+          <p:cNvSpPr txBox="1"/>
+          <p:nvPr/>
+        </p:nvSpPr>
+        <p:spPr>
+          <a:xfrm>
+            <a:off x="7607808" y="2496311"/>
+            <a:ext cx="3200400" cy="384048"/>
+          </a:xfrm>
+          <a:prstGeom prst="rect">
+            <a:avLst/>
+          </a:prstGeom>
+          <a:noFill/>
+        </p:spPr>
+        <p:txBody>
+          <a:bodyPr wrap="square">
+            <a:spAutoFit/>
+          </a:bodyPr>
+          <a:lstStyle/>
+          <a:p>
+            <a:pPr algn="l"/>
+            <a:r>
+              <a:rPr sz="900" b="0" i="0">
+                <a:solidFill>
+                  <a:srgbClr val="CAD3DF"/>
+                </a:solidFill>
+              </a:rPr>
+              <a:t>Strong specular reflectors — secondary paths</a:t>
+            </a:r>
+          </a:p>
+        </p:txBody>
+      </p:sp>
+      <p:sp>
+        <p:nvSpPr>
+          <p:cNvPr id="65" name="TextBox 64"/>
+          <p:cNvSpPr txBox="1"/>
+          <p:nvPr/>
+        </p:nvSpPr>
+        <p:spPr>
+          <a:xfrm>
+            <a:off x="10808208" y="2496311"/>
+            <a:ext cx="1005840" cy="384048"/>
+          </a:xfrm>
+          <a:prstGeom prst="rect">
+            <a:avLst/>
+          </a:prstGeom>
+          <a:noFill/>
+        </p:spPr>
+        <p:txBody>
+          <a:bodyPr wrap="square">
+            <a:spAutoFit/>
+          </a:bodyPr>
+          <a:lstStyle/>
+          <a:p>
+            <a:pPr algn="r"/>
+            <a:r>
+              <a:rPr sz="950" b="1" i="0">
+                <a:solidFill>
+                  <a:srgbClr val="FF9F1C"/>
+                </a:solidFill>
+              </a:rPr>
+              <a:t>+2–5 dB</a:t>
+            </a:r>
+          </a:p>
+        </p:txBody>
+      </p:sp>
+      <p:sp>
+        <p:nvSpPr>
+          <p:cNvPr id="66" name="Rectangle 65"/>
+          <p:cNvSpPr/>
+          <p:nvPr/>
+        </p:nvSpPr>
+        <p:spPr>
+          <a:xfrm>
+            <a:off x="6126480" y="3200399"/>
+            <a:ext cx="36576" cy="274320"/>
+          </a:xfrm>
+          <a:prstGeom prst="rect">
+            <a:avLst/>
+          </a:prstGeom>
+          <a:solidFill>
+            <a:srgbClr val="CAD3DF"/>
+          </a:solidFill>
+          <a:ln>
+            <a:noFill/>
+          </a:ln>
+        </p:spPr>
+        <p:style>
+          <a:lnRef idx="1">
+            <a:schemeClr val="accent1"/>
+          </a:lnRef>
+          <a:fillRef idx="3">
+            <a:schemeClr val="accent1"/>
+          </a:fillRef>
+          <a:effectRef idx="2">
+            <a:schemeClr val="accent1"/>
+          </a:effectRef>
+          <a:fontRef idx="minor">
+            <a:schemeClr val="lt1"/>
+          </a:fontRef>
+        </p:style>
+        <p:txBody>
+          <a:bodyPr rtlCol="0" anchor="ctr"/>
+          <a:lstStyle/>
+          <a:p>
+            <a:pPr algn="ctr"/>
+          </a:p>
+        </p:txBody>
+      </p:sp>
+      <p:sp>
+        <p:nvSpPr>
+          <p:cNvPr id="67" name="TextBox 66"/>
+          <p:cNvSpPr txBox="1"/>
+          <p:nvPr/>
+        </p:nvSpPr>
+        <p:spPr>
+          <a:xfrm>
+            <a:off x="6236208" y="3118103"/>
+            <a:ext cx="1371600" cy="384048"/>
+          </a:xfrm>
+          <a:prstGeom prst="rect">
+            <a:avLst/>
+          </a:prstGeom>
+          <a:noFill/>
+        </p:spPr>
+        <p:txBody>
+          <a:bodyPr wrap="square">
+            <a:spAutoFit/>
+          </a:bodyPr>
+          <a:lstStyle/>
+          <a:p>
+            <a:pPr algn="l"/>
+            <a:r>
+              <a:rPr sz="950" b="1" i="0">
+                <a:solidFill>
+                  <a:srgbClr val="CAD3DF"/>
+                </a:solidFill>
+              </a:rPr>
+              <a:t>Roads</a:t>
+            </a:r>
+          </a:p>
+        </p:txBody>
+      </p:sp>
+      <p:sp>
+        <p:nvSpPr>
+          <p:cNvPr id="68" name="TextBox 67"/>
+          <p:cNvSpPr txBox="1"/>
+          <p:nvPr/>
+        </p:nvSpPr>
+        <p:spPr>
+          <a:xfrm>
+            <a:off x="7607808" y="3118103"/>
+            <a:ext cx="3200400" cy="384048"/>
+          </a:xfrm>
+          <a:prstGeom prst="rect">
+            <a:avLst/>
+          </a:prstGeom>
+          <a:noFill/>
+        </p:spPr>
+        <p:txBody>
+          <a:bodyPr wrap="square">
+            <a:spAutoFit/>
+          </a:bodyPr>
+          <a:lstStyle/>
+          <a:p>
+            <a:pPr algn="l"/>
+            <a:r>
+              <a:rPr sz="900" b="0" i="0">
+                <a:solidFill>
+                  <a:srgbClr val="CAD3DF"/>
+                </a:solidFill>
+              </a:rPr>
+              <a:t>Ground bounce — 2-ray interference pattern</a:t>
+            </a:r>
+          </a:p>
+        </p:txBody>
+      </p:sp>
+      <p:sp>
+        <p:nvSpPr>
+          <p:cNvPr id="69" name="TextBox 68"/>
+          <p:cNvSpPr txBox="1"/>
+          <p:nvPr/>
+        </p:nvSpPr>
+        <p:spPr>
+          <a:xfrm>
+            <a:off x="10808208" y="3118103"/>
+            <a:ext cx="1005840" cy="384048"/>
+          </a:xfrm>
+          <a:prstGeom prst="rect">
+            <a:avLst/>
+          </a:prstGeom>
+          <a:noFill/>
+        </p:spPr>
+        <p:txBody>
+          <a:bodyPr wrap="square">
+            <a:spAutoFit/>
+          </a:bodyPr>
+          <a:lstStyle/>
+          <a:p>
+            <a:pPr algn="r"/>
+            <a:r>
+              <a:rPr sz="950" b="1" i="0">
+                <a:solidFill>
+                  <a:srgbClr val="CAD3DF"/>
+                </a:solidFill>
+              </a:rPr>
+              <a:t>±3 dB</a:t>
+            </a:r>
+          </a:p>
+        </p:txBody>
+      </p:sp>
+      <p:sp>
+        <p:nvSpPr>
+          <p:cNvPr id="70" name="Rectangle 69"/>
+          <p:cNvSpPr/>
+          <p:nvPr/>
+        </p:nvSpPr>
+        <p:spPr>
+          <a:xfrm>
+            <a:off x="6126480" y="3822191"/>
+            <a:ext cx="36576" cy="274320"/>
+          </a:xfrm>
+          <a:prstGeom prst="rect">
+            <a:avLst/>
+          </a:prstGeom>
+          <a:solidFill>
+            <a:srgbClr val="2DCB7F"/>
+          </a:solidFill>
+          <a:ln>
+            <a:noFill/>
+          </a:ln>
+        </p:spPr>
+        <p:style>
+          <a:lnRef idx="1">
+            <a:schemeClr val="accent1"/>
+          </a:lnRef>
+          <a:fillRef idx="3">
+            <a:schemeClr val="accent1"/>
+          </a:fillRef>
+          <a:effectRef idx="2">
+            <a:schemeClr val="accent1"/>
+          </a:effectRef>
+          <a:fontRef idx="minor">
+            <a:schemeClr val="lt1"/>
+          </a:fontRef>
+        </p:style>
+        <p:txBody>
+          <a:bodyPr rtlCol="0" anchor="ctr"/>
+          <a:lstStyle/>
+          <a:p>
+            <a:pPr algn="ctr"/>
+          </a:p>
+        </p:txBody>
+      </p:sp>
+      <p:sp>
+        <p:nvSpPr>
+          <p:cNvPr id="71" name="TextBox 70"/>
+          <p:cNvSpPr txBox="1"/>
+          <p:nvPr/>
+        </p:nvSpPr>
+        <p:spPr>
+          <a:xfrm>
+            <a:off x="6236208" y="3739895"/>
+            <a:ext cx="1371600" cy="384048"/>
+          </a:xfrm>
+          <a:prstGeom prst="rect">
+            <a:avLst/>
+          </a:prstGeom>
+          <a:noFill/>
+        </p:spPr>
+        <p:txBody>
+          <a:bodyPr wrap="square">
+            <a:spAutoFit/>
+          </a:bodyPr>
+          <a:lstStyle/>
+          <a:p>
+            <a:pPr algn="l"/>
+            <a:r>
+              <a:rPr sz="950" b="1" i="0">
+                <a:solidFill>
+                  <a:srgbClr val="2DCB7F"/>
+                </a:solidFill>
+              </a:rPr>
+              <a:t>Vegetation</a:t>
+            </a:r>
+          </a:p>
+        </p:txBody>
+      </p:sp>
+      <p:sp>
+        <p:nvSpPr>
+          <p:cNvPr id="72" name="TextBox 71"/>
+          <p:cNvSpPr txBox="1"/>
+          <p:nvPr/>
+        </p:nvSpPr>
+        <p:spPr>
+          <a:xfrm>
+            <a:off x="7607808" y="3739895"/>
+            <a:ext cx="3200400" cy="384048"/>
+          </a:xfrm>
+          <a:prstGeom prst="rect">
+            <a:avLst/>
+          </a:prstGeom>
+          <a:noFill/>
+        </p:spPr>
+        <p:txBody>
+          <a:bodyPr wrap="square">
+            <a:spAutoFit/>
+          </a:bodyPr>
+          <a:lstStyle/>
+          <a:p>
+            <a:pPr algn="l"/>
+            <a:r>
+              <a:rPr sz="900" b="0" i="0">
+                <a:solidFill>
+                  <a:srgbClr val="CAD3DF"/>
+                </a:solidFill>
+              </a:rPr>
+              <a:t>Absorption + scatter (P.833) up to 67 dB at 9 km</a:t>
+            </a:r>
+          </a:p>
+        </p:txBody>
+      </p:sp>
+      <p:sp>
+        <p:nvSpPr>
+          <p:cNvPr id="73" name="TextBox 72"/>
+          <p:cNvSpPr txBox="1"/>
+          <p:nvPr/>
+        </p:nvSpPr>
+        <p:spPr>
+          <a:xfrm>
+            <a:off x="10808208" y="3739895"/>
+            <a:ext cx="1005840" cy="384048"/>
+          </a:xfrm>
+          <a:prstGeom prst="rect">
+            <a:avLst/>
+          </a:prstGeom>
+          <a:noFill/>
+        </p:spPr>
+        <p:txBody>
+          <a:bodyPr wrap="square">
+            <a:spAutoFit/>
+          </a:bodyPr>
+          <a:lstStyle/>
+          <a:p>
+            <a:pPr algn="r"/>
+            <a:r>
+              <a:rPr sz="950" b="1" i="0">
+                <a:solidFill>
+                  <a:srgbClr val="2DCB7F"/>
+                </a:solidFill>
+              </a:rPr>
+              <a:t>+12–27 dB</a:t>
+            </a:r>
+          </a:p>
+        </p:txBody>
+      </p:sp>
+      <p:sp>
+        <p:nvSpPr>
+          <p:cNvPr id="74" name="Rectangle 73"/>
+          <p:cNvSpPr/>
+          <p:nvPr/>
+        </p:nvSpPr>
+        <p:spPr>
+          <a:xfrm>
+            <a:off x="6126480" y="4443983"/>
+            <a:ext cx="36576" cy="274320"/>
+          </a:xfrm>
+          <a:prstGeom prst="rect">
+            <a:avLst/>
+          </a:prstGeom>
+          <a:solidFill>
+            <a:srgbClr val="FF4D6D"/>
+          </a:solidFill>
+          <a:ln>
+            <a:noFill/>
+          </a:ln>
+        </p:spPr>
+        <p:style>
+          <a:lnRef idx="1">
+            <a:schemeClr val="accent1"/>
+          </a:lnRef>
+          <a:fillRef idx="3">
+            <a:schemeClr val="accent1"/>
+          </a:fillRef>
+          <a:effectRef idx="2">
+            <a:schemeClr val="accent1"/>
+          </a:effectRef>
+          <a:fontRef idx="minor">
+            <a:schemeClr val="lt1"/>
+          </a:fontRef>
+        </p:style>
+        <p:txBody>
+          <a:bodyPr rtlCol="0" anchor="ctr"/>
+          <a:lstStyle/>
+          <a:p>
+            <a:pPr algn="ctr"/>
+          </a:p>
+        </p:txBody>
+      </p:sp>
+      <p:sp>
+        <p:nvSpPr>
+          <p:cNvPr id="75" name="TextBox 74"/>
+          <p:cNvSpPr txBox="1"/>
+          <p:nvPr/>
+        </p:nvSpPr>
+        <p:spPr>
+          <a:xfrm>
+            <a:off x="6236208" y="4361687"/>
+            <a:ext cx="1371600" cy="384048"/>
+          </a:xfrm>
+          <a:prstGeom prst="rect">
+            <a:avLst/>
+          </a:prstGeom>
+          <a:noFill/>
+        </p:spPr>
+        <p:txBody>
+          <a:bodyPr wrap="square">
+            <a:spAutoFit/>
+          </a:bodyPr>
+          <a:lstStyle/>
+          <a:p>
+            <a:pPr algn="l"/>
+            <a:r>
+              <a:rPr sz="950" b="1" i="0">
+                <a:solidFill>
+                  <a:srgbClr val="FF4D6D"/>
+                </a:solidFill>
+              </a:rPr>
+              <a:t>Railways</a:t>
+            </a:r>
+          </a:p>
+        </p:txBody>
+      </p:sp>
+      <p:sp>
+        <p:nvSpPr>
+          <p:cNvPr id="76" name="TextBox 75"/>
+          <p:cNvSpPr txBox="1"/>
+          <p:nvPr/>
+        </p:nvSpPr>
+        <p:spPr>
+          <a:xfrm>
+            <a:off x="7607808" y="4361687"/>
+            <a:ext cx="3200400" cy="384048"/>
+          </a:xfrm>
+          <a:prstGeom prst="rect">
+            <a:avLst/>
+          </a:prstGeom>
+          <a:noFill/>
+        </p:spPr>
+        <p:txBody>
+          <a:bodyPr wrap="square">
+            <a:spAutoFit/>
+          </a:bodyPr>
+          <a:lstStyle/>
+          <a:p>
+            <a:pPr algn="l"/>
+            <a:r>
+              <a:rPr sz="900" b="0" i="0">
+                <a:solidFill>
+                  <a:srgbClr val="CAD3DF"/>
+                </a:solidFill>
+              </a:rPr>
+              <a:t>Specular waveguide along rail corridors</a:t>
+            </a:r>
+          </a:p>
+        </p:txBody>
+      </p:sp>
+      <p:sp>
+        <p:nvSpPr>
+          <p:cNvPr id="77" name="TextBox 76"/>
+          <p:cNvSpPr txBox="1"/>
+          <p:nvPr/>
+        </p:nvSpPr>
+        <p:spPr>
+          <a:xfrm>
+            <a:off x="10808208" y="4361687"/>
+            <a:ext cx="1005840" cy="384048"/>
+          </a:xfrm>
+          <a:prstGeom prst="rect">
+            <a:avLst/>
+          </a:prstGeom>
+          <a:noFill/>
+        </p:spPr>
+        <p:txBody>
+          <a:bodyPr wrap="square">
+            <a:spAutoFit/>
+          </a:bodyPr>
+          <a:lstStyle/>
+          <a:p>
+            <a:pPr algn="r"/>
+            <a:r>
+              <a:rPr sz="950" b="1" i="0">
+                <a:solidFill>
+                  <a:srgbClr val="FF4D6D"/>
+                </a:solidFill>
+              </a:rPr>
+              <a:t>Elevated</a:t>
+            </a:r>
+          </a:p>
+        </p:txBody>
+      </p:sp>
+      <p:sp>
+        <p:nvSpPr>
+          <p:cNvPr id="78" name="Rectangle 77"/>
+          <p:cNvSpPr/>
+          <p:nvPr/>
+        </p:nvSpPr>
+        <p:spPr>
+          <a:xfrm>
+            <a:off x="6126480" y="5065775"/>
+            <a:ext cx="36576" cy="274320"/>
+          </a:xfrm>
+          <a:prstGeom prst="rect">
+            <a:avLst/>
+          </a:prstGeom>
+          <a:solidFill>
+            <a:srgbClr val="90E0EF"/>
+          </a:solidFill>
+          <a:ln>
+            <a:noFill/>
+          </a:ln>
+        </p:spPr>
+        <p:style>
+          <a:lnRef idx="1">
+            <a:schemeClr val="accent1"/>
+          </a:lnRef>
+          <a:fillRef idx="3">
+            <a:schemeClr val="accent1"/>
+          </a:fillRef>
+          <a:effectRef idx="2">
+            <a:schemeClr val="accent1"/>
+          </a:effectRef>
+          <a:fontRef idx="minor">
+            <a:schemeClr val="lt1"/>
+          </a:fontRef>
+        </p:style>
+        <p:txBody>
+          <a:bodyPr rtlCol="0" anchor="ctr"/>
+          <a:lstStyle/>
+          <a:p>
+            <a:pPr algn="ctr"/>
+          </a:p>
+        </p:txBody>
+      </p:sp>
+      <p:sp>
+        <p:nvSpPr>
+          <p:cNvPr id="79" name="TextBox 78"/>
+          <p:cNvSpPr txBox="1"/>
+          <p:nvPr/>
+        </p:nvSpPr>
+        <p:spPr>
+          <a:xfrm>
+            <a:off x="6236208" y="4983479"/>
+            <a:ext cx="1371600" cy="384048"/>
+          </a:xfrm>
+          <a:prstGeom prst="rect">
+            <a:avLst/>
+          </a:prstGeom>
+          <a:noFill/>
+        </p:spPr>
+        <p:txBody>
+          <a:bodyPr wrap="square">
+            <a:spAutoFit/>
+          </a:bodyPr>
+          <a:lstStyle/>
+          <a:p>
+            <a:pPr algn="l"/>
+            <a:r>
+              <a:rPr sz="950" b="1" i="0">
+                <a:solidFill>
+                  <a:srgbClr val="90E0EF"/>
+                </a:solidFill>
+              </a:rPr>
+              <a:t>Water (Trent)</a:t>
+            </a:r>
+          </a:p>
+        </p:txBody>
+      </p:sp>
+      <p:sp>
+        <p:nvSpPr>
+          <p:cNvPr id="80" name="TextBox 79"/>
+          <p:cNvSpPr txBox="1"/>
+          <p:nvPr/>
+        </p:nvSpPr>
+        <p:spPr>
+          <a:xfrm>
+            <a:off x="7607808" y="4983479"/>
+            <a:ext cx="3200400" cy="384048"/>
+          </a:xfrm>
+          <a:prstGeom prst="rect">
+            <a:avLst/>
+          </a:prstGeom>
+          <a:noFill/>
+        </p:spPr>
+        <p:txBody>
+          <a:bodyPr wrap="square">
+            <a:spAutoFit/>
+          </a:bodyPr>
+          <a:lstStyle/>
+          <a:p>
+            <a:pPr algn="l"/>
+            <a:r>
+              <a:rPr sz="900" b="0" i="0">
+                <a:solidFill>
+                  <a:srgbClr val="CAD3DF"/>
+                </a:solidFill>
+              </a:rPr>
+              <a:t>Near-specular reflection — local enhancement</a:t>
+            </a:r>
+          </a:p>
+        </p:txBody>
+      </p:sp>
+      <p:sp>
+        <p:nvSpPr>
+          <p:cNvPr id="81" name="TextBox 80"/>
+          <p:cNvSpPr txBox="1"/>
+          <p:nvPr/>
+        </p:nvSpPr>
+        <p:spPr>
+          <a:xfrm>
+            <a:off x="10808208" y="4983479"/>
+            <a:ext cx="1005840" cy="384048"/>
+          </a:xfrm>
+          <a:prstGeom prst="rect">
+            <a:avLst/>
+          </a:prstGeom>
+          <a:noFill/>
+        </p:spPr>
+        <p:txBody>
+          <a:bodyPr wrap="square">
+            <a:spAutoFit/>
+          </a:bodyPr>
+          <a:lstStyle/>
+          <a:p>
+            <a:pPr algn="r"/>
+            <a:r>
+              <a:rPr sz="950" b="1" i="0">
+                <a:solidFill>
+                  <a:srgbClr val="90E0EF"/>
+                </a:solidFill>
+              </a:rPr>
+              <a:t>Local +</a:t>
+            </a:r>
+          </a:p>
+        </p:txBody>
+      </p:sp>
+      <p:sp>
+        <p:nvSpPr>
+          <p:cNvPr id="82" name="Rectangle 81"/>
+          <p:cNvSpPr/>
+          <p:nvPr/>
+        </p:nvSpPr>
+        <p:spPr>
+          <a:xfrm>
+            <a:off x="6126480" y="5687567"/>
+            <a:ext cx="36576" cy="274320"/>
+          </a:xfrm>
+          <a:prstGeom prst="rect">
+            <a:avLst/>
+          </a:prstGeom>
+          <a:solidFill>
+            <a:srgbClr val="CAD3DF"/>
+          </a:solidFill>
+          <a:ln>
+            <a:noFill/>
+          </a:ln>
+        </p:spPr>
+        <p:style>
+          <a:lnRef idx="1">
+            <a:schemeClr val="accent1"/>
+          </a:lnRef>
+          <a:fillRef idx="3">
+            <a:schemeClr val="accent1"/>
+          </a:fillRef>
+          <a:effectRef idx="2">
+            <a:schemeClr val="accent1"/>
+          </a:effectRef>
+          <a:fontRef idx="minor">
+            <a:schemeClr val="lt1"/>
+          </a:fontRef>
+        </p:style>
+        <p:txBody>
+          <a:bodyPr rtlCol="0" anchor="ctr"/>
+          <a:lstStyle/>
+          <a:p>
+            <a:pPr algn="ctr"/>
+          </a:p>
+        </p:txBody>
+      </p:sp>
+      <p:sp>
+        <p:nvSpPr>
+          <p:cNvPr id="83" name="TextBox 82"/>
+          <p:cNvSpPr txBox="1"/>
+          <p:nvPr/>
+        </p:nvSpPr>
+        <p:spPr>
+          <a:xfrm>
+            <a:off x="6236208" y="5605271"/>
+            <a:ext cx="1371600" cy="384048"/>
+          </a:xfrm>
+          <a:prstGeom prst="rect">
+            <a:avLst/>
+          </a:prstGeom>
+          <a:noFill/>
+        </p:spPr>
+        <p:txBody>
+          <a:bodyPr wrap="square">
+            <a:spAutoFit/>
+          </a:bodyPr>
+          <a:lstStyle/>
+          <a:p>
+            <a:pPr algn="l"/>
+            <a:r>
+              <a:rPr sz="950" b="1" i="0">
+                <a:solidFill>
+                  <a:srgbClr val="CAD3DF"/>
+                </a:solidFill>
+              </a:rPr>
+              <a:t>Barriers</a:t>
+            </a:r>
+          </a:p>
+        </p:txBody>
+      </p:sp>
+      <p:sp>
+        <p:nvSpPr>
+          <p:cNvPr id="84" name="TextBox 83"/>
+          <p:cNvSpPr txBox="1"/>
+          <p:nvPr/>
+        </p:nvSpPr>
+        <p:spPr>
+          <a:xfrm>
+            <a:off x="7607808" y="5605271"/>
+            <a:ext cx="3200400" cy="384048"/>
+          </a:xfrm>
+          <a:prstGeom prst="rect">
+            <a:avLst/>
+          </a:prstGeom>
+          <a:noFill/>
+        </p:spPr>
+        <p:txBody>
+          <a:bodyPr wrap="square">
+            <a:spAutoFit/>
+          </a:bodyPr>
+          <a:lstStyle/>
+          <a:p>
+            <a:pPr algn="l"/>
+            <a:r>
+              <a:rPr sz="900" b="0" i="0">
+                <a:solidFill>
+                  <a:srgbClr val="CAD3DF"/>
+                </a:solidFill>
+              </a:rPr>
+              <a:t>Extra diffraction edges — additional shielding</a:t>
+            </a:r>
+          </a:p>
+        </p:txBody>
+      </p:sp>
+      <p:sp>
+        <p:nvSpPr>
+          <p:cNvPr id="85" name="TextBox 84"/>
+          <p:cNvSpPr txBox="1"/>
+          <p:nvPr/>
+        </p:nvSpPr>
+        <p:spPr>
+          <a:xfrm>
+            <a:off x="10808208" y="5605271"/>
+            <a:ext cx="1005840" cy="384048"/>
+          </a:xfrm>
+          <a:prstGeom prst="rect">
+            <a:avLst/>
+          </a:prstGeom>
+          <a:noFill/>
+        </p:spPr>
+        <p:txBody>
+          <a:bodyPr wrap="square">
+            <a:spAutoFit/>
+          </a:bodyPr>
+          <a:lstStyle/>
+          <a:p>
+            <a:pPr algn="r"/>
+            <a:r>
+              <a:rPr sz="950" b="1" i="0">
+                <a:solidFill>
+                  <a:srgbClr val="CAD3DF"/>
+                </a:solidFill>
+              </a:rPr>
+              <a:t>+2–8 dB</a:t>
+            </a:r>
+          </a:p>
+        </p:txBody>
+      </p:sp>
+      <p:sp>
+        <p:nvSpPr>
+          <p:cNvPr id="86" name="Rectangle 85"/>
+          <p:cNvSpPr/>
+          <p:nvPr/>
+        </p:nvSpPr>
+        <p:spPr>
+          <a:xfrm>
+            <a:off x="320040" y="6492240"/>
+            <a:ext cx="11612880" cy="0"/>
+          </a:xfrm>
+          <a:prstGeom prst="rect">
+            <a:avLst/>
+          </a:prstGeom>
+          <a:solidFill>
+            <a:srgbClr val="112A40"/>
+          </a:solidFill>
+          <a:ln>
+            <a:noFill/>
+          </a:ln>
+        </p:spPr>
+        <p:style>
+          <a:lnRef idx="1">
+            <a:schemeClr val="accent1"/>
+          </a:lnRef>
+          <a:fillRef idx="3">
+            <a:schemeClr val="accent1"/>
+          </a:fillRef>
+          <a:effectRef idx="2">
+            <a:schemeClr val="accent1"/>
+          </a:effectRef>
+          <a:fontRef idx="minor">
+            <a:schemeClr val="lt1"/>
+          </a:fontRef>
+        </p:style>
+        <p:txBody>
+          <a:bodyPr rtlCol="0" anchor="ctr"/>
+          <a:lstStyle/>
+          <a:p>
+            <a:pPr algn="ctr"/>
+          </a:p>
+        </p:txBody>
+      </p:sp>
+      <p:sp>
+        <p:nvSpPr>
+          <p:cNvPr id="87" name="TextBox 86"/>
+          <p:cNvSpPr txBox="1"/>
+          <p:nvPr/>
+        </p:nvSpPr>
+        <p:spPr>
+          <a:xfrm>
+            <a:off x="457200" y="6291072"/>
+            <a:ext cx="11155680" cy="457200"/>
+          </a:xfrm>
+          <a:prstGeom prst="rect">
+            <a:avLst/>
+          </a:prstGeom>
+          <a:noFill/>
+        </p:spPr>
+        <p:txBody>
+          <a:bodyPr wrap="square">
+            <a:spAutoFit/>
+          </a:bodyPr>
+          <a:lstStyle/>
+          <a:p>
+            <a:pPr algn="ctr"/>
+            <a:r>
+              <a:rPr sz="1000" b="0" i="1">
+                <a:solidFill>
+                  <a:srgbClr val="90E0EF"/>
+                </a:solidFill>
+              </a:rPr>
+              <a:t>Metal infrastructure (σ = 10⁷ S/m) added in scene_v2_infra — absent in flat baseline.  At 915 MHz metal surfaces are near-perfect reflectors creating strong secondary paths.</a:t>
+            </a:r>
+          </a:p>
+        </p:txBody>
+      </p:sp>
+    </p:spTree>
+  </p:cSld>
+  <p:clrMapOvr>
+    <a:masterClrMapping/>
+  </p:clrMapOvr>
+</p:sld>
+</file>
+
+<file path=ppt/slides/slide13.xml><?xml version="1.0" encoding="utf-8"?>
+<p:sld xmlns:a="http://schemas.openxmlformats.org/drawingml/2006/main" xmlns:p="http://schemas.openxmlformats.org/presentationml/2006/main" xmlns:r="http://schemas.openxmlformats.org/officeDocument/2006/relationships">
+  <p:cSld>
+    <p:bg>
+      <p:bgPr>
+        <a:solidFill>
+          <a:srgbClr val="0D1B2A"/>
+        </a:solidFill>
+        <a:effectLst/>
+      </p:bgPr>
+    </p:bg>
+    <p:spTree>
+      <p:nvGrpSpPr>
+        <p:cNvPr id="1" name=""/>
+        <p:cNvGrpSpPr/>
+        <p:nvPr/>
+      </p:nvGrpSpPr>
+      <p:grpSpPr/>
+      <p:sp>
+        <p:nvSpPr>
+          <p:cNvPr id="2" name="Rectangle 1"/>
+          <p:cNvSpPr/>
+          <p:nvPr/>
+        </p:nvSpPr>
+        <p:spPr>
+          <a:xfrm>
+            <a:off x="0" y="73152"/>
+            <a:ext cx="12188952" cy="54864"/>
+          </a:xfrm>
+          <a:prstGeom prst="rect">
+            <a:avLst/>
+          </a:prstGeom>
+          <a:solidFill>
+            <a:srgbClr val="00B4D8"/>
+          </a:solidFill>
+          <a:ln>
+            <a:noFill/>
+          </a:ln>
+        </p:spPr>
+        <p:style>
+          <a:lnRef idx="1">
+            <a:schemeClr val="accent1"/>
+          </a:lnRef>
+          <a:fillRef idx="3">
+            <a:schemeClr val="accent1"/>
+          </a:fillRef>
+          <a:effectRef idx="2">
+            <a:schemeClr val="accent1"/>
+          </a:effectRef>
+          <a:fontRef idx="minor">
+            <a:schemeClr val="lt1"/>
+          </a:fontRef>
+        </p:style>
+        <p:txBody>
+          <a:bodyPr rtlCol="0" anchor="ctr"/>
+          <a:lstStyle/>
+          <a:p>
+            <a:pPr algn="ctr"/>
+          </a:p>
+        </p:txBody>
+      </p:sp>
+      <p:sp>
+        <p:nvSpPr>
+          <p:cNvPr id="3" name="TextBox 2"/>
+          <p:cNvSpPr txBox="1"/>
+          <p:nvPr/>
+        </p:nvSpPr>
+        <p:spPr>
+          <a:xfrm>
+            <a:off x="320040" y="201168"/>
+            <a:ext cx="3657600" cy="256032"/>
+          </a:xfrm>
+          <a:prstGeom prst="rect">
+            <a:avLst/>
+          </a:prstGeom>
+          <a:noFill/>
+        </p:spPr>
+        <p:txBody>
+          <a:bodyPr wrap="square">
+            <a:spAutoFit/>
+          </a:bodyPr>
+          <a:lstStyle/>
+          <a:p>
+            <a:pPr algn="l"/>
+            <a:r>
+              <a:rPr sz="800" b="1" i="0">
+                <a:solidFill>
+                  <a:srgbClr val="00B4D8"/>
+                </a:solidFill>
+              </a:rPr>
+              <a:t>TX / RX SETUP</a:t>
+            </a:r>
+          </a:p>
+        </p:txBody>
+      </p:sp>
+      <p:sp>
+        <p:nvSpPr>
+          <p:cNvPr id="4" name="TextBox 3"/>
+          <p:cNvSpPr txBox="1"/>
+          <p:nvPr/>
+        </p:nvSpPr>
+        <p:spPr>
+          <a:xfrm>
+            <a:off x="10972800" y="6492240"/>
+            <a:ext cx="1097280" cy="320040"/>
+          </a:xfrm>
+          <a:prstGeom prst="rect">
+            <a:avLst/>
+          </a:prstGeom>
+          <a:noFill/>
+        </p:spPr>
+        <p:txBody>
+          <a:bodyPr wrap="square">
+            <a:spAutoFit/>
+          </a:bodyPr>
+          <a:lstStyle/>
+          <a:p>
+            <a:pPr algn="r"/>
+            <a:r>
+              <a:rPr sz="900" b="0" i="0">
+                <a:solidFill>
+                  <a:srgbClr val="CAD3DF"/>
+                </a:solidFill>
+              </a:rPr>
+              <a:t>13 / 12</a:t>
+            </a:r>
+          </a:p>
+        </p:txBody>
+      </p:sp>
+      <p:sp>
+        <p:nvSpPr>
+          <p:cNvPr id="5" name="TextBox 4"/>
+          <p:cNvSpPr txBox="1"/>
+          <p:nvPr/>
+        </p:nvSpPr>
+        <p:spPr>
+          <a:xfrm>
+            <a:off x="411480" y="457200"/>
+            <a:ext cx="11430000" cy="640080"/>
+          </a:xfrm>
+          <a:prstGeom prst="rect">
+            <a:avLst/>
+          </a:prstGeom>
+          <a:noFill/>
+        </p:spPr>
+        <p:txBody>
+          <a:bodyPr wrap="square">
+            <a:spAutoFit/>
+          </a:bodyPr>
+          <a:lstStyle/>
+          <a:p>
+            <a:pPr algn="l"/>
+            <a:r>
+              <a:rPr sz="2600" b="1" i="0">
+                <a:solidFill>
+                  <a:srgbClr val="FFFFFF"/>
+                </a:solidFill>
+              </a:rPr>
+              <a:t>TX &amp; RX Placement — GPS to Scene + Ray-Cast Validation</a:t>
+            </a:r>
+          </a:p>
+        </p:txBody>
+      </p:sp>
+      <p:sp>
+        <p:nvSpPr>
+          <p:cNvPr id="6" name="Rectangle 5"/>
+          <p:cNvSpPr/>
+          <p:nvPr/>
+        </p:nvSpPr>
+        <p:spPr>
+          <a:xfrm>
+            <a:off x="411480" y="1078992"/>
+            <a:ext cx="11338560" cy="16459"/>
+          </a:xfrm>
+          <a:prstGeom prst="rect">
+            <a:avLst/>
+          </a:prstGeom>
+          <a:solidFill>
+            <a:srgbClr val="1E3A52"/>
+          </a:solidFill>
+          <a:ln>
+            <a:noFill/>
+          </a:ln>
+        </p:spPr>
+        <p:style>
+          <a:lnRef idx="1">
+            <a:schemeClr val="accent1"/>
+          </a:lnRef>
+          <a:fillRef idx="3">
+            <a:schemeClr val="accent1"/>
+          </a:fillRef>
+          <a:effectRef idx="2">
+            <a:schemeClr val="accent1"/>
+          </a:effectRef>
+          <a:fontRef idx="minor">
+            <a:schemeClr val="lt1"/>
+          </a:fontRef>
+        </p:style>
+        <p:txBody>
+          <a:bodyPr rtlCol="0" anchor="ctr"/>
+          <a:lstStyle/>
+          <a:p>
+            <a:pPr algn="ctr"/>
+          </a:p>
+        </p:txBody>
+      </p:sp>
+      <p:sp>
+        <p:nvSpPr>
+          <p:cNvPr id="7" name="Rectangle 6"/>
+          <p:cNvSpPr/>
+          <p:nvPr/>
+        </p:nvSpPr>
+        <p:spPr>
+          <a:xfrm>
+            <a:off x="320040" y="1234440"/>
+            <a:ext cx="3657600" cy="2926080"/>
+          </a:xfrm>
+          <a:prstGeom prst="rect">
+            <a:avLst/>
+          </a:prstGeom>
+          <a:solidFill>
+            <a:srgbClr val="112A40"/>
+          </a:solidFill>
+          <a:ln>
+            <a:noFill/>
+          </a:ln>
+        </p:spPr>
+        <p:style>
+          <a:lnRef idx="1">
+            <a:schemeClr val="accent1"/>
+          </a:lnRef>
+          <a:fillRef idx="3">
+            <a:schemeClr val="accent1"/>
+          </a:fillRef>
+          <a:effectRef idx="2">
+            <a:schemeClr val="accent1"/>
+          </a:effectRef>
+          <a:fontRef idx="minor">
+            <a:schemeClr val="lt1"/>
+          </a:fontRef>
+        </p:style>
+        <p:txBody>
+          <a:bodyPr rtlCol="0" anchor="ctr"/>
+          <a:lstStyle/>
+          <a:p>
+            <a:pPr algn="ctr"/>
+          </a:p>
+        </p:txBody>
+      </p:sp>
+      <p:sp>
+        <p:nvSpPr>
+          <p:cNvPr id="8" name="Rectangle 7"/>
+          <p:cNvSpPr/>
+          <p:nvPr/>
+        </p:nvSpPr>
+        <p:spPr>
+          <a:xfrm>
+            <a:off x="320040" y="1234440"/>
+            <a:ext cx="3657600" cy="54864"/>
+          </a:xfrm>
+          <a:prstGeom prst="rect">
+            <a:avLst/>
+          </a:prstGeom>
+          <a:solidFill>
+            <a:srgbClr val="FF9F1C"/>
+          </a:solidFill>
+          <a:ln>
+            <a:noFill/>
+          </a:ln>
+        </p:spPr>
+        <p:style>
+          <a:lnRef idx="1">
+            <a:schemeClr val="accent1"/>
+          </a:lnRef>
+          <a:fillRef idx="3">
+            <a:schemeClr val="accent1"/>
+          </a:fillRef>
+          <a:effectRef idx="2">
+            <a:schemeClr val="accent1"/>
+          </a:effectRef>
+          <a:fontRef idx="minor">
+            <a:schemeClr val="lt1"/>
+          </a:fontRef>
+        </p:style>
+        <p:txBody>
+          <a:bodyPr rtlCol="0" anchor="ctr"/>
+          <a:lstStyle/>
+          <a:p>
+            <a:pPr algn="ctr"/>
+          </a:p>
+        </p:txBody>
+      </p:sp>
+      <p:sp>
+        <p:nvSpPr>
+          <p:cNvPr id="9" name="TextBox 8"/>
+          <p:cNvSpPr txBox="1"/>
+          <p:nvPr/>
+        </p:nvSpPr>
+        <p:spPr>
+          <a:xfrm>
+            <a:off x="457200" y="1371600"/>
+            <a:ext cx="3383280" cy="365760"/>
+          </a:xfrm>
+          <a:prstGeom prst="rect">
+            <a:avLst/>
+          </a:prstGeom>
+          <a:noFill/>
+        </p:spPr>
+        <p:txBody>
+          <a:bodyPr wrap="square">
+            <a:spAutoFit/>
+          </a:bodyPr>
+          <a:lstStyle/>
+          <a:p>
+            <a:pPr algn="l"/>
+            <a:r>
+              <a:rPr sz="1200" b="1" i="0">
+                <a:solidFill>
+                  <a:srgbClr val="FF9F1C"/>
+                </a:solidFill>
+              </a:rPr>
+              <a:t>TX — Transmitter</a:t>
+            </a:r>
+          </a:p>
+        </p:txBody>
+      </p:sp>
+      <p:sp>
+        <p:nvSpPr>
+          <p:cNvPr id="10" name="TextBox 9"/>
+          <p:cNvSpPr txBox="1"/>
+          <p:nvPr/>
+        </p:nvSpPr>
+        <p:spPr>
+          <a:xfrm>
+            <a:off x="457200" y="1828800"/>
+            <a:ext cx="1371600" cy="347472"/>
+          </a:xfrm>
+          <a:prstGeom prst="rect">
+            <a:avLst/>
+          </a:prstGeom>
+          <a:noFill/>
+        </p:spPr>
+        <p:txBody>
+          <a:bodyPr wrap="square">
+            <a:spAutoFit/>
+          </a:bodyPr>
+          <a:lstStyle/>
+          <a:p>
+            <a:pPr algn="l"/>
+            <a:r>
+              <a:rPr sz="950" b="1" i="0">
+                <a:solidFill>
+                  <a:srgbClr val="90E0EF"/>
+                </a:solidFill>
+              </a:rPr>
+              <a:t>GPS (WGS84)</a:t>
+            </a:r>
+          </a:p>
+        </p:txBody>
+      </p:sp>
+      <p:sp>
+        <p:nvSpPr>
+          <p:cNvPr id="11" name="TextBox 10"/>
+          <p:cNvSpPr txBox="1"/>
+          <p:nvPr/>
+        </p:nvSpPr>
+        <p:spPr>
+          <a:xfrm>
+            <a:off x="1828800" y="1828800"/>
+            <a:ext cx="2011680" cy="347472"/>
+          </a:xfrm>
+          <a:prstGeom prst="rect">
+            <a:avLst/>
+          </a:prstGeom>
+          <a:noFill/>
+        </p:spPr>
+        <p:txBody>
+          <a:bodyPr wrap="square">
+            <a:spAutoFit/>
+          </a:bodyPr>
+          <a:lstStyle/>
+          <a:p>
+            <a:pPr algn="l"/>
+            <a:r>
+              <a:rPr sz="950" b="0" i="0">
+                <a:solidFill>
+                  <a:srgbClr val="FFFFFF"/>
+                </a:solidFill>
+              </a:rPr>
+              <a:t>−1.25590°,  52.98630°</a:t>
+            </a:r>
+          </a:p>
+        </p:txBody>
+      </p:sp>
+      <p:sp>
+        <p:nvSpPr>
+          <p:cNvPr id="12" name="TextBox 11"/>
+          <p:cNvSpPr txBox="1"/>
+          <p:nvPr/>
+        </p:nvSpPr>
+        <p:spPr>
+          <a:xfrm>
+            <a:off x="457200" y="2176272"/>
+            <a:ext cx="1371600" cy="347472"/>
+          </a:xfrm>
+          <a:prstGeom prst="rect">
+            <a:avLst/>
+          </a:prstGeom>
+          <a:noFill/>
+        </p:spPr>
+        <p:txBody>
+          <a:bodyPr wrap="square">
+            <a:spAutoFit/>
+          </a:bodyPr>
+          <a:lstStyle/>
+          <a:p>
+            <a:pPr algn="l"/>
+            <a:r>
+              <a:rPr sz="950" b="1" i="0">
+                <a:solidFill>
+                  <a:srgbClr val="90E0EF"/>
+                </a:solidFill>
+              </a:rPr>
+              <a:t>Transform</a:t>
+            </a:r>
+          </a:p>
+        </p:txBody>
+      </p:sp>
+      <p:sp>
+        <p:nvSpPr>
+          <p:cNvPr id="13" name="TextBox 12"/>
+          <p:cNvSpPr txBox="1"/>
+          <p:nvPr/>
+        </p:nvSpPr>
+        <p:spPr>
+          <a:xfrm>
+            <a:off x="1828800" y="2176272"/>
+            <a:ext cx="2011680" cy="347472"/>
+          </a:xfrm>
+          <a:prstGeom prst="rect">
+            <a:avLst/>
+          </a:prstGeom>
+          <a:noFill/>
+        </p:spPr>
+        <p:txBody>
+          <a:bodyPr wrap="square">
+            <a:spAutoFit/>
+          </a:bodyPr>
+          <a:lstStyle/>
+          <a:p>
+            <a:pPr algn="l"/>
+            <a:r>
+              <a:rPr sz="950" b="0" i="0">
+                <a:solidFill>
+                  <a:srgbClr val="FFFFFF"/>
+                </a:solidFill>
+              </a:rPr>
+              <a:t>WGS84 → UTM 30N → scene XY</a:t>
+            </a:r>
+          </a:p>
+        </p:txBody>
+      </p:sp>
+      <p:sp>
+        <p:nvSpPr>
+          <p:cNvPr id="14" name="TextBox 13"/>
+          <p:cNvSpPr txBox="1"/>
+          <p:nvPr/>
+        </p:nvSpPr>
+        <p:spPr>
+          <a:xfrm>
+            <a:off x="457200" y="2523744"/>
+            <a:ext cx="1371600" cy="347472"/>
+          </a:xfrm>
+          <a:prstGeom prst="rect">
+            <a:avLst/>
+          </a:prstGeom>
+          <a:noFill/>
+        </p:spPr>
+        <p:txBody>
+          <a:bodyPr wrap="square">
+            <a:spAutoFit/>
+          </a:bodyPr>
+          <a:lstStyle/>
+          <a:p>
+            <a:pPr algn="l"/>
+            <a:r>
+              <a:rPr sz="950" b="1" i="0">
+                <a:solidFill>
+                  <a:srgbClr val="90E0EF"/>
+                </a:solidFill>
+              </a:rPr>
+              <a:t>Terrain Z</a:t>
+            </a:r>
+          </a:p>
+        </p:txBody>
+      </p:sp>
+      <p:sp>
+        <p:nvSpPr>
+          <p:cNvPr id="15" name="TextBox 14"/>
+          <p:cNvSpPr txBox="1"/>
+          <p:nvPr/>
+        </p:nvSpPr>
+        <p:spPr>
+          <a:xfrm>
+            <a:off x="1828800" y="2523744"/>
+            <a:ext cx="2011680" cy="347472"/>
+          </a:xfrm>
+          <a:prstGeom prst="rect">
+            <a:avLst/>
+          </a:prstGeom>
+          <a:noFill/>
+        </p:spPr>
+        <p:txBody>
+          <a:bodyPr wrap="square">
+            <a:spAutoFit/>
+          </a:bodyPr>
+          <a:lstStyle/>
+          <a:p>
+            <a:pPr algn="l"/>
+            <a:r>
+              <a:rPr sz="950" b="0" i="0">
+                <a:solidFill>
+                  <a:srgbClr val="FFFFFF"/>
+                </a:solidFill>
+              </a:rPr>
+              <a:t>~79 m ODN  (EA LiDAR DTM)</a:t>
+            </a:r>
+          </a:p>
+        </p:txBody>
+      </p:sp>
+      <p:sp>
+        <p:nvSpPr>
+          <p:cNvPr id="16" name="TextBox 15"/>
+          <p:cNvSpPr txBox="1"/>
+          <p:nvPr/>
+        </p:nvSpPr>
+        <p:spPr>
+          <a:xfrm>
+            <a:off x="457200" y="2871216"/>
+            <a:ext cx="1371600" cy="347472"/>
+          </a:xfrm>
+          <a:prstGeom prst="rect">
+            <a:avLst/>
+          </a:prstGeom>
+          <a:noFill/>
+        </p:spPr>
+        <p:txBody>
+          <a:bodyPr wrap="square">
+            <a:spAutoFit/>
+          </a:bodyPr>
+          <a:lstStyle/>
+          <a:p>
+            <a:pPr algn="l"/>
+            <a:r>
+              <a:rPr sz="950" b="1" i="0">
+                <a:solidFill>
+                  <a:srgbClr val="90E0EF"/>
+                </a:solidFill>
+              </a:rPr>
+              <a:t>AGL height</a:t>
+            </a:r>
+          </a:p>
+        </p:txBody>
+      </p:sp>
+      <p:sp>
+        <p:nvSpPr>
+          <p:cNvPr id="17" name="TextBox 16"/>
+          <p:cNvSpPr txBox="1"/>
+          <p:nvPr/>
+        </p:nvSpPr>
+        <p:spPr>
+          <a:xfrm>
+            <a:off x="1828800" y="2871216"/>
+            <a:ext cx="2011680" cy="347472"/>
+          </a:xfrm>
+          <a:prstGeom prst="rect">
+            <a:avLst/>
+          </a:prstGeom>
+          <a:noFill/>
+        </p:spPr>
+        <p:txBody>
+          <a:bodyPr wrap="square">
+            <a:spAutoFit/>
+          </a:bodyPr>
+          <a:lstStyle/>
+          <a:p>
+            <a:pPr algn="l"/>
+            <a:r>
+              <a:rPr sz="950" b="0" i="0">
+                <a:solidFill>
+                  <a:srgbClr val="FFFFFF"/>
+                </a:solidFill>
+              </a:rPr>
+              <a:t>+17 m  (mast)</a:t>
+            </a:r>
+          </a:p>
+        </p:txBody>
+      </p:sp>
+      <p:sp>
+        <p:nvSpPr>
+          <p:cNvPr id="18" name="TextBox 17"/>
+          <p:cNvSpPr txBox="1"/>
+          <p:nvPr/>
+        </p:nvSpPr>
+        <p:spPr>
+          <a:xfrm>
+            <a:off x="457200" y="3218688"/>
+            <a:ext cx="1371600" cy="347472"/>
+          </a:xfrm>
+          <a:prstGeom prst="rect">
+            <a:avLst/>
+          </a:prstGeom>
+          <a:noFill/>
+        </p:spPr>
+        <p:txBody>
+          <a:bodyPr wrap="square">
+            <a:spAutoFit/>
+          </a:bodyPr>
+          <a:lstStyle/>
+          <a:p>
+            <a:pPr algn="l"/>
+            <a:r>
+              <a:rPr sz="950" b="1" i="0">
+                <a:solidFill>
+                  <a:srgbClr val="90E0EF"/>
+                </a:solidFill>
+              </a:rPr>
+              <a:t>Scene Z</a:t>
+            </a:r>
+          </a:p>
+        </p:txBody>
+      </p:sp>
+      <p:sp>
+        <p:nvSpPr>
+          <p:cNvPr id="19" name="TextBox 18"/>
+          <p:cNvSpPr txBox="1"/>
+          <p:nvPr/>
+        </p:nvSpPr>
+        <p:spPr>
+          <a:xfrm>
+            <a:off x="1828800" y="3218688"/>
+            <a:ext cx="2011680" cy="347472"/>
+          </a:xfrm>
+          <a:prstGeom prst="rect">
+            <a:avLst/>
+          </a:prstGeom>
+          <a:noFill/>
+        </p:spPr>
+        <p:txBody>
+          <a:bodyPr wrap="square">
+            <a:spAutoFit/>
+          </a:bodyPr>
+          <a:lstStyle/>
+          <a:p>
+            <a:pPr algn="l"/>
+            <a:r>
+              <a:rPr sz="950" b="0" i="0">
+                <a:solidFill>
+                  <a:srgbClr val="FFFFFF"/>
+                </a:solidFill>
+              </a:rPr>
+              <a:t>~96 m absolute</a:t>
+            </a:r>
+          </a:p>
+        </p:txBody>
+      </p:sp>
+      <p:sp>
+        <p:nvSpPr>
+          <p:cNvPr id="20" name="TextBox 19"/>
+          <p:cNvSpPr txBox="1"/>
+          <p:nvPr/>
+        </p:nvSpPr>
+        <p:spPr>
+          <a:xfrm>
+            <a:off x="457200" y="3566160"/>
+            <a:ext cx="1371600" cy="347472"/>
+          </a:xfrm>
+          <a:prstGeom prst="rect">
+            <a:avLst/>
+          </a:prstGeom>
+          <a:noFill/>
+        </p:spPr>
+        <p:txBody>
+          <a:bodyPr wrap="square">
+            <a:spAutoFit/>
+          </a:bodyPr>
+          <a:lstStyle/>
+          <a:p>
+            <a:pPr algn="l"/>
+            <a:r>
+              <a:rPr sz="950" b="1" i="0">
+                <a:solidFill>
+                  <a:srgbClr val="90E0EF"/>
+                </a:solidFill>
+              </a:rPr>
+              <a:t>Antenna</a:t>
+            </a:r>
+          </a:p>
+        </p:txBody>
+      </p:sp>
+      <p:sp>
+        <p:nvSpPr>
+          <p:cNvPr id="21" name="TextBox 20"/>
+          <p:cNvSpPr txBox="1"/>
+          <p:nvPr/>
+        </p:nvSpPr>
+        <p:spPr>
+          <a:xfrm>
+            <a:off x="1828800" y="3566160"/>
+            <a:ext cx="2011680" cy="347472"/>
+          </a:xfrm>
+          <a:prstGeom prst="rect">
+            <a:avLst/>
+          </a:prstGeom>
+          <a:noFill/>
+        </p:spPr>
+        <p:txBody>
+          <a:bodyPr wrap="square">
+            <a:spAutoFit/>
+          </a:bodyPr>
+          <a:lstStyle/>
+          <a:p>
+            <a:pPr algn="l"/>
+            <a:r>
+              <a:rPr sz="950" b="0" i="0">
+                <a:solidFill>
+                  <a:srgbClr val="FFFFFF"/>
+                </a:solidFill>
+              </a:rPr>
+              <a:t>Dipole — donut pattern</a:t>
+            </a:r>
+          </a:p>
+        </p:txBody>
+      </p:sp>
+      <p:sp>
+        <p:nvSpPr>
+          <p:cNvPr id="22" name="TextBox 21"/>
+          <p:cNvSpPr txBox="1"/>
+          <p:nvPr/>
+        </p:nvSpPr>
+        <p:spPr>
+          <a:xfrm>
+            <a:off x="457200" y="3913632"/>
+            <a:ext cx="1371600" cy="347472"/>
+          </a:xfrm>
+          <a:prstGeom prst="rect">
+            <a:avLst/>
+          </a:prstGeom>
+          <a:noFill/>
+        </p:spPr>
+        <p:txBody>
+          <a:bodyPr wrap="square">
+            <a:spAutoFit/>
+          </a:bodyPr>
+          <a:lstStyle/>
+          <a:p>
+            <a:pPr algn="l"/>
+            <a:r>
+              <a:rPr sz="950" b="1" i="0">
+                <a:solidFill>
+                  <a:srgbClr val="90E0EF"/>
+                </a:solidFill>
+              </a:rPr>
+              <a:t>Ray-cast check</a:t>
+            </a:r>
+          </a:p>
+        </p:txBody>
+      </p:sp>
+      <p:sp>
+        <p:nvSpPr>
+          <p:cNvPr id="23" name="TextBox 22"/>
+          <p:cNvSpPr txBox="1"/>
+          <p:nvPr/>
+        </p:nvSpPr>
+        <p:spPr>
+          <a:xfrm>
+            <a:off x="1828800" y="3913632"/>
+            <a:ext cx="2011680" cy="347472"/>
+          </a:xfrm>
+          <a:prstGeom prst="rect">
+            <a:avLst/>
+          </a:prstGeom>
+          <a:noFill/>
+        </p:spPr>
+        <p:txBody>
+          <a:bodyPr wrap="square">
+            <a:spAutoFit/>
+          </a:bodyPr>
+          <a:lstStyle/>
+          <a:p>
+            <a:pPr algn="l"/>
+            <a:r>
+              <a:rPr sz="950" b="0" i="0">
+                <a:solidFill>
+                  <a:srgbClr val="FFFFFF"/>
+                </a:solidFill>
+              </a:rPr>
+              <a:t>Downward ray → above terrain ✅</a:t>
+            </a:r>
+          </a:p>
+        </p:txBody>
+      </p:sp>
+      <p:sp>
+        <p:nvSpPr>
+          <p:cNvPr id="24" name="Rectangle 23"/>
+          <p:cNvSpPr/>
+          <p:nvPr/>
+        </p:nvSpPr>
+        <p:spPr>
+          <a:xfrm>
+            <a:off x="4160520" y="1234440"/>
+            <a:ext cx="7772400" cy="2926080"/>
+          </a:xfrm>
+          <a:prstGeom prst="rect">
+            <a:avLst/>
+          </a:prstGeom>
+          <a:solidFill>
+            <a:srgbClr val="112A40"/>
+          </a:solidFill>
+          <a:ln>
+            <a:noFill/>
+          </a:ln>
+        </p:spPr>
+        <p:style>
+          <a:lnRef idx="1">
+            <a:schemeClr val="accent1"/>
+          </a:lnRef>
+          <a:fillRef idx="3">
+            <a:schemeClr val="accent1"/>
+          </a:fillRef>
+          <a:effectRef idx="2">
+            <a:schemeClr val="accent1"/>
+          </a:effectRef>
+          <a:fontRef idx="minor">
+            <a:schemeClr val="lt1"/>
+          </a:fontRef>
+        </p:style>
+        <p:txBody>
+          <a:bodyPr rtlCol="0" anchor="ctr"/>
+          <a:lstStyle/>
+          <a:p>
+            <a:pPr algn="ctr"/>
+          </a:p>
+        </p:txBody>
+      </p:sp>
+      <p:sp>
+        <p:nvSpPr>
+          <p:cNvPr id="25" name="Rectangle 24"/>
+          <p:cNvSpPr/>
+          <p:nvPr/>
+        </p:nvSpPr>
+        <p:spPr>
+          <a:xfrm>
+            <a:off x="4160520" y="1234440"/>
+            <a:ext cx="7772400" cy="54864"/>
+          </a:xfrm>
+          <a:prstGeom prst="rect">
+            <a:avLst/>
+          </a:prstGeom>
+          <a:solidFill>
+            <a:srgbClr val="2DCB7F"/>
+          </a:solidFill>
+          <a:ln>
+            <a:noFill/>
+          </a:ln>
+        </p:spPr>
+        <p:style>
+          <a:lnRef idx="1">
+            <a:schemeClr val="accent1"/>
+          </a:lnRef>
+          <a:fillRef idx="3">
+            <a:schemeClr val="accent1"/>
+          </a:fillRef>
+          <a:effectRef idx="2">
+            <a:schemeClr val="accent1"/>
+          </a:effectRef>
+          <a:fontRef idx="minor">
+            <a:schemeClr val="lt1"/>
+          </a:fontRef>
+        </p:style>
+        <p:txBody>
+          <a:bodyPr rtlCol="0" anchor="ctr"/>
+          <a:lstStyle/>
+          <a:p>
+            <a:pPr algn="ctr"/>
+          </a:p>
+        </p:txBody>
+      </p:sp>
+      <p:sp>
+        <p:nvSpPr>
+          <p:cNvPr id="26" name="TextBox 25"/>
+          <p:cNvSpPr txBox="1"/>
+          <p:nvPr/>
+        </p:nvSpPr>
+        <p:spPr>
+          <a:xfrm>
+            <a:off x="4297680" y="1371600"/>
+            <a:ext cx="7498079" cy="365760"/>
+          </a:xfrm>
+          <a:prstGeom prst="rect">
+            <a:avLst/>
+          </a:prstGeom>
+          <a:noFill/>
+        </p:spPr>
+        <p:txBody>
+          <a:bodyPr wrap="square">
+            <a:spAutoFit/>
+          </a:bodyPr>
+          <a:lstStyle/>
+          <a:p>
+            <a:pPr algn="l"/>
+            <a:r>
+              <a:rPr sz="1200" b="1" i="0">
+                <a:solidFill>
+                  <a:srgbClr val="2DCB7F"/>
+                </a:solidFill>
+              </a:rPr>
+              <a:t>RX — 1200 Ofcom Receivers</a:t>
+            </a:r>
+          </a:p>
+        </p:txBody>
+      </p:sp>
+      <p:sp>
+        <p:nvSpPr>
+          <p:cNvPr id="27" name="Rectangle 26"/>
+          <p:cNvSpPr/>
+          <p:nvPr/>
+        </p:nvSpPr>
+        <p:spPr>
+          <a:xfrm>
+            <a:off x="4279392" y="1883664"/>
+            <a:ext cx="219456" cy="219456"/>
+          </a:xfrm>
+          <a:prstGeom prst="rect">
+            <a:avLst/>
+          </a:prstGeom>
+          <a:solidFill>
+            <a:srgbClr val="00B4D8"/>
+          </a:solidFill>
+          <a:ln>
+            <a:noFill/>
+          </a:ln>
+        </p:spPr>
+        <p:style>
+          <a:lnRef idx="1">
+            <a:schemeClr val="accent1"/>
+          </a:lnRef>
+          <a:fillRef idx="3">
+            <a:schemeClr val="accent1"/>
+          </a:fillRef>
+          <a:effectRef idx="2">
+            <a:schemeClr val="accent1"/>
+          </a:effectRef>
+          <a:fontRef idx="minor">
+            <a:schemeClr val="lt1"/>
+          </a:fontRef>
+        </p:style>
+        <p:txBody>
+          <a:bodyPr rtlCol="0" anchor="ctr"/>
+          <a:lstStyle/>
+          <a:p>
+            <a:pPr algn="ctr"/>
+          </a:p>
+        </p:txBody>
+      </p:sp>
+      <p:sp>
+        <p:nvSpPr>
+          <p:cNvPr id="28" name="TextBox 27"/>
+          <p:cNvSpPr txBox="1"/>
+          <p:nvPr/>
+        </p:nvSpPr>
+        <p:spPr>
+          <a:xfrm>
+            <a:off x="4279392" y="1856232"/>
+            <a:ext cx="219456" cy="256032"/>
+          </a:xfrm>
+          <a:prstGeom prst="rect">
+            <a:avLst/>
+          </a:prstGeom>
+          <a:noFill/>
+        </p:spPr>
+        <p:txBody>
+          <a:bodyPr wrap="square">
+            <a:spAutoFit/>
+          </a:bodyPr>
+          <a:lstStyle/>
+          <a:p>
+            <a:pPr algn="ctr"/>
+            <a:r>
+              <a:rPr sz="900" b="1" i="0">
+                <a:solidFill>
+                  <a:srgbClr val="0D1B2A"/>
+                </a:solidFill>
+              </a:rPr>
+              <a:t>1</a:t>
+            </a:r>
+          </a:p>
+        </p:txBody>
+      </p:sp>
+      <p:sp>
+        <p:nvSpPr>
+          <p:cNvPr id="29" name="TextBox 28"/>
+          <p:cNvSpPr txBox="1"/>
+          <p:nvPr/>
+        </p:nvSpPr>
+        <p:spPr>
+          <a:xfrm>
+            <a:off x="4572000" y="1828800"/>
+            <a:ext cx="1463040" cy="320040"/>
+          </a:xfrm>
+          <a:prstGeom prst="rect">
+            <a:avLst/>
+          </a:prstGeom>
+          <a:noFill/>
+        </p:spPr>
+        <p:txBody>
+          <a:bodyPr wrap="square">
+            <a:spAutoFit/>
+          </a:bodyPr>
+          <a:lstStyle/>
+          <a:p>
+            <a:pPr algn="l"/>
+            <a:r>
+              <a:rPr sz="1000" b="1" i="0">
+                <a:solidFill>
+                  <a:srgbClr val="00B4D8"/>
+                </a:solidFill>
+              </a:rPr>
+              <a:t>GPS (WGS84)</a:t>
+            </a:r>
+          </a:p>
+        </p:txBody>
+      </p:sp>
+      <p:sp>
+        <p:nvSpPr>
+          <p:cNvPr id="30" name="TextBox 29"/>
+          <p:cNvSpPr txBox="1"/>
+          <p:nvPr/>
+        </p:nvSpPr>
+        <p:spPr>
+          <a:xfrm>
+            <a:off x="6035040" y="1828800"/>
+            <a:ext cx="5760720" cy="320040"/>
+          </a:xfrm>
+          <a:prstGeom prst="rect">
+            <a:avLst/>
+          </a:prstGeom>
+          <a:noFill/>
+        </p:spPr>
+        <p:txBody>
+          <a:bodyPr wrap="square">
+            <a:spAutoFit/>
+          </a:bodyPr>
+          <a:lstStyle/>
+          <a:p>
+            <a:pPr algn="l"/>
+            <a:r>
+              <a:rPr sz="950" b="0" i="0">
+                <a:solidFill>
+                  <a:srgbClr val="CAD3DF"/>
+                </a:solidFill>
+              </a:rPr>
+              <a:t>→  UTM Zone 30N (EPSG:32630)  →  local scene XY</a:t>
+            </a:r>
+          </a:p>
+        </p:txBody>
+      </p:sp>
+      <p:sp>
+        <p:nvSpPr>
+          <p:cNvPr id="31" name="Rectangle 30"/>
+          <p:cNvSpPr/>
+          <p:nvPr/>
+        </p:nvSpPr>
+        <p:spPr>
+          <a:xfrm>
+            <a:off x="4279392" y="2304288"/>
+            <a:ext cx="219456" cy="219456"/>
+          </a:xfrm>
+          <a:prstGeom prst="rect">
+            <a:avLst/>
+          </a:prstGeom>
+          <a:solidFill>
+            <a:srgbClr val="00B4D8"/>
+          </a:solidFill>
+          <a:ln>
+            <a:noFill/>
+          </a:ln>
+        </p:spPr>
+        <p:style>
+          <a:lnRef idx="1">
+            <a:schemeClr val="accent1"/>
+          </a:lnRef>
+          <a:fillRef idx="3">
+            <a:schemeClr val="accent1"/>
+          </a:fillRef>
+          <a:effectRef idx="2">
+            <a:schemeClr val="accent1"/>
+          </a:effectRef>
+          <a:fontRef idx="minor">
+            <a:schemeClr val="lt1"/>
+          </a:fontRef>
+        </p:style>
+        <p:txBody>
+          <a:bodyPr rtlCol="0" anchor="ctr"/>
+          <a:lstStyle/>
+          <a:p>
+            <a:pPr algn="ctr"/>
+          </a:p>
+        </p:txBody>
+      </p:sp>
+      <p:sp>
+        <p:nvSpPr>
+          <p:cNvPr id="32" name="TextBox 31"/>
+          <p:cNvSpPr txBox="1"/>
+          <p:nvPr/>
+        </p:nvSpPr>
+        <p:spPr>
+          <a:xfrm>
+            <a:off x="4279392" y="2276856"/>
+            <a:ext cx="219456" cy="256032"/>
+          </a:xfrm>
+          <a:prstGeom prst="rect">
+            <a:avLst/>
+          </a:prstGeom>
+          <a:noFill/>
+        </p:spPr>
+        <p:txBody>
+          <a:bodyPr wrap="square">
+            <a:spAutoFit/>
+          </a:bodyPr>
+          <a:lstStyle/>
+          <a:p>
+            <a:pPr algn="ctr"/>
+            <a:r>
+              <a:rPr sz="900" b="1" i="0">
+                <a:solidFill>
+                  <a:srgbClr val="0D1B2A"/>
+                </a:solidFill>
+              </a:rPr>
+              <a:t>2</a:t>
+            </a:r>
+          </a:p>
+        </p:txBody>
+      </p:sp>
+      <p:sp>
+        <p:nvSpPr>
+          <p:cNvPr id="33" name="TextBox 32"/>
+          <p:cNvSpPr txBox="1"/>
+          <p:nvPr/>
+        </p:nvSpPr>
+        <p:spPr>
+          <a:xfrm>
+            <a:off x="4572000" y="2249424"/>
+            <a:ext cx="1463040" cy="320040"/>
+          </a:xfrm>
+          <a:prstGeom prst="rect">
+            <a:avLst/>
+          </a:prstGeom>
+          <a:noFill/>
+        </p:spPr>
+        <p:txBody>
+          <a:bodyPr wrap="square">
+            <a:spAutoFit/>
+          </a:bodyPr>
+          <a:lstStyle/>
+          <a:p>
+            <a:pPr algn="l"/>
+            <a:r>
+              <a:rPr sz="1000" b="1" i="0">
+                <a:solidFill>
+                  <a:srgbClr val="00B4D8"/>
+                </a:solidFill>
+              </a:rPr>
+              <a:t>DEM lookup</a:t>
+            </a:r>
+          </a:p>
+        </p:txBody>
+      </p:sp>
+      <p:sp>
+        <p:nvSpPr>
+          <p:cNvPr id="34" name="TextBox 33"/>
+          <p:cNvSpPr txBox="1"/>
+          <p:nvPr/>
+        </p:nvSpPr>
+        <p:spPr>
+          <a:xfrm>
+            <a:off x="6035040" y="2249424"/>
+            <a:ext cx="5760720" cy="320040"/>
+          </a:xfrm>
+          <a:prstGeom prst="rect">
+            <a:avLst/>
+          </a:prstGeom>
+          <a:noFill/>
+        </p:spPr>
+        <p:txBody>
+          <a:bodyPr wrap="square">
+            <a:spAutoFit/>
+          </a:bodyPr>
+          <a:lstStyle/>
+          <a:p>
+            <a:pPr algn="l"/>
+            <a:r>
+              <a:rPr sz="950" b="0" i="0">
+                <a:solidFill>
+                  <a:srgbClr val="CAD3DF"/>
+                </a:solidFill>
+              </a:rPr>
+              <a:t>Bilinear interpolation at (x,y) → terrain Z from LiDAR DTM</a:t>
+            </a:r>
+          </a:p>
+        </p:txBody>
+      </p:sp>
+      <p:sp>
+        <p:nvSpPr>
+          <p:cNvPr id="35" name="Rectangle 34"/>
+          <p:cNvSpPr/>
+          <p:nvPr/>
+        </p:nvSpPr>
+        <p:spPr>
+          <a:xfrm>
+            <a:off x="4279392" y="2724912"/>
+            <a:ext cx="219456" cy="219456"/>
+          </a:xfrm>
+          <a:prstGeom prst="rect">
+            <a:avLst/>
+          </a:prstGeom>
+          <a:solidFill>
+            <a:srgbClr val="2DCB7F"/>
+          </a:solidFill>
+          <a:ln>
+            <a:noFill/>
+          </a:ln>
+        </p:spPr>
+        <p:style>
+          <a:lnRef idx="1">
+            <a:schemeClr val="accent1"/>
+          </a:lnRef>
+          <a:fillRef idx="3">
+            <a:schemeClr val="accent1"/>
+          </a:fillRef>
+          <a:effectRef idx="2">
+            <a:schemeClr val="accent1"/>
+          </a:effectRef>
+          <a:fontRef idx="minor">
+            <a:schemeClr val="lt1"/>
+          </a:fontRef>
+        </p:style>
+        <p:txBody>
+          <a:bodyPr rtlCol="0" anchor="ctr"/>
+          <a:lstStyle/>
+          <a:p>
+            <a:pPr algn="ctr"/>
+          </a:p>
+        </p:txBody>
+      </p:sp>
+      <p:sp>
+        <p:nvSpPr>
+          <p:cNvPr id="36" name="TextBox 35"/>
+          <p:cNvSpPr txBox="1"/>
+          <p:nvPr/>
+        </p:nvSpPr>
+        <p:spPr>
+          <a:xfrm>
+            <a:off x="4279392" y="2697480"/>
+            <a:ext cx="219456" cy="256032"/>
+          </a:xfrm>
+          <a:prstGeom prst="rect">
+            <a:avLst/>
+          </a:prstGeom>
+          <a:noFill/>
+        </p:spPr>
+        <p:txBody>
+          <a:bodyPr wrap="square">
+            <a:spAutoFit/>
+          </a:bodyPr>
+          <a:lstStyle/>
+          <a:p>
+            <a:pPr algn="ctr"/>
+            <a:r>
+              <a:rPr sz="900" b="1" i="0">
+                <a:solidFill>
+                  <a:srgbClr val="0D1B2A"/>
+                </a:solidFill>
+              </a:rPr>
+              <a:t>3</a:t>
+            </a:r>
+          </a:p>
+        </p:txBody>
+      </p:sp>
+      <p:sp>
+        <p:nvSpPr>
+          <p:cNvPr id="37" name="TextBox 36"/>
+          <p:cNvSpPr txBox="1"/>
+          <p:nvPr/>
+        </p:nvSpPr>
+        <p:spPr>
+          <a:xfrm>
+            <a:off x="4572000" y="2670048"/>
+            <a:ext cx="1463040" cy="320040"/>
+          </a:xfrm>
+          <a:prstGeom prst="rect">
+            <a:avLst/>
+          </a:prstGeom>
+          <a:noFill/>
+        </p:spPr>
+        <p:txBody>
+          <a:bodyPr wrap="square">
+            <a:spAutoFit/>
+          </a:bodyPr>
+          <a:lstStyle/>
+          <a:p>
+            <a:pPr algn="l"/>
+            <a:r>
+              <a:rPr sz="1000" b="1" i="0">
+                <a:solidFill>
+                  <a:srgbClr val="2DCB7F"/>
+                </a:solidFill>
+              </a:rPr>
+              <a:t>Height assignment</a:t>
+            </a:r>
+          </a:p>
+        </p:txBody>
+      </p:sp>
+      <p:sp>
+        <p:nvSpPr>
+          <p:cNvPr id="38" name="TextBox 37"/>
+          <p:cNvSpPr txBox="1"/>
+          <p:nvPr/>
+        </p:nvSpPr>
+        <p:spPr>
+          <a:xfrm>
+            <a:off x="6035040" y="2670048"/>
+            <a:ext cx="5760720" cy="320040"/>
+          </a:xfrm>
+          <a:prstGeom prst="rect">
+            <a:avLst/>
+          </a:prstGeom>
+          <a:noFill/>
+        </p:spPr>
+        <p:txBody>
+          <a:bodyPr wrap="square">
+            <a:spAutoFit/>
+          </a:bodyPr>
+          <a:lstStyle/>
+          <a:p>
+            <a:pPr algn="l"/>
+            <a:r>
+              <a:rPr sz="950" b="0" i="0">
+                <a:solidFill>
+                  <a:srgbClr val="CAD3DF"/>
+                </a:solidFill>
+              </a:rPr>
+              <a:t>RX Z = terrain Z + 1.5 m AGL</a:t>
+            </a:r>
+          </a:p>
+        </p:txBody>
+      </p:sp>
+      <p:sp>
+        <p:nvSpPr>
+          <p:cNvPr id="39" name="Rectangle 38"/>
+          <p:cNvSpPr/>
+          <p:nvPr/>
+        </p:nvSpPr>
+        <p:spPr>
+          <a:xfrm>
+            <a:off x="4279392" y="3145536"/>
+            <a:ext cx="219456" cy="219456"/>
+          </a:xfrm>
+          <a:prstGeom prst="rect">
+            <a:avLst/>
+          </a:prstGeom>
+          <a:solidFill>
+            <a:srgbClr val="FF9F1C"/>
+          </a:solidFill>
+          <a:ln>
+            <a:noFill/>
+          </a:ln>
+        </p:spPr>
+        <p:style>
+          <a:lnRef idx="1">
+            <a:schemeClr val="accent1"/>
+          </a:lnRef>
+          <a:fillRef idx="3">
+            <a:schemeClr val="accent1"/>
+          </a:fillRef>
+          <a:effectRef idx="2">
+            <a:schemeClr val="accent1"/>
+          </a:effectRef>
+          <a:fontRef idx="minor">
+            <a:schemeClr val="lt1"/>
+          </a:fontRef>
+        </p:style>
+        <p:txBody>
+          <a:bodyPr rtlCol="0" anchor="ctr"/>
+          <a:lstStyle/>
+          <a:p>
+            <a:pPr algn="ctr"/>
+          </a:p>
+        </p:txBody>
+      </p:sp>
+      <p:sp>
+        <p:nvSpPr>
+          <p:cNvPr id="40" name="TextBox 39"/>
+          <p:cNvSpPr txBox="1"/>
+          <p:nvPr/>
+        </p:nvSpPr>
+        <p:spPr>
+          <a:xfrm>
+            <a:off x="4279392" y="3118104"/>
+            <a:ext cx="219456" cy="256032"/>
+          </a:xfrm>
+          <a:prstGeom prst="rect">
+            <a:avLst/>
+          </a:prstGeom>
+          <a:noFill/>
+        </p:spPr>
+        <p:txBody>
+          <a:bodyPr wrap="square">
+            <a:spAutoFit/>
+          </a:bodyPr>
+          <a:lstStyle/>
+          <a:p>
+            <a:pPr algn="ctr"/>
+            <a:r>
+              <a:rPr sz="900" b="1" i="0">
+                <a:solidFill>
+                  <a:srgbClr val="0D1B2A"/>
+                </a:solidFill>
+              </a:rPr>
+              <a:t>4</a:t>
+            </a:r>
+          </a:p>
+        </p:txBody>
+      </p:sp>
+      <p:sp>
+        <p:nvSpPr>
+          <p:cNvPr id="41" name="TextBox 40"/>
+          <p:cNvSpPr txBox="1"/>
+          <p:nvPr/>
+        </p:nvSpPr>
+        <p:spPr>
+          <a:xfrm>
+            <a:off x="4572000" y="3090672"/>
+            <a:ext cx="1463040" cy="320040"/>
+          </a:xfrm>
+          <a:prstGeom prst="rect">
+            <a:avLst/>
+          </a:prstGeom>
+          <a:noFill/>
+        </p:spPr>
+        <p:txBody>
+          <a:bodyPr wrap="square">
+            <a:spAutoFit/>
+          </a:bodyPr>
+          <a:lstStyle/>
+          <a:p>
+            <a:pPr algn="l"/>
+            <a:r>
+              <a:rPr sz="1000" b="1" i="0">
+                <a:solidFill>
+                  <a:srgbClr val="FF9F1C"/>
+                </a:solidFill>
+              </a:rPr>
+              <a:t>Ray-cast check</a:t>
+            </a:r>
+          </a:p>
+        </p:txBody>
+      </p:sp>
+      <p:sp>
+        <p:nvSpPr>
+          <p:cNvPr id="42" name="TextBox 41"/>
+          <p:cNvSpPr txBox="1"/>
+          <p:nvPr/>
+        </p:nvSpPr>
+        <p:spPr>
+          <a:xfrm>
+            <a:off x="6035040" y="3090672"/>
+            <a:ext cx="5760720" cy="320040"/>
+          </a:xfrm>
+          <a:prstGeom prst="rect">
+            <a:avLst/>
+          </a:prstGeom>
+          <a:noFill/>
+        </p:spPr>
+        <p:txBody>
+          <a:bodyPr wrap="square">
+            <a:spAutoFit/>
+          </a:bodyPr>
+          <a:lstStyle/>
+          <a:p>
+            <a:pPr algn="l"/>
+            <a:r>
+              <a:rPr sz="950" b="0" i="0">
+                <a:solidFill>
+                  <a:srgbClr val="CAD3DF"/>
+                </a:solidFill>
+              </a:rPr>
+              <a:t>Shoot ray downward → if first hit above RX → inside building</a:t>
+            </a:r>
+          </a:p>
+        </p:txBody>
+      </p:sp>
+      <p:sp>
+        <p:nvSpPr>
+          <p:cNvPr id="43" name="Rectangle 42"/>
+          <p:cNvSpPr/>
+          <p:nvPr/>
+        </p:nvSpPr>
+        <p:spPr>
+          <a:xfrm>
+            <a:off x="4279392" y="3566160"/>
+            <a:ext cx="219456" cy="219456"/>
+          </a:xfrm>
+          <a:prstGeom prst="rect">
+            <a:avLst/>
+          </a:prstGeom>
+          <a:solidFill>
+            <a:srgbClr val="FF4D6D"/>
+          </a:solidFill>
+          <a:ln>
+            <a:noFill/>
+          </a:ln>
+        </p:spPr>
+        <p:style>
+          <a:lnRef idx="1">
+            <a:schemeClr val="accent1"/>
+          </a:lnRef>
+          <a:fillRef idx="3">
+            <a:schemeClr val="accent1"/>
+          </a:fillRef>
+          <a:effectRef idx="2">
+            <a:schemeClr val="accent1"/>
+          </a:effectRef>
+          <a:fontRef idx="minor">
+            <a:schemeClr val="lt1"/>
+          </a:fontRef>
+        </p:style>
+        <p:txBody>
+          <a:bodyPr rtlCol="0" anchor="ctr"/>
+          <a:lstStyle/>
+          <a:p>
+            <a:pPr algn="ctr"/>
+          </a:p>
+        </p:txBody>
+      </p:sp>
+      <p:sp>
+        <p:nvSpPr>
+          <p:cNvPr id="44" name="TextBox 43"/>
+          <p:cNvSpPr txBox="1"/>
+          <p:nvPr/>
+        </p:nvSpPr>
+        <p:spPr>
+          <a:xfrm>
+            <a:off x="4279392" y="3538728"/>
+            <a:ext cx="219456" cy="256032"/>
+          </a:xfrm>
+          <a:prstGeom prst="rect">
+            <a:avLst/>
+          </a:prstGeom>
+          <a:noFill/>
+        </p:spPr>
+        <p:txBody>
+          <a:bodyPr wrap="square">
+            <a:spAutoFit/>
+          </a:bodyPr>
+          <a:lstStyle/>
+          <a:p>
+            <a:pPr algn="ctr"/>
+            <a:r>
+              <a:rPr sz="900" b="1" i="0">
+                <a:solidFill>
+                  <a:srgbClr val="0D1B2A"/>
+                </a:solidFill>
+              </a:rPr>
+              <a:t>5</a:t>
+            </a:r>
+          </a:p>
+        </p:txBody>
+      </p:sp>
+      <p:sp>
+        <p:nvSpPr>
+          <p:cNvPr id="45" name="TextBox 44"/>
+          <p:cNvSpPr txBox="1"/>
+          <p:nvPr/>
+        </p:nvSpPr>
+        <p:spPr>
+          <a:xfrm>
+            <a:off x="4572000" y="3511296"/>
+            <a:ext cx="1463040" cy="320040"/>
+          </a:xfrm>
+          <a:prstGeom prst="rect">
+            <a:avLst/>
+          </a:prstGeom>
+          <a:noFill/>
+        </p:spPr>
+        <p:txBody>
+          <a:bodyPr wrap="square">
+            <a:spAutoFit/>
+          </a:bodyPr>
+          <a:lstStyle/>
+          <a:p>
+            <a:pPr algn="l"/>
+            <a:r>
+              <a:rPr sz="1000" b="1" i="0">
+                <a:solidFill>
+                  <a:srgbClr val="FF4D6D"/>
+                </a:solidFill>
+              </a:rPr>
+              <a:t>Fix if invalid</a:t>
+            </a:r>
+          </a:p>
+        </p:txBody>
+      </p:sp>
+      <p:sp>
+        <p:nvSpPr>
+          <p:cNvPr id="46" name="TextBox 45"/>
+          <p:cNvSpPr txBox="1"/>
+          <p:nvPr/>
+        </p:nvSpPr>
+        <p:spPr>
+          <a:xfrm>
+            <a:off x="6035040" y="3511296"/>
+            <a:ext cx="5760720" cy="320040"/>
+          </a:xfrm>
+          <a:prstGeom prst="rect">
+            <a:avLst/>
+          </a:prstGeom>
+          <a:noFill/>
+        </p:spPr>
+        <p:txBody>
+          <a:bodyPr wrap="square">
+            <a:spAutoFit/>
+          </a:bodyPr>
+          <a:lstStyle/>
+          <a:p>
+            <a:pPr algn="l"/>
+            <a:r>
+              <a:rPr sz="950" b="0" i="0">
+                <a:solidFill>
+                  <a:srgbClr val="CAD3DF"/>
+                </a:solidFill>
+              </a:rPr>
+              <a:t>Raise RX to building roof + 0.1 m  OR  exclude from solve</a:t>
+            </a:r>
+          </a:p>
+        </p:txBody>
+      </p:sp>
+      <p:sp>
+        <p:nvSpPr>
+          <p:cNvPr id="47" name="Rectangle 46"/>
+          <p:cNvSpPr/>
+          <p:nvPr/>
+        </p:nvSpPr>
+        <p:spPr>
+          <a:xfrm>
+            <a:off x="320040" y="4343400"/>
+            <a:ext cx="11612880" cy="2148840"/>
+          </a:xfrm>
+          <a:prstGeom prst="rect">
+            <a:avLst/>
+          </a:prstGeom>
+          <a:solidFill>
+            <a:srgbClr val="112A40"/>
+          </a:solidFill>
+          <a:ln>
+            <a:noFill/>
+          </a:ln>
+        </p:spPr>
+        <p:style>
+          <a:lnRef idx="1">
+            <a:schemeClr val="accent1"/>
+          </a:lnRef>
+          <a:fillRef idx="3">
+            <a:schemeClr val="accent1"/>
+          </a:fillRef>
+          <a:effectRef idx="2">
+            <a:schemeClr val="accent1"/>
+          </a:effectRef>
+          <a:fontRef idx="minor">
+            <a:schemeClr val="lt1"/>
+          </a:fontRef>
+        </p:style>
+        <p:txBody>
+          <a:bodyPr rtlCol="0" anchor="ctr"/>
+          <a:lstStyle/>
+          <a:p>
+            <a:pPr algn="ctr"/>
+          </a:p>
+        </p:txBody>
+      </p:sp>
+      <p:sp>
+        <p:nvSpPr>
+          <p:cNvPr id="48" name="Rectangle 47"/>
+          <p:cNvSpPr/>
+          <p:nvPr/>
+        </p:nvSpPr>
+        <p:spPr>
+          <a:xfrm>
+            <a:off x="320040" y="4343400"/>
+            <a:ext cx="11612880" cy="54864"/>
+          </a:xfrm>
+          <a:prstGeom prst="rect">
+            <a:avLst/>
+          </a:prstGeom>
+          <a:solidFill>
+            <a:srgbClr val="FF4D6D"/>
+          </a:solidFill>
+          <a:ln>
+            <a:noFill/>
+          </a:ln>
+        </p:spPr>
+        <p:style>
+          <a:lnRef idx="1">
+            <a:schemeClr val="accent1"/>
+          </a:lnRef>
+          <a:fillRef idx="3">
+            <a:schemeClr val="accent1"/>
+          </a:fillRef>
+          <a:effectRef idx="2">
+            <a:schemeClr val="accent1"/>
+          </a:effectRef>
+          <a:fontRef idx="minor">
+            <a:schemeClr val="lt1"/>
+          </a:fontRef>
+        </p:style>
+        <p:txBody>
+          <a:bodyPr rtlCol="0" anchor="ctr"/>
+          <a:lstStyle/>
+          <a:p>
+            <a:pPr algn="ctr"/>
+          </a:p>
+        </p:txBody>
+      </p:sp>
+      <p:sp>
+        <p:nvSpPr>
+          <p:cNvPr id="49" name="TextBox 48"/>
+          <p:cNvSpPr txBox="1"/>
+          <p:nvPr/>
+        </p:nvSpPr>
+        <p:spPr>
+          <a:xfrm>
+            <a:off x="457200" y="4462272"/>
+            <a:ext cx="10972800" cy="365760"/>
+          </a:xfrm>
+          <a:prstGeom prst="rect">
+            <a:avLst/>
+          </a:prstGeom>
+          <a:noFill/>
+        </p:spPr>
+        <p:txBody>
+          <a:bodyPr wrap="square">
+            <a:spAutoFit/>
+          </a:bodyPr>
+          <a:lstStyle/>
+          <a:p>
+            <a:pPr algn="l"/>
+            <a:r>
+              <a:rPr sz="1200" b="1" i="0">
+                <a:solidFill>
+                  <a:srgbClr val="FF4D6D"/>
+                </a:solidFill>
+              </a:rPr>
+              <a:t>Why Positioning Validation Matters</a:t>
+            </a:r>
+          </a:p>
+        </p:txBody>
+      </p:sp>
+      <p:sp>
+        <p:nvSpPr>
+          <p:cNvPr id="50" name="TextBox 49"/>
+          <p:cNvSpPr txBox="1"/>
+          <p:nvPr/>
+        </p:nvSpPr>
+        <p:spPr>
+          <a:xfrm>
+            <a:off x="457200" y="4892040"/>
+            <a:ext cx="3291840" cy="365760"/>
+          </a:xfrm>
+          <a:prstGeom prst="rect">
+            <a:avLst/>
+          </a:prstGeom>
+          <a:noFill/>
+        </p:spPr>
+        <p:txBody>
+          <a:bodyPr wrap="square">
+            <a:spAutoFit/>
+          </a:bodyPr>
+          <a:lstStyle/>
+          <a:p>
+            <a:pPr algn="l"/>
+            <a:r>
+              <a:rPr sz="950" b="0" i="0">
+                <a:solidFill>
+                  <a:srgbClr val="FF9F1C"/>
+                </a:solidFill>
+              </a:rPr>
+              <a:t>RX inside building footprint</a:t>
+            </a:r>
+          </a:p>
+        </p:txBody>
+      </p:sp>
+      <p:sp>
+        <p:nvSpPr>
+          <p:cNvPr id="51" name="TextBox 50"/>
+          <p:cNvSpPr txBox="1"/>
+          <p:nvPr/>
+        </p:nvSpPr>
+        <p:spPr>
+          <a:xfrm>
+            <a:off x="3840480" y="4892040"/>
+            <a:ext cx="3749039" cy="365760"/>
+          </a:xfrm>
+          <a:prstGeom prst="rect">
+            <a:avLst/>
+          </a:prstGeom>
+          <a:noFill/>
+        </p:spPr>
+        <p:txBody>
+          <a:bodyPr wrap="square">
+            <a:spAutoFit/>
+          </a:bodyPr>
+          <a:lstStyle/>
+          <a:p>
+            <a:pPr algn="l"/>
+            <a:r>
+              <a:rPr sz="950" b="0" i="0">
+                <a:solidFill>
+                  <a:srgbClr val="CAD3DF"/>
+                </a:solidFill>
+              </a:rPr>
+              <a:t>Spawned in solid geometry → no paths → NaN RSSI</a:t>
+            </a:r>
+          </a:p>
+        </p:txBody>
+      </p:sp>
+      <p:sp>
+        <p:nvSpPr>
+          <p:cNvPr id="52" name="TextBox 51"/>
+          <p:cNvSpPr txBox="1"/>
+          <p:nvPr/>
+        </p:nvSpPr>
+        <p:spPr>
+          <a:xfrm>
+            <a:off x="7680960" y="4892040"/>
+            <a:ext cx="4114800" cy="365760"/>
+          </a:xfrm>
+          <a:prstGeom prst="rect">
+            <a:avLst/>
+          </a:prstGeom>
+          <a:noFill/>
+        </p:spPr>
+        <p:txBody>
+          <a:bodyPr wrap="square">
+            <a:spAutoFit/>
+          </a:bodyPr>
+          <a:lstStyle/>
+          <a:p>
+            <a:pPr algn="l"/>
+            <a:r>
+              <a:rPr sz="950" b="0" i="0">
+                <a:solidFill>
+                  <a:srgbClr val="2DCB7F"/>
+                </a:solidFill>
+              </a:rPr>
+              <a:t>Ray-cast detects → adjust Z</a:t>
+            </a:r>
+          </a:p>
+        </p:txBody>
+      </p:sp>
+      <p:sp>
+        <p:nvSpPr>
+          <p:cNvPr id="53" name="TextBox 52"/>
+          <p:cNvSpPr txBox="1"/>
+          <p:nvPr/>
+        </p:nvSpPr>
+        <p:spPr>
+          <a:xfrm>
+            <a:off x="457200" y="5276088"/>
+            <a:ext cx="3291840" cy="365760"/>
+          </a:xfrm>
+          <a:prstGeom prst="rect">
+            <a:avLst/>
+          </a:prstGeom>
+          <a:noFill/>
+        </p:spPr>
+        <p:txBody>
+          <a:bodyPr wrap="square">
+            <a:spAutoFit/>
+          </a:bodyPr>
+          <a:lstStyle/>
+          <a:p>
+            <a:pPr algn="l"/>
+            <a:r>
+              <a:rPr sz="950" b="0" i="0">
+                <a:solidFill>
+                  <a:srgbClr val="FF9F1C"/>
+                </a:solidFill>
+              </a:rPr>
+              <a:t>TX near building face</a:t>
+            </a:r>
+          </a:p>
+        </p:txBody>
+      </p:sp>
+      <p:sp>
+        <p:nvSpPr>
+          <p:cNvPr id="54" name="TextBox 53"/>
+          <p:cNvSpPr txBox="1"/>
+          <p:nvPr/>
+        </p:nvSpPr>
+        <p:spPr>
+          <a:xfrm>
+            <a:off x="3840480" y="5276088"/>
+            <a:ext cx="3749039" cy="365760"/>
+          </a:xfrm>
+          <a:prstGeom prst="rect">
+            <a:avLst/>
+          </a:prstGeom>
+          <a:noFill/>
+        </p:spPr>
+        <p:txBody>
+          <a:bodyPr wrap="square">
+            <a:spAutoFit/>
+          </a:bodyPr>
+          <a:lstStyle/>
+          <a:p>
+            <a:pPr algn="l"/>
+            <a:r>
+              <a:rPr sz="950" b="0" i="0">
+                <a:solidFill>
+                  <a:srgbClr val="CAD3DF"/>
+                </a:solidFill>
+              </a:rPr>
+              <a:t>Rays immediately blocked → unrealistic near-field</a:t>
+            </a:r>
+          </a:p>
+        </p:txBody>
+      </p:sp>
+      <p:sp>
+        <p:nvSpPr>
+          <p:cNvPr id="55" name="TextBox 54"/>
+          <p:cNvSpPr txBox="1"/>
+          <p:nvPr/>
+        </p:nvSpPr>
+        <p:spPr>
+          <a:xfrm>
+            <a:off x="7680960" y="5276088"/>
+            <a:ext cx="4114800" cy="365760"/>
+          </a:xfrm>
+          <a:prstGeom prst="rect">
+            <a:avLst/>
+          </a:prstGeom>
+          <a:noFill/>
+        </p:spPr>
+        <p:txBody>
+          <a:bodyPr wrap="square">
+            <a:spAutoFit/>
+          </a:bodyPr>
+          <a:lstStyle/>
+          <a:p>
+            <a:pPr algn="l"/>
+            <a:r>
+              <a:rPr sz="950" b="0" i="0">
+                <a:solidFill>
+                  <a:srgbClr val="2DCB7F"/>
+                </a:solidFill>
+              </a:rPr>
+              <a:t>Minimum clearance check</a:t>
+            </a:r>
+          </a:p>
+        </p:txBody>
+      </p:sp>
+      <p:sp>
+        <p:nvSpPr>
+          <p:cNvPr id="56" name="TextBox 55"/>
+          <p:cNvSpPr txBox="1"/>
+          <p:nvPr/>
+        </p:nvSpPr>
+        <p:spPr>
+          <a:xfrm>
+            <a:off x="457200" y="5660136"/>
+            <a:ext cx="3291840" cy="365760"/>
+          </a:xfrm>
+          <a:prstGeom prst="rect">
+            <a:avLst/>
+          </a:prstGeom>
+          <a:noFill/>
+        </p:spPr>
+        <p:txBody>
+          <a:bodyPr wrap="square">
+            <a:spAutoFit/>
+          </a:bodyPr>
+          <a:lstStyle/>
+          <a:p>
+            <a:pPr algn="l"/>
+            <a:r>
+              <a:rPr sz="950" b="0" i="0">
+                <a:solidFill>
+                  <a:srgbClr val="FF9F1C"/>
+                </a:solidFill>
+              </a:rPr>
+              <a:t>DEM returns 0 at scene edge</a:t>
+            </a:r>
+          </a:p>
+        </p:txBody>
+      </p:sp>
+      <p:sp>
+        <p:nvSpPr>
+          <p:cNvPr id="57" name="TextBox 56"/>
+          <p:cNvSpPr txBox="1"/>
+          <p:nvPr/>
+        </p:nvSpPr>
+        <p:spPr>
+          <a:xfrm>
+            <a:off x="3840480" y="5660136"/>
+            <a:ext cx="3749039" cy="365760"/>
+          </a:xfrm>
+          <a:prstGeom prst="rect">
+            <a:avLst/>
+          </a:prstGeom>
+          <a:noFill/>
+        </p:spPr>
+        <p:txBody>
+          <a:bodyPr wrap="square">
+            <a:spAutoFit/>
+          </a:bodyPr>
+          <a:lstStyle/>
+          <a:p>
+            <a:pPr algn="l"/>
+            <a:r>
+              <a:rPr sz="950" b="0" i="0">
+                <a:solidFill>
+                  <a:srgbClr val="CAD3DF"/>
+                </a:solidFill>
+              </a:rPr>
+              <a:t>RX at z=1.5 m → inside terrain → all paths blocked</a:t>
+            </a:r>
+          </a:p>
+        </p:txBody>
+      </p:sp>
+      <p:sp>
+        <p:nvSpPr>
+          <p:cNvPr id="58" name="TextBox 57"/>
+          <p:cNvSpPr txBox="1"/>
+          <p:nvPr/>
+        </p:nvSpPr>
+        <p:spPr>
+          <a:xfrm>
+            <a:off x="7680960" y="5660136"/>
+            <a:ext cx="4114800" cy="365760"/>
+          </a:xfrm>
+          <a:prstGeom prst="rect">
+            <a:avLst/>
+          </a:prstGeom>
+          <a:noFill/>
+        </p:spPr>
+        <p:txBody>
+          <a:bodyPr wrap="square">
+            <a:spAutoFit/>
+          </a:bodyPr>
+          <a:lstStyle/>
+          <a:p>
+            <a:pPr algn="l"/>
+            <a:r>
+              <a:rPr sz="950" b="0" i="0">
+                <a:solidFill>
+                  <a:srgbClr val="2DCB7F"/>
+                </a:solidFill>
+              </a:rPr>
+              <a:t>Fallback to median terrain Z</a:t>
+            </a:r>
+          </a:p>
+        </p:txBody>
+      </p:sp>
+      <p:sp>
+        <p:nvSpPr>
+          <p:cNvPr id="59" name="TextBox 58"/>
+          <p:cNvSpPr txBox="1"/>
+          <p:nvPr/>
+        </p:nvSpPr>
+        <p:spPr>
+          <a:xfrm>
+            <a:off x="457200" y="6044184"/>
+            <a:ext cx="3291840" cy="365760"/>
+          </a:xfrm>
+          <a:prstGeom prst="rect">
+            <a:avLst/>
+          </a:prstGeom>
+          <a:noFill/>
+        </p:spPr>
+        <p:txBody>
+          <a:bodyPr wrap="square">
+            <a:spAutoFit/>
+          </a:bodyPr>
+          <a:lstStyle/>
+          <a:p>
+            <a:pPr algn="l"/>
+            <a:r>
+              <a:rPr sz="950" b="0" i="0">
+                <a:solidFill>
+                  <a:srgbClr val="FF9F1C"/>
+                </a:solidFill>
+              </a:rPr>
+              <a:t>Ofcom GPS imprecision ±3–10 m</a:t>
+            </a:r>
+          </a:p>
+        </p:txBody>
+      </p:sp>
+      <p:sp>
+        <p:nvSpPr>
+          <p:cNvPr id="60" name="TextBox 59"/>
+          <p:cNvSpPr txBox="1"/>
+          <p:nvPr/>
+        </p:nvSpPr>
+        <p:spPr>
+          <a:xfrm>
+            <a:off x="3840480" y="6044184"/>
+            <a:ext cx="3749039" cy="365760"/>
+          </a:xfrm>
+          <a:prstGeom prst="rect">
+            <a:avLst/>
+          </a:prstGeom>
+          <a:noFill/>
+        </p:spPr>
+        <p:txBody>
+          <a:bodyPr wrap="square">
+            <a:spAutoFit/>
+          </a:bodyPr>
+          <a:lstStyle/>
+          <a:p>
+            <a:pPr algn="l"/>
+            <a:r>
+              <a:rPr sz="950" b="0" i="0">
+                <a:solidFill>
+                  <a:srgbClr val="CAD3DF"/>
+                </a:solidFill>
+              </a:rPr>
+              <a:t>RX may be on wrong side of building wall</a:t>
+            </a:r>
+          </a:p>
+        </p:txBody>
+      </p:sp>
+      <p:sp>
+        <p:nvSpPr>
+          <p:cNvPr id="61" name="TextBox 60"/>
+          <p:cNvSpPr txBox="1"/>
+          <p:nvPr/>
+        </p:nvSpPr>
+        <p:spPr>
+          <a:xfrm>
+            <a:off x="7680960" y="6044184"/>
+            <a:ext cx="4114800" cy="365760"/>
+          </a:xfrm>
+          <a:prstGeom prst="rect">
+            <a:avLst/>
+          </a:prstGeom>
+          <a:noFill/>
+        </p:spPr>
+        <p:txBody>
+          <a:bodyPr wrap="square">
+            <a:spAutoFit/>
+          </a:bodyPr>
+          <a:lstStyle/>
+          <a:p>
+            <a:pPr algn="l"/>
+            <a:r>
+              <a:rPr sz="950" b="0" i="0">
+                <a:solidFill>
+                  <a:srgbClr val="2DCB7F"/>
+                </a:solidFill>
+              </a:rPr>
+              <a:t>Accepted — statistical uncertainty</a:t>
             </a:r>
           </a:p>
         </p:txBody>

--- a/FYP_RayTracing_Presentation.pptx
+++ b/FYP_RayTracing_Presentation.pptx
@@ -18,6 +18,10 @@
     <p:sldId id="266" r:id="rId17"/>
     <p:sldId id="267" r:id="rId18"/>
     <p:sldId id="268" r:id="rId19"/>
+    <p:sldId id="269" r:id="rId20"/>
+    <p:sldId id="270" r:id="rId21"/>
+    <p:sldId id="271" r:id="rId22"/>
+    <p:sldId id="272" r:id="rId23"/>
   </p:sldIdLst>
   <p:sldSz cx="12188952" cy="6858000" type="screen4x3"/>
   <p:notesSz cx="6858000" cy="9144000"/>
@@ -12757,6 +12761,8303 @@
                 </a:solidFill>
               </a:rPr>
               <a:t>Accepted — statistical uncertainty</a:t>
+            </a:r>
+          </a:p>
+        </p:txBody>
+      </p:sp>
+    </p:spTree>
+  </p:cSld>
+  <p:clrMapOvr>
+    <a:masterClrMapping/>
+  </p:clrMapOvr>
+</p:sld>
+</file>
+
+<file path=ppt/slides/slide14.xml><?xml version="1.0" encoding="utf-8"?>
+<p:sld xmlns:a="http://schemas.openxmlformats.org/drawingml/2006/main" xmlns:p="http://schemas.openxmlformats.org/presentationml/2006/main" xmlns:r="http://schemas.openxmlformats.org/officeDocument/2006/relationships">
+  <p:cSld>
+    <p:bg>
+      <p:bgPr>
+        <a:solidFill>
+          <a:srgbClr val="0D1B2A"/>
+        </a:solidFill>
+        <a:effectLst/>
+      </p:bgPr>
+    </p:bg>
+    <p:spTree>
+      <p:nvGrpSpPr>
+        <p:cNvPr id="1" name=""/>
+        <p:cNvGrpSpPr/>
+        <p:nvPr/>
+      </p:nvGrpSpPr>
+      <p:grpSpPr/>
+      <p:sp>
+        <p:nvSpPr>
+          <p:cNvPr id="2" name="Rectangle 1"/>
+          <p:cNvSpPr/>
+          <p:nvPr/>
+        </p:nvSpPr>
+        <p:spPr>
+          <a:xfrm>
+            <a:off x="0" y="73152"/>
+            <a:ext cx="12188952" cy="54864"/>
+          </a:xfrm>
+          <a:prstGeom prst="rect">
+            <a:avLst/>
+          </a:prstGeom>
+          <a:solidFill>
+            <a:srgbClr val="00B4D8"/>
+          </a:solidFill>
+          <a:ln>
+            <a:noFill/>
+          </a:ln>
+        </p:spPr>
+        <p:style>
+          <a:lnRef idx="1">
+            <a:schemeClr val="accent1"/>
+          </a:lnRef>
+          <a:fillRef idx="3">
+            <a:schemeClr val="accent1"/>
+          </a:fillRef>
+          <a:effectRef idx="2">
+            <a:schemeClr val="accent1"/>
+          </a:effectRef>
+          <a:fontRef idx="minor">
+            <a:schemeClr val="lt1"/>
+          </a:fontRef>
+        </p:style>
+        <p:txBody>
+          <a:bodyPr rtlCol="0" anchor="ctr"/>
+          <a:lstStyle/>
+          <a:p>
+            <a:pPr algn="ctr"/>
+          </a:p>
+        </p:txBody>
+      </p:sp>
+      <p:sp>
+        <p:nvSpPr>
+          <p:cNvPr id="3" name="TextBox 2"/>
+          <p:cNvSpPr txBox="1"/>
+          <p:nvPr/>
+        </p:nvSpPr>
+        <p:spPr>
+          <a:xfrm>
+            <a:off x="320040" y="201168"/>
+            <a:ext cx="3657600" cy="256032"/>
+          </a:xfrm>
+          <a:prstGeom prst="rect">
+            <a:avLst/>
+          </a:prstGeom>
+          <a:noFill/>
+        </p:spPr>
+        <p:txBody>
+          <a:bodyPr wrap="square">
+            <a:spAutoFit/>
+          </a:bodyPr>
+          <a:lstStyle/>
+          <a:p>
+            <a:pPr algn="l"/>
+            <a:r>
+              <a:rPr sz="800" b="1" i="0">
+                <a:solidFill>
+                  <a:srgbClr val="00B4D8"/>
+                </a:solidFill>
+              </a:rPr>
+              <a:t>LOS / NLOS</a:t>
+            </a:r>
+          </a:p>
+        </p:txBody>
+      </p:sp>
+      <p:sp>
+        <p:nvSpPr>
+          <p:cNvPr id="4" name="TextBox 3"/>
+          <p:cNvSpPr txBox="1"/>
+          <p:nvPr/>
+        </p:nvSpPr>
+        <p:spPr>
+          <a:xfrm>
+            <a:off x="10972800" y="6492240"/>
+            <a:ext cx="1097280" cy="320040"/>
+          </a:xfrm>
+          <a:prstGeom prst="rect">
+            <a:avLst/>
+          </a:prstGeom>
+          <a:noFill/>
+        </p:spPr>
+        <p:txBody>
+          <a:bodyPr wrap="square">
+            <a:spAutoFit/>
+          </a:bodyPr>
+          <a:lstStyle/>
+          <a:p>
+            <a:pPr algn="r"/>
+            <a:r>
+              <a:rPr sz="900" b="0" i="0">
+                <a:solidFill>
+                  <a:srgbClr val="CAD3DF"/>
+                </a:solidFill>
+              </a:rPr>
+              <a:t>14 / 12</a:t>
+            </a:r>
+          </a:p>
+        </p:txBody>
+      </p:sp>
+      <p:sp>
+        <p:nvSpPr>
+          <p:cNvPr id="5" name="TextBox 4"/>
+          <p:cNvSpPr txBox="1"/>
+          <p:nvPr/>
+        </p:nvSpPr>
+        <p:spPr>
+          <a:xfrm>
+            <a:off x="411480" y="457200"/>
+            <a:ext cx="11430000" cy="640080"/>
+          </a:xfrm>
+          <a:prstGeom prst="rect">
+            <a:avLst/>
+          </a:prstGeom>
+          <a:noFill/>
+        </p:spPr>
+        <p:txBody>
+          <a:bodyPr wrap="square">
+            <a:spAutoFit/>
+          </a:bodyPr>
+          <a:lstStyle/>
+          <a:p>
+            <a:pPr algn="l"/>
+            <a:r>
+              <a:rPr sz="2800" b="1" i="0">
+                <a:solidFill>
+                  <a:srgbClr val="FFFFFF"/>
+                </a:solidFill>
+              </a:rPr>
+              <a:t>Receiver Classification — LOS vs NLOS</a:t>
+            </a:r>
+          </a:p>
+        </p:txBody>
+      </p:sp>
+      <p:sp>
+        <p:nvSpPr>
+          <p:cNvPr id="6" name="Rectangle 5"/>
+          <p:cNvSpPr/>
+          <p:nvPr/>
+        </p:nvSpPr>
+        <p:spPr>
+          <a:xfrm>
+            <a:off x="411480" y="1078992"/>
+            <a:ext cx="11338560" cy="16459"/>
+          </a:xfrm>
+          <a:prstGeom prst="rect">
+            <a:avLst/>
+          </a:prstGeom>
+          <a:solidFill>
+            <a:srgbClr val="1E3A52"/>
+          </a:solidFill>
+          <a:ln>
+            <a:noFill/>
+          </a:ln>
+        </p:spPr>
+        <p:style>
+          <a:lnRef idx="1">
+            <a:schemeClr val="accent1"/>
+          </a:lnRef>
+          <a:fillRef idx="3">
+            <a:schemeClr val="accent1"/>
+          </a:fillRef>
+          <a:effectRef idx="2">
+            <a:schemeClr val="accent1"/>
+          </a:effectRef>
+          <a:fontRef idx="minor">
+            <a:schemeClr val="lt1"/>
+          </a:fontRef>
+        </p:style>
+        <p:txBody>
+          <a:bodyPr rtlCol="0" anchor="ctr"/>
+          <a:lstStyle/>
+          <a:p>
+            <a:pPr algn="ctr"/>
+          </a:p>
+        </p:txBody>
+      </p:sp>
+      <p:sp>
+        <p:nvSpPr>
+          <p:cNvPr id="7" name="Rectangle 6"/>
+          <p:cNvSpPr/>
+          <p:nvPr/>
+        </p:nvSpPr>
+        <p:spPr>
+          <a:xfrm>
+            <a:off x="320040" y="1234440"/>
+            <a:ext cx="5303520" cy="5212080"/>
+          </a:xfrm>
+          <a:prstGeom prst="rect">
+            <a:avLst/>
+          </a:prstGeom>
+          <a:solidFill>
+            <a:srgbClr val="112A40"/>
+          </a:solidFill>
+          <a:ln>
+            <a:noFill/>
+          </a:ln>
+        </p:spPr>
+        <p:style>
+          <a:lnRef idx="1">
+            <a:schemeClr val="accent1"/>
+          </a:lnRef>
+          <a:fillRef idx="3">
+            <a:schemeClr val="accent1"/>
+          </a:fillRef>
+          <a:effectRef idx="2">
+            <a:schemeClr val="accent1"/>
+          </a:effectRef>
+          <a:fontRef idx="minor">
+            <a:schemeClr val="lt1"/>
+          </a:fontRef>
+        </p:style>
+        <p:txBody>
+          <a:bodyPr rtlCol="0" anchor="ctr"/>
+          <a:lstStyle/>
+          <a:p>
+            <a:pPr algn="ctr"/>
+          </a:p>
+        </p:txBody>
+      </p:sp>
+      <p:sp>
+        <p:nvSpPr>
+          <p:cNvPr id="8" name="Rectangle 7"/>
+          <p:cNvSpPr/>
+          <p:nvPr/>
+        </p:nvSpPr>
+        <p:spPr>
+          <a:xfrm>
+            <a:off x="320040" y="1234440"/>
+            <a:ext cx="5303520" cy="54864"/>
+          </a:xfrm>
+          <a:prstGeom prst="rect">
+            <a:avLst/>
+          </a:prstGeom>
+          <a:solidFill>
+            <a:srgbClr val="00B4D8"/>
+          </a:solidFill>
+          <a:ln>
+            <a:noFill/>
+          </a:ln>
+        </p:spPr>
+        <p:style>
+          <a:lnRef idx="1">
+            <a:schemeClr val="accent1"/>
+          </a:lnRef>
+          <a:fillRef idx="3">
+            <a:schemeClr val="accent1"/>
+          </a:fillRef>
+          <a:effectRef idx="2">
+            <a:schemeClr val="accent1"/>
+          </a:effectRef>
+          <a:fontRef idx="minor">
+            <a:schemeClr val="lt1"/>
+          </a:fontRef>
+        </p:style>
+        <p:txBody>
+          <a:bodyPr rtlCol="0" anchor="ctr"/>
+          <a:lstStyle/>
+          <a:p>
+            <a:pPr algn="ctr"/>
+          </a:p>
+        </p:txBody>
+      </p:sp>
+      <p:sp>
+        <p:nvSpPr>
+          <p:cNvPr id="9" name="TextBox 8"/>
+          <p:cNvSpPr txBox="1"/>
+          <p:nvPr/>
+        </p:nvSpPr>
+        <p:spPr>
+          <a:xfrm>
+            <a:off x="457200" y="1371600"/>
+            <a:ext cx="5029200" cy="365760"/>
+          </a:xfrm>
+          <a:prstGeom prst="rect">
+            <a:avLst/>
+          </a:prstGeom>
+          <a:noFill/>
+        </p:spPr>
+        <p:txBody>
+          <a:bodyPr wrap="square">
+            <a:spAutoFit/>
+          </a:bodyPr>
+          <a:lstStyle/>
+          <a:p>
+            <a:pPr algn="l"/>
+            <a:r>
+              <a:rPr sz="1200" b="1" i="0">
+                <a:solidFill>
+                  <a:srgbClr val="00B4D8"/>
+                </a:solidFill>
+              </a:rPr>
+              <a:t>Classification &amp; Results</a:t>
+            </a:r>
+          </a:p>
+        </p:txBody>
+      </p:sp>
+      <p:sp>
+        <p:nvSpPr>
+          <p:cNvPr id="10" name="TextBox 9"/>
+          <p:cNvSpPr txBox="1"/>
+          <p:nvPr/>
+        </p:nvSpPr>
+        <p:spPr>
+          <a:xfrm>
+            <a:off x="457200" y="1828800"/>
+            <a:ext cx="5029200" cy="347472"/>
+          </a:xfrm>
+          <a:prstGeom prst="rect">
+            <a:avLst/>
+          </a:prstGeom>
+          <a:noFill/>
+        </p:spPr>
+        <p:txBody>
+          <a:bodyPr wrap="square">
+            <a:spAutoFit/>
+          </a:bodyPr>
+          <a:lstStyle/>
+          <a:p>
+            <a:pPr algn="l"/>
+            <a:r>
+              <a:rPr sz="1000" b="0" i="1">
+                <a:solidFill>
+                  <a:srgbClr val="CAD3DF"/>
+                </a:solidFill>
+              </a:rPr>
+              <a:t>Method: LOS if direct path amplitude |a_LOS|² &gt; 0 in solved paths</a:t>
+            </a:r>
+          </a:p>
+        </p:txBody>
+      </p:sp>
+      <p:sp>
+        <p:nvSpPr>
+          <p:cNvPr id="11" name="Rectangle 10"/>
+          <p:cNvSpPr/>
+          <p:nvPr/>
+        </p:nvSpPr>
+        <p:spPr>
+          <a:xfrm>
+            <a:off x="457200" y="2331720"/>
+            <a:ext cx="4937760" cy="749808"/>
+          </a:xfrm>
+          <a:prstGeom prst="rect">
+            <a:avLst/>
+          </a:prstGeom>
+          <a:solidFill>
+            <a:srgbClr val="112A40"/>
+          </a:solidFill>
+          <a:ln>
+            <a:noFill/>
+          </a:ln>
+        </p:spPr>
+        <p:style>
+          <a:lnRef idx="1">
+            <a:schemeClr val="accent1"/>
+          </a:lnRef>
+          <a:fillRef idx="3">
+            <a:schemeClr val="accent1"/>
+          </a:fillRef>
+          <a:effectRef idx="2">
+            <a:schemeClr val="accent1"/>
+          </a:effectRef>
+          <a:fontRef idx="minor">
+            <a:schemeClr val="lt1"/>
+          </a:fontRef>
+        </p:style>
+        <p:txBody>
+          <a:bodyPr rtlCol="0" anchor="ctr"/>
+          <a:lstStyle/>
+          <a:p>
+            <a:pPr algn="ctr"/>
+          </a:p>
+        </p:txBody>
+      </p:sp>
+      <p:sp>
+        <p:nvSpPr>
+          <p:cNvPr id="12" name="Rectangle 11"/>
+          <p:cNvSpPr/>
+          <p:nvPr/>
+        </p:nvSpPr>
+        <p:spPr>
+          <a:xfrm>
+            <a:off x="457200" y="2331720"/>
+            <a:ext cx="54864" cy="749808"/>
+          </a:xfrm>
+          <a:prstGeom prst="rect">
+            <a:avLst/>
+          </a:prstGeom>
+          <a:solidFill>
+            <a:srgbClr val="2DCB7F"/>
+          </a:solidFill>
+          <a:ln>
+            <a:noFill/>
+          </a:ln>
+        </p:spPr>
+        <p:style>
+          <a:lnRef idx="1">
+            <a:schemeClr val="accent1"/>
+          </a:lnRef>
+          <a:fillRef idx="3">
+            <a:schemeClr val="accent1"/>
+          </a:fillRef>
+          <a:effectRef idx="2">
+            <a:schemeClr val="accent1"/>
+          </a:effectRef>
+          <a:fontRef idx="minor">
+            <a:schemeClr val="lt1"/>
+          </a:fontRef>
+        </p:style>
+        <p:txBody>
+          <a:bodyPr rtlCol="0" anchor="ctr"/>
+          <a:lstStyle/>
+          <a:p>
+            <a:pPr algn="ctr"/>
+          </a:p>
+        </p:txBody>
+      </p:sp>
+      <p:sp>
+        <p:nvSpPr>
+          <p:cNvPr id="13" name="TextBox 12"/>
+          <p:cNvSpPr txBox="1"/>
+          <p:nvPr/>
+        </p:nvSpPr>
+        <p:spPr>
+          <a:xfrm>
+            <a:off x="594360" y="2441448"/>
+            <a:ext cx="822960" cy="457200"/>
+          </a:xfrm>
+          <a:prstGeom prst="rect">
+            <a:avLst/>
+          </a:prstGeom>
+          <a:noFill/>
+        </p:spPr>
+        <p:txBody>
+          <a:bodyPr wrap="square">
+            <a:spAutoFit/>
+          </a:bodyPr>
+          <a:lstStyle/>
+          <a:p>
+            <a:pPr algn="l"/>
+            <a:r>
+              <a:rPr sz="1600" b="1" i="0">
+                <a:solidFill>
+                  <a:srgbClr val="2DCB7F"/>
+                </a:solidFill>
+              </a:rPr>
+              <a:t>LOS</a:t>
+            </a:r>
+          </a:p>
+        </p:txBody>
+      </p:sp>
+      <p:sp>
+        <p:nvSpPr>
+          <p:cNvPr id="14" name="TextBox 13"/>
+          <p:cNvSpPr txBox="1"/>
+          <p:nvPr/>
+        </p:nvSpPr>
+        <p:spPr>
+          <a:xfrm>
+            <a:off x="1417320" y="2441448"/>
+            <a:ext cx="822960" cy="457200"/>
+          </a:xfrm>
+          <a:prstGeom prst="rect">
+            <a:avLst/>
+          </a:prstGeom>
+          <a:noFill/>
+        </p:spPr>
+        <p:txBody>
+          <a:bodyPr wrap="square">
+            <a:spAutoFit/>
+          </a:bodyPr>
+          <a:lstStyle/>
+          <a:p>
+            <a:pPr algn="l"/>
+            <a:r>
+              <a:rPr sz="1600" b="1" i="0">
+                <a:solidFill>
+                  <a:srgbClr val="FFFFFF"/>
+                </a:solidFill>
+              </a:rPr>
+              <a:t>~20</a:t>
+            </a:r>
+          </a:p>
+        </p:txBody>
+      </p:sp>
+      <p:sp>
+        <p:nvSpPr>
+          <p:cNvPr id="15" name="TextBox 14"/>
+          <p:cNvSpPr txBox="1"/>
+          <p:nvPr/>
+        </p:nvSpPr>
+        <p:spPr>
+          <a:xfrm>
+            <a:off x="2240280" y="2441448"/>
+            <a:ext cx="731520" cy="457200"/>
+          </a:xfrm>
+          <a:prstGeom prst="rect">
+            <a:avLst/>
+          </a:prstGeom>
+          <a:noFill/>
+        </p:spPr>
+        <p:txBody>
+          <a:bodyPr wrap="square">
+            <a:spAutoFit/>
+          </a:bodyPr>
+          <a:lstStyle/>
+          <a:p>
+            <a:pPr algn="l"/>
+            <a:r>
+              <a:rPr sz="1400" b="1" i="0">
+                <a:solidFill>
+                  <a:srgbClr val="2DCB7F"/>
+                </a:solidFill>
+              </a:rPr>
+              <a:t>1.7%</a:t>
+            </a:r>
+          </a:p>
+        </p:txBody>
+      </p:sp>
+      <p:sp>
+        <p:nvSpPr>
+          <p:cNvPr id="16" name="TextBox 15"/>
+          <p:cNvSpPr txBox="1"/>
+          <p:nvPr/>
+        </p:nvSpPr>
+        <p:spPr>
+          <a:xfrm>
+            <a:off x="2971800" y="2496312"/>
+            <a:ext cx="2286000" cy="411480"/>
+          </a:xfrm>
+          <a:prstGeom prst="rect">
+            <a:avLst/>
+          </a:prstGeom>
+          <a:noFill/>
+        </p:spPr>
+        <p:txBody>
+          <a:bodyPr wrap="square">
+            <a:spAutoFit/>
+          </a:bodyPr>
+          <a:lstStyle/>
+          <a:p>
+            <a:pPr algn="l"/>
+            <a:r>
+              <a:rPr sz="950" b="0" i="0">
+                <a:solidFill>
+                  <a:srgbClr val="CAD3DF"/>
+                </a:solidFill>
+              </a:rPr>
+              <a:t>&lt; 200 m · open streets</a:t>
+            </a:r>
+          </a:p>
+        </p:txBody>
+      </p:sp>
+      <p:sp>
+        <p:nvSpPr>
+          <p:cNvPr id="17" name="Rectangle 16"/>
+          <p:cNvSpPr/>
+          <p:nvPr/>
+        </p:nvSpPr>
+        <p:spPr>
+          <a:xfrm>
+            <a:off x="457200" y="3246120"/>
+            <a:ext cx="4937760" cy="749808"/>
+          </a:xfrm>
+          <a:prstGeom prst="rect">
+            <a:avLst/>
+          </a:prstGeom>
+          <a:solidFill>
+            <a:srgbClr val="112A40"/>
+          </a:solidFill>
+          <a:ln>
+            <a:noFill/>
+          </a:ln>
+        </p:spPr>
+        <p:style>
+          <a:lnRef idx="1">
+            <a:schemeClr val="accent1"/>
+          </a:lnRef>
+          <a:fillRef idx="3">
+            <a:schemeClr val="accent1"/>
+          </a:fillRef>
+          <a:effectRef idx="2">
+            <a:schemeClr val="accent1"/>
+          </a:effectRef>
+          <a:fontRef idx="minor">
+            <a:schemeClr val="lt1"/>
+          </a:fontRef>
+        </p:style>
+        <p:txBody>
+          <a:bodyPr rtlCol="0" anchor="ctr"/>
+          <a:lstStyle/>
+          <a:p>
+            <a:pPr algn="ctr"/>
+          </a:p>
+        </p:txBody>
+      </p:sp>
+      <p:sp>
+        <p:nvSpPr>
+          <p:cNvPr id="18" name="Rectangle 17"/>
+          <p:cNvSpPr/>
+          <p:nvPr/>
+        </p:nvSpPr>
+        <p:spPr>
+          <a:xfrm>
+            <a:off x="457200" y="3246120"/>
+            <a:ext cx="54864" cy="749808"/>
+          </a:xfrm>
+          <a:prstGeom prst="rect">
+            <a:avLst/>
+          </a:prstGeom>
+          <a:solidFill>
+            <a:srgbClr val="FF4D6D"/>
+          </a:solidFill>
+          <a:ln>
+            <a:noFill/>
+          </a:ln>
+        </p:spPr>
+        <p:style>
+          <a:lnRef idx="1">
+            <a:schemeClr val="accent1"/>
+          </a:lnRef>
+          <a:fillRef idx="3">
+            <a:schemeClr val="accent1"/>
+          </a:fillRef>
+          <a:effectRef idx="2">
+            <a:schemeClr val="accent1"/>
+          </a:effectRef>
+          <a:fontRef idx="minor">
+            <a:schemeClr val="lt1"/>
+          </a:fontRef>
+        </p:style>
+        <p:txBody>
+          <a:bodyPr rtlCol="0" anchor="ctr"/>
+          <a:lstStyle/>
+          <a:p>
+            <a:pPr algn="ctr"/>
+          </a:p>
+        </p:txBody>
+      </p:sp>
+      <p:sp>
+        <p:nvSpPr>
+          <p:cNvPr id="19" name="TextBox 18"/>
+          <p:cNvSpPr txBox="1"/>
+          <p:nvPr/>
+        </p:nvSpPr>
+        <p:spPr>
+          <a:xfrm>
+            <a:off x="594360" y="3355848"/>
+            <a:ext cx="822960" cy="457200"/>
+          </a:xfrm>
+          <a:prstGeom prst="rect">
+            <a:avLst/>
+          </a:prstGeom>
+          <a:noFill/>
+        </p:spPr>
+        <p:txBody>
+          <a:bodyPr wrap="square">
+            <a:spAutoFit/>
+          </a:bodyPr>
+          <a:lstStyle/>
+          <a:p>
+            <a:pPr algn="l"/>
+            <a:r>
+              <a:rPr sz="1600" b="1" i="0">
+                <a:solidFill>
+                  <a:srgbClr val="FF4D6D"/>
+                </a:solidFill>
+              </a:rPr>
+              <a:t>NLOS</a:t>
+            </a:r>
+          </a:p>
+        </p:txBody>
+      </p:sp>
+      <p:sp>
+        <p:nvSpPr>
+          <p:cNvPr id="20" name="TextBox 19"/>
+          <p:cNvSpPr txBox="1"/>
+          <p:nvPr/>
+        </p:nvSpPr>
+        <p:spPr>
+          <a:xfrm>
+            <a:off x="1417320" y="3355848"/>
+            <a:ext cx="822960" cy="457200"/>
+          </a:xfrm>
+          <a:prstGeom prst="rect">
+            <a:avLst/>
+          </a:prstGeom>
+          <a:noFill/>
+        </p:spPr>
+        <p:txBody>
+          <a:bodyPr wrap="square">
+            <a:spAutoFit/>
+          </a:bodyPr>
+          <a:lstStyle/>
+          <a:p>
+            <a:pPr algn="l"/>
+            <a:r>
+              <a:rPr sz="1600" b="1" i="0">
+                <a:solidFill>
+                  <a:srgbClr val="FFFFFF"/>
+                </a:solidFill>
+              </a:rPr>
+              <a:t>~1120</a:t>
+            </a:r>
+          </a:p>
+        </p:txBody>
+      </p:sp>
+      <p:sp>
+        <p:nvSpPr>
+          <p:cNvPr id="21" name="TextBox 20"/>
+          <p:cNvSpPr txBox="1"/>
+          <p:nvPr/>
+        </p:nvSpPr>
+        <p:spPr>
+          <a:xfrm>
+            <a:off x="2240280" y="3355848"/>
+            <a:ext cx="731520" cy="457200"/>
+          </a:xfrm>
+          <a:prstGeom prst="rect">
+            <a:avLst/>
+          </a:prstGeom>
+          <a:noFill/>
+        </p:spPr>
+        <p:txBody>
+          <a:bodyPr wrap="square">
+            <a:spAutoFit/>
+          </a:bodyPr>
+          <a:lstStyle/>
+          <a:p>
+            <a:pPr algn="l"/>
+            <a:r>
+              <a:rPr sz="1400" b="1" i="0">
+                <a:solidFill>
+                  <a:srgbClr val="FF4D6D"/>
+                </a:solidFill>
+              </a:rPr>
+              <a:t>98.3%</a:t>
+            </a:r>
+          </a:p>
+        </p:txBody>
+      </p:sp>
+      <p:sp>
+        <p:nvSpPr>
+          <p:cNvPr id="22" name="TextBox 21"/>
+          <p:cNvSpPr txBox="1"/>
+          <p:nvPr/>
+        </p:nvSpPr>
+        <p:spPr>
+          <a:xfrm>
+            <a:off x="2971800" y="3410712"/>
+            <a:ext cx="2286000" cy="411480"/>
+          </a:xfrm>
+          <a:prstGeom prst="rect">
+            <a:avLst/>
+          </a:prstGeom>
+          <a:noFill/>
+        </p:spPr>
+        <p:txBody>
+          <a:bodyPr wrap="square">
+            <a:spAutoFit/>
+          </a:bodyPr>
+          <a:lstStyle/>
+          <a:p>
+            <a:pPr algn="l"/>
+            <a:r>
+              <a:rPr sz="950" b="0" i="0">
+                <a:solidFill>
+                  <a:srgbClr val="CAD3DF"/>
+                </a:solidFill>
+              </a:rPr>
+              <a:t>All ranges · urban canyon</a:t>
+            </a:r>
+          </a:p>
+        </p:txBody>
+      </p:sp>
+      <p:sp>
+        <p:nvSpPr>
+          <p:cNvPr id="23" name="TextBox 22"/>
+          <p:cNvSpPr txBox="1"/>
+          <p:nvPr/>
+        </p:nvSpPr>
+        <p:spPr>
+          <a:xfrm>
+            <a:off x="457200" y="4315968"/>
+            <a:ext cx="5029200" cy="320040"/>
+          </a:xfrm>
+          <a:prstGeom prst="rect">
+            <a:avLst/>
+          </a:prstGeom>
+          <a:noFill/>
+        </p:spPr>
+        <p:txBody>
+          <a:bodyPr wrap="square">
+            <a:spAutoFit/>
+          </a:bodyPr>
+          <a:lstStyle/>
+          <a:p>
+            <a:pPr algn="l"/>
+            <a:r>
+              <a:rPr sz="1000" b="1" i="0">
+                <a:solidFill>
+                  <a:srgbClr val="90E0EF"/>
+                </a:solidFill>
+              </a:rPr>
+              <a:t>Ray Type Breakdown — 153 450 total rays</a:t>
+            </a:r>
+          </a:p>
+        </p:txBody>
+      </p:sp>
+      <p:sp>
+        <p:nvSpPr>
+          <p:cNvPr id="24" name="Rectangle 23"/>
+          <p:cNvSpPr/>
+          <p:nvPr/>
+        </p:nvSpPr>
+        <p:spPr>
+          <a:xfrm>
+            <a:off x="457200" y="4754880"/>
+            <a:ext cx="4389120" cy="274320"/>
+          </a:xfrm>
+          <a:prstGeom prst="rect">
+            <a:avLst/>
+          </a:prstGeom>
+          <a:solidFill>
+            <a:srgbClr val="00B4D8"/>
+          </a:solidFill>
+          <a:ln>
+            <a:noFill/>
+          </a:ln>
+        </p:spPr>
+        <p:style>
+          <a:lnRef idx="1">
+            <a:schemeClr val="accent1"/>
+          </a:lnRef>
+          <a:fillRef idx="3">
+            <a:schemeClr val="accent1"/>
+          </a:fillRef>
+          <a:effectRef idx="2">
+            <a:schemeClr val="accent1"/>
+          </a:effectRef>
+          <a:fontRef idx="minor">
+            <a:schemeClr val="lt1"/>
+          </a:fontRef>
+        </p:style>
+        <p:txBody>
+          <a:bodyPr rtlCol="0" anchor="ctr"/>
+          <a:lstStyle/>
+          <a:p>
+            <a:pPr algn="ctr"/>
+          </a:p>
+        </p:txBody>
+      </p:sp>
+      <p:sp>
+        <p:nvSpPr>
+          <p:cNvPr id="25" name="TextBox 24"/>
+          <p:cNvSpPr txBox="1"/>
+          <p:nvPr/>
+        </p:nvSpPr>
+        <p:spPr>
+          <a:xfrm>
+            <a:off x="457200" y="4681728"/>
+            <a:ext cx="4937760" cy="347472"/>
+          </a:xfrm>
+          <a:prstGeom prst="rect">
+            <a:avLst/>
+          </a:prstGeom>
+          <a:noFill/>
+        </p:spPr>
+        <p:txBody>
+          <a:bodyPr wrap="square">
+            <a:spAutoFit/>
+          </a:bodyPr>
+          <a:lstStyle/>
+          <a:p>
+            <a:pPr algn="l"/>
+            <a:r>
+              <a:rPr sz="950" b="0" i="0">
+                <a:solidFill>
+                  <a:srgbClr val="FFFFFF"/>
+                </a:solidFill>
+              </a:rPr>
+              <a:t>Diffraction  110 618  (72.1%)</a:t>
+            </a:r>
+          </a:p>
+        </p:txBody>
+      </p:sp>
+      <p:sp>
+        <p:nvSpPr>
+          <p:cNvPr id="26" name="Rectangle 25"/>
+          <p:cNvSpPr/>
+          <p:nvPr/>
+        </p:nvSpPr>
+        <p:spPr>
+          <a:xfrm>
+            <a:off x="457200" y="5193792"/>
+            <a:ext cx="1467098" cy="274320"/>
+          </a:xfrm>
+          <a:prstGeom prst="rect">
+            <a:avLst/>
+          </a:prstGeom>
+          <a:solidFill>
+            <a:srgbClr val="FF9F1C"/>
+          </a:solidFill>
+          <a:ln>
+            <a:noFill/>
+          </a:ln>
+        </p:spPr>
+        <p:style>
+          <a:lnRef idx="1">
+            <a:schemeClr val="accent1"/>
+          </a:lnRef>
+          <a:fillRef idx="3">
+            <a:schemeClr val="accent1"/>
+          </a:fillRef>
+          <a:effectRef idx="2">
+            <a:schemeClr val="accent1"/>
+          </a:effectRef>
+          <a:fontRef idx="minor">
+            <a:schemeClr val="lt1"/>
+          </a:fontRef>
+        </p:style>
+        <p:txBody>
+          <a:bodyPr rtlCol="0" anchor="ctr"/>
+          <a:lstStyle/>
+          <a:p>
+            <a:pPr algn="ctr"/>
+          </a:p>
+        </p:txBody>
+      </p:sp>
+      <p:sp>
+        <p:nvSpPr>
+          <p:cNvPr id="27" name="TextBox 26"/>
+          <p:cNvSpPr txBox="1"/>
+          <p:nvPr/>
+        </p:nvSpPr>
+        <p:spPr>
+          <a:xfrm>
+            <a:off x="457200" y="5120640"/>
+            <a:ext cx="4937760" cy="347472"/>
+          </a:xfrm>
+          <a:prstGeom prst="rect">
+            <a:avLst/>
+          </a:prstGeom>
+          <a:noFill/>
+        </p:spPr>
+        <p:txBody>
+          <a:bodyPr wrap="square">
+            <a:spAutoFit/>
+          </a:bodyPr>
+          <a:lstStyle/>
+          <a:p>
+            <a:pPr algn="l"/>
+            <a:r>
+              <a:rPr sz="950" b="0" i="0">
+                <a:solidFill>
+                  <a:srgbClr val="FFFFFF"/>
+                </a:solidFill>
+              </a:rPr>
+              <a:t>Multi-reflection  37 006  (24.1%)</a:t>
+            </a:r>
+          </a:p>
+        </p:txBody>
+      </p:sp>
+      <p:sp>
+        <p:nvSpPr>
+          <p:cNvPr id="28" name="Rectangle 27"/>
+          <p:cNvSpPr/>
+          <p:nvPr/>
+        </p:nvSpPr>
+        <p:spPr>
+          <a:xfrm>
+            <a:off x="457200" y="5632704"/>
+            <a:ext cx="127838" cy="274320"/>
+          </a:xfrm>
+          <a:prstGeom prst="rect">
+            <a:avLst/>
+          </a:prstGeom>
+          <a:solidFill>
+            <a:srgbClr val="CAD3DF"/>
+          </a:solidFill>
+          <a:ln>
+            <a:noFill/>
+          </a:ln>
+        </p:spPr>
+        <p:style>
+          <a:lnRef idx="1">
+            <a:schemeClr val="accent1"/>
+          </a:lnRef>
+          <a:fillRef idx="3">
+            <a:schemeClr val="accent1"/>
+          </a:fillRef>
+          <a:effectRef idx="2">
+            <a:schemeClr val="accent1"/>
+          </a:effectRef>
+          <a:fontRef idx="minor">
+            <a:schemeClr val="lt1"/>
+          </a:fontRef>
+        </p:style>
+        <p:txBody>
+          <a:bodyPr rtlCol="0" anchor="ctr"/>
+          <a:lstStyle/>
+          <a:p>
+            <a:pPr algn="ctr"/>
+          </a:p>
+        </p:txBody>
+      </p:sp>
+      <p:sp>
+        <p:nvSpPr>
+          <p:cNvPr id="29" name="TextBox 28"/>
+          <p:cNvSpPr txBox="1"/>
+          <p:nvPr/>
+        </p:nvSpPr>
+        <p:spPr>
+          <a:xfrm>
+            <a:off x="457200" y="5559552"/>
+            <a:ext cx="4937760" cy="347472"/>
+          </a:xfrm>
+          <a:prstGeom prst="rect">
+            <a:avLst/>
+          </a:prstGeom>
+          <a:noFill/>
+        </p:spPr>
+        <p:txBody>
+          <a:bodyPr wrap="square">
+            <a:spAutoFit/>
+          </a:bodyPr>
+          <a:lstStyle/>
+          <a:p>
+            <a:pPr algn="l"/>
+            <a:r>
+              <a:rPr sz="950" b="0" i="0">
+                <a:solidFill>
+                  <a:srgbClr val="FFFFFF"/>
+                </a:solidFill>
+              </a:rPr>
+              <a:t>Reflection  3 190  (2.1%)</a:t>
+            </a:r>
+          </a:p>
+        </p:txBody>
+      </p:sp>
+      <p:sp>
+        <p:nvSpPr>
+          <p:cNvPr id="30" name="Rectangle 29"/>
+          <p:cNvSpPr/>
+          <p:nvPr/>
+        </p:nvSpPr>
+        <p:spPr>
+          <a:xfrm>
+            <a:off x="457200" y="6071616"/>
+            <a:ext cx="103488" cy="274320"/>
+          </a:xfrm>
+          <a:prstGeom prst="rect">
+            <a:avLst/>
+          </a:prstGeom>
+          <a:solidFill>
+            <a:srgbClr val="2DCB7F"/>
+          </a:solidFill>
+          <a:ln>
+            <a:noFill/>
+          </a:ln>
+        </p:spPr>
+        <p:style>
+          <a:lnRef idx="1">
+            <a:schemeClr val="accent1"/>
+          </a:lnRef>
+          <a:fillRef idx="3">
+            <a:schemeClr val="accent1"/>
+          </a:fillRef>
+          <a:effectRef idx="2">
+            <a:schemeClr val="accent1"/>
+          </a:effectRef>
+          <a:fontRef idx="minor">
+            <a:schemeClr val="lt1"/>
+          </a:fontRef>
+        </p:style>
+        <p:txBody>
+          <a:bodyPr rtlCol="0" anchor="ctr"/>
+          <a:lstStyle/>
+          <a:p>
+            <a:pPr algn="ctr"/>
+          </a:p>
+        </p:txBody>
+      </p:sp>
+      <p:sp>
+        <p:nvSpPr>
+          <p:cNvPr id="31" name="TextBox 30"/>
+          <p:cNvSpPr txBox="1"/>
+          <p:nvPr/>
+        </p:nvSpPr>
+        <p:spPr>
+          <a:xfrm>
+            <a:off x="457200" y="5998464"/>
+            <a:ext cx="4937760" cy="347472"/>
+          </a:xfrm>
+          <a:prstGeom prst="rect">
+            <a:avLst/>
+          </a:prstGeom>
+          <a:noFill/>
+        </p:spPr>
+        <p:txBody>
+          <a:bodyPr wrap="square">
+            <a:spAutoFit/>
+          </a:bodyPr>
+          <a:lstStyle/>
+          <a:p>
+            <a:pPr algn="l"/>
+            <a:r>
+              <a:rPr sz="950" b="0" i="0">
+                <a:solidFill>
+                  <a:srgbClr val="FFFFFF"/>
+                </a:solidFill>
+              </a:rPr>
+              <a:t>LOS  2 636  (1.7%)</a:t>
+            </a:r>
+          </a:p>
+        </p:txBody>
+      </p:sp>
+      <p:sp>
+        <p:nvSpPr>
+          <p:cNvPr id="32" name="Rectangle 31"/>
+          <p:cNvSpPr/>
+          <p:nvPr/>
+        </p:nvSpPr>
+        <p:spPr>
+          <a:xfrm>
+            <a:off x="5852160" y="1234440"/>
+            <a:ext cx="6035040" cy="5212080"/>
+          </a:xfrm>
+          <a:prstGeom prst="rect">
+            <a:avLst/>
+          </a:prstGeom>
+          <a:solidFill>
+            <a:srgbClr val="112A40"/>
+          </a:solidFill>
+          <a:ln>
+            <a:noFill/>
+          </a:ln>
+        </p:spPr>
+        <p:style>
+          <a:lnRef idx="1">
+            <a:schemeClr val="accent1"/>
+          </a:lnRef>
+          <a:fillRef idx="3">
+            <a:schemeClr val="accent1"/>
+          </a:fillRef>
+          <a:effectRef idx="2">
+            <a:schemeClr val="accent1"/>
+          </a:effectRef>
+          <a:fontRef idx="minor">
+            <a:schemeClr val="lt1"/>
+          </a:fontRef>
+        </p:style>
+        <p:txBody>
+          <a:bodyPr rtlCol="0" anchor="ctr"/>
+          <a:lstStyle/>
+          <a:p>
+            <a:pPr algn="ctr"/>
+          </a:p>
+        </p:txBody>
+      </p:sp>
+      <p:sp>
+        <p:nvSpPr>
+          <p:cNvPr id="33" name="Rectangle 32"/>
+          <p:cNvSpPr/>
+          <p:nvPr/>
+        </p:nvSpPr>
+        <p:spPr>
+          <a:xfrm>
+            <a:off x="5852160" y="1234440"/>
+            <a:ext cx="6035040" cy="54864"/>
+          </a:xfrm>
+          <a:prstGeom prst="rect">
+            <a:avLst/>
+          </a:prstGeom>
+          <a:solidFill>
+            <a:srgbClr val="FF9F1C"/>
+          </a:solidFill>
+          <a:ln>
+            <a:noFill/>
+          </a:ln>
+        </p:spPr>
+        <p:style>
+          <a:lnRef idx="1">
+            <a:schemeClr val="accent1"/>
+          </a:lnRef>
+          <a:fillRef idx="3">
+            <a:schemeClr val="accent1"/>
+          </a:fillRef>
+          <a:effectRef idx="2">
+            <a:schemeClr val="accent1"/>
+          </a:effectRef>
+          <a:fontRef idx="minor">
+            <a:schemeClr val="lt1"/>
+          </a:fontRef>
+        </p:style>
+        <p:txBody>
+          <a:bodyPr rtlCol="0" anchor="ctr"/>
+          <a:lstStyle/>
+          <a:p>
+            <a:pPr algn="ctr"/>
+          </a:p>
+        </p:txBody>
+      </p:sp>
+      <p:sp>
+        <p:nvSpPr>
+          <p:cNvPr id="34" name="TextBox 33"/>
+          <p:cNvSpPr txBox="1"/>
+          <p:nvPr/>
+        </p:nvSpPr>
+        <p:spPr>
+          <a:xfrm>
+            <a:off x="5989320" y="1371600"/>
+            <a:ext cx="5760720" cy="365760"/>
+          </a:xfrm>
+          <a:prstGeom prst="rect">
+            <a:avLst/>
+          </a:prstGeom>
+          <a:noFill/>
+        </p:spPr>
+        <p:txBody>
+          <a:bodyPr wrap="square">
+            <a:spAutoFit/>
+          </a:bodyPr>
+          <a:lstStyle/>
+          <a:p>
+            <a:pPr algn="l"/>
+            <a:r>
+              <a:rPr sz="1200" b="1" i="0">
+                <a:solidFill>
+                  <a:srgbClr val="FF9F1C"/>
+                </a:solidFill>
+              </a:rPr>
+              <a:t>Why It Matters for Path Loss Modelling</a:t>
+            </a:r>
+          </a:p>
+        </p:txBody>
+      </p:sp>
+      <p:sp>
+        <p:nvSpPr>
+          <p:cNvPr id="35" name="Rectangle 34"/>
+          <p:cNvSpPr/>
+          <p:nvPr/>
+        </p:nvSpPr>
+        <p:spPr>
+          <a:xfrm>
+            <a:off x="5943600" y="1965959"/>
+            <a:ext cx="45720" cy="731520"/>
+          </a:xfrm>
+          <a:prstGeom prst="rect">
+            <a:avLst/>
+          </a:prstGeom>
+          <a:solidFill>
+            <a:srgbClr val="2DCB7F"/>
+          </a:solidFill>
+          <a:ln>
+            <a:noFill/>
+          </a:ln>
+        </p:spPr>
+        <p:style>
+          <a:lnRef idx="1">
+            <a:schemeClr val="accent1"/>
+          </a:lnRef>
+          <a:fillRef idx="3">
+            <a:schemeClr val="accent1"/>
+          </a:fillRef>
+          <a:effectRef idx="2">
+            <a:schemeClr val="accent1"/>
+          </a:effectRef>
+          <a:fontRef idx="minor">
+            <a:schemeClr val="lt1"/>
+          </a:fontRef>
+        </p:style>
+        <p:txBody>
+          <a:bodyPr rtlCol="0" anchor="ctr"/>
+          <a:lstStyle/>
+          <a:p>
+            <a:pPr algn="ctr"/>
+          </a:p>
+        </p:txBody>
+      </p:sp>
+      <p:sp>
+        <p:nvSpPr>
+          <p:cNvPr id="36" name="Rectangle 35"/>
+          <p:cNvSpPr/>
+          <p:nvPr/>
+        </p:nvSpPr>
+        <p:spPr>
+          <a:xfrm>
+            <a:off x="5989320" y="1874519"/>
+            <a:ext cx="5760720" cy="914400"/>
+          </a:xfrm>
+          <a:prstGeom prst="rect">
+            <a:avLst/>
+          </a:prstGeom>
+          <a:solidFill>
+            <a:srgbClr val="112A40"/>
+          </a:solidFill>
+          <a:ln>
+            <a:noFill/>
+          </a:ln>
+        </p:spPr>
+        <p:style>
+          <a:lnRef idx="1">
+            <a:schemeClr val="accent1"/>
+          </a:lnRef>
+          <a:fillRef idx="3">
+            <a:schemeClr val="accent1"/>
+          </a:fillRef>
+          <a:effectRef idx="2">
+            <a:schemeClr val="accent1"/>
+          </a:effectRef>
+          <a:fontRef idx="minor">
+            <a:schemeClr val="lt1"/>
+          </a:fontRef>
+        </p:style>
+        <p:txBody>
+          <a:bodyPr rtlCol="0" anchor="ctr"/>
+          <a:lstStyle/>
+          <a:p>
+            <a:pPr algn="ctr"/>
+          </a:p>
+        </p:txBody>
+      </p:sp>
+      <p:sp>
+        <p:nvSpPr>
+          <p:cNvPr id="37" name="TextBox 36"/>
+          <p:cNvSpPr txBox="1"/>
+          <p:nvPr/>
+        </p:nvSpPr>
+        <p:spPr>
+          <a:xfrm>
+            <a:off x="6126480" y="1947671"/>
+            <a:ext cx="2011680" cy="384048"/>
+          </a:xfrm>
+          <a:prstGeom prst="rect">
+            <a:avLst/>
+          </a:prstGeom>
+          <a:noFill/>
+        </p:spPr>
+        <p:txBody>
+          <a:bodyPr wrap="square">
+            <a:spAutoFit/>
+          </a:bodyPr>
+          <a:lstStyle/>
+          <a:p>
+            <a:pPr algn="l"/>
+            <a:r>
+              <a:rPr sz="1100" b="1" i="0">
+                <a:solidFill>
+                  <a:srgbClr val="2DCB7F"/>
+                </a:solidFill>
+              </a:rPr>
+              <a:t>LOS</a:t>
+            </a:r>
+          </a:p>
+        </p:txBody>
+      </p:sp>
+      <p:sp>
+        <p:nvSpPr>
+          <p:cNvPr id="38" name="TextBox 37"/>
+          <p:cNvSpPr txBox="1"/>
+          <p:nvPr/>
+        </p:nvSpPr>
+        <p:spPr>
+          <a:xfrm>
+            <a:off x="8138160" y="1947671"/>
+            <a:ext cx="3474720" cy="749808"/>
+          </a:xfrm>
+          <a:prstGeom prst="rect">
+            <a:avLst/>
+          </a:prstGeom>
+          <a:noFill/>
+        </p:spPr>
+        <p:txBody>
+          <a:bodyPr wrap="square">
+            <a:spAutoFit/>
+          </a:bodyPr>
+          <a:lstStyle/>
+          <a:p>
+            <a:pPr algn="l"/>
+            <a:r>
+              <a:rPr sz="1000" b="0" i="0">
+                <a:solidFill>
+                  <a:srgbClr val="CAD3DF"/>
+                </a:solidFill>
+              </a:rPr>
+              <a:t>Free-space + ground reflection
+Friis equation sufficient</a:t>
+            </a:r>
+          </a:p>
+        </p:txBody>
+      </p:sp>
+      <p:sp>
+        <p:nvSpPr>
+          <p:cNvPr id="39" name="Rectangle 38"/>
+          <p:cNvSpPr/>
+          <p:nvPr/>
+        </p:nvSpPr>
+        <p:spPr>
+          <a:xfrm>
+            <a:off x="5943600" y="2971799"/>
+            <a:ext cx="45720" cy="731520"/>
+          </a:xfrm>
+          <a:prstGeom prst="rect">
+            <a:avLst/>
+          </a:prstGeom>
+          <a:solidFill>
+            <a:srgbClr val="FF9F1C"/>
+          </a:solidFill>
+          <a:ln>
+            <a:noFill/>
+          </a:ln>
+        </p:spPr>
+        <p:style>
+          <a:lnRef idx="1">
+            <a:schemeClr val="accent1"/>
+          </a:lnRef>
+          <a:fillRef idx="3">
+            <a:schemeClr val="accent1"/>
+          </a:fillRef>
+          <a:effectRef idx="2">
+            <a:schemeClr val="accent1"/>
+          </a:effectRef>
+          <a:fontRef idx="minor">
+            <a:schemeClr val="lt1"/>
+          </a:fontRef>
+        </p:style>
+        <p:txBody>
+          <a:bodyPr rtlCol="0" anchor="ctr"/>
+          <a:lstStyle/>
+          <a:p>
+            <a:pPr algn="ctr"/>
+          </a:p>
+        </p:txBody>
+      </p:sp>
+      <p:sp>
+        <p:nvSpPr>
+          <p:cNvPr id="40" name="Rectangle 39"/>
+          <p:cNvSpPr/>
+          <p:nvPr/>
+        </p:nvSpPr>
+        <p:spPr>
+          <a:xfrm>
+            <a:off x="5989320" y="2880359"/>
+            <a:ext cx="5760720" cy="914400"/>
+          </a:xfrm>
+          <a:prstGeom prst="rect">
+            <a:avLst/>
+          </a:prstGeom>
+          <a:solidFill>
+            <a:srgbClr val="112A40"/>
+          </a:solidFill>
+          <a:ln>
+            <a:noFill/>
+          </a:ln>
+        </p:spPr>
+        <p:style>
+          <a:lnRef idx="1">
+            <a:schemeClr val="accent1"/>
+          </a:lnRef>
+          <a:fillRef idx="3">
+            <a:schemeClr val="accent1"/>
+          </a:fillRef>
+          <a:effectRef idx="2">
+            <a:schemeClr val="accent1"/>
+          </a:effectRef>
+          <a:fontRef idx="minor">
+            <a:schemeClr val="lt1"/>
+          </a:fontRef>
+        </p:style>
+        <p:txBody>
+          <a:bodyPr rtlCol="0" anchor="ctr"/>
+          <a:lstStyle/>
+          <a:p>
+            <a:pPr algn="ctr"/>
+          </a:p>
+        </p:txBody>
+      </p:sp>
+      <p:sp>
+        <p:nvSpPr>
+          <p:cNvPr id="41" name="TextBox 40"/>
+          <p:cNvSpPr txBox="1"/>
+          <p:nvPr/>
+        </p:nvSpPr>
+        <p:spPr>
+          <a:xfrm>
+            <a:off x="6126480" y="2953511"/>
+            <a:ext cx="2011680" cy="384048"/>
+          </a:xfrm>
+          <a:prstGeom prst="rect">
+            <a:avLst/>
+          </a:prstGeom>
+          <a:noFill/>
+        </p:spPr>
+        <p:txBody>
+          <a:bodyPr wrap="square">
+            <a:spAutoFit/>
+          </a:bodyPr>
+          <a:lstStyle/>
+          <a:p>
+            <a:pPr algn="l"/>
+            <a:r>
+              <a:rPr sz="1100" b="1" i="0">
+                <a:solidFill>
+                  <a:srgbClr val="FF9F1C"/>
+                </a:solidFill>
+              </a:rPr>
+              <a:t>NLOS &lt; 500 m</a:t>
+            </a:r>
+          </a:p>
+        </p:txBody>
+      </p:sp>
+      <p:sp>
+        <p:nvSpPr>
+          <p:cNvPr id="42" name="TextBox 41"/>
+          <p:cNvSpPr txBox="1"/>
+          <p:nvPr/>
+        </p:nvSpPr>
+        <p:spPr>
+          <a:xfrm>
+            <a:off x="8138160" y="2953511"/>
+            <a:ext cx="3474720" cy="749808"/>
+          </a:xfrm>
+          <a:prstGeom prst="rect">
+            <a:avLst/>
+          </a:prstGeom>
+          <a:noFill/>
+        </p:spPr>
+        <p:txBody>
+          <a:bodyPr wrap="square">
+            <a:spAutoFit/>
+          </a:bodyPr>
+          <a:lstStyle/>
+          <a:p>
+            <a:pPr algn="l"/>
+            <a:r>
+              <a:rPr sz="1000" b="0" i="0">
+                <a:solidFill>
+                  <a:srgbClr val="CAD3DF"/>
+                </a:solidFill>
+              </a:rPr>
+              <a:t>Diffraction over 1–2 rooftops
+Edge diffraction critical</a:t>
+            </a:r>
+          </a:p>
+        </p:txBody>
+      </p:sp>
+      <p:sp>
+        <p:nvSpPr>
+          <p:cNvPr id="43" name="Rectangle 42"/>
+          <p:cNvSpPr/>
+          <p:nvPr/>
+        </p:nvSpPr>
+        <p:spPr>
+          <a:xfrm>
+            <a:off x="5943600" y="3977639"/>
+            <a:ext cx="45720" cy="731520"/>
+          </a:xfrm>
+          <a:prstGeom prst="rect">
+            <a:avLst/>
+          </a:prstGeom>
+          <a:solidFill>
+            <a:srgbClr val="FF4D6D"/>
+          </a:solidFill>
+          <a:ln>
+            <a:noFill/>
+          </a:ln>
+        </p:spPr>
+        <p:style>
+          <a:lnRef idx="1">
+            <a:schemeClr val="accent1"/>
+          </a:lnRef>
+          <a:fillRef idx="3">
+            <a:schemeClr val="accent1"/>
+          </a:fillRef>
+          <a:effectRef idx="2">
+            <a:schemeClr val="accent1"/>
+          </a:effectRef>
+          <a:fontRef idx="minor">
+            <a:schemeClr val="lt1"/>
+          </a:fontRef>
+        </p:style>
+        <p:txBody>
+          <a:bodyPr rtlCol="0" anchor="ctr"/>
+          <a:lstStyle/>
+          <a:p>
+            <a:pPr algn="ctr"/>
+          </a:p>
+        </p:txBody>
+      </p:sp>
+      <p:sp>
+        <p:nvSpPr>
+          <p:cNvPr id="44" name="Rectangle 43"/>
+          <p:cNvSpPr/>
+          <p:nvPr/>
+        </p:nvSpPr>
+        <p:spPr>
+          <a:xfrm>
+            <a:off x="5989320" y="3886199"/>
+            <a:ext cx="5760720" cy="914400"/>
+          </a:xfrm>
+          <a:prstGeom prst="rect">
+            <a:avLst/>
+          </a:prstGeom>
+          <a:solidFill>
+            <a:srgbClr val="112A40"/>
+          </a:solidFill>
+          <a:ln>
+            <a:noFill/>
+          </a:ln>
+        </p:spPr>
+        <p:style>
+          <a:lnRef idx="1">
+            <a:schemeClr val="accent1"/>
+          </a:lnRef>
+          <a:fillRef idx="3">
+            <a:schemeClr val="accent1"/>
+          </a:fillRef>
+          <a:effectRef idx="2">
+            <a:schemeClr val="accent1"/>
+          </a:effectRef>
+          <a:fontRef idx="minor">
+            <a:schemeClr val="lt1"/>
+          </a:fontRef>
+        </p:style>
+        <p:txBody>
+          <a:bodyPr rtlCol="0" anchor="ctr"/>
+          <a:lstStyle/>
+          <a:p>
+            <a:pPr algn="ctr"/>
+          </a:p>
+        </p:txBody>
+      </p:sp>
+      <p:sp>
+        <p:nvSpPr>
+          <p:cNvPr id="45" name="TextBox 44"/>
+          <p:cNvSpPr txBox="1"/>
+          <p:nvPr/>
+        </p:nvSpPr>
+        <p:spPr>
+          <a:xfrm>
+            <a:off x="6126480" y="3959351"/>
+            <a:ext cx="2011680" cy="384048"/>
+          </a:xfrm>
+          <a:prstGeom prst="rect">
+            <a:avLst/>
+          </a:prstGeom>
+          <a:noFill/>
+        </p:spPr>
+        <p:txBody>
+          <a:bodyPr wrap="square">
+            <a:spAutoFit/>
+          </a:bodyPr>
+          <a:lstStyle/>
+          <a:p>
+            <a:pPr algn="l"/>
+            <a:r>
+              <a:rPr sz="1100" b="1" i="0">
+                <a:solidFill>
+                  <a:srgbClr val="FF4D6D"/>
+                </a:solidFill>
+              </a:rPr>
+              <a:t>NLOS 500–2000 m</a:t>
+            </a:r>
+          </a:p>
+        </p:txBody>
+      </p:sp>
+      <p:sp>
+        <p:nvSpPr>
+          <p:cNvPr id="46" name="TextBox 45"/>
+          <p:cNvSpPr txBox="1"/>
+          <p:nvPr/>
+        </p:nvSpPr>
+        <p:spPr>
+          <a:xfrm>
+            <a:off x="8138160" y="3959351"/>
+            <a:ext cx="3474720" cy="749808"/>
+          </a:xfrm>
+          <a:prstGeom prst="rect">
+            <a:avLst/>
+          </a:prstGeom>
+          <a:noFill/>
+        </p:spPr>
+        <p:txBody>
+          <a:bodyPr wrap="square">
+            <a:spAutoFit/>
+          </a:bodyPr>
+          <a:lstStyle/>
+          <a:p>
+            <a:pPr algn="l"/>
+            <a:r>
+              <a:rPr sz="1000" b="0" i="0">
+                <a:solidFill>
+                  <a:srgbClr val="CAD3DF"/>
+                </a:solidFill>
+              </a:rPr>
+              <a:t>Multi-hop diffraction + scatter
+Full ray tracing essential</a:t>
+            </a:r>
+          </a:p>
+        </p:txBody>
+      </p:sp>
+      <p:sp>
+        <p:nvSpPr>
+          <p:cNvPr id="47" name="Rectangle 46"/>
+          <p:cNvSpPr/>
+          <p:nvPr/>
+        </p:nvSpPr>
+        <p:spPr>
+          <a:xfrm>
+            <a:off x="5943600" y="4983479"/>
+            <a:ext cx="45720" cy="731520"/>
+          </a:xfrm>
+          <a:prstGeom prst="rect">
+            <a:avLst/>
+          </a:prstGeom>
+          <a:solidFill>
+            <a:srgbClr val="00B4D8"/>
+          </a:solidFill>
+          <a:ln>
+            <a:noFill/>
+          </a:ln>
+        </p:spPr>
+        <p:style>
+          <a:lnRef idx="1">
+            <a:schemeClr val="accent1"/>
+          </a:lnRef>
+          <a:fillRef idx="3">
+            <a:schemeClr val="accent1"/>
+          </a:fillRef>
+          <a:effectRef idx="2">
+            <a:schemeClr val="accent1"/>
+          </a:effectRef>
+          <a:fontRef idx="minor">
+            <a:schemeClr val="lt1"/>
+          </a:fontRef>
+        </p:style>
+        <p:txBody>
+          <a:bodyPr rtlCol="0" anchor="ctr"/>
+          <a:lstStyle/>
+          <a:p>
+            <a:pPr algn="ctr"/>
+          </a:p>
+        </p:txBody>
+      </p:sp>
+      <p:sp>
+        <p:nvSpPr>
+          <p:cNvPr id="48" name="Rectangle 47"/>
+          <p:cNvSpPr/>
+          <p:nvPr/>
+        </p:nvSpPr>
+        <p:spPr>
+          <a:xfrm>
+            <a:off x="5989320" y="4892039"/>
+            <a:ext cx="5760720" cy="914400"/>
+          </a:xfrm>
+          <a:prstGeom prst="rect">
+            <a:avLst/>
+          </a:prstGeom>
+          <a:solidFill>
+            <a:srgbClr val="112A40"/>
+          </a:solidFill>
+          <a:ln>
+            <a:noFill/>
+          </a:ln>
+        </p:spPr>
+        <p:style>
+          <a:lnRef idx="1">
+            <a:schemeClr val="accent1"/>
+          </a:lnRef>
+          <a:fillRef idx="3">
+            <a:schemeClr val="accent1"/>
+          </a:fillRef>
+          <a:effectRef idx="2">
+            <a:schemeClr val="accent1"/>
+          </a:effectRef>
+          <a:fontRef idx="minor">
+            <a:schemeClr val="lt1"/>
+          </a:fontRef>
+        </p:style>
+        <p:txBody>
+          <a:bodyPr rtlCol="0" anchor="ctr"/>
+          <a:lstStyle/>
+          <a:p>
+            <a:pPr algn="ctr"/>
+          </a:p>
+        </p:txBody>
+      </p:sp>
+      <p:sp>
+        <p:nvSpPr>
+          <p:cNvPr id="49" name="TextBox 48"/>
+          <p:cNvSpPr txBox="1"/>
+          <p:nvPr/>
+        </p:nvSpPr>
+        <p:spPr>
+          <a:xfrm>
+            <a:off x="6126480" y="4965191"/>
+            <a:ext cx="2011680" cy="384048"/>
+          </a:xfrm>
+          <a:prstGeom prst="rect">
+            <a:avLst/>
+          </a:prstGeom>
+          <a:noFill/>
+        </p:spPr>
+        <p:txBody>
+          <a:bodyPr wrap="square">
+            <a:spAutoFit/>
+          </a:bodyPr>
+          <a:lstStyle/>
+          <a:p>
+            <a:pPr algn="l"/>
+            <a:r>
+              <a:rPr sz="1100" b="1" i="0">
+                <a:solidFill>
+                  <a:srgbClr val="00B4D8"/>
+                </a:solidFill>
+              </a:rPr>
+              <a:t>NLOS &gt; 2000 m</a:t>
+            </a:r>
+          </a:p>
+        </p:txBody>
+      </p:sp>
+      <p:sp>
+        <p:nvSpPr>
+          <p:cNvPr id="50" name="TextBox 49"/>
+          <p:cNvSpPr txBox="1"/>
+          <p:nvPr/>
+        </p:nvSpPr>
+        <p:spPr>
+          <a:xfrm>
+            <a:off x="8138160" y="4965191"/>
+            <a:ext cx="3474720" cy="749808"/>
+          </a:xfrm>
+          <a:prstGeom prst="rect">
+            <a:avLst/>
+          </a:prstGeom>
+          <a:noFill/>
+        </p:spPr>
+        <p:txBody>
+          <a:bodyPr wrap="square">
+            <a:spAutoFit/>
+          </a:bodyPr>
+          <a:lstStyle/>
+          <a:p>
+            <a:pPr algn="l"/>
+            <a:r>
+              <a:rPr sz="1000" b="0" i="0">
+                <a:solidFill>
+                  <a:srgbClr val="CAD3DF"/>
+                </a:solidFill>
+              </a:rPr>
+              <a:t>Statistical scatter paths
+10M+ samples needed</a:t>
+            </a:r>
+          </a:p>
+        </p:txBody>
+      </p:sp>
+      <p:sp>
+        <p:nvSpPr>
+          <p:cNvPr id="51" name="TextBox 50"/>
+          <p:cNvSpPr txBox="1"/>
+          <p:nvPr/>
+        </p:nvSpPr>
+        <p:spPr>
+          <a:xfrm>
+            <a:off x="5989320" y="5870448"/>
+            <a:ext cx="5760720" cy="502920"/>
+          </a:xfrm>
+          <a:prstGeom prst="rect">
+            <a:avLst/>
+          </a:prstGeom>
+          <a:noFill/>
+        </p:spPr>
+        <p:txBody>
+          <a:bodyPr wrap="square">
+            <a:spAutoFit/>
+          </a:bodyPr>
+          <a:lstStyle/>
+          <a:p>
+            <a:pPr algn="l"/>
+            <a:r>
+              <a:rPr sz="1000" b="0" i="1">
+                <a:solidFill>
+                  <a:srgbClr val="90E0EF"/>
+                </a:solidFill>
+              </a:rPr>
+              <a:t>98.3% NLOS — empirical models calibrated for mixed LOS/NLOS are fundamentally mismatched.
+Ray tracing is necessary.</a:t>
+            </a:r>
+          </a:p>
+        </p:txBody>
+      </p:sp>
+    </p:spTree>
+  </p:cSld>
+  <p:clrMapOvr>
+    <a:masterClrMapping/>
+  </p:clrMapOvr>
+</p:sld>
+</file>
+
+<file path=ppt/slides/slide15.xml><?xml version="1.0" encoding="utf-8"?>
+<p:sld xmlns:a="http://schemas.openxmlformats.org/drawingml/2006/main" xmlns:p="http://schemas.openxmlformats.org/presentationml/2006/main" xmlns:r="http://schemas.openxmlformats.org/officeDocument/2006/relationships">
+  <p:cSld>
+    <p:bg>
+      <p:bgPr>
+        <a:solidFill>
+          <a:srgbClr val="0D1B2A"/>
+        </a:solidFill>
+        <a:effectLst/>
+      </p:bgPr>
+    </p:bg>
+    <p:spTree>
+      <p:nvGrpSpPr>
+        <p:cNvPr id="1" name=""/>
+        <p:cNvGrpSpPr/>
+        <p:nvPr/>
+      </p:nvGrpSpPr>
+      <p:grpSpPr/>
+      <p:sp>
+        <p:nvSpPr>
+          <p:cNvPr id="2" name="Rectangle 1"/>
+          <p:cNvSpPr/>
+          <p:nvPr/>
+        </p:nvSpPr>
+        <p:spPr>
+          <a:xfrm>
+            <a:off x="0" y="73152"/>
+            <a:ext cx="12188952" cy="54864"/>
+          </a:xfrm>
+          <a:prstGeom prst="rect">
+            <a:avLst/>
+          </a:prstGeom>
+          <a:solidFill>
+            <a:srgbClr val="00B4D8"/>
+          </a:solidFill>
+          <a:ln>
+            <a:noFill/>
+          </a:ln>
+        </p:spPr>
+        <p:style>
+          <a:lnRef idx="1">
+            <a:schemeClr val="accent1"/>
+          </a:lnRef>
+          <a:fillRef idx="3">
+            <a:schemeClr val="accent1"/>
+          </a:fillRef>
+          <a:effectRef idx="2">
+            <a:schemeClr val="accent1"/>
+          </a:effectRef>
+          <a:fontRef idx="minor">
+            <a:schemeClr val="lt1"/>
+          </a:fontRef>
+        </p:style>
+        <p:txBody>
+          <a:bodyPr rtlCol="0" anchor="ctr"/>
+          <a:lstStyle/>
+          <a:p>
+            <a:pPr algn="ctr"/>
+          </a:p>
+        </p:txBody>
+      </p:sp>
+      <p:sp>
+        <p:nvSpPr>
+          <p:cNvPr id="3" name="TextBox 2"/>
+          <p:cNvSpPr txBox="1"/>
+          <p:nvPr/>
+        </p:nvSpPr>
+        <p:spPr>
+          <a:xfrm>
+            <a:off x="320040" y="201168"/>
+            <a:ext cx="3657600" cy="256032"/>
+          </a:xfrm>
+          <a:prstGeom prst="rect">
+            <a:avLst/>
+          </a:prstGeom>
+          <a:noFill/>
+        </p:spPr>
+        <p:txBody>
+          <a:bodyPr wrap="square">
+            <a:spAutoFit/>
+          </a:bodyPr>
+          <a:lstStyle/>
+          <a:p>
+            <a:pPr algn="l"/>
+            <a:r>
+              <a:rPr sz="800" b="1" i="0">
+                <a:solidFill>
+                  <a:srgbClr val="00B4D8"/>
+                </a:solidFill>
+              </a:rPr>
+              <a:t>CALIBRATION · STAGE 1</a:t>
+            </a:r>
+          </a:p>
+        </p:txBody>
+      </p:sp>
+      <p:sp>
+        <p:nvSpPr>
+          <p:cNvPr id="4" name="TextBox 3"/>
+          <p:cNvSpPr txBox="1"/>
+          <p:nvPr/>
+        </p:nvSpPr>
+        <p:spPr>
+          <a:xfrm>
+            <a:off x="10972800" y="6492240"/>
+            <a:ext cx="1097280" cy="320040"/>
+          </a:xfrm>
+          <a:prstGeom prst="rect">
+            <a:avLst/>
+          </a:prstGeom>
+          <a:noFill/>
+        </p:spPr>
+        <p:txBody>
+          <a:bodyPr wrap="square">
+            <a:spAutoFit/>
+          </a:bodyPr>
+          <a:lstStyle/>
+          <a:p>
+            <a:pPr algn="r"/>
+            <a:r>
+              <a:rPr sz="900" b="0" i="0">
+                <a:solidFill>
+                  <a:srgbClr val="CAD3DF"/>
+                </a:solidFill>
+              </a:rPr>
+              <a:t>15 / 12</a:t>
+            </a:r>
+          </a:p>
+        </p:txBody>
+      </p:sp>
+      <p:sp>
+        <p:nvSpPr>
+          <p:cNvPr id="5" name="TextBox 4"/>
+          <p:cNvSpPr txBox="1"/>
+          <p:nvPr/>
+        </p:nvSpPr>
+        <p:spPr>
+          <a:xfrm>
+            <a:off x="411480" y="457200"/>
+            <a:ext cx="11430000" cy="640080"/>
+          </a:xfrm>
+          <a:prstGeom prst="rect">
+            <a:avLst/>
+          </a:prstGeom>
+          <a:noFill/>
+        </p:spPr>
+        <p:txBody>
+          <a:bodyPr wrap="square">
+            <a:spAutoFit/>
+          </a:bodyPr>
+          <a:lstStyle/>
+          <a:p>
+            <a:pPr algn="l"/>
+            <a:r>
+              <a:rPr sz="2400" b="1" i="0">
+                <a:solidFill>
+                  <a:srgbClr val="FFFFFF"/>
+                </a:solidFill>
+              </a:rPr>
+              <a:t>Stage 1 — Scalar Offset Calibration  (NVLabs ITU Materials Baseline)</a:t>
+            </a:r>
+          </a:p>
+        </p:txBody>
+      </p:sp>
+      <p:sp>
+        <p:nvSpPr>
+          <p:cNvPr id="6" name="Rectangle 5"/>
+          <p:cNvSpPr/>
+          <p:nvPr/>
+        </p:nvSpPr>
+        <p:spPr>
+          <a:xfrm>
+            <a:off x="411480" y="1078992"/>
+            <a:ext cx="11338560" cy="16459"/>
+          </a:xfrm>
+          <a:prstGeom prst="rect">
+            <a:avLst/>
+          </a:prstGeom>
+          <a:solidFill>
+            <a:srgbClr val="1E3A52"/>
+          </a:solidFill>
+          <a:ln>
+            <a:noFill/>
+          </a:ln>
+        </p:spPr>
+        <p:style>
+          <a:lnRef idx="1">
+            <a:schemeClr val="accent1"/>
+          </a:lnRef>
+          <a:fillRef idx="3">
+            <a:schemeClr val="accent1"/>
+          </a:fillRef>
+          <a:effectRef idx="2">
+            <a:schemeClr val="accent1"/>
+          </a:effectRef>
+          <a:fontRef idx="minor">
+            <a:schemeClr val="lt1"/>
+          </a:fontRef>
+        </p:style>
+        <p:txBody>
+          <a:bodyPr rtlCol="0" anchor="ctr"/>
+          <a:lstStyle/>
+          <a:p>
+            <a:pPr algn="ctr"/>
+          </a:p>
+        </p:txBody>
+      </p:sp>
+      <p:sp>
+        <p:nvSpPr>
+          <p:cNvPr id="7" name="Rectangle 6"/>
+          <p:cNvSpPr/>
+          <p:nvPr/>
+        </p:nvSpPr>
+        <p:spPr>
+          <a:xfrm>
+            <a:off x="320040" y="1234440"/>
+            <a:ext cx="5486400" cy="5212080"/>
+          </a:xfrm>
+          <a:prstGeom prst="rect">
+            <a:avLst/>
+          </a:prstGeom>
+          <a:solidFill>
+            <a:srgbClr val="112A40"/>
+          </a:solidFill>
+          <a:ln>
+            <a:noFill/>
+          </a:ln>
+        </p:spPr>
+        <p:style>
+          <a:lnRef idx="1">
+            <a:schemeClr val="accent1"/>
+          </a:lnRef>
+          <a:fillRef idx="3">
+            <a:schemeClr val="accent1"/>
+          </a:fillRef>
+          <a:effectRef idx="2">
+            <a:schemeClr val="accent1"/>
+          </a:effectRef>
+          <a:fontRef idx="minor">
+            <a:schemeClr val="lt1"/>
+          </a:fontRef>
+        </p:style>
+        <p:txBody>
+          <a:bodyPr rtlCol="0" anchor="ctr"/>
+          <a:lstStyle/>
+          <a:p>
+            <a:pPr algn="ctr"/>
+          </a:p>
+        </p:txBody>
+      </p:sp>
+      <p:sp>
+        <p:nvSpPr>
+          <p:cNvPr id="8" name="Rectangle 7"/>
+          <p:cNvSpPr/>
+          <p:nvPr/>
+        </p:nvSpPr>
+        <p:spPr>
+          <a:xfrm>
+            <a:off x="320040" y="1234440"/>
+            <a:ext cx="5486400" cy="54864"/>
+          </a:xfrm>
+          <a:prstGeom prst="rect">
+            <a:avLst/>
+          </a:prstGeom>
+          <a:solidFill>
+            <a:srgbClr val="00B4D8"/>
+          </a:solidFill>
+          <a:ln>
+            <a:noFill/>
+          </a:ln>
+        </p:spPr>
+        <p:style>
+          <a:lnRef idx="1">
+            <a:schemeClr val="accent1"/>
+          </a:lnRef>
+          <a:fillRef idx="3">
+            <a:schemeClr val="accent1"/>
+          </a:fillRef>
+          <a:effectRef idx="2">
+            <a:schemeClr val="accent1"/>
+          </a:effectRef>
+          <a:fontRef idx="minor">
+            <a:schemeClr val="lt1"/>
+          </a:fontRef>
+        </p:style>
+        <p:txBody>
+          <a:bodyPr rtlCol="0" anchor="ctr"/>
+          <a:lstStyle/>
+          <a:p>
+            <a:pPr algn="ctr"/>
+          </a:p>
+        </p:txBody>
+      </p:sp>
+      <p:sp>
+        <p:nvSpPr>
+          <p:cNvPr id="9" name="TextBox 8"/>
+          <p:cNvSpPr txBox="1"/>
+          <p:nvPr/>
+        </p:nvSpPr>
+        <p:spPr>
+          <a:xfrm>
+            <a:off x="457200" y="1371600"/>
+            <a:ext cx="5212080" cy="365760"/>
+          </a:xfrm>
+          <a:prstGeom prst="rect">
+            <a:avLst/>
+          </a:prstGeom>
+          <a:noFill/>
+        </p:spPr>
+        <p:txBody>
+          <a:bodyPr wrap="square">
+            <a:spAutoFit/>
+          </a:bodyPr>
+          <a:lstStyle/>
+          <a:p>
+            <a:pPr algn="l"/>
+            <a:r>
+              <a:rPr sz="1300" b="1" i="0">
+                <a:solidFill>
+                  <a:srgbClr val="00B4D8"/>
+                </a:solidFill>
+              </a:rPr>
+              <a:t>Method</a:t>
+            </a:r>
+          </a:p>
+        </p:txBody>
+      </p:sp>
+      <p:sp>
+        <p:nvSpPr>
+          <p:cNvPr id="10" name="Rectangle 9"/>
+          <p:cNvSpPr/>
+          <p:nvPr/>
+        </p:nvSpPr>
+        <p:spPr>
+          <a:xfrm>
+            <a:off x="457200" y="1901952"/>
+            <a:ext cx="256032" cy="256032"/>
+          </a:xfrm>
+          <a:prstGeom prst="rect">
+            <a:avLst/>
+          </a:prstGeom>
+          <a:solidFill>
+            <a:srgbClr val="00B4D8"/>
+          </a:solidFill>
+          <a:ln>
+            <a:noFill/>
+          </a:ln>
+        </p:spPr>
+        <p:style>
+          <a:lnRef idx="1">
+            <a:schemeClr val="accent1"/>
+          </a:lnRef>
+          <a:fillRef idx="3">
+            <a:schemeClr val="accent1"/>
+          </a:fillRef>
+          <a:effectRef idx="2">
+            <a:schemeClr val="accent1"/>
+          </a:effectRef>
+          <a:fontRef idx="minor">
+            <a:schemeClr val="lt1"/>
+          </a:fontRef>
+        </p:style>
+        <p:txBody>
+          <a:bodyPr rtlCol="0" anchor="ctr"/>
+          <a:lstStyle/>
+          <a:p>
+            <a:pPr algn="ctr"/>
+          </a:p>
+        </p:txBody>
+      </p:sp>
+      <p:sp>
+        <p:nvSpPr>
+          <p:cNvPr id="11" name="TextBox 10"/>
+          <p:cNvSpPr txBox="1"/>
+          <p:nvPr/>
+        </p:nvSpPr>
+        <p:spPr>
+          <a:xfrm>
+            <a:off x="457200" y="1874520"/>
+            <a:ext cx="274320" cy="274320"/>
+          </a:xfrm>
+          <a:prstGeom prst="rect">
+            <a:avLst/>
+          </a:prstGeom>
+          <a:noFill/>
+        </p:spPr>
+        <p:txBody>
+          <a:bodyPr wrap="square">
+            <a:spAutoFit/>
+          </a:bodyPr>
+          <a:lstStyle/>
+          <a:p>
+            <a:pPr algn="ctr"/>
+            <a:r>
+              <a:rPr sz="1000" b="1" i="0">
+                <a:solidFill>
+                  <a:srgbClr val="0D1B2A"/>
+                </a:solidFill>
+              </a:rPr>
+              <a:t>1</a:t>
+            </a:r>
+          </a:p>
+        </p:txBody>
+      </p:sp>
+      <p:sp>
+        <p:nvSpPr>
+          <p:cNvPr id="12" name="TextBox 11"/>
+          <p:cNvSpPr txBox="1"/>
+          <p:nvPr/>
+        </p:nvSpPr>
+        <p:spPr>
+          <a:xfrm>
+            <a:off x="822960" y="1828800"/>
+            <a:ext cx="4754880" cy="685800"/>
+          </a:xfrm>
+          <a:prstGeom prst="rect">
+            <a:avLst/>
+          </a:prstGeom>
+          <a:noFill/>
+        </p:spPr>
+        <p:txBody>
+          <a:bodyPr wrap="square">
+            <a:spAutoFit/>
+          </a:bodyPr>
+          <a:lstStyle/>
+          <a:p>
+            <a:pPr algn="l"/>
+            <a:r>
+              <a:rPr sz="1000" b="0" i="0">
+                <a:solidFill>
+                  <a:srgbClr val="CAD3DF"/>
+                </a:solidFill>
+              </a:rPr>
+              <a:t>Pre-trace all receivers once — cache RSSI
+(no gradient — offline)</a:t>
+            </a:r>
+          </a:p>
+        </p:txBody>
+      </p:sp>
+      <p:sp>
+        <p:nvSpPr>
+          <p:cNvPr id="13" name="Rectangle 12"/>
+          <p:cNvSpPr/>
+          <p:nvPr/>
+        </p:nvSpPr>
+        <p:spPr>
+          <a:xfrm>
+            <a:off x="457200" y="2724912"/>
+            <a:ext cx="256032" cy="256032"/>
+          </a:xfrm>
+          <a:prstGeom prst="rect">
+            <a:avLst/>
+          </a:prstGeom>
+          <a:solidFill>
+            <a:srgbClr val="00B4D8"/>
+          </a:solidFill>
+          <a:ln>
+            <a:noFill/>
+          </a:ln>
+        </p:spPr>
+        <p:style>
+          <a:lnRef idx="1">
+            <a:schemeClr val="accent1"/>
+          </a:lnRef>
+          <a:fillRef idx="3">
+            <a:schemeClr val="accent1"/>
+          </a:fillRef>
+          <a:effectRef idx="2">
+            <a:schemeClr val="accent1"/>
+          </a:effectRef>
+          <a:fontRef idx="minor">
+            <a:schemeClr val="lt1"/>
+          </a:fontRef>
+        </p:style>
+        <p:txBody>
+          <a:bodyPr rtlCol="0" anchor="ctr"/>
+          <a:lstStyle/>
+          <a:p>
+            <a:pPr algn="ctr"/>
+          </a:p>
+        </p:txBody>
+      </p:sp>
+      <p:sp>
+        <p:nvSpPr>
+          <p:cNvPr id="14" name="TextBox 13"/>
+          <p:cNvSpPr txBox="1"/>
+          <p:nvPr/>
+        </p:nvSpPr>
+        <p:spPr>
+          <a:xfrm>
+            <a:off x="457200" y="2697480"/>
+            <a:ext cx="274320" cy="274320"/>
+          </a:xfrm>
+          <a:prstGeom prst="rect">
+            <a:avLst/>
+          </a:prstGeom>
+          <a:noFill/>
+        </p:spPr>
+        <p:txBody>
+          <a:bodyPr wrap="square">
+            <a:spAutoFit/>
+          </a:bodyPr>
+          <a:lstStyle/>
+          <a:p>
+            <a:pPr algn="ctr"/>
+            <a:r>
+              <a:rPr sz="1000" b="1" i="0">
+                <a:solidFill>
+                  <a:srgbClr val="0D1B2A"/>
+                </a:solidFill>
+              </a:rPr>
+              <a:t>2</a:t>
+            </a:r>
+          </a:p>
+        </p:txBody>
+      </p:sp>
+      <p:sp>
+        <p:nvSpPr>
+          <p:cNvPr id="15" name="TextBox 14"/>
+          <p:cNvSpPr txBox="1"/>
+          <p:nvPr/>
+        </p:nvSpPr>
+        <p:spPr>
+          <a:xfrm>
+            <a:off x="822960" y="2651760"/>
+            <a:ext cx="4754880" cy="685800"/>
+          </a:xfrm>
+          <a:prstGeom prst="rect">
+            <a:avLst/>
+          </a:prstGeom>
+          <a:noFill/>
+        </p:spPr>
+        <p:txBody>
+          <a:bodyPr wrap="square">
+            <a:spAutoFit/>
+          </a:bodyPr>
+          <a:lstStyle/>
+          <a:p>
+            <a:pPr algn="l"/>
+            <a:r>
+              <a:rPr sz="1000" b="0" i="0">
+                <a:solidFill>
+                  <a:srgbClr val="CAD3DF"/>
+                </a:solidFill>
+              </a:rPr>
+              <a:t>Ghost path filter: remove PL_sim &gt; PL_meas_max + 10 dB
+(physically impossible multi-bounce paths)</a:t>
+            </a:r>
+          </a:p>
+        </p:txBody>
+      </p:sp>
+      <p:sp>
+        <p:nvSpPr>
+          <p:cNvPr id="16" name="Rectangle 15"/>
+          <p:cNvSpPr/>
+          <p:nvPr/>
+        </p:nvSpPr>
+        <p:spPr>
+          <a:xfrm>
+            <a:off x="457200" y="3547872"/>
+            <a:ext cx="256032" cy="256032"/>
+          </a:xfrm>
+          <a:prstGeom prst="rect">
+            <a:avLst/>
+          </a:prstGeom>
+          <a:solidFill>
+            <a:srgbClr val="00B4D8"/>
+          </a:solidFill>
+          <a:ln>
+            <a:noFill/>
+          </a:ln>
+        </p:spPr>
+        <p:style>
+          <a:lnRef idx="1">
+            <a:schemeClr val="accent1"/>
+          </a:lnRef>
+          <a:fillRef idx="3">
+            <a:schemeClr val="accent1"/>
+          </a:fillRef>
+          <a:effectRef idx="2">
+            <a:schemeClr val="accent1"/>
+          </a:effectRef>
+          <a:fontRef idx="minor">
+            <a:schemeClr val="lt1"/>
+          </a:fontRef>
+        </p:style>
+        <p:txBody>
+          <a:bodyPr rtlCol="0" anchor="ctr"/>
+          <a:lstStyle/>
+          <a:p>
+            <a:pPr algn="ctr"/>
+          </a:p>
+        </p:txBody>
+      </p:sp>
+      <p:sp>
+        <p:nvSpPr>
+          <p:cNvPr id="17" name="TextBox 16"/>
+          <p:cNvSpPr txBox="1"/>
+          <p:nvPr/>
+        </p:nvSpPr>
+        <p:spPr>
+          <a:xfrm>
+            <a:off x="457200" y="3520440"/>
+            <a:ext cx="274320" cy="274320"/>
+          </a:xfrm>
+          <a:prstGeom prst="rect">
+            <a:avLst/>
+          </a:prstGeom>
+          <a:noFill/>
+        </p:spPr>
+        <p:txBody>
+          <a:bodyPr wrap="square">
+            <a:spAutoFit/>
+          </a:bodyPr>
+          <a:lstStyle/>
+          <a:p>
+            <a:pPr algn="ctr"/>
+            <a:r>
+              <a:rPr sz="1000" b="1" i="0">
+                <a:solidFill>
+                  <a:srgbClr val="0D1B2A"/>
+                </a:solidFill>
+              </a:rPr>
+              <a:t>3</a:t>
+            </a:r>
+          </a:p>
+        </p:txBody>
+      </p:sp>
+      <p:sp>
+        <p:nvSpPr>
+          <p:cNvPr id="18" name="TextBox 17"/>
+          <p:cNvSpPr txBox="1"/>
+          <p:nvPr/>
+        </p:nvSpPr>
+        <p:spPr>
+          <a:xfrm>
+            <a:off x="822960" y="3474720"/>
+            <a:ext cx="4754880" cy="685800"/>
+          </a:xfrm>
+          <a:prstGeom prst="rect">
+            <a:avLst/>
+          </a:prstGeom>
+          <a:noFill/>
+        </p:spPr>
+        <p:txBody>
+          <a:bodyPr wrap="square">
+            <a:spAutoFit/>
+          </a:bodyPr>
+          <a:lstStyle/>
+          <a:p>
+            <a:pPr algn="l"/>
+            <a:r>
+              <a:rPr sz="1000" b="0" i="0">
+                <a:solidFill>
+                  <a:srgbClr val="CAD3DF"/>
+                </a:solidFill>
+              </a:rPr>
+              <a:t>Single trainable scalar: scaling_factor_db
+Minimise SMAPE loss on linear power (NVLabs standard)</a:t>
+            </a:r>
+          </a:p>
+        </p:txBody>
+      </p:sp>
+      <p:sp>
+        <p:nvSpPr>
+          <p:cNvPr id="19" name="Rectangle 18"/>
+          <p:cNvSpPr/>
+          <p:nvPr/>
+        </p:nvSpPr>
+        <p:spPr>
+          <a:xfrm>
+            <a:off x="457200" y="4370832"/>
+            <a:ext cx="256032" cy="256032"/>
+          </a:xfrm>
+          <a:prstGeom prst="rect">
+            <a:avLst/>
+          </a:prstGeom>
+          <a:solidFill>
+            <a:srgbClr val="00B4D8"/>
+          </a:solidFill>
+          <a:ln>
+            <a:noFill/>
+          </a:ln>
+        </p:spPr>
+        <p:style>
+          <a:lnRef idx="1">
+            <a:schemeClr val="accent1"/>
+          </a:lnRef>
+          <a:fillRef idx="3">
+            <a:schemeClr val="accent1"/>
+          </a:fillRef>
+          <a:effectRef idx="2">
+            <a:schemeClr val="accent1"/>
+          </a:effectRef>
+          <a:fontRef idx="minor">
+            <a:schemeClr val="lt1"/>
+          </a:fontRef>
+        </p:style>
+        <p:txBody>
+          <a:bodyPr rtlCol="0" anchor="ctr"/>
+          <a:lstStyle/>
+          <a:p>
+            <a:pPr algn="ctr"/>
+          </a:p>
+        </p:txBody>
+      </p:sp>
+      <p:sp>
+        <p:nvSpPr>
+          <p:cNvPr id="20" name="TextBox 19"/>
+          <p:cNvSpPr txBox="1"/>
+          <p:nvPr/>
+        </p:nvSpPr>
+        <p:spPr>
+          <a:xfrm>
+            <a:off x="457200" y="4343400"/>
+            <a:ext cx="274320" cy="274320"/>
+          </a:xfrm>
+          <a:prstGeom prst="rect">
+            <a:avLst/>
+          </a:prstGeom>
+          <a:noFill/>
+        </p:spPr>
+        <p:txBody>
+          <a:bodyPr wrap="square">
+            <a:spAutoFit/>
+          </a:bodyPr>
+          <a:lstStyle/>
+          <a:p>
+            <a:pPr algn="ctr"/>
+            <a:r>
+              <a:rPr sz="1000" b="1" i="0">
+                <a:solidFill>
+                  <a:srgbClr val="0D1B2A"/>
+                </a:solidFill>
+              </a:rPr>
+              <a:t>4</a:t>
+            </a:r>
+          </a:p>
+        </p:txBody>
+      </p:sp>
+      <p:sp>
+        <p:nvSpPr>
+          <p:cNvPr id="21" name="TextBox 20"/>
+          <p:cNvSpPr txBox="1"/>
+          <p:nvPr/>
+        </p:nvSpPr>
+        <p:spPr>
+          <a:xfrm>
+            <a:off x="822960" y="4297680"/>
+            <a:ext cx="4754880" cy="685800"/>
+          </a:xfrm>
+          <a:prstGeom prst="rect">
+            <a:avLst/>
+          </a:prstGeom>
+          <a:noFill/>
+        </p:spPr>
+        <p:txBody>
+          <a:bodyPr wrap="square">
+            <a:spAutoFit/>
+          </a:bodyPr>
+          <a:lstStyle/>
+          <a:p>
+            <a:pPr algn="l"/>
+            <a:r>
+              <a:rPr sz="1000" b="0" i="0">
+                <a:solidFill>
+                  <a:srgbClr val="CAD3DF"/>
+                </a:solidFill>
+              </a:rPr>
+              <a:t>Best-RMSE checkpoint — save scalar at lowest RMSE step
+(not SMAPE-final — prevents overshoot)</a:t>
+            </a:r>
+          </a:p>
+        </p:txBody>
+      </p:sp>
+      <p:sp>
+        <p:nvSpPr>
+          <p:cNvPr id="22" name="TextBox 21"/>
+          <p:cNvSpPr txBox="1"/>
+          <p:nvPr/>
+        </p:nvSpPr>
+        <p:spPr>
+          <a:xfrm>
+            <a:off x="457200" y="5870448"/>
+            <a:ext cx="5212080" cy="365760"/>
+          </a:xfrm>
+          <a:prstGeom prst="rect">
+            <a:avLst/>
+          </a:prstGeom>
+          <a:noFill/>
+        </p:spPr>
+        <p:txBody>
+          <a:bodyPr wrap="square">
+            <a:spAutoFit/>
+          </a:bodyPr>
+          <a:lstStyle/>
+          <a:p>
+            <a:pPr algn="l"/>
+            <a:r>
+              <a:rPr sz="950" b="0" i="1">
+                <a:solidFill>
+                  <a:srgbClr val="1E3A52"/>
+                </a:solidFill>
+              </a:rPr>
+              <a:t>Reference: Hoydis et al. 2023 (arXiv:2311.18558) — ITU Materials scalar baseline</a:t>
+            </a:r>
+          </a:p>
+        </p:txBody>
+      </p:sp>
+      <p:sp>
+        <p:nvSpPr>
+          <p:cNvPr id="23" name="Rectangle 22"/>
+          <p:cNvSpPr/>
+          <p:nvPr/>
+        </p:nvSpPr>
+        <p:spPr>
+          <a:xfrm>
+            <a:off x="5943600" y="1234440"/>
+            <a:ext cx="5943600" cy="5212080"/>
+          </a:xfrm>
+          <a:prstGeom prst="rect">
+            <a:avLst/>
+          </a:prstGeom>
+          <a:solidFill>
+            <a:srgbClr val="112A40"/>
+          </a:solidFill>
+          <a:ln>
+            <a:noFill/>
+          </a:ln>
+        </p:spPr>
+        <p:style>
+          <a:lnRef idx="1">
+            <a:schemeClr val="accent1"/>
+          </a:lnRef>
+          <a:fillRef idx="3">
+            <a:schemeClr val="accent1"/>
+          </a:fillRef>
+          <a:effectRef idx="2">
+            <a:schemeClr val="accent1"/>
+          </a:effectRef>
+          <a:fontRef idx="minor">
+            <a:schemeClr val="lt1"/>
+          </a:fontRef>
+        </p:style>
+        <p:txBody>
+          <a:bodyPr rtlCol="0" anchor="ctr"/>
+          <a:lstStyle/>
+          <a:p>
+            <a:pPr algn="ctr"/>
+          </a:p>
+        </p:txBody>
+      </p:sp>
+      <p:sp>
+        <p:nvSpPr>
+          <p:cNvPr id="24" name="Rectangle 23"/>
+          <p:cNvSpPr/>
+          <p:nvPr/>
+        </p:nvSpPr>
+        <p:spPr>
+          <a:xfrm>
+            <a:off x="5943600" y="1234440"/>
+            <a:ext cx="5943600" cy="54864"/>
+          </a:xfrm>
+          <a:prstGeom prst="rect">
+            <a:avLst/>
+          </a:prstGeom>
+          <a:solidFill>
+            <a:srgbClr val="2DCB7F"/>
+          </a:solidFill>
+          <a:ln>
+            <a:noFill/>
+          </a:ln>
+        </p:spPr>
+        <p:style>
+          <a:lnRef idx="1">
+            <a:schemeClr val="accent1"/>
+          </a:lnRef>
+          <a:fillRef idx="3">
+            <a:schemeClr val="accent1"/>
+          </a:fillRef>
+          <a:effectRef idx="2">
+            <a:schemeClr val="accent1"/>
+          </a:effectRef>
+          <a:fontRef idx="minor">
+            <a:schemeClr val="lt1"/>
+          </a:fontRef>
+        </p:style>
+        <p:txBody>
+          <a:bodyPr rtlCol="0" anchor="ctr"/>
+          <a:lstStyle/>
+          <a:p>
+            <a:pPr algn="ctr"/>
+          </a:p>
+        </p:txBody>
+      </p:sp>
+      <p:sp>
+        <p:nvSpPr>
+          <p:cNvPr id="25" name="TextBox 24"/>
+          <p:cNvSpPr txBox="1"/>
+          <p:nvPr/>
+        </p:nvSpPr>
+        <p:spPr>
+          <a:xfrm>
+            <a:off x="6080760" y="1371600"/>
+            <a:ext cx="5669280" cy="365760"/>
+          </a:xfrm>
+          <a:prstGeom prst="rect">
+            <a:avLst/>
+          </a:prstGeom>
+          <a:noFill/>
+        </p:spPr>
+        <p:txBody>
+          <a:bodyPr wrap="square">
+            <a:spAutoFit/>
+          </a:bodyPr>
+          <a:lstStyle/>
+          <a:p>
+            <a:pPr algn="l"/>
+            <a:r>
+              <a:rPr sz="1300" b="1" i="0">
+                <a:solidFill>
+                  <a:srgbClr val="2DCB7F"/>
+                </a:solidFill>
+              </a:rPr>
+              <a:t>Results</a:t>
+            </a:r>
+          </a:p>
+        </p:txBody>
+      </p:sp>
+      <p:sp>
+        <p:nvSpPr>
+          <p:cNvPr id="26" name="TextBox 25"/>
+          <p:cNvSpPr txBox="1"/>
+          <p:nvPr/>
+        </p:nvSpPr>
+        <p:spPr>
+          <a:xfrm>
+            <a:off x="6080760" y="1874519"/>
+            <a:ext cx="3017520" cy="384048"/>
+          </a:xfrm>
+          <a:prstGeom prst="rect">
+            <a:avLst/>
+          </a:prstGeom>
+          <a:noFill/>
+        </p:spPr>
+        <p:txBody>
+          <a:bodyPr wrap="square">
+            <a:spAutoFit/>
+          </a:bodyPr>
+          <a:lstStyle/>
+          <a:p>
+            <a:pPr algn="l"/>
+            <a:r>
+              <a:rPr sz="1000" b="0" i="0">
+                <a:solidFill>
+                  <a:srgbClr val="90E0EF"/>
+                </a:solidFill>
+              </a:rPr>
+              <a:t>Receivers solved</a:t>
+            </a:r>
+          </a:p>
+        </p:txBody>
+      </p:sp>
+      <p:sp>
+        <p:nvSpPr>
+          <p:cNvPr id="27" name="TextBox 26"/>
+          <p:cNvSpPr txBox="1"/>
+          <p:nvPr/>
+        </p:nvSpPr>
+        <p:spPr>
+          <a:xfrm>
+            <a:off x="9098280" y="1874519"/>
+            <a:ext cx="2651760" cy="384048"/>
+          </a:xfrm>
+          <a:prstGeom prst="rect">
+            <a:avLst/>
+          </a:prstGeom>
+          <a:noFill/>
+        </p:spPr>
+        <p:txBody>
+          <a:bodyPr wrap="square">
+            <a:spAutoFit/>
+          </a:bodyPr>
+          <a:lstStyle/>
+          <a:p>
+            <a:pPr algn="l"/>
+            <a:r>
+              <a:rPr sz="1000" b="0" i="0">
+                <a:solidFill>
+                  <a:srgbClr val="FFFFFF"/>
+                </a:solidFill>
+              </a:rPr>
+              <a:t>383 / 1140  (34%)</a:t>
+            </a:r>
+          </a:p>
+        </p:txBody>
+      </p:sp>
+      <p:sp>
+        <p:nvSpPr>
+          <p:cNvPr id="28" name="TextBox 27"/>
+          <p:cNvSpPr txBox="1"/>
+          <p:nvPr/>
+        </p:nvSpPr>
+        <p:spPr>
+          <a:xfrm>
+            <a:off x="6080760" y="2404871"/>
+            <a:ext cx="3017520" cy="384048"/>
+          </a:xfrm>
+          <a:prstGeom prst="rect">
+            <a:avLst/>
+          </a:prstGeom>
+          <a:noFill/>
+        </p:spPr>
+        <p:txBody>
+          <a:bodyPr wrap="square">
+            <a:spAutoFit/>
+          </a:bodyPr>
+          <a:lstStyle/>
+          <a:p>
+            <a:pPr algn="l"/>
+            <a:r>
+              <a:rPr sz="1000" b="0" i="0">
+                <a:solidFill>
+                  <a:srgbClr val="90E0EF"/>
+                </a:solidFill>
+              </a:rPr>
+              <a:t>Valid pairs after filter</a:t>
+            </a:r>
+          </a:p>
+        </p:txBody>
+      </p:sp>
+      <p:sp>
+        <p:nvSpPr>
+          <p:cNvPr id="29" name="TextBox 28"/>
+          <p:cNvSpPr txBox="1"/>
+          <p:nvPr/>
+        </p:nvSpPr>
+        <p:spPr>
+          <a:xfrm>
+            <a:off x="9098280" y="2404871"/>
+            <a:ext cx="2651760" cy="384048"/>
+          </a:xfrm>
+          <a:prstGeom prst="rect">
+            <a:avLst/>
+          </a:prstGeom>
+          <a:noFill/>
+        </p:spPr>
+        <p:txBody>
+          <a:bodyPr wrap="square">
+            <a:spAutoFit/>
+          </a:bodyPr>
+          <a:lstStyle/>
+          <a:p>
+            <a:pPr algn="l"/>
+            <a:r>
+              <a:rPr sz="1000" b="0" i="0">
+                <a:solidFill>
+                  <a:srgbClr val="FFFFFF"/>
+                </a:solidFill>
+              </a:rPr>
+              <a:t>218</a:t>
+            </a:r>
+          </a:p>
+        </p:txBody>
+      </p:sp>
+      <p:sp>
+        <p:nvSpPr>
+          <p:cNvPr id="30" name="TextBox 29"/>
+          <p:cNvSpPr txBox="1"/>
+          <p:nvPr/>
+        </p:nvSpPr>
+        <p:spPr>
+          <a:xfrm>
+            <a:off x="6080760" y="2935223"/>
+            <a:ext cx="3017520" cy="384048"/>
+          </a:xfrm>
+          <a:prstGeom prst="rect">
+            <a:avLst/>
+          </a:prstGeom>
+          <a:noFill/>
+        </p:spPr>
+        <p:txBody>
+          <a:bodyPr wrap="square">
+            <a:spAutoFit/>
+          </a:bodyPr>
+          <a:lstStyle/>
+          <a:p>
+            <a:pPr algn="l"/>
+            <a:r>
+              <a:rPr sz="1000" b="0" i="0">
+                <a:solidFill>
+                  <a:srgbClr val="90E0EF"/>
+                </a:solidFill>
+              </a:rPr>
+              <a:t>Ghost paths removed</a:t>
+            </a:r>
+          </a:p>
+        </p:txBody>
+      </p:sp>
+      <p:sp>
+        <p:nvSpPr>
+          <p:cNvPr id="31" name="TextBox 30"/>
+          <p:cNvSpPr txBox="1"/>
+          <p:nvPr/>
+        </p:nvSpPr>
+        <p:spPr>
+          <a:xfrm>
+            <a:off x="9098280" y="2935223"/>
+            <a:ext cx="2651760" cy="384048"/>
+          </a:xfrm>
+          <a:prstGeom prst="rect">
+            <a:avLst/>
+          </a:prstGeom>
+          <a:noFill/>
+        </p:spPr>
+        <p:txBody>
+          <a:bodyPr wrap="square">
+            <a:spAutoFit/>
+          </a:bodyPr>
+          <a:lstStyle/>
+          <a:p>
+            <a:pPr algn="l"/>
+            <a:r>
+              <a:rPr sz="1000" b="0" i="0">
+                <a:solidFill>
+                  <a:srgbClr val="FFFFFF"/>
+                </a:solidFill>
+              </a:rPr>
+              <a:t>165  (PL &gt; 154.4 dB)</a:t>
+            </a:r>
+          </a:p>
+        </p:txBody>
+      </p:sp>
+      <p:sp>
+        <p:nvSpPr>
+          <p:cNvPr id="32" name="TextBox 31"/>
+          <p:cNvSpPr txBox="1"/>
+          <p:nvPr/>
+        </p:nvSpPr>
+        <p:spPr>
+          <a:xfrm>
+            <a:off x="6080760" y="3465575"/>
+            <a:ext cx="3017520" cy="384048"/>
+          </a:xfrm>
+          <a:prstGeom prst="rect">
+            <a:avLst/>
+          </a:prstGeom>
+          <a:noFill/>
+        </p:spPr>
+        <p:txBody>
+          <a:bodyPr wrap="square">
+            <a:spAutoFit/>
+          </a:bodyPr>
+          <a:lstStyle/>
+          <a:p>
+            <a:pPr algn="l"/>
+            <a:r>
+              <a:rPr sz="1100" b="1" i="0">
+                <a:solidFill>
+                  <a:srgbClr val="90E0EF"/>
+                </a:solidFill>
+              </a:rPr>
+              <a:t>Pre-calibration RMSE</a:t>
+            </a:r>
+          </a:p>
+        </p:txBody>
+      </p:sp>
+      <p:sp>
+        <p:nvSpPr>
+          <p:cNvPr id="33" name="TextBox 32"/>
+          <p:cNvSpPr txBox="1"/>
+          <p:nvPr/>
+        </p:nvSpPr>
+        <p:spPr>
+          <a:xfrm>
+            <a:off x="9098280" y="3465575"/>
+            <a:ext cx="2651760" cy="384048"/>
+          </a:xfrm>
+          <a:prstGeom prst="rect">
+            <a:avLst/>
+          </a:prstGeom>
+          <a:noFill/>
+        </p:spPr>
+        <p:txBody>
+          <a:bodyPr wrap="square">
+            <a:spAutoFit/>
+          </a:bodyPr>
+          <a:lstStyle/>
+          <a:p>
+            <a:pPr algn="l"/>
+            <a:r>
+              <a:rPr sz="1300" b="1" i="0">
+                <a:solidFill>
+                  <a:srgbClr val="2DCB7F"/>
+                </a:solidFill>
+              </a:rPr>
+              <a:t>14.12 dB  ✅</a:t>
+            </a:r>
+          </a:p>
+        </p:txBody>
+      </p:sp>
+      <p:sp>
+        <p:nvSpPr>
+          <p:cNvPr id="34" name="TextBox 33"/>
+          <p:cNvSpPr txBox="1"/>
+          <p:nvPr/>
+        </p:nvSpPr>
+        <p:spPr>
+          <a:xfrm>
+            <a:off x="6080760" y="3995927"/>
+            <a:ext cx="3017520" cy="384048"/>
+          </a:xfrm>
+          <a:prstGeom prst="rect">
+            <a:avLst/>
+          </a:prstGeom>
+          <a:noFill/>
+        </p:spPr>
+        <p:txBody>
+          <a:bodyPr wrap="square">
+            <a:spAutoFit/>
+          </a:bodyPr>
+          <a:lstStyle/>
+          <a:p>
+            <a:pPr algn="l"/>
+            <a:r>
+              <a:rPr sz="1000" b="0" i="0">
+                <a:solidFill>
+                  <a:srgbClr val="90E0EF"/>
+                </a:solidFill>
+              </a:rPr>
+              <a:t>Best-RMSE scalar</a:t>
+            </a:r>
+          </a:p>
+        </p:txBody>
+      </p:sp>
+      <p:sp>
+        <p:nvSpPr>
+          <p:cNvPr id="35" name="TextBox 34"/>
+          <p:cNvSpPr txBox="1"/>
+          <p:nvPr/>
+        </p:nvSpPr>
+        <p:spPr>
+          <a:xfrm>
+            <a:off x="9098280" y="3995927"/>
+            <a:ext cx="2651760" cy="384048"/>
+          </a:xfrm>
+          <a:prstGeom prst="rect">
+            <a:avLst/>
+          </a:prstGeom>
+          <a:noFill/>
+        </p:spPr>
+        <p:txBody>
+          <a:bodyPr wrap="square">
+            <a:spAutoFit/>
+          </a:bodyPr>
+          <a:lstStyle/>
+          <a:p>
+            <a:pPr algn="l"/>
+            <a:r>
+              <a:rPr sz="1000" b="0" i="0">
+                <a:solidFill>
+                  <a:srgbClr val="FFFFFF"/>
+                </a:solidFill>
+              </a:rPr>
+              <a:t>−0.50 dB  (≈ 0)</a:t>
+            </a:r>
+          </a:p>
+        </p:txBody>
+      </p:sp>
+      <p:sp>
+        <p:nvSpPr>
+          <p:cNvPr id="36" name="TextBox 35"/>
+          <p:cNvSpPr txBox="1"/>
+          <p:nvPr/>
+        </p:nvSpPr>
+        <p:spPr>
+          <a:xfrm>
+            <a:off x="6080760" y="4526279"/>
+            <a:ext cx="3017520" cy="384048"/>
+          </a:xfrm>
+          <a:prstGeom prst="rect">
+            <a:avLst/>
+          </a:prstGeom>
+          <a:noFill/>
+        </p:spPr>
+        <p:txBody>
+          <a:bodyPr wrap="square">
+            <a:spAutoFit/>
+          </a:bodyPr>
+          <a:lstStyle/>
+          <a:p>
+            <a:pPr algn="l"/>
+            <a:r>
+              <a:rPr sz="1000" b="0" i="0">
+                <a:solidFill>
+                  <a:srgbClr val="90E0EF"/>
+                </a:solidFill>
+              </a:rPr>
+              <a:t>Post-calibration RMSE</a:t>
+            </a:r>
+          </a:p>
+        </p:txBody>
+      </p:sp>
+      <p:sp>
+        <p:nvSpPr>
+          <p:cNvPr id="37" name="TextBox 36"/>
+          <p:cNvSpPr txBox="1"/>
+          <p:nvPr/>
+        </p:nvSpPr>
+        <p:spPr>
+          <a:xfrm>
+            <a:off x="9098280" y="4526279"/>
+            <a:ext cx="2651760" cy="384048"/>
+          </a:xfrm>
+          <a:prstGeom prst="rect">
+            <a:avLst/>
+          </a:prstGeom>
+          <a:noFill/>
+        </p:spPr>
+        <p:txBody>
+          <a:bodyPr wrap="square">
+            <a:spAutoFit/>
+          </a:bodyPr>
+          <a:lstStyle/>
+          <a:p>
+            <a:pPr algn="l"/>
+            <a:r>
+              <a:rPr sz="1000" b="0" i="0">
+                <a:solidFill>
+                  <a:srgbClr val="FFFFFF"/>
+                </a:solidFill>
+              </a:rPr>
+              <a:t>14.43 dB</a:t>
+            </a:r>
+          </a:p>
+        </p:txBody>
+      </p:sp>
+      <p:sp>
+        <p:nvSpPr>
+          <p:cNvPr id="38" name="TextBox 37"/>
+          <p:cNvSpPr txBox="1"/>
+          <p:nvPr/>
+        </p:nvSpPr>
+        <p:spPr>
+          <a:xfrm>
+            <a:off x="6080760" y="5056631"/>
+            <a:ext cx="3017520" cy="384048"/>
+          </a:xfrm>
+          <a:prstGeom prst="rect">
+            <a:avLst/>
+          </a:prstGeom>
+          <a:noFill/>
+        </p:spPr>
+        <p:txBody>
+          <a:bodyPr wrap="square">
+            <a:spAutoFit/>
+          </a:bodyPr>
+          <a:lstStyle/>
+          <a:p>
+            <a:pPr algn="l"/>
+            <a:r>
+              <a:rPr sz="1000" b="0" i="0">
+                <a:solidFill>
+                  <a:srgbClr val="90E0EF"/>
+                </a:solidFill>
+              </a:rPr>
+              <a:t>RMSE improvement</a:t>
+            </a:r>
+          </a:p>
+        </p:txBody>
+      </p:sp>
+      <p:sp>
+        <p:nvSpPr>
+          <p:cNvPr id="39" name="TextBox 38"/>
+          <p:cNvSpPr txBox="1"/>
+          <p:nvPr/>
+        </p:nvSpPr>
+        <p:spPr>
+          <a:xfrm>
+            <a:off x="9098280" y="5056631"/>
+            <a:ext cx="2651760" cy="384048"/>
+          </a:xfrm>
+          <a:prstGeom prst="rect">
+            <a:avLst/>
+          </a:prstGeom>
+          <a:noFill/>
+        </p:spPr>
+        <p:txBody>
+          <a:bodyPr wrap="square">
+            <a:spAutoFit/>
+          </a:bodyPr>
+          <a:lstStyle/>
+          <a:p>
+            <a:pPr algn="l"/>
+            <a:r>
+              <a:rPr sz="1000" b="0" i="0">
+                <a:solidFill>
+                  <a:srgbClr val="FFFFFF"/>
+                </a:solidFill>
+              </a:rPr>
+              <a:t>−0.31 dB</a:t>
+            </a:r>
+          </a:p>
+        </p:txBody>
+      </p:sp>
+      <p:sp>
+        <p:nvSpPr>
+          <p:cNvPr id="40" name="Rectangle 39"/>
+          <p:cNvSpPr/>
+          <p:nvPr/>
+        </p:nvSpPr>
+        <p:spPr>
+          <a:xfrm>
+            <a:off x="5943600" y="5532120"/>
+            <a:ext cx="5943600" cy="868680"/>
+          </a:xfrm>
+          <a:prstGeom prst="rect">
+            <a:avLst/>
+          </a:prstGeom>
+          <a:solidFill>
+            <a:srgbClr val="112A40"/>
+          </a:solidFill>
+          <a:ln>
+            <a:noFill/>
+          </a:ln>
+        </p:spPr>
+        <p:style>
+          <a:lnRef idx="1">
+            <a:schemeClr val="accent1"/>
+          </a:lnRef>
+          <a:fillRef idx="3">
+            <a:schemeClr val="accent1"/>
+          </a:fillRef>
+          <a:effectRef idx="2">
+            <a:schemeClr val="accent1"/>
+          </a:effectRef>
+          <a:fontRef idx="minor">
+            <a:schemeClr val="lt1"/>
+          </a:fontRef>
+        </p:style>
+        <p:txBody>
+          <a:bodyPr rtlCol="0" anchor="ctr"/>
+          <a:lstStyle/>
+          <a:p>
+            <a:pPr algn="ctr"/>
+          </a:p>
+        </p:txBody>
+      </p:sp>
+      <p:sp>
+        <p:nvSpPr>
+          <p:cNvPr id="41" name="Rectangle 40"/>
+          <p:cNvSpPr/>
+          <p:nvPr/>
+        </p:nvSpPr>
+        <p:spPr>
+          <a:xfrm>
+            <a:off x="5943600" y="5532120"/>
+            <a:ext cx="5943600" cy="45720"/>
+          </a:xfrm>
+          <a:prstGeom prst="rect">
+            <a:avLst/>
+          </a:prstGeom>
+          <a:solidFill>
+            <a:srgbClr val="00B4D8"/>
+          </a:solidFill>
+          <a:ln>
+            <a:noFill/>
+          </a:ln>
+        </p:spPr>
+        <p:style>
+          <a:lnRef idx="1">
+            <a:schemeClr val="accent1"/>
+          </a:lnRef>
+          <a:fillRef idx="3">
+            <a:schemeClr val="accent1"/>
+          </a:fillRef>
+          <a:effectRef idx="2">
+            <a:schemeClr val="accent1"/>
+          </a:effectRef>
+          <a:fontRef idx="minor">
+            <a:schemeClr val="lt1"/>
+          </a:fontRef>
+        </p:style>
+        <p:txBody>
+          <a:bodyPr rtlCol="0" anchor="ctr"/>
+          <a:lstStyle/>
+          <a:p>
+            <a:pPr algn="ctr"/>
+          </a:p>
+        </p:txBody>
+      </p:sp>
+      <p:sp>
+        <p:nvSpPr>
+          <p:cNvPr id="42" name="TextBox 41"/>
+          <p:cNvSpPr txBox="1"/>
+          <p:nvPr/>
+        </p:nvSpPr>
+        <p:spPr>
+          <a:xfrm>
+            <a:off x="6080760" y="5623560"/>
+            <a:ext cx="5669280" cy="685800"/>
+          </a:xfrm>
+          <a:prstGeom prst="rect">
+            <a:avLst/>
+          </a:prstGeom>
+          <a:noFill/>
+        </p:spPr>
+        <p:txBody>
+          <a:bodyPr wrap="square">
+            <a:spAutoFit/>
+          </a:bodyPr>
+          <a:lstStyle/>
+          <a:p>
+            <a:pPr algn="l"/>
+            <a:r>
+              <a:rPr sz="1000" b="0" i="0">
+                <a:solidFill>
+                  <a:srgbClr val="FFFFFF"/>
+                </a:solidFill>
+              </a:rPr>
+              <a:t>Best scalar ≈ 0 dB — scene_v2_infra + DEM is already
+physically well-calibrated. Scalar stage validates, not corrects.</a:t>
+            </a:r>
+          </a:p>
+        </p:txBody>
+      </p:sp>
+    </p:spTree>
+  </p:cSld>
+  <p:clrMapOvr>
+    <a:masterClrMapping/>
+  </p:clrMapOvr>
+</p:sld>
+</file>
+
+<file path=ppt/slides/slide16.xml><?xml version="1.0" encoding="utf-8"?>
+<p:sld xmlns:a="http://schemas.openxmlformats.org/drawingml/2006/main" xmlns:p="http://schemas.openxmlformats.org/presentationml/2006/main" xmlns:r="http://schemas.openxmlformats.org/officeDocument/2006/relationships">
+  <p:cSld>
+    <p:bg>
+      <p:bgPr>
+        <a:solidFill>
+          <a:srgbClr val="0D1B2A"/>
+        </a:solidFill>
+        <a:effectLst/>
+      </p:bgPr>
+    </p:bg>
+    <p:spTree>
+      <p:nvGrpSpPr>
+        <p:cNvPr id="1" name=""/>
+        <p:cNvGrpSpPr/>
+        <p:nvPr/>
+      </p:nvGrpSpPr>
+      <p:grpSpPr/>
+      <p:sp>
+        <p:nvSpPr>
+          <p:cNvPr id="2" name="Rectangle 1"/>
+          <p:cNvSpPr/>
+          <p:nvPr/>
+        </p:nvSpPr>
+        <p:spPr>
+          <a:xfrm>
+            <a:off x="0" y="73152"/>
+            <a:ext cx="12188952" cy="54864"/>
+          </a:xfrm>
+          <a:prstGeom prst="rect">
+            <a:avLst/>
+          </a:prstGeom>
+          <a:solidFill>
+            <a:srgbClr val="00B4D8"/>
+          </a:solidFill>
+          <a:ln>
+            <a:noFill/>
+          </a:ln>
+        </p:spPr>
+        <p:style>
+          <a:lnRef idx="1">
+            <a:schemeClr val="accent1"/>
+          </a:lnRef>
+          <a:fillRef idx="3">
+            <a:schemeClr val="accent1"/>
+          </a:fillRef>
+          <a:effectRef idx="2">
+            <a:schemeClr val="accent1"/>
+          </a:effectRef>
+          <a:fontRef idx="minor">
+            <a:schemeClr val="lt1"/>
+          </a:fontRef>
+        </p:style>
+        <p:txBody>
+          <a:bodyPr rtlCol="0" anchor="ctr"/>
+          <a:lstStyle/>
+          <a:p>
+            <a:pPr algn="ctr"/>
+          </a:p>
+        </p:txBody>
+      </p:sp>
+      <p:sp>
+        <p:nvSpPr>
+          <p:cNvPr id="3" name="TextBox 2"/>
+          <p:cNvSpPr txBox="1"/>
+          <p:nvPr/>
+        </p:nvSpPr>
+        <p:spPr>
+          <a:xfrm>
+            <a:off x="320040" y="201168"/>
+            <a:ext cx="3657600" cy="256032"/>
+          </a:xfrm>
+          <a:prstGeom prst="rect">
+            <a:avLst/>
+          </a:prstGeom>
+          <a:noFill/>
+        </p:spPr>
+        <p:txBody>
+          <a:bodyPr wrap="square">
+            <a:spAutoFit/>
+          </a:bodyPr>
+          <a:lstStyle/>
+          <a:p>
+            <a:pPr algn="l"/>
+            <a:r>
+              <a:rPr sz="800" b="1" i="0">
+                <a:solidFill>
+                  <a:srgbClr val="00B4D8"/>
+                </a:solidFill>
+              </a:rPr>
+              <a:t>CALIBRATION · STAGE 2</a:t>
+            </a:r>
+          </a:p>
+        </p:txBody>
+      </p:sp>
+      <p:sp>
+        <p:nvSpPr>
+          <p:cNvPr id="4" name="TextBox 3"/>
+          <p:cNvSpPr txBox="1"/>
+          <p:nvPr/>
+        </p:nvSpPr>
+        <p:spPr>
+          <a:xfrm>
+            <a:off x="10972800" y="6492240"/>
+            <a:ext cx="1097280" cy="320040"/>
+          </a:xfrm>
+          <a:prstGeom prst="rect">
+            <a:avLst/>
+          </a:prstGeom>
+          <a:noFill/>
+        </p:spPr>
+        <p:txBody>
+          <a:bodyPr wrap="square">
+            <a:spAutoFit/>
+          </a:bodyPr>
+          <a:lstStyle/>
+          <a:p>
+            <a:pPr algn="r"/>
+            <a:r>
+              <a:rPr sz="900" b="0" i="0">
+                <a:solidFill>
+                  <a:srgbClr val="CAD3DF"/>
+                </a:solidFill>
+              </a:rPr>
+              <a:t>16 / 12</a:t>
+            </a:r>
+          </a:p>
+        </p:txBody>
+      </p:sp>
+      <p:sp>
+        <p:nvSpPr>
+          <p:cNvPr id="5" name="TextBox 4"/>
+          <p:cNvSpPr txBox="1"/>
+          <p:nvPr/>
+        </p:nvSpPr>
+        <p:spPr>
+          <a:xfrm>
+            <a:off x="411480" y="457200"/>
+            <a:ext cx="11430000" cy="640080"/>
+          </a:xfrm>
+          <a:prstGeom prst="rect">
+            <a:avLst/>
+          </a:prstGeom>
+          <a:noFill/>
+        </p:spPr>
+        <p:txBody>
+          <a:bodyPr wrap="square">
+            <a:spAutoFit/>
+          </a:bodyPr>
+          <a:lstStyle/>
+          <a:p>
+            <a:pPr algn="l"/>
+            <a:r>
+              <a:rPr sz="2400" b="1" i="0">
+                <a:solidFill>
+                  <a:srgbClr val="FFFFFF"/>
+                </a:solidFill>
+              </a:rPr>
+              <a:t>Stage 2 — Differentiable Material Calibration  (Full NVLabs)</a:t>
+            </a:r>
+          </a:p>
+        </p:txBody>
+      </p:sp>
+      <p:sp>
+        <p:nvSpPr>
+          <p:cNvPr id="6" name="Rectangle 5"/>
+          <p:cNvSpPr/>
+          <p:nvPr/>
+        </p:nvSpPr>
+        <p:spPr>
+          <a:xfrm>
+            <a:off x="411480" y="1078992"/>
+            <a:ext cx="11338560" cy="16459"/>
+          </a:xfrm>
+          <a:prstGeom prst="rect">
+            <a:avLst/>
+          </a:prstGeom>
+          <a:solidFill>
+            <a:srgbClr val="1E3A52"/>
+          </a:solidFill>
+          <a:ln>
+            <a:noFill/>
+          </a:ln>
+        </p:spPr>
+        <p:style>
+          <a:lnRef idx="1">
+            <a:schemeClr val="accent1"/>
+          </a:lnRef>
+          <a:fillRef idx="3">
+            <a:schemeClr val="accent1"/>
+          </a:fillRef>
+          <a:effectRef idx="2">
+            <a:schemeClr val="accent1"/>
+          </a:effectRef>
+          <a:fontRef idx="minor">
+            <a:schemeClr val="lt1"/>
+          </a:fontRef>
+        </p:style>
+        <p:txBody>
+          <a:bodyPr rtlCol="0" anchor="ctr"/>
+          <a:lstStyle/>
+          <a:p>
+            <a:pPr algn="ctr"/>
+          </a:p>
+        </p:txBody>
+      </p:sp>
+      <p:sp>
+        <p:nvSpPr>
+          <p:cNvPr id="7" name="Rectangle 6"/>
+          <p:cNvSpPr/>
+          <p:nvPr/>
+        </p:nvSpPr>
+        <p:spPr>
+          <a:xfrm>
+            <a:off x="320040" y="1234440"/>
+            <a:ext cx="5029200" cy="5212080"/>
+          </a:xfrm>
+          <a:prstGeom prst="rect">
+            <a:avLst/>
+          </a:prstGeom>
+          <a:solidFill>
+            <a:srgbClr val="112A40"/>
+          </a:solidFill>
+          <a:ln>
+            <a:noFill/>
+          </a:ln>
+        </p:spPr>
+        <p:style>
+          <a:lnRef idx="1">
+            <a:schemeClr val="accent1"/>
+          </a:lnRef>
+          <a:fillRef idx="3">
+            <a:schemeClr val="accent1"/>
+          </a:fillRef>
+          <a:effectRef idx="2">
+            <a:schemeClr val="accent1"/>
+          </a:effectRef>
+          <a:fontRef idx="minor">
+            <a:schemeClr val="lt1"/>
+          </a:fontRef>
+        </p:style>
+        <p:txBody>
+          <a:bodyPr rtlCol="0" anchor="ctr"/>
+          <a:lstStyle/>
+          <a:p>
+            <a:pPr algn="ctr"/>
+          </a:p>
+        </p:txBody>
+      </p:sp>
+      <p:sp>
+        <p:nvSpPr>
+          <p:cNvPr id="8" name="Rectangle 7"/>
+          <p:cNvSpPr/>
+          <p:nvPr/>
+        </p:nvSpPr>
+        <p:spPr>
+          <a:xfrm>
+            <a:off x="320040" y="1234440"/>
+            <a:ext cx="5029200" cy="54864"/>
+          </a:xfrm>
+          <a:prstGeom prst="rect">
+            <a:avLst/>
+          </a:prstGeom>
+          <a:solidFill>
+            <a:srgbClr val="FF9F1C"/>
+          </a:solidFill>
+          <a:ln>
+            <a:noFill/>
+          </a:ln>
+        </p:spPr>
+        <p:style>
+          <a:lnRef idx="1">
+            <a:schemeClr val="accent1"/>
+          </a:lnRef>
+          <a:fillRef idx="3">
+            <a:schemeClr val="accent1"/>
+          </a:fillRef>
+          <a:effectRef idx="2">
+            <a:schemeClr val="accent1"/>
+          </a:effectRef>
+          <a:fontRef idx="minor">
+            <a:schemeClr val="lt1"/>
+          </a:fontRef>
+        </p:style>
+        <p:txBody>
+          <a:bodyPr rtlCol="0" anchor="ctr"/>
+          <a:lstStyle/>
+          <a:p>
+            <a:pPr algn="ctr"/>
+          </a:p>
+        </p:txBody>
+      </p:sp>
+      <p:sp>
+        <p:nvSpPr>
+          <p:cNvPr id="9" name="TextBox 8"/>
+          <p:cNvSpPr txBox="1"/>
+          <p:nvPr/>
+        </p:nvSpPr>
+        <p:spPr>
+          <a:xfrm>
+            <a:off x="457200" y="1371600"/>
+            <a:ext cx="4754880" cy="365760"/>
+          </a:xfrm>
+          <a:prstGeom prst="rect">
+            <a:avLst/>
+          </a:prstGeom>
+          <a:noFill/>
+        </p:spPr>
+        <p:txBody>
+          <a:bodyPr wrap="square">
+            <a:spAutoFit/>
+          </a:bodyPr>
+          <a:lstStyle/>
+          <a:p>
+            <a:pPr algn="l"/>
+            <a:r>
+              <a:rPr sz="1300" b="1" i="0">
+                <a:solidFill>
+                  <a:srgbClr val="FF9F1C"/>
+                </a:solidFill>
+              </a:rPr>
+              <a:t>Method</a:t>
+            </a:r>
+          </a:p>
+        </p:txBody>
+      </p:sp>
+      <p:sp>
+        <p:nvSpPr>
+          <p:cNvPr id="10" name="TextBox 9"/>
+          <p:cNvSpPr txBox="1"/>
+          <p:nvPr/>
+        </p:nvSpPr>
+        <p:spPr>
+          <a:xfrm>
+            <a:off x="457200" y="1828800"/>
+            <a:ext cx="1737360" cy="502920"/>
+          </a:xfrm>
+          <a:prstGeom prst="rect">
+            <a:avLst/>
+          </a:prstGeom>
+          <a:noFill/>
+        </p:spPr>
+        <p:txBody>
+          <a:bodyPr wrap="square">
+            <a:spAutoFit/>
+          </a:bodyPr>
+          <a:lstStyle/>
+          <a:p>
+            <a:pPr algn="l"/>
+            <a:r>
+              <a:rPr sz="1000" b="1" i="0">
+                <a:solidFill>
+                  <a:srgbClr val="90E0EF"/>
+                </a:solidFill>
+              </a:rPr>
+              <a:t>Trainable params</a:t>
+            </a:r>
+          </a:p>
+        </p:txBody>
+      </p:sp>
+      <p:sp>
+        <p:nvSpPr>
+          <p:cNvPr id="11" name="TextBox 10"/>
+          <p:cNvSpPr txBox="1"/>
+          <p:nvPr/>
+        </p:nvSpPr>
+        <p:spPr>
+          <a:xfrm>
+            <a:off x="2194560" y="1828800"/>
+            <a:ext cx="2926080" cy="502920"/>
+          </a:xfrm>
+          <a:prstGeom prst="rect">
+            <a:avLst/>
+          </a:prstGeom>
+          <a:noFill/>
+        </p:spPr>
+        <p:txBody>
+          <a:bodyPr wrap="square">
+            <a:spAutoFit/>
+          </a:bodyPr>
+          <a:lstStyle/>
+          <a:p>
+            <a:pPr algn="l"/>
+            <a:r>
+              <a:rPr sz="1000" b="0" i="0">
+                <a:solidFill>
+                  <a:srgbClr val="CAD3DF"/>
+                </a:solidFill>
+              </a:rPr>
+              <a:t>17 materials × 3 vars (εᵣ, σ, S) = 51 parameters</a:t>
+            </a:r>
+          </a:p>
+        </p:txBody>
+      </p:sp>
+      <p:sp>
+        <p:nvSpPr>
+          <p:cNvPr id="12" name="TextBox 11"/>
+          <p:cNvSpPr txBox="1"/>
+          <p:nvPr/>
+        </p:nvSpPr>
+        <p:spPr>
+          <a:xfrm>
+            <a:off x="457200" y="2423160"/>
+            <a:ext cx="1737360" cy="502920"/>
+          </a:xfrm>
+          <a:prstGeom prst="rect">
+            <a:avLst/>
+          </a:prstGeom>
+          <a:noFill/>
+        </p:spPr>
+        <p:txBody>
+          <a:bodyPr wrap="square">
+            <a:spAutoFit/>
+          </a:bodyPr>
+          <a:lstStyle/>
+          <a:p>
+            <a:pPr algn="l"/>
+            <a:r>
+              <a:rPr sz="1000" b="1" i="0">
+                <a:solidFill>
+                  <a:srgbClr val="90E0EF"/>
+                </a:solidFill>
+              </a:rPr>
+              <a:t>Gradient flow</a:t>
+            </a:r>
+          </a:p>
+        </p:txBody>
+      </p:sp>
+      <p:sp>
+        <p:nvSpPr>
+          <p:cNvPr id="13" name="TextBox 12"/>
+          <p:cNvSpPr txBox="1"/>
+          <p:nvPr/>
+        </p:nvSpPr>
+        <p:spPr>
+          <a:xfrm>
+            <a:off x="2194560" y="2423160"/>
+            <a:ext cx="2926080" cy="502920"/>
+          </a:xfrm>
+          <a:prstGeom prst="rect">
+            <a:avLst/>
+          </a:prstGeom>
+          <a:noFill/>
+        </p:spPr>
+        <p:txBody>
+          <a:bodyPr wrap="square">
+            <a:spAutoFit/>
+          </a:bodyPr>
+          <a:lstStyle/>
+          <a:p>
+            <a:pPr algn="l"/>
+            <a:r>
+              <a:rPr sz="1000" b="0" i="0">
+                <a:solidFill>
+                  <a:srgbClr val="CAD3DF"/>
+                </a:solidFill>
+              </a:rPr>
+              <a:t>compute_fields() inside GradientTape
+→ fully differentiable through RT</a:t>
+            </a:r>
+          </a:p>
+        </p:txBody>
+      </p:sp>
+      <p:sp>
+        <p:nvSpPr>
+          <p:cNvPr id="14" name="TextBox 13"/>
+          <p:cNvSpPr txBox="1"/>
+          <p:nvPr/>
+        </p:nvSpPr>
+        <p:spPr>
+          <a:xfrm>
+            <a:off x="457200" y="3017520"/>
+            <a:ext cx="1737360" cy="502920"/>
+          </a:xfrm>
+          <a:prstGeom prst="rect">
+            <a:avLst/>
+          </a:prstGeom>
+          <a:noFill/>
+        </p:spPr>
+        <p:txBody>
+          <a:bodyPr wrap="square">
+            <a:spAutoFit/>
+          </a:bodyPr>
+          <a:lstStyle/>
+          <a:p>
+            <a:pPr algn="l"/>
+            <a:r>
+              <a:rPr sz="1000" b="1" i="0">
+                <a:solidFill>
+                  <a:srgbClr val="90E0EF"/>
+                </a:solidFill>
+              </a:rPr>
+              <a:t>Loss</a:t>
+            </a:r>
+          </a:p>
+        </p:txBody>
+      </p:sp>
+      <p:sp>
+        <p:nvSpPr>
+          <p:cNvPr id="15" name="TextBox 14"/>
+          <p:cNvSpPr txBox="1"/>
+          <p:nvPr/>
+        </p:nvSpPr>
+        <p:spPr>
+          <a:xfrm>
+            <a:off x="2194560" y="3017520"/>
+            <a:ext cx="2926080" cy="502920"/>
+          </a:xfrm>
+          <a:prstGeom prst="rect">
+            <a:avLst/>
+          </a:prstGeom>
+          <a:noFill/>
+        </p:spPr>
+        <p:txBody>
+          <a:bodyPr wrap="square">
+            <a:spAutoFit/>
+          </a:bodyPr>
+          <a:lstStyle/>
+          <a:p>
+            <a:pPr algn="l"/>
+            <a:r>
+              <a:rPr sz="1000" b="0" i="0">
+                <a:solidFill>
+                  <a:srgbClr val="CAD3DF"/>
+                </a:solidFill>
+              </a:rPr>
+              <a:t>SMAPE on linear power
++ Tikhonov regularisation → ITU-R P.2040-2</a:t>
+            </a:r>
+          </a:p>
+        </p:txBody>
+      </p:sp>
+      <p:sp>
+        <p:nvSpPr>
+          <p:cNvPr id="16" name="TextBox 15"/>
+          <p:cNvSpPr txBox="1"/>
+          <p:nvPr/>
+        </p:nvSpPr>
+        <p:spPr>
+          <a:xfrm>
+            <a:off x="457200" y="3611880"/>
+            <a:ext cx="1737360" cy="502920"/>
+          </a:xfrm>
+          <a:prstGeom prst="rect">
+            <a:avLst/>
+          </a:prstGeom>
+          <a:noFill/>
+        </p:spPr>
+        <p:txBody>
+          <a:bodyPr wrap="square">
+            <a:spAutoFit/>
+          </a:bodyPr>
+          <a:lstStyle/>
+          <a:p>
+            <a:pPr algn="l"/>
+            <a:r>
+              <a:rPr sz="1000" b="1" i="0">
+                <a:solidFill>
+                  <a:srgbClr val="90E0EF"/>
+                </a:solidFill>
+              </a:rPr>
+              <a:t>Optimizer</a:t>
+            </a:r>
+          </a:p>
+        </p:txBody>
+      </p:sp>
+      <p:sp>
+        <p:nvSpPr>
+          <p:cNvPr id="17" name="TextBox 16"/>
+          <p:cNvSpPr txBox="1"/>
+          <p:nvPr/>
+        </p:nvSpPr>
+        <p:spPr>
+          <a:xfrm>
+            <a:off x="2194560" y="3611880"/>
+            <a:ext cx="2926080" cy="502920"/>
+          </a:xfrm>
+          <a:prstGeom prst="rect">
+            <a:avLst/>
+          </a:prstGeom>
+          <a:noFill/>
+        </p:spPr>
+        <p:txBody>
+          <a:bodyPr wrap="square">
+            <a:spAutoFit/>
+          </a:bodyPr>
+          <a:lstStyle/>
+          <a:p>
+            <a:pPr algn="l"/>
+            <a:r>
+              <a:rPr sz="1000" b="0" i="0">
+                <a:solidFill>
+                  <a:srgbClr val="CAD3DF"/>
+                </a:solidFill>
+              </a:rPr>
+              <a:t>Adam  LR=0.05 → cosine decay → 0.001</a:t>
+            </a:r>
+          </a:p>
+        </p:txBody>
+      </p:sp>
+      <p:sp>
+        <p:nvSpPr>
+          <p:cNvPr id="18" name="TextBox 17"/>
+          <p:cNvSpPr txBox="1"/>
+          <p:nvPr/>
+        </p:nvSpPr>
+        <p:spPr>
+          <a:xfrm>
+            <a:off x="457200" y="4206240"/>
+            <a:ext cx="1737360" cy="502920"/>
+          </a:xfrm>
+          <a:prstGeom prst="rect">
+            <a:avLst/>
+          </a:prstGeom>
+          <a:noFill/>
+        </p:spPr>
+        <p:txBody>
+          <a:bodyPr wrap="square">
+            <a:spAutoFit/>
+          </a:bodyPr>
+          <a:lstStyle/>
+          <a:p>
+            <a:pPr algn="l"/>
+            <a:r>
+              <a:rPr sz="1000" b="1" i="0">
+                <a:solidFill>
+                  <a:srgbClr val="90E0EF"/>
+                </a:solidFill>
+              </a:rPr>
+              <a:t>Steps</a:t>
+            </a:r>
+          </a:p>
+        </p:txBody>
+      </p:sp>
+      <p:sp>
+        <p:nvSpPr>
+          <p:cNvPr id="19" name="TextBox 18"/>
+          <p:cNvSpPr txBox="1"/>
+          <p:nvPr/>
+        </p:nvSpPr>
+        <p:spPr>
+          <a:xfrm>
+            <a:off x="2194560" y="4206240"/>
+            <a:ext cx="2926080" cy="502920"/>
+          </a:xfrm>
+          <a:prstGeom prst="rect">
+            <a:avLst/>
+          </a:prstGeom>
+          <a:noFill/>
+        </p:spPr>
+        <p:txBody>
+          <a:bodyPr wrap="square">
+            <a:spAutoFit/>
+          </a:bodyPr>
+          <a:lstStyle/>
+          <a:p>
+            <a:pPr algn="l"/>
+            <a:r>
+              <a:rPr sz="1000" b="0" i="0">
+                <a:solidFill>
+                  <a:srgbClr val="CAD3DF"/>
+                </a:solidFill>
+              </a:rPr>
+              <a:t>300</a:t>
+            </a:r>
+          </a:p>
+        </p:txBody>
+      </p:sp>
+      <p:sp>
+        <p:nvSpPr>
+          <p:cNvPr id="20" name="TextBox 19"/>
+          <p:cNvSpPr txBox="1"/>
+          <p:nvPr/>
+        </p:nvSpPr>
+        <p:spPr>
+          <a:xfrm>
+            <a:off x="457200" y="4800600"/>
+            <a:ext cx="1737360" cy="502920"/>
+          </a:xfrm>
+          <a:prstGeom prst="rect">
+            <a:avLst/>
+          </a:prstGeom>
+          <a:noFill/>
+        </p:spPr>
+        <p:txBody>
+          <a:bodyPr wrap="square">
+            <a:spAutoFit/>
+          </a:bodyPr>
+          <a:lstStyle/>
+          <a:p>
+            <a:pPr algn="l"/>
+            <a:r>
+              <a:rPr sz="1000" b="1" i="0">
+                <a:solidFill>
+                  <a:srgbClr val="90E0EF"/>
+                </a:solidFill>
+              </a:rPr>
+              <a:t>Baseline</a:t>
+            </a:r>
+          </a:p>
+        </p:txBody>
+      </p:sp>
+      <p:sp>
+        <p:nvSpPr>
+          <p:cNvPr id="21" name="TextBox 20"/>
+          <p:cNvSpPr txBox="1"/>
+          <p:nvPr/>
+        </p:nvSpPr>
+        <p:spPr>
+          <a:xfrm>
+            <a:off x="2194560" y="4800600"/>
+            <a:ext cx="2926080" cy="502920"/>
+          </a:xfrm>
+          <a:prstGeom prst="rect">
+            <a:avLst/>
+          </a:prstGeom>
+          <a:noFill/>
+        </p:spPr>
+        <p:txBody>
+          <a:bodyPr wrap="square">
+            <a:spAutoFit/>
+          </a:bodyPr>
+          <a:lstStyle/>
+          <a:p>
+            <a:pPr algn="l"/>
+            <a:r>
+              <a:rPr sz="1000" b="0" i="0">
+                <a:solidFill>
+                  <a:srgbClr val="CAD3DF"/>
+                </a:solidFill>
+              </a:rPr>
+              <a:t>Initialised at ITU-R P.2040-2 Table 3 values</a:t>
+            </a:r>
+          </a:p>
+        </p:txBody>
+      </p:sp>
+      <p:sp>
+        <p:nvSpPr>
+          <p:cNvPr id="22" name="Rectangle 21"/>
+          <p:cNvSpPr/>
+          <p:nvPr/>
+        </p:nvSpPr>
+        <p:spPr>
+          <a:xfrm>
+            <a:off x="5486400" y="1234440"/>
+            <a:ext cx="6400800" cy="5212080"/>
+          </a:xfrm>
+          <a:prstGeom prst="rect">
+            <a:avLst/>
+          </a:prstGeom>
+          <a:solidFill>
+            <a:srgbClr val="112A40"/>
+          </a:solidFill>
+          <a:ln>
+            <a:noFill/>
+          </a:ln>
+        </p:spPr>
+        <p:style>
+          <a:lnRef idx="1">
+            <a:schemeClr val="accent1"/>
+          </a:lnRef>
+          <a:fillRef idx="3">
+            <a:schemeClr val="accent1"/>
+          </a:fillRef>
+          <a:effectRef idx="2">
+            <a:schemeClr val="accent1"/>
+          </a:effectRef>
+          <a:fontRef idx="minor">
+            <a:schemeClr val="lt1"/>
+          </a:fontRef>
+        </p:style>
+        <p:txBody>
+          <a:bodyPr rtlCol="0" anchor="ctr"/>
+          <a:lstStyle/>
+          <a:p>
+            <a:pPr algn="ctr"/>
+          </a:p>
+        </p:txBody>
+      </p:sp>
+      <p:sp>
+        <p:nvSpPr>
+          <p:cNvPr id="23" name="Rectangle 22"/>
+          <p:cNvSpPr/>
+          <p:nvPr/>
+        </p:nvSpPr>
+        <p:spPr>
+          <a:xfrm>
+            <a:off x="5486400" y="1234440"/>
+            <a:ext cx="6400800" cy="54864"/>
+          </a:xfrm>
+          <a:prstGeom prst="rect">
+            <a:avLst/>
+          </a:prstGeom>
+          <a:solidFill>
+            <a:srgbClr val="90E0EF"/>
+          </a:solidFill>
+          <a:ln>
+            <a:noFill/>
+          </a:ln>
+        </p:spPr>
+        <p:style>
+          <a:lnRef idx="1">
+            <a:schemeClr val="accent1"/>
+          </a:lnRef>
+          <a:fillRef idx="3">
+            <a:schemeClr val="accent1"/>
+          </a:fillRef>
+          <a:effectRef idx="2">
+            <a:schemeClr val="accent1"/>
+          </a:effectRef>
+          <a:fontRef idx="minor">
+            <a:schemeClr val="lt1"/>
+          </a:fontRef>
+        </p:style>
+        <p:txBody>
+          <a:bodyPr rtlCol="0" anchor="ctr"/>
+          <a:lstStyle/>
+          <a:p>
+            <a:pPr algn="ctr"/>
+          </a:p>
+        </p:txBody>
+      </p:sp>
+      <p:sp>
+        <p:nvSpPr>
+          <p:cNvPr id="24" name="TextBox 23"/>
+          <p:cNvSpPr txBox="1"/>
+          <p:nvPr/>
+        </p:nvSpPr>
+        <p:spPr>
+          <a:xfrm>
+            <a:off x="5623560" y="1371600"/>
+            <a:ext cx="6126480" cy="365760"/>
+          </a:xfrm>
+          <a:prstGeom prst="rect">
+            <a:avLst/>
+          </a:prstGeom>
+          <a:noFill/>
+        </p:spPr>
+        <p:txBody>
+          <a:bodyPr wrap="square">
+            <a:spAutoFit/>
+          </a:bodyPr>
+          <a:lstStyle/>
+          <a:p>
+            <a:pPr algn="l"/>
+            <a:r>
+              <a:rPr sz="1100" b="1" i="0">
+                <a:solidFill>
+                  <a:srgbClr val="90E0EF"/>
+                </a:solidFill>
+              </a:rPr>
+              <a:t>17 Materials — ITU-R P.2040-2 Initial Values</a:t>
+            </a:r>
+          </a:p>
+        </p:txBody>
+      </p:sp>
+      <p:sp>
+        <p:nvSpPr>
+          <p:cNvPr id="25" name="TextBox 24"/>
+          <p:cNvSpPr txBox="1"/>
+          <p:nvPr/>
+        </p:nvSpPr>
+        <p:spPr>
+          <a:xfrm>
+            <a:off x="5623560" y="1810512"/>
+            <a:ext cx="2377440" cy="320040"/>
+          </a:xfrm>
+          <a:prstGeom prst="rect">
+            <a:avLst/>
+          </a:prstGeom>
+          <a:noFill/>
+        </p:spPr>
+        <p:txBody>
+          <a:bodyPr wrap="square">
+            <a:spAutoFit/>
+          </a:bodyPr>
+          <a:lstStyle/>
+          <a:p>
+            <a:pPr algn="l"/>
+            <a:r>
+              <a:rPr sz="950" b="1" i="0">
+                <a:solidFill>
+                  <a:srgbClr val="00B4D8"/>
+                </a:solidFill>
+              </a:rPr>
+              <a:t>Material</a:t>
+            </a:r>
+          </a:p>
+        </p:txBody>
+      </p:sp>
+      <p:sp>
+        <p:nvSpPr>
+          <p:cNvPr id="26" name="TextBox 25"/>
+          <p:cNvSpPr txBox="1"/>
+          <p:nvPr/>
+        </p:nvSpPr>
+        <p:spPr>
+          <a:xfrm>
+            <a:off x="8092440" y="1810512"/>
+            <a:ext cx="822960" cy="320040"/>
+          </a:xfrm>
+          <a:prstGeom prst="rect">
+            <a:avLst/>
+          </a:prstGeom>
+          <a:noFill/>
+        </p:spPr>
+        <p:txBody>
+          <a:bodyPr wrap="square">
+            <a:spAutoFit/>
+          </a:bodyPr>
+          <a:lstStyle/>
+          <a:p>
+            <a:pPr algn="l"/>
+            <a:r>
+              <a:rPr sz="950" b="1" i="0">
+                <a:solidFill>
+                  <a:srgbClr val="00B4D8"/>
+                </a:solidFill>
+              </a:rPr>
+              <a:t>εᵣ</a:t>
+            </a:r>
+          </a:p>
+        </p:txBody>
+      </p:sp>
+      <p:sp>
+        <p:nvSpPr>
+          <p:cNvPr id="27" name="TextBox 26"/>
+          <p:cNvSpPr txBox="1"/>
+          <p:nvPr/>
+        </p:nvSpPr>
+        <p:spPr>
+          <a:xfrm>
+            <a:off x="9006840" y="1810512"/>
+            <a:ext cx="1005840" cy="320040"/>
+          </a:xfrm>
+          <a:prstGeom prst="rect">
+            <a:avLst/>
+          </a:prstGeom>
+          <a:noFill/>
+        </p:spPr>
+        <p:txBody>
+          <a:bodyPr wrap="square">
+            <a:spAutoFit/>
+          </a:bodyPr>
+          <a:lstStyle/>
+          <a:p>
+            <a:pPr algn="l"/>
+            <a:r>
+              <a:rPr sz="950" b="1" i="0">
+                <a:solidFill>
+                  <a:srgbClr val="00B4D8"/>
+                </a:solidFill>
+              </a:rPr>
+              <a:t>σ (S/m)</a:t>
+            </a:r>
+          </a:p>
+        </p:txBody>
+      </p:sp>
+      <p:sp>
+        <p:nvSpPr>
+          <p:cNvPr id="28" name="TextBox 27"/>
+          <p:cNvSpPr txBox="1"/>
+          <p:nvPr/>
+        </p:nvSpPr>
+        <p:spPr>
+          <a:xfrm>
+            <a:off x="10104120" y="1810512"/>
+            <a:ext cx="731520" cy="320040"/>
+          </a:xfrm>
+          <a:prstGeom prst="rect">
+            <a:avLst/>
+          </a:prstGeom>
+          <a:noFill/>
+        </p:spPr>
+        <p:txBody>
+          <a:bodyPr wrap="square">
+            <a:spAutoFit/>
+          </a:bodyPr>
+          <a:lstStyle/>
+          <a:p>
+            <a:pPr algn="l"/>
+            <a:r>
+              <a:rPr sz="950" b="1" i="0">
+                <a:solidFill>
+                  <a:srgbClr val="00B4D8"/>
+                </a:solidFill>
+              </a:rPr>
+              <a:t>S</a:t>
+            </a:r>
+          </a:p>
+        </p:txBody>
+      </p:sp>
+      <p:sp>
+        <p:nvSpPr>
+          <p:cNvPr id="29" name="Rectangle 28"/>
+          <p:cNvSpPr/>
+          <p:nvPr/>
+        </p:nvSpPr>
+        <p:spPr>
+          <a:xfrm>
+            <a:off x="5623560" y="2148840"/>
+            <a:ext cx="6126480" cy="16459"/>
+          </a:xfrm>
+          <a:prstGeom prst="rect">
+            <a:avLst/>
+          </a:prstGeom>
+          <a:solidFill>
+            <a:srgbClr val="1E3A52"/>
+          </a:solidFill>
+          <a:ln>
+            <a:noFill/>
+          </a:ln>
+        </p:spPr>
+        <p:style>
+          <a:lnRef idx="1">
+            <a:schemeClr val="accent1"/>
+          </a:lnRef>
+          <a:fillRef idx="3">
+            <a:schemeClr val="accent1"/>
+          </a:fillRef>
+          <a:effectRef idx="2">
+            <a:schemeClr val="accent1"/>
+          </a:effectRef>
+          <a:fontRef idx="minor">
+            <a:schemeClr val="lt1"/>
+          </a:fontRef>
+        </p:style>
+        <p:txBody>
+          <a:bodyPr rtlCol="0" anchor="ctr"/>
+          <a:lstStyle/>
+          <a:p>
+            <a:pPr algn="ctr"/>
+          </a:p>
+        </p:txBody>
+      </p:sp>
+      <p:sp>
+        <p:nvSpPr>
+          <p:cNvPr id="30" name="Rectangle 29"/>
+          <p:cNvSpPr/>
+          <p:nvPr/>
+        </p:nvSpPr>
+        <p:spPr>
+          <a:xfrm>
+            <a:off x="5486400" y="2267712"/>
+            <a:ext cx="6400800" cy="347472"/>
+          </a:xfrm>
+          <a:prstGeom prst="rect">
+            <a:avLst/>
+          </a:prstGeom>
+          <a:solidFill>
+            <a:srgbClr val="112A40"/>
+          </a:solidFill>
+          <a:ln>
+            <a:noFill/>
+          </a:ln>
+        </p:spPr>
+        <p:style>
+          <a:lnRef idx="1">
+            <a:schemeClr val="accent1"/>
+          </a:lnRef>
+          <a:fillRef idx="3">
+            <a:schemeClr val="accent1"/>
+          </a:fillRef>
+          <a:effectRef idx="2">
+            <a:schemeClr val="accent1"/>
+          </a:effectRef>
+          <a:fontRef idx="minor">
+            <a:schemeClr val="lt1"/>
+          </a:fontRef>
+        </p:style>
+        <p:txBody>
+          <a:bodyPr rtlCol="0" anchor="ctr"/>
+          <a:lstStyle/>
+          <a:p>
+            <a:pPr algn="ctr"/>
+          </a:p>
+        </p:txBody>
+      </p:sp>
+      <p:sp>
+        <p:nvSpPr>
+          <p:cNvPr id="31" name="TextBox 30"/>
+          <p:cNvSpPr txBox="1"/>
+          <p:nvPr/>
+        </p:nvSpPr>
+        <p:spPr>
+          <a:xfrm>
+            <a:off x="5623560" y="2304288"/>
+            <a:ext cx="2377440" cy="292608"/>
+          </a:xfrm>
+          <a:prstGeom prst="rect">
+            <a:avLst/>
+          </a:prstGeom>
+          <a:noFill/>
+        </p:spPr>
+        <p:txBody>
+          <a:bodyPr wrap="square">
+            <a:spAutoFit/>
+          </a:bodyPr>
+          <a:lstStyle/>
+          <a:p>
+            <a:pPr algn="l"/>
+            <a:r>
+              <a:rPr sz="900" b="0" i="0">
+                <a:solidFill>
+                  <a:srgbClr val="FFFFFF"/>
+                </a:solidFill>
+              </a:rPr>
+              <a:t>itu_concrete</a:t>
+            </a:r>
+          </a:p>
+        </p:txBody>
+      </p:sp>
+      <p:sp>
+        <p:nvSpPr>
+          <p:cNvPr id="32" name="TextBox 31"/>
+          <p:cNvSpPr txBox="1"/>
+          <p:nvPr/>
+        </p:nvSpPr>
+        <p:spPr>
+          <a:xfrm>
+            <a:off x="8092440" y="2304288"/>
+            <a:ext cx="822960" cy="292608"/>
+          </a:xfrm>
+          <a:prstGeom prst="rect">
+            <a:avLst/>
+          </a:prstGeom>
+          <a:noFill/>
+        </p:spPr>
+        <p:txBody>
+          <a:bodyPr wrap="square">
+            <a:spAutoFit/>
+          </a:bodyPr>
+          <a:lstStyle/>
+          <a:p>
+            <a:pPr algn="l"/>
+            <a:r>
+              <a:rPr sz="900" b="0" i="0">
+                <a:solidFill>
+                  <a:srgbClr val="CAD3DF"/>
+                </a:solidFill>
+              </a:rPr>
+              <a:t>5.31</a:t>
+            </a:r>
+          </a:p>
+        </p:txBody>
+      </p:sp>
+      <p:sp>
+        <p:nvSpPr>
+          <p:cNvPr id="33" name="TextBox 32"/>
+          <p:cNvSpPr txBox="1"/>
+          <p:nvPr/>
+        </p:nvSpPr>
+        <p:spPr>
+          <a:xfrm>
+            <a:off x="9006840" y="2304288"/>
+            <a:ext cx="1005840" cy="292608"/>
+          </a:xfrm>
+          <a:prstGeom prst="rect">
+            <a:avLst/>
+          </a:prstGeom>
+          <a:noFill/>
+        </p:spPr>
+        <p:txBody>
+          <a:bodyPr wrap="square">
+            <a:spAutoFit/>
+          </a:bodyPr>
+          <a:lstStyle/>
+          <a:p>
+            <a:pPr algn="l"/>
+            <a:r>
+              <a:rPr sz="900" b="0" i="0">
+                <a:solidFill>
+                  <a:srgbClr val="CAD3DF"/>
+                </a:solidFill>
+              </a:rPr>
+              <a:t>0.0304</a:t>
+            </a:r>
+          </a:p>
+        </p:txBody>
+      </p:sp>
+      <p:sp>
+        <p:nvSpPr>
+          <p:cNvPr id="34" name="TextBox 33"/>
+          <p:cNvSpPr txBox="1"/>
+          <p:nvPr/>
+        </p:nvSpPr>
+        <p:spPr>
+          <a:xfrm>
+            <a:off x="10104120" y="2304288"/>
+            <a:ext cx="731520" cy="292608"/>
+          </a:xfrm>
+          <a:prstGeom prst="rect">
+            <a:avLst/>
+          </a:prstGeom>
+          <a:noFill/>
+        </p:spPr>
+        <p:txBody>
+          <a:bodyPr wrap="square">
+            <a:spAutoFit/>
+          </a:bodyPr>
+          <a:lstStyle/>
+          <a:p>
+            <a:pPr algn="l"/>
+            <a:r>
+              <a:rPr sz="900" b="0" i="0">
+                <a:solidFill>
+                  <a:srgbClr val="CAD3DF"/>
+                </a:solidFill>
+              </a:rPr>
+              <a:t>0.30</a:t>
+            </a:r>
+          </a:p>
+        </p:txBody>
+      </p:sp>
+      <p:sp>
+        <p:nvSpPr>
+          <p:cNvPr id="35" name="Rectangle 34"/>
+          <p:cNvSpPr/>
+          <p:nvPr/>
+        </p:nvSpPr>
+        <p:spPr>
+          <a:xfrm>
+            <a:off x="5486400" y="2615184"/>
+            <a:ext cx="6400800" cy="347472"/>
+          </a:xfrm>
+          <a:prstGeom prst="rect">
+            <a:avLst/>
+          </a:prstGeom>
+          <a:solidFill>
+            <a:srgbClr val="0D1B2A"/>
+          </a:solidFill>
+          <a:ln>
+            <a:noFill/>
+          </a:ln>
+        </p:spPr>
+        <p:style>
+          <a:lnRef idx="1">
+            <a:schemeClr val="accent1"/>
+          </a:lnRef>
+          <a:fillRef idx="3">
+            <a:schemeClr val="accent1"/>
+          </a:fillRef>
+          <a:effectRef idx="2">
+            <a:schemeClr val="accent1"/>
+          </a:effectRef>
+          <a:fontRef idx="minor">
+            <a:schemeClr val="lt1"/>
+          </a:fontRef>
+        </p:style>
+        <p:txBody>
+          <a:bodyPr rtlCol="0" anchor="ctr"/>
+          <a:lstStyle/>
+          <a:p>
+            <a:pPr algn="ctr"/>
+          </a:p>
+        </p:txBody>
+      </p:sp>
+      <p:sp>
+        <p:nvSpPr>
+          <p:cNvPr id="36" name="TextBox 35"/>
+          <p:cNvSpPr txBox="1"/>
+          <p:nvPr/>
+        </p:nvSpPr>
+        <p:spPr>
+          <a:xfrm>
+            <a:off x="5623560" y="2651760"/>
+            <a:ext cx="2377440" cy="292608"/>
+          </a:xfrm>
+          <a:prstGeom prst="rect">
+            <a:avLst/>
+          </a:prstGeom>
+          <a:noFill/>
+        </p:spPr>
+        <p:txBody>
+          <a:bodyPr wrap="square">
+            <a:spAutoFit/>
+          </a:bodyPr>
+          <a:lstStyle/>
+          <a:p>
+            <a:pPr algn="l"/>
+            <a:r>
+              <a:rPr sz="900" b="0" i="0">
+                <a:solidFill>
+                  <a:srgbClr val="FFFFFF"/>
+                </a:solidFill>
+              </a:rPr>
+              <a:t>itu_brick</a:t>
+            </a:r>
+          </a:p>
+        </p:txBody>
+      </p:sp>
+      <p:sp>
+        <p:nvSpPr>
+          <p:cNvPr id="37" name="TextBox 36"/>
+          <p:cNvSpPr txBox="1"/>
+          <p:nvPr/>
+        </p:nvSpPr>
+        <p:spPr>
+          <a:xfrm>
+            <a:off x="8092440" y="2651760"/>
+            <a:ext cx="822960" cy="292608"/>
+          </a:xfrm>
+          <a:prstGeom prst="rect">
+            <a:avLst/>
+          </a:prstGeom>
+          <a:noFill/>
+        </p:spPr>
+        <p:txBody>
+          <a:bodyPr wrap="square">
+            <a:spAutoFit/>
+          </a:bodyPr>
+          <a:lstStyle/>
+          <a:p>
+            <a:pPr algn="l"/>
+            <a:r>
+              <a:rPr sz="900" b="0" i="0">
+                <a:solidFill>
+                  <a:srgbClr val="CAD3DF"/>
+                </a:solidFill>
+              </a:rPr>
+              <a:t>3.91</a:t>
+            </a:r>
+          </a:p>
+        </p:txBody>
+      </p:sp>
+      <p:sp>
+        <p:nvSpPr>
+          <p:cNvPr id="38" name="TextBox 37"/>
+          <p:cNvSpPr txBox="1"/>
+          <p:nvPr/>
+        </p:nvSpPr>
+        <p:spPr>
+          <a:xfrm>
+            <a:off x="9006840" y="2651760"/>
+            <a:ext cx="1005840" cy="292608"/>
+          </a:xfrm>
+          <a:prstGeom prst="rect">
+            <a:avLst/>
+          </a:prstGeom>
+          <a:noFill/>
+        </p:spPr>
+        <p:txBody>
+          <a:bodyPr wrap="square">
+            <a:spAutoFit/>
+          </a:bodyPr>
+          <a:lstStyle/>
+          <a:p>
+            <a:pPr algn="l"/>
+            <a:r>
+              <a:rPr sz="900" b="0" i="0">
+                <a:solidFill>
+                  <a:srgbClr val="CAD3DF"/>
+                </a:solidFill>
+              </a:rPr>
+              <a:t>0.0238</a:t>
+            </a:r>
+          </a:p>
+        </p:txBody>
+      </p:sp>
+      <p:sp>
+        <p:nvSpPr>
+          <p:cNvPr id="39" name="TextBox 38"/>
+          <p:cNvSpPr txBox="1"/>
+          <p:nvPr/>
+        </p:nvSpPr>
+        <p:spPr>
+          <a:xfrm>
+            <a:off x="10104120" y="2651760"/>
+            <a:ext cx="731520" cy="292608"/>
+          </a:xfrm>
+          <a:prstGeom prst="rect">
+            <a:avLst/>
+          </a:prstGeom>
+          <a:noFill/>
+        </p:spPr>
+        <p:txBody>
+          <a:bodyPr wrap="square">
+            <a:spAutoFit/>
+          </a:bodyPr>
+          <a:lstStyle/>
+          <a:p>
+            <a:pPr algn="l"/>
+            <a:r>
+              <a:rPr sz="900" b="0" i="0">
+                <a:solidFill>
+                  <a:srgbClr val="CAD3DF"/>
+                </a:solidFill>
+              </a:rPr>
+              <a:t>0.25</a:t>
+            </a:r>
+          </a:p>
+        </p:txBody>
+      </p:sp>
+      <p:sp>
+        <p:nvSpPr>
+          <p:cNvPr id="40" name="Rectangle 39"/>
+          <p:cNvSpPr/>
+          <p:nvPr/>
+        </p:nvSpPr>
+        <p:spPr>
+          <a:xfrm>
+            <a:off x="5486400" y="2962656"/>
+            <a:ext cx="6400800" cy="347472"/>
+          </a:xfrm>
+          <a:prstGeom prst="rect">
+            <a:avLst/>
+          </a:prstGeom>
+          <a:solidFill>
+            <a:srgbClr val="112A40"/>
+          </a:solidFill>
+          <a:ln>
+            <a:noFill/>
+          </a:ln>
+        </p:spPr>
+        <p:style>
+          <a:lnRef idx="1">
+            <a:schemeClr val="accent1"/>
+          </a:lnRef>
+          <a:fillRef idx="3">
+            <a:schemeClr val="accent1"/>
+          </a:fillRef>
+          <a:effectRef idx="2">
+            <a:schemeClr val="accent1"/>
+          </a:effectRef>
+          <a:fontRef idx="minor">
+            <a:schemeClr val="lt1"/>
+          </a:fontRef>
+        </p:style>
+        <p:txBody>
+          <a:bodyPr rtlCol="0" anchor="ctr"/>
+          <a:lstStyle/>
+          <a:p>
+            <a:pPr algn="ctr"/>
+          </a:p>
+        </p:txBody>
+      </p:sp>
+      <p:sp>
+        <p:nvSpPr>
+          <p:cNvPr id="41" name="TextBox 40"/>
+          <p:cNvSpPr txBox="1"/>
+          <p:nvPr/>
+        </p:nvSpPr>
+        <p:spPr>
+          <a:xfrm>
+            <a:off x="5623560" y="2999232"/>
+            <a:ext cx="2377440" cy="292608"/>
+          </a:xfrm>
+          <a:prstGeom prst="rect">
+            <a:avLst/>
+          </a:prstGeom>
+          <a:noFill/>
+        </p:spPr>
+        <p:txBody>
+          <a:bodyPr wrap="square">
+            <a:spAutoFit/>
+          </a:bodyPr>
+          <a:lstStyle/>
+          <a:p>
+            <a:pPr algn="l"/>
+            <a:r>
+              <a:rPr sz="900" b="0" i="0">
+                <a:solidFill>
+                  <a:srgbClr val="FFFFFF"/>
+                </a:solidFill>
+              </a:rPr>
+              <a:t>itu_glass</a:t>
+            </a:r>
+          </a:p>
+        </p:txBody>
+      </p:sp>
+      <p:sp>
+        <p:nvSpPr>
+          <p:cNvPr id="42" name="TextBox 41"/>
+          <p:cNvSpPr txBox="1"/>
+          <p:nvPr/>
+        </p:nvSpPr>
+        <p:spPr>
+          <a:xfrm>
+            <a:off x="8092440" y="2999232"/>
+            <a:ext cx="822960" cy="292608"/>
+          </a:xfrm>
+          <a:prstGeom prst="rect">
+            <a:avLst/>
+          </a:prstGeom>
+          <a:noFill/>
+        </p:spPr>
+        <p:txBody>
+          <a:bodyPr wrap="square">
+            <a:spAutoFit/>
+          </a:bodyPr>
+          <a:lstStyle/>
+          <a:p>
+            <a:pPr algn="l"/>
+            <a:r>
+              <a:rPr sz="900" b="0" i="0">
+                <a:solidFill>
+                  <a:srgbClr val="CAD3DF"/>
+                </a:solidFill>
+              </a:rPr>
+              <a:t>6.27</a:t>
+            </a:r>
+          </a:p>
+        </p:txBody>
+      </p:sp>
+      <p:sp>
+        <p:nvSpPr>
+          <p:cNvPr id="43" name="TextBox 42"/>
+          <p:cNvSpPr txBox="1"/>
+          <p:nvPr/>
+        </p:nvSpPr>
+        <p:spPr>
+          <a:xfrm>
+            <a:off x="9006840" y="2999232"/>
+            <a:ext cx="1005840" cy="292608"/>
+          </a:xfrm>
+          <a:prstGeom prst="rect">
+            <a:avLst/>
+          </a:prstGeom>
+          <a:noFill/>
+        </p:spPr>
+        <p:txBody>
+          <a:bodyPr wrap="square">
+            <a:spAutoFit/>
+          </a:bodyPr>
+          <a:lstStyle/>
+          <a:p>
+            <a:pPr algn="l"/>
+            <a:r>
+              <a:rPr sz="900" b="0" i="0">
+                <a:solidFill>
+                  <a:srgbClr val="CAD3DF"/>
+                </a:solidFill>
+              </a:rPr>
+              <a:t>0.0039</a:t>
+            </a:r>
+          </a:p>
+        </p:txBody>
+      </p:sp>
+      <p:sp>
+        <p:nvSpPr>
+          <p:cNvPr id="44" name="TextBox 43"/>
+          <p:cNvSpPr txBox="1"/>
+          <p:nvPr/>
+        </p:nvSpPr>
+        <p:spPr>
+          <a:xfrm>
+            <a:off x="10104120" y="2999232"/>
+            <a:ext cx="731520" cy="292608"/>
+          </a:xfrm>
+          <a:prstGeom prst="rect">
+            <a:avLst/>
+          </a:prstGeom>
+          <a:noFill/>
+        </p:spPr>
+        <p:txBody>
+          <a:bodyPr wrap="square">
+            <a:spAutoFit/>
+          </a:bodyPr>
+          <a:lstStyle/>
+          <a:p>
+            <a:pPr algn="l"/>
+            <a:r>
+              <a:rPr sz="900" b="0" i="0">
+                <a:solidFill>
+                  <a:srgbClr val="CAD3DF"/>
+                </a:solidFill>
+              </a:rPr>
+              <a:t>0.08</a:t>
+            </a:r>
+          </a:p>
+        </p:txBody>
+      </p:sp>
+      <p:sp>
+        <p:nvSpPr>
+          <p:cNvPr id="45" name="Rectangle 44"/>
+          <p:cNvSpPr/>
+          <p:nvPr/>
+        </p:nvSpPr>
+        <p:spPr>
+          <a:xfrm>
+            <a:off x="5486400" y="3310128"/>
+            <a:ext cx="6400800" cy="347472"/>
+          </a:xfrm>
+          <a:prstGeom prst="rect">
+            <a:avLst/>
+          </a:prstGeom>
+          <a:solidFill>
+            <a:srgbClr val="0D1B2A"/>
+          </a:solidFill>
+          <a:ln>
+            <a:noFill/>
+          </a:ln>
+        </p:spPr>
+        <p:style>
+          <a:lnRef idx="1">
+            <a:schemeClr val="accent1"/>
+          </a:lnRef>
+          <a:fillRef idx="3">
+            <a:schemeClr val="accent1"/>
+          </a:fillRef>
+          <a:effectRef idx="2">
+            <a:schemeClr val="accent1"/>
+          </a:effectRef>
+          <a:fontRef idx="minor">
+            <a:schemeClr val="lt1"/>
+          </a:fontRef>
+        </p:style>
+        <p:txBody>
+          <a:bodyPr rtlCol="0" anchor="ctr"/>
+          <a:lstStyle/>
+          <a:p>
+            <a:pPr algn="ctr"/>
+          </a:p>
+        </p:txBody>
+      </p:sp>
+      <p:sp>
+        <p:nvSpPr>
+          <p:cNvPr id="46" name="TextBox 45"/>
+          <p:cNvSpPr txBox="1"/>
+          <p:nvPr/>
+        </p:nvSpPr>
+        <p:spPr>
+          <a:xfrm>
+            <a:off x="5623560" y="3346704"/>
+            <a:ext cx="2377440" cy="292608"/>
+          </a:xfrm>
+          <a:prstGeom prst="rect">
+            <a:avLst/>
+          </a:prstGeom>
+          <a:noFill/>
+        </p:spPr>
+        <p:txBody>
+          <a:bodyPr wrap="square">
+            <a:spAutoFit/>
+          </a:bodyPr>
+          <a:lstStyle/>
+          <a:p>
+            <a:pPr algn="l"/>
+            <a:r>
+              <a:rPr sz="900" b="0" i="0">
+                <a:solidFill>
+                  <a:srgbClr val="FFFFFF"/>
+                </a:solidFill>
+              </a:rPr>
+              <a:t>itu_metal</a:t>
+            </a:r>
+          </a:p>
+        </p:txBody>
+      </p:sp>
+      <p:sp>
+        <p:nvSpPr>
+          <p:cNvPr id="47" name="TextBox 46"/>
+          <p:cNvSpPr txBox="1"/>
+          <p:nvPr/>
+        </p:nvSpPr>
+        <p:spPr>
+          <a:xfrm>
+            <a:off x="8092440" y="3346704"/>
+            <a:ext cx="822960" cy="292608"/>
+          </a:xfrm>
+          <a:prstGeom prst="rect">
+            <a:avLst/>
+          </a:prstGeom>
+          <a:noFill/>
+        </p:spPr>
+        <p:txBody>
+          <a:bodyPr wrap="square">
+            <a:spAutoFit/>
+          </a:bodyPr>
+          <a:lstStyle/>
+          <a:p>
+            <a:pPr algn="l"/>
+            <a:r>
+              <a:rPr sz="900" b="0" i="0">
+                <a:solidFill>
+                  <a:srgbClr val="CAD3DF"/>
+                </a:solidFill>
+              </a:rPr>
+              <a:t>1.00</a:t>
+            </a:r>
+          </a:p>
+        </p:txBody>
+      </p:sp>
+      <p:sp>
+        <p:nvSpPr>
+          <p:cNvPr id="48" name="TextBox 47"/>
+          <p:cNvSpPr txBox="1"/>
+          <p:nvPr/>
+        </p:nvSpPr>
+        <p:spPr>
+          <a:xfrm>
+            <a:off x="9006840" y="3346704"/>
+            <a:ext cx="1005840" cy="292608"/>
+          </a:xfrm>
+          <a:prstGeom prst="rect">
+            <a:avLst/>
+          </a:prstGeom>
+          <a:noFill/>
+        </p:spPr>
+        <p:txBody>
+          <a:bodyPr wrap="square">
+            <a:spAutoFit/>
+          </a:bodyPr>
+          <a:lstStyle/>
+          <a:p>
+            <a:pPr algn="l"/>
+            <a:r>
+              <a:rPr sz="900" b="0" i="0">
+                <a:solidFill>
+                  <a:srgbClr val="CAD3DF"/>
+                </a:solidFill>
+              </a:rPr>
+              <a:t>1.0×10⁷</a:t>
+            </a:r>
+          </a:p>
+        </p:txBody>
+      </p:sp>
+      <p:sp>
+        <p:nvSpPr>
+          <p:cNvPr id="49" name="TextBox 48"/>
+          <p:cNvSpPr txBox="1"/>
+          <p:nvPr/>
+        </p:nvSpPr>
+        <p:spPr>
+          <a:xfrm>
+            <a:off x="10104120" y="3346704"/>
+            <a:ext cx="731520" cy="292608"/>
+          </a:xfrm>
+          <a:prstGeom prst="rect">
+            <a:avLst/>
+          </a:prstGeom>
+          <a:noFill/>
+        </p:spPr>
+        <p:txBody>
+          <a:bodyPr wrap="square">
+            <a:spAutoFit/>
+          </a:bodyPr>
+          <a:lstStyle/>
+          <a:p>
+            <a:pPr algn="l"/>
+            <a:r>
+              <a:rPr sz="900" b="0" i="0">
+                <a:solidFill>
+                  <a:srgbClr val="CAD3DF"/>
+                </a:solidFill>
+              </a:rPr>
+              <a:t>0.05</a:t>
+            </a:r>
+          </a:p>
+        </p:txBody>
+      </p:sp>
+      <p:sp>
+        <p:nvSpPr>
+          <p:cNvPr id="50" name="Rectangle 49"/>
+          <p:cNvSpPr/>
+          <p:nvPr/>
+        </p:nvSpPr>
+        <p:spPr>
+          <a:xfrm>
+            <a:off x="5486400" y="3657600"/>
+            <a:ext cx="6400800" cy="347472"/>
+          </a:xfrm>
+          <a:prstGeom prst="rect">
+            <a:avLst/>
+          </a:prstGeom>
+          <a:solidFill>
+            <a:srgbClr val="112A40"/>
+          </a:solidFill>
+          <a:ln>
+            <a:noFill/>
+          </a:ln>
+        </p:spPr>
+        <p:style>
+          <a:lnRef idx="1">
+            <a:schemeClr val="accent1"/>
+          </a:lnRef>
+          <a:fillRef idx="3">
+            <a:schemeClr val="accent1"/>
+          </a:fillRef>
+          <a:effectRef idx="2">
+            <a:schemeClr val="accent1"/>
+          </a:effectRef>
+          <a:fontRef idx="minor">
+            <a:schemeClr val="lt1"/>
+          </a:fontRef>
+        </p:style>
+        <p:txBody>
+          <a:bodyPr rtlCol="0" anchor="ctr"/>
+          <a:lstStyle/>
+          <a:p>
+            <a:pPr algn="ctr"/>
+          </a:p>
+        </p:txBody>
+      </p:sp>
+      <p:sp>
+        <p:nvSpPr>
+          <p:cNvPr id="51" name="TextBox 50"/>
+          <p:cNvSpPr txBox="1"/>
+          <p:nvPr/>
+        </p:nvSpPr>
+        <p:spPr>
+          <a:xfrm>
+            <a:off x="5623560" y="3694176"/>
+            <a:ext cx="2377440" cy="292608"/>
+          </a:xfrm>
+          <a:prstGeom prst="rect">
+            <a:avLst/>
+          </a:prstGeom>
+          <a:noFill/>
+        </p:spPr>
+        <p:txBody>
+          <a:bodyPr wrap="square">
+            <a:spAutoFit/>
+          </a:bodyPr>
+          <a:lstStyle/>
+          <a:p>
+            <a:pPr algn="l"/>
+            <a:r>
+              <a:rPr sz="900" b="0" i="0">
+                <a:solidFill>
+                  <a:srgbClr val="FFFFFF"/>
+                </a:solidFill>
+              </a:rPr>
+              <a:t>itu_asphalt</a:t>
+            </a:r>
+          </a:p>
+        </p:txBody>
+      </p:sp>
+      <p:sp>
+        <p:nvSpPr>
+          <p:cNvPr id="52" name="TextBox 51"/>
+          <p:cNvSpPr txBox="1"/>
+          <p:nvPr/>
+        </p:nvSpPr>
+        <p:spPr>
+          <a:xfrm>
+            <a:off x="8092440" y="3694176"/>
+            <a:ext cx="822960" cy="292608"/>
+          </a:xfrm>
+          <a:prstGeom prst="rect">
+            <a:avLst/>
+          </a:prstGeom>
+          <a:noFill/>
+        </p:spPr>
+        <p:txBody>
+          <a:bodyPr wrap="square">
+            <a:spAutoFit/>
+          </a:bodyPr>
+          <a:lstStyle/>
+          <a:p>
+            <a:pPr algn="l"/>
+            <a:r>
+              <a:rPr sz="900" b="0" i="0">
+                <a:solidFill>
+                  <a:srgbClr val="CAD3DF"/>
+                </a:solidFill>
+              </a:rPr>
+              <a:t>2.56</a:t>
+            </a:r>
+          </a:p>
+        </p:txBody>
+      </p:sp>
+      <p:sp>
+        <p:nvSpPr>
+          <p:cNvPr id="53" name="TextBox 52"/>
+          <p:cNvSpPr txBox="1"/>
+          <p:nvPr/>
+        </p:nvSpPr>
+        <p:spPr>
+          <a:xfrm>
+            <a:off x="9006840" y="3694176"/>
+            <a:ext cx="1005840" cy="292608"/>
+          </a:xfrm>
+          <a:prstGeom prst="rect">
+            <a:avLst/>
+          </a:prstGeom>
+          <a:noFill/>
+        </p:spPr>
+        <p:txBody>
+          <a:bodyPr wrap="square">
+            <a:spAutoFit/>
+          </a:bodyPr>
+          <a:lstStyle/>
+          <a:p>
+            <a:pPr algn="l"/>
+            <a:r>
+              <a:rPr sz="900" b="0" i="0">
+                <a:solidFill>
+                  <a:srgbClr val="CAD3DF"/>
+                </a:solidFill>
+              </a:rPr>
+              <a:t>0.0050</a:t>
+            </a:r>
+          </a:p>
+        </p:txBody>
+      </p:sp>
+      <p:sp>
+        <p:nvSpPr>
+          <p:cNvPr id="54" name="TextBox 53"/>
+          <p:cNvSpPr txBox="1"/>
+          <p:nvPr/>
+        </p:nvSpPr>
+        <p:spPr>
+          <a:xfrm>
+            <a:off x="10104120" y="3694176"/>
+            <a:ext cx="731520" cy="292608"/>
+          </a:xfrm>
+          <a:prstGeom prst="rect">
+            <a:avLst/>
+          </a:prstGeom>
+          <a:noFill/>
+        </p:spPr>
+        <p:txBody>
+          <a:bodyPr wrap="square">
+            <a:spAutoFit/>
+          </a:bodyPr>
+          <a:lstStyle/>
+          <a:p>
+            <a:pPr algn="l"/>
+            <a:r>
+              <a:rPr sz="900" b="0" i="0">
+                <a:solidFill>
+                  <a:srgbClr val="CAD3DF"/>
+                </a:solidFill>
+              </a:rPr>
+              <a:t>0.30</a:t>
+            </a:r>
+          </a:p>
+        </p:txBody>
+      </p:sp>
+      <p:sp>
+        <p:nvSpPr>
+          <p:cNvPr id="55" name="Rectangle 54"/>
+          <p:cNvSpPr/>
+          <p:nvPr/>
+        </p:nvSpPr>
+        <p:spPr>
+          <a:xfrm>
+            <a:off x="5486400" y="4005072"/>
+            <a:ext cx="6400800" cy="347472"/>
+          </a:xfrm>
+          <a:prstGeom prst="rect">
+            <a:avLst/>
+          </a:prstGeom>
+          <a:solidFill>
+            <a:srgbClr val="0D1B2A"/>
+          </a:solidFill>
+          <a:ln>
+            <a:noFill/>
+          </a:ln>
+        </p:spPr>
+        <p:style>
+          <a:lnRef idx="1">
+            <a:schemeClr val="accent1"/>
+          </a:lnRef>
+          <a:fillRef idx="3">
+            <a:schemeClr val="accent1"/>
+          </a:fillRef>
+          <a:effectRef idx="2">
+            <a:schemeClr val="accent1"/>
+          </a:effectRef>
+          <a:fontRef idx="minor">
+            <a:schemeClr val="lt1"/>
+          </a:fontRef>
+        </p:style>
+        <p:txBody>
+          <a:bodyPr rtlCol="0" anchor="ctr"/>
+          <a:lstStyle/>
+          <a:p>
+            <a:pPr algn="ctr"/>
+          </a:p>
+        </p:txBody>
+      </p:sp>
+      <p:sp>
+        <p:nvSpPr>
+          <p:cNvPr id="56" name="TextBox 55"/>
+          <p:cNvSpPr txBox="1"/>
+          <p:nvPr/>
+        </p:nvSpPr>
+        <p:spPr>
+          <a:xfrm>
+            <a:off x="5623560" y="4041648"/>
+            <a:ext cx="2377440" cy="292608"/>
+          </a:xfrm>
+          <a:prstGeom prst="rect">
+            <a:avLst/>
+          </a:prstGeom>
+          <a:noFill/>
+        </p:spPr>
+        <p:txBody>
+          <a:bodyPr wrap="square">
+            <a:spAutoFit/>
+          </a:bodyPr>
+          <a:lstStyle/>
+          <a:p>
+            <a:pPr algn="l"/>
+            <a:r>
+              <a:rPr sz="900" b="0" i="0">
+                <a:solidFill>
+                  <a:srgbClr val="FFFFFF"/>
+                </a:solidFill>
+              </a:rPr>
+              <a:t>itu_vegetation</a:t>
+            </a:r>
+          </a:p>
+        </p:txBody>
+      </p:sp>
+      <p:sp>
+        <p:nvSpPr>
+          <p:cNvPr id="57" name="TextBox 56"/>
+          <p:cNvSpPr txBox="1"/>
+          <p:nvPr/>
+        </p:nvSpPr>
+        <p:spPr>
+          <a:xfrm>
+            <a:off x="8092440" y="4041648"/>
+            <a:ext cx="822960" cy="292608"/>
+          </a:xfrm>
+          <a:prstGeom prst="rect">
+            <a:avLst/>
+          </a:prstGeom>
+          <a:noFill/>
+        </p:spPr>
+        <p:txBody>
+          <a:bodyPr wrap="square">
+            <a:spAutoFit/>
+          </a:bodyPr>
+          <a:lstStyle/>
+          <a:p>
+            <a:pPr algn="l"/>
+            <a:r>
+              <a:rPr sz="900" b="0" i="0">
+                <a:solidFill>
+                  <a:srgbClr val="CAD3DF"/>
+                </a:solidFill>
+              </a:rPr>
+              <a:t>1.50</a:t>
+            </a:r>
+          </a:p>
+        </p:txBody>
+      </p:sp>
+      <p:sp>
+        <p:nvSpPr>
+          <p:cNvPr id="58" name="TextBox 57"/>
+          <p:cNvSpPr txBox="1"/>
+          <p:nvPr/>
+        </p:nvSpPr>
+        <p:spPr>
+          <a:xfrm>
+            <a:off x="9006840" y="4041648"/>
+            <a:ext cx="1005840" cy="292608"/>
+          </a:xfrm>
+          <a:prstGeom prst="rect">
+            <a:avLst/>
+          </a:prstGeom>
+          <a:noFill/>
+        </p:spPr>
+        <p:txBody>
+          <a:bodyPr wrap="square">
+            <a:spAutoFit/>
+          </a:bodyPr>
+          <a:lstStyle/>
+          <a:p>
+            <a:pPr algn="l"/>
+            <a:r>
+              <a:rPr sz="900" b="0" i="0">
+                <a:solidFill>
+                  <a:srgbClr val="CAD3DF"/>
+                </a:solidFill>
+              </a:rPr>
+              <a:t>0.0019</a:t>
+            </a:r>
+          </a:p>
+        </p:txBody>
+      </p:sp>
+      <p:sp>
+        <p:nvSpPr>
+          <p:cNvPr id="59" name="TextBox 58"/>
+          <p:cNvSpPr txBox="1"/>
+          <p:nvPr/>
+        </p:nvSpPr>
+        <p:spPr>
+          <a:xfrm>
+            <a:off x="10104120" y="4041648"/>
+            <a:ext cx="731520" cy="292608"/>
+          </a:xfrm>
+          <a:prstGeom prst="rect">
+            <a:avLst/>
+          </a:prstGeom>
+          <a:noFill/>
+        </p:spPr>
+        <p:txBody>
+          <a:bodyPr wrap="square">
+            <a:spAutoFit/>
+          </a:bodyPr>
+          <a:lstStyle/>
+          <a:p>
+            <a:pPr algn="l"/>
+            <a:r>
+              <a:rPr sz="900" b="0" i="0">
+                <a:solidFill>
+                  <a:srgbClr val="CAD3DF"/>
+                </a:solidFill>
+              </a:rPr>
+              <a:t>0.40</a:t>
+            </a:r>
+          </a:p>
+        </p:txBody>
+      </p:sp>
+      <p:sp>
+        <p:nvSpPr>
+          <p:cNvPr id="60" name="Rectangle 59"/>
+          <p:cNvSpPr/>
+          <p:nvPr/>
+        </p:nvSpPr>
+        <p:spPr>
+          <a:xfrm>
+            <a:off x="5486400" y="4352544"/>
+            <a:ext cx="6400800" cy="347472"/>
+          </a:xfrm>
+          <a:prstGeom prst="rect">
+            <a:avLst/>
+          </a:prstGeom>
+          <a:solidFill>
+            <a:srgbClr val="112A40"/>
+          </a:solidFill>
+          <a:ln>
+            <a:noFill/>
+          </a:ln>
+        </p:spPr>
+        <p:style>
+          <a:lnRef idx="1">
+            <a:schemeClr val="accent1"/>
+          </a:lnRef>
+          <a:fillRef idx="3">
+            <a:schemeClr val="accent1"/>
+          </a:fillRef>
+          <a:effectRef idx="2">
+            <a:schemeClr val="accent1"/>
+          </a:effectRef>
+          <a:fontRef idx="minor">
+            <a:schemeClr val="lt1"/>
+          </a:fontRef>
+        </p:style>
+        <p:txBody>
+          <a:bodyPr rtlCol="0" anchor="ctr"/>
+          <a:lstStyle/>
+          <a:p>
+            <a:pPr algn="ctr"/>
+          </a:p>
+        </p:txBody>
+      </p:sp>
+      <p:sp>
+        <p:nvSpPr>
+          <p:cNvPr id="61" name="TextBox 60"/>
+          <p:cNvSpPr txBox="1"/>
+          <p:nvPr/>
+        </p:nvSpPr>
+        <p:spPr>
+          <a:xfrm>
+            <a:off x="5623560" y="4389120"/>
+            <a:ext cx="2377440" cy="292608"/>
+          </a:xfrm>
+          <a:prstGeom prst="rect">
+            <a:avLst/>
+          </a:prstGeom>
+          <a:noFill/>
+        </p:spPr>
+        <p:txBody>
+          <a:bodyPr wrap="square">
+            <a:spAutoFit/>
+          </a:bodyPr>
+          <a:lstStyle/>
+          <a:p>
+            <a:pPr algn="l"/>
+            <a:r>
+              <a:rPr sz="900" b="0" i="0">
+                <a:solidFill>
+                  <a:srgbClr val="FFFFFF"/>
+                </a:solidFill>
+              </a:rPr>
+              <a:t>itu_wet_ground</a:t>
+            </a:r>
+          </a:p>
+        </p:txBody>
+      </p:sp>
+      <p:sp>
+        <p:nvSpPr>
+          <p:cNvPr id="62" name="TextBox 61"/>
+          <p:cNvSpPr txBox="1"/>
+          <p:nvPr/>
+        </p:nvSpPr>
+        <p:spPr>
+          <a:xfrm>
+            <a:off x="8092440" y="4389120"/>
+            <a:ext cx="822960" cy="292608"/>
+          </a:xfrm>
+          <a:prstGeom prst="rect">
+            <a:avLst/>
+          </a:prstGeom>
+          <a:noFill/>
+        </p:spPr>
+        <p:txBody>
+          <a:bodyPr wrap="square">
+            <a:spAutoFit/>
+          </a:bodyPr>
+          <a:lstStyle/>
+          <a:p>
+            <a:pPr algn="l"/>
+            <a:r>
+              <a:rPr sz="900" b="0" i="0">
+                <a:solidFill>
+                  <a:srgbClr val="CAD3DF"/>
+                </a:solidFill>
+              </a:rPr>
+              <a:t>31.07</a:t>
+            </a:r>
+          </a:p>
+        </p:txBody>
+      </p:sp>
+      <p:sp>
+        <p:nvSpPr>
+          <p:cNvPr id="63" name="TextBox 62"/>
+          <p:cNvSpPr txBox="1"/>
+          <p:nvPr/>
+        </p:nvSpPr>
+        <p:spPr>
+          <a:xfrm>
+            <a:off x="9006840" y="4389120"/>
+            <a:ext cx="1005840" cy="292608"/>
+          </a:xfrm>
+          <a:prstGeom prst="rect">
+            <a:avLst/>
+          </a:prstGeom>
+          <a:noFill/>
+        </p:spPr>
+        <p:txBody>
+          <a:bodyPr wrap="square">
+            <a:spAutoFit/>
+          </a:bodyPr>
+          <a:lstStyle/>
+          <a:p>
+            <a:pPr algn="l"/>
+            <a:r>
+              <a:rPr sz="900" b="0" i="0">
+                <a:solidFill>
+                  <a:srgbClr val="CAD3DF"/>
+                </a:solidFill>
+              </a:rPr>
+              <a:t>0.1338</a:t>
+            </a:r>
+          </a:p>
+        </p:txBody>
+      </p:sp>
+      <p:sp>
+        <p:nvSpPr>
+          <p:cNvPr id="64" name="TextBox 63"/>
+          <p:cNvSpPr txBox="1"/>
+          <p:nvPr/>
+        </p:nvSpPr>
+        <p:spPr>
+          <a:xfrm>
+            <a:off x="10104120" y="4389120"/>
+            <a:ext cx="731520" cy="292608"/>
+          </a:xfrm>
+          <a:prstGeom prst="rect">
+            <a:avLst/>
+          </a:prstGeom>
+          <a:noFill/>
+        </p:spPr>
+        <p:txBody>
+          <a:bodyPr wrap="square">
+            <a:spAutoFit/>
+          </a:bodyPr>
+          <a:lstStyle/>
+          <a:p>
+            <a:pPr algn="l"/>
+            <a:r>
+              <a:rPr sz="900" b="0" i="0">
+                <a:solidFill>
+                  <a:srgbClr val="CAD3DF"/>
+                </a:solidFill>
+              </a:rPr>
+              <a:t>0.35</a:t>
+            </a:r>
+          </a:p>
+        </p:txBody>
+      </p:sp>
+      <p:sp>
+        <p:nvSpPr>
+          <p:cNvPr id="65" name="Rectangle 64"/>
+          <p:cNvSpPr/>
+          <p:nvPr/>
+        </p:nvSpPr>
+        <p:spPr>
+          <a:xfrm>
+            <a:off x="5486400" y="4700016"/>
+            <a:ext cx="6400800" cy="347472"/>
+          </a:xfrm>
+          <a:prstGeom prst="rect">
+            <a:avLst/>
+          </a:prstGeom>
+          <a:solidFill>
+            <a:srgbClr val="0D1B2A"/>
+          </a:solidFill>
+          <a:ln>
+            <a:noFill/>
+          </a:ln>
+        </p:spPr>
+        <p:style>
+          <a:lnRef idx="1">
+            <a:schemeClr val="accent1"/>
+          </a:lnRef>
+          <a:fillRef idx="3">
+            <a:schemeClr val="accent1"/>
+          </a:fillRef>
+          <a:effectRef idx="2">
+            <a:schemeClr val="accent1"/>
+          </a:effectRef>
+          <a:fontRef idx="minor">
+            <a:schemeClr val="lt1"/>
+          </a:fontRef>
+        </p:style>
+        <p:txBody>
+          <a:bodyPr rtlCol="0" anchor="ctr"/>
+          <a:lstStyle/>
+          <a:p>
+            <a:pPr algn="ctr"/>
+          </a:p>
+        </p:txBody>
+      </p:sp>
+      <p:sp>
+        <p:nvSpPr>
+          <p:cNvPr id="66" name="TextBox 65"/>
+          <p:cNvSpPr txBox="1"/>
+          <p:nvPr/>
+        </p:nvSpPr>
+        <p:spPr>
+          <a:xfrm>
+            <a:off x="5623560" y="4736592"/>
+            <a:ext cx="2377440" cy="292608"/>
+          </a:xfrm>
+          <a:prstGeom prst="rect">
+            <a:avLst/>
+          </a:prstGeom>
+          <a:noFill/>
+        </p:spPr>
+        <p:txBody>
+          <a:bodyPr wrap="square">
+            <a:spAutoFit/>
+          </a:bodyPr>
+          <a:lstStyle/>
+          <a:p>
+            <a:pPr algn="l"/>
+            <a:r>
+              <a:rPr sz="900" b="0" i="0">
+                <a:solidFill>
+                  <a:srgbClr val="FFFFFF"/>
+                </a:solidFill>
+              </a:rPr>
+              <a:t>itu_water</a:t>
+            </a:r>
+          </a:p>
+        </p:txBody>
+      </p:sp>
+      <p:sp>
+        <p:nvSpPr>
+          <p:cNvPr id="67" name="TextBox 66"/>
+          <p:cNvSpPr txBox="1"/>
+          <p:nvPr/>
+        </p:nvSpPr>
+        <p:spPr>
+          <a:xfrm>
+            <a:off x="8092440" y="4736592"/>
+            <a:ext cx="822960" cy="292608"/>
+          </a:xfrm>
+          <a:prstGeom prst="rect">
+            <a:avLst/>
+          </a:prstGeom>
+          <a:noFill/>
+        </p:spPr>
+        <p:txBody>
+          <a:bodyPr wrap="square">
+            <a:spAutoFit/>
+          </a:bodyPr>
+          <a:lstStyle/>
+          <a:p>
+            <a:pPr algn="l"/>
+            <a:r>
+              <a:rPr sz="900" b="0" i="0">
+                <a:solidFill>
+                  <a:srgbClr val="CAD3DF"/>
+                </a:solidFill>
+              </a:rPr>
+              <a:t>80.00</a:t>
+            </a:r>
+          </a:p>
+        </p:txBody>
+      </p:sp>
+      <p:sp>
+        <p:nvSpPr>
+          <p:cNvPr id="68" name="TextBox 67"/>
+          <p:cNvSpPr txBox="1"/>
+          <p:nvPr/>
+        </p:nvSpPr>
+        <p:spPr>
+          <a:xfrm>
+            <a:off x="9006840" y="4736592"/>
+            <a:ext cx="1005840" cy="292608"/>
+          </a:xfrm>
+          <a:prstGeom prst="rect">
+            <a:avLst/>
+          </a:prstGeom>
+          <a:noFill/>
+        </p:spPr>
+        <p:txBody>
+          <a:bodyPr wrap="square">
+            <a:spAutoFit/>
+          </a:bodyPr>
+          <a:lstStyle/>
+          <a:p>
+            <a:pPr algn="l"/>
+            <a:r>
+              <a:rPr sz="900" b="0" i="0">
+                <a:solidFill>
+                  <a:srgbClr val="CAD3DF"/>
+                </a:solidFill>
+              </a:rPr>
+              <a:t>0.0100</a:t>
+            </a:r>
+          </a:p>
+        </p:txBody>
+      </p:sp>
+      <p:sp>
+        <p:nvSpPr>
+          <p:cNvPr id="69" name="TextBox 68"/>
+          <p:cNvSpPr txBox="1"/>
+          <p:nvPr/>
+        </p:nvSpPr>
+        <p:spPr>
+          <a:xfrm>
+            <a:off x="10104120" y="4736592"/>
+            <a:ext cx="731520" cy="292608"/>
+          </a:xfrm>
+          <a:prstGeom prst="rect">
+            <a:avLst/>
+          </a:prstGeom>
+          <a:noFill/>
+        </p:spPr>
+        <p:txBody>
+          <a:bodyPr wrap="square">
+            <a:spAutoFit/>
+          </a:bodyPr>
+          <a:lstStyle/>
+          <a:p>
+            <a:pPr algn="l"/>
+            <a:r>
+              <a:rPr sz="900" b="0" i="0">
+                <a:solidFill>
+                  <a:srgbClr val="CAD3DF"/>
+                </a:solidFill>
+              </a:rPr>
+              <a:t>0.03</a:t>
+            </a:r>
+          </a:p>
+        </p:txBody>
+      </p:sp>
+      <p:sp>
+        <p:nvSpPr>
+          <p:cNvPr id="70" name="Rectangle 69"/>
+          <p:cNvSpPr/>
+          <p:nvPr/>
+        </p:nvSpPr>
+        <p:spPr>
+          <a:xfrm>
+            <a:off x="5486400" y="5047488"/>
+            <a:ext cx="6400800" cy="347472"/>
+          </a:xfrm>
+          <a:prstGeom prst="rect">
+            <a:avLst/>
+          </a:prstGeom>
+          <a:solidFill>
+            <a:srgbClr val="112A40"/>
+          </a:solidFill>
+          <a:ln>
+            <a:noFill/>
+          </a:ln>
+        </p:spPr>
+        <p:style>
+          <a:lnRef idx="1">
+            <a:schemeClr val="accent1"/>
+          </a:lnRef>
+          <a:fillRef idx="3">
+            <a:schemeClr val="accent1"/>
+          </a:fillRef>
+          <a:effectRef idx="2">
+            <a:schemeClr val="accent1"/>
+          </a:effectRef>
+          <a:fontRef idx="minor">
+            <a:schemeClr val="lt1"/>
+          </a:fontRef>
+        </p:style>
+        <p:txBody>
+          <a:bodyPr rtlCol="0" anchor="ctr"/>
+          <a:lstStyle/>
+          <a:p>
+            <a:pPr algn="ctr"/>
+          </a:p>
+        </p:txBody>
+      </p:sp>
+      <p:sp>
+        <p:nvSpPr>
+          <p:cNvPr id="71" name="TextBox 70"/>
+          <p:cNvSpPr txBox="1"/>
+          <p:nvPr/>
+        </p:nvSpPr>
+        <p:spPr>
+          <a:xfrm>
+            <a:off x="5623560" y="5084064"/>
+            <a:ext cx="2377440" cy="292608"/>
+          </a:xfrm>
+          <a:prstGeom prst="rect">
+            <a:avLst/>
+          </a:prstGeom>
+          <a:noFill/>
+        </p:spPr>
+        <p:txBody>
+          <a:bodyPr wrap="square">
+            <a:spAutoFit/>
+          </a:bodyPr>
+          <a:lstStyle/>
+          <a:p>
+            <a:pPr algn="l"/>
+            <a:r>
+              <a:rPr sz="900" b="0" i="0">
+                <a:solidFill>
+                  <a:srgbClr val="FFFFFF"/>
+                </a:solidFill>
+              </a:rPr>
+              <a:t>itu_wood</a:t>
+            </a:r>
+          </a:p>
+        </p:txBody>
+      </p:sp>
+      <p:sp>
+        <p:nvSpPr>
+          <p:cNvPr id="72" name="TextBox 71"/>
+          <p:cNvSpPr txBox="1"/>
+          <p:nvPr/>
+        </p:nvSpPr>
+        <p:spPr>
+          <a:xfrm>
+            <a:off x="8092440" y="5084064"/>
+            <a:ext cx="822960" cy="292608"/>
+          </a:xfrm>
+          <a:prstGeom prst="rect">
+            <a:avLst/>
+          </a:prstGeom>
+          <a:noFill/>
+        </p:spPr>
+        <p:txBody>
+          <a:bodyPr wrap="square">
+            <a:spAutoFit/>
+          </a:bodyPr>
+          <a:lstStyle/>
+          <a:p>
+            <a:pPr algn="l"/>
+            <a:r>
+              <a:rPr sz="900" b="0" i="0">
+                <a:solidFill>
+                  <a:srgbClr val="CAD3DF"/>
+                </a:solidFill>
+              </a:rPr>
+              <a:t>1.99</a:t>
+            </a:r>
+          </a:p>
+        </p:txBody>
+      </p:sp>
+      <p:sp>
+        <p:nvSpPr>
+          <p:cNvPr id="73" name="TextBox 72"/>
+          <p:cNvSpPr txBox="1"/>
+          <p:nvPr/>
+        </p:nvSpPr>
+        <p:spPr>
+          <a:xfrm>
+            <a:off x="9006840" y="5084064"/>
+            <a:ext cx="1005840" cy="292608"/>
+          </a:xfrm>
+          <a:prstGeom prst="rect">
+            <a:avLst/>
+          </a:prstGeom>
+          <a:noFill/>
+        </p:spPr>
+        <p:txBody>
+          <a:bodyPr wrap="square">
+            <a:spAutoFit/>
+          </a:bodyPr>
+          <a:lstStyle/>
+          <a:p>
+            <a:pPr algn="l"/>
+            <a:r>
+              <a:rPr sz="900" b="0" i="0">
+                <a:solidFill>
+                  <a:srgbClr val="CAD3DF"/>
+                </a:solidFill>
+              </a:rPr>
+              <a:t>0.0043</a:t>
+            </a:r>
+          </a:p>
+        </p:txBody>
+      </p:sp>
+      <p:sp>
+        <p:nvSpPr>
+          <p:cNvPr id="74" name="TextBox 73"/>
+          <p:cNvSpPr txBox="1"/>
+          <p:nvPr/>
+        </p:nvSpPr>
+        <p:spPr>
+          <a:xfrm>
+            <a:off x="10104120" y="5084064"/>
+            <a:ext cx="731520" cy="292608"/>
+          </a:xfrm>
+          <a:prstGeom prst="rect">
+            <a:avLst/>
+          </a:prstGeom>
+          <a:noFill/>
+        </p:spPr>
+        <p:txBody>
+          <a:bodyPr wrap="square">
+            <a:spAutoFit/>
+          </a:bodyPr>
+          <a:lstStyle/>
+          <a:p>
+            <a:pPr algn="l"/>
+            <a:r>
+              <a:rPr sz="900" b="0" i="0">
+                <a:solidFill>
+                  <a:srgbClr val="CAD3DF"/>
+                </a:solidFill>
+              </a:rPr>
+              <a:t>0.15</a:t>
+            </a:r>
+          </a:p>
+        </p:txBody>
+      </p:sp>
+      <p:sp>
+        <p:nvSpPr>
+          <p:cNvPr id="75" name="TextBox 74"/>
+          <p:cNvSpPr txBox="1"/>
+          <p:nvPr/>
+        </p:nvSpPr>
+        <p:spPr>
+          <a:xfrm>
+            <a:off x="5623560" y="5486400"/>
+            <a:ext cx="6126480" cy="347472"/>
+          </a:xfrm>
+          <a:prstGeom prst="rect">
+            <a:avLst/>
+          </a:prstGeom>
+          <a:noFill/>
+        </p:spPr>
+        <p:txBody>
+          <a:bodyPr wrap="square">
+            <a:spAutoFit/>
+          </a:bodyPr>
+          <a:lstStyle/>
+          <a:p>
+            <a:pPr algn="l"/>
+            <a:r>
+              <a:rPr sz="1100" b="1" i="0">
+                <a:solidFill>
+                  <a:srgbClr val="FF9F1C"/>
+                </a:solidFill>
+              </a:rPr>
+              <a:t>Target: RMSE &lt; 10 dB  (from 14.12 dB baseline)</a:t>
+            </a:r>
+          </a:p>
+        </p:txBody>
+      </p:sp>
+    </p:spTree>
+  </p:cSld>
+  <p:clrMapOvr>
+    <a:masterClrMapping/>
+  </p:clrMapOvr>
+</p:sld>
+</file>
+
+<file path=ppt/slides/slide17.xml><?xml version="1.0" encoding="utf-8"?>
+<p:sld xmlns:a="http://schemas.openxmlformats.org/drawingml/2006/main" xmlns:p="http://schemas.openxmlformats.org/presentationml/2006/main" xmlns:r="http://schemas.openxmlformats.org/officeDocument/2006/relationships">
+  <p:cSld>
+    <p:bg>
+      <p:bgPr>
+        <a:solidFill>
+          <a:srgbClr val="0D1B2A"/>
+        </a:solidFill>
+        <a:effectLst/>
+      </p:bgPr>
+    </p:bg>
+    <p:spTree>
+      <p:nvGrpSpPr>
+        <p:cNvPr id="1" name=""/>
+        <p:cNvGrpSpPr/>
+        <p:nvPr/>
+      </p:nvGrpSpPr>
+      <p:grpSpPr/>
+      <p:sp>
+        <p:nvSpPr>
+          <p:cNvPr id="2" name="Rectangle 1"/>
+          <p:cNvSpPr/>
+          <p:nvPr/>
+        </p:nvSpPr>
+        <p:spPr>
+          <a:xfrm>
+            <a:off x="0" y="73152"/>
+            <a:ext cx="12188952" cy="54864"/>
+          </a:xfrm>
+          <a:prstGeom prst="rect">
+            <a:avLst/>
+          </a:prstGeom>
+          <a:solidFill>
+            <a:srgbClr val="00B4D8"/>
+          </a:solidFill>
+          <a:ln>
+            <a:noFill/>
+          </a:ln>
+        </p:spPr>
+        <p:style>
+          <a:lnRef idx="1">
+            <a:schemeClr val="accent1"/>
+          </a:lnRef>
+          <a:fillRef idx="3">
+            <a:schemeClr val="accent1"/>
+          </a:fillRef>
+          <a:effectRef idx="2">
+            <a:schemeClr val="accent1"/>
+          </a:effectRef>
+          <a:fontRef idx="minor">
+            <a:schemeClr val="lt1"/>
+          </a:fontRef>
+        </p:style>
+        <p:txBody>
+          <a:bodyPr rtlCol="0" anchor="ctr"/>
+          <a:lstStyle/>
+          <a:p>
+            <a:pPr algn="ctr"/>
+          </a:p>
+        </p:txBody>
+      </p:sp>
+      <p:sp>
+        <p:nvSpPr>
+          <p:cNvPr id="3" name="TextBox 2"/>
+          <p:cNvSpPr txBox="1"/>
+          <p:nvPr/>
+        </p:nvSpPr>
+        <p:spPr>
+          <a:xfrm>
+            <a:off x="320040" y="201168"/>
+            <a:ext cx="3657600" cy="256032"/>
+          </a:xfrm>
+          <a:prstGeom prst="rect">
+            <a:avLst/>
+          </a:prstGeom>
+          <a:noFill/>
+        </p:spPr>
+        <p:txBody>
+          <a:bodyPr wrap="square">
+            <a:spAutoFit/>
+          </a:bodyPr>
+          <a:lstStyle/>
+          <a:p>
+            <a:pPr algn="l"/>
+            <a:r>
+              <a:rPr sz="800" b="1" i="0">
+                <a:solidFill>
+                  <a:srgbClr val="00B4D8"/>
+                </a:solidFill>
+              </a:rPr>
+              <a:t>ANTENNA CONFIG</a:t>
+            </a:r>
+          </a:p>
+        </p:txBody>
+      </p:sp>
+      <p:sp>
+        <p:nvSpPr>
+          <p:cNvPr id="4" name="TextBox 3"/>
+          <p:cNvSpPr txBox="1"/>
+          <p:nvPr/>
+        </p:nvSpPr>
+        <p:spPr>
+          <a:xfrm>
+            <a:off x="10972800" y="6492240"/>
+            <a:ext cx="1097280" cy="320040"/>
+          </a:xfrm>
+          <a:prstGeom prst="rect">
+            <a:avLst/>
+          </a:prstGeom>
+          <a:noFill/>
+        </p:spPr>
+        <p:txBody>
+          <a:bodyPr wrap="square">
+            <a:spAutoFit/>
+          </a:bodyPr>
+          <a:lstStyle/>
+          <a:p>
+            <a:pPr algn="r"/>
+            <a:r>
+              <a:rPr sz="900" b="0" i="0">
+                <a:solidFill>
+                  <a:srgbClr val="CAD3DF"/>
+                </a:solidFill>
+              </a:rPr>
+              <a:t>17 / 12</a:t>
+            </a:r>
+          </a:p>
+        </p:txBody>
+      </p:sp>
+      <p:sp>
+        <p:nvSpPr>
+          <p:cNvPr id="5" name="TextBox 4"/>
+          <p:cNvSpPr txBox="1"/>
+          <p:nvPr/>
+        </p:nvSpPr>
+        <p:spPr>
+          <a:xfrm>
+            <a:off x="411480" y="457200"/>
+            <a:ext cx="11430000" cy="640080"/>
+          </a:xfrm>
+          <a:prstGeom prst="rect">
+            <a:avLst/>
+          </a:prstGeom>
+          <a:noFill/>
+        </p:spPr>
+        <p:txBody>
+          <a:bodyPr wrap="square">
+            <a:spAutoFit/>
+          </a:bodyPr>
+          <a:lstStyle/>
+          <a:p>
+            <a:pPr algn="l"/>
+            <a:r>
+              <a:rPr sz="2800" b="1" i="0">
+                <a:solidFill>
+                  <a:srgbClr val="FFFFFF"/>
+                </a:solidFill>
+              </a:rPr>
+              <a:t>Antenna Configuration — TX &amp; RX Specifications</a:t>
+            </a:r>
+          </a:p>
+        </p:txBody>
+      </p:sp>
+      <p:sp>
+        <p:nvSpPr>
+          <p:cNvPr id="6" name="Rectangle 5"/>
+          <p:cNvSpPr/>
+          <p:nvPr/>
+        </p:nvSpPr>
+        <p:spPr>
+          <a:xfrm>
+            <a:off x="411480" y="1078992"/>
+            <a:ext cx="11338560" cy="16459"/>
+          </a:xfrm>
+          <a:prstGeom prst="rect">
+            <a:avLst/>
+          </a:prstGeom>
+          <a:solidFill>
+            <a:srgbClr val="1E3A52"/>
+          </a:solidFill>
+          <a:ln>
+            <a:noFill/>
+          </a:ln>
+        </p:spPr>
+        <p:style>
+          <a:lnRef idx="1">
+            <a:schemeClr val="accent1"/>
+          </a:lnRef>
+          <a:fillRef idx="3">
+            <a:schemeClr val="accent1"/>
+          </a:fillRef>
+          <a:effectRef idx="2">
+            <a:schemeClr val="accent1"/>
+          </a:effectRef>
+          <a:fontRef idx="minor">
+            <a:schemeClr val="lt1"/>
+          </a:fontRef>
+        </p:style>
+        <p:txBody>
+          <a:bodyPr rtlCol="0" anchor="ctr"/>
+          <a:lstStyle/>
+          <a:p>
+            <a:pPr algn="ctr"/>
+          </a:p>
+        </p:txBody>
+      </p:sp>
+      <p:sp>
+        <p:nvSpPr>
+          <p:cNvPr id="7" name="Rectangle 6"/>
+          <p:cNvSpPr/>
+          <p:nvPr/>
+        </p:nvSpPr>
+        <p:spPr>
+          <a:xfrm>
+            <a:off x="320040" y="1234440"/>
+            <a:ext cx="5394960" cy="3200400"/>
+          </a:xfrm>
+          <a:prstGeom prst="rect">
+            <a:avLst/>
+          </a:prstGeom>
+          <a:solidFill>
+            <a:srgbClr val="112A40"/>
+          </a:solidFill>
+          <a:ln>
+            <a:noFill/>
+          </a:ln>
+        </p:spPr>
+        <p:style>
+          <a:lnRef idx="1">
+            <a:schemeClr val="accent1"/>
+          </a:lnRef>
+          <a:fillRef idx="3">
+            <a:schemeClr val="accent1"/>
+          </a:fillRef>
+          <a:effectRef idx="2">
+            <a:schemeClr val="accent1"/>
+          </a:effectRef>
+          <a:fontRef idx="minor">
+            <a:schemeClr val="lt1"/>
+          </a:fontRef>
+        </p:style>
+        <p:txBody>
+          <a:bodyPr rtlCol="0" anchor="ctr"/>
+          <a:lstStyle/>
+          <a:p>
+            <a:pPr algn="ctr"/>
+          </a:p>
+        </p:txBody>
+      </p:sp>
+      <p:sp>
+        <p:nvSpPr>
+          <p:cNvPr id="8" name="Rectangle 7"/>
+          <p:cNvSpPr/>
+          <p:nvPr/>
+        </p:nvSpPr>
+        <p:spPr>
+          <a:xfrm>
+            <a:off x="320040" y="1234440"/>
+            <a:ext cx="5394960" cy="54864"/>
+          </a:xfrm>
+          <a:prstGeom prst="rect">
+            <a:avLst/>
+          </a:prstGeom>
+          <a:solidFill>
+            <a:srgbClr val="FF9F1C"/>
+          </a:solidFill>
+          <a:ln>
+            <a:noFill/>
+          </a:ln>
+        </p:spPr>
+        <p:style>
+          <a:lnRef idx="1">
+            <a:schemeClr val="accent1"/>
+          </a:lnRef>
+          <a:fillRef idx="3">
+            <a:schemeClr val="accent1"/>
+          </a:fillRef>
+          <a:effectRef idx="2">
+            <a:schemeClr val="accent1"/>
+          </a:effectRef>
+          <a:fontRef idx="minor">
+            <a:schemeClr val="lt1"/>
+          </a:fontRef>
+        </p:style>
+        <p:txBody>
+          <a:bodyPr rtlCol="0" anchor="ctr"/>
+          <a:lstStyle/>
+          <a:p>
+            <a:pPr algn="ctr"/>
+          </a:p>
+        </p:txBody>
+      </p:sp>
+      <p:sp>
+        <p:nvSpPr>
+          <p:cNvPr id="9" name="TextBox 8"/>
+          <p:cNvSpPr txBox="1"/>
+          <p:nvPr/>
+        </p:nvSpPr>
+        <p:spPr>
+          <a:xfrm>
+            <a:off x="457200" y="1371600"/>
+            <a:ext cx="5120640" cy="365760"/>
+          </a:xfrm>
+          <a:prstGeom prst="rect">
+            <a:avLst/>
+          </a:prstGeom>
+          <a:noFill/>
+        </p:spPr>
+        <p:txBody>
+          <a:bodyPr wrap="square">
+            <a:spAutoFit/>
+          </a:bodyPr>
+          <a:lstStyle/>
+          <a:p>
+            <a:pPr algn="l"/>
+            <a:r>
+              <a:rPr sz="1300" b="1" i="0">
+                <a:solidFill>
+                  <a:srgbClr val="FF9F1C"/>
+                </a:solidFill>
+              </a:rPr>
+              <a:t>TX — Transmitter Antenna</a:t>
+            </a:r>
+          </a:p>
+        </p:txBody>
+      </p:sp>
+      <p:sp>
+        <p:nvSpPr>
+          <p:cNvPr id="10" name="TextBox 9"/>
+          <p:cNvSpPr txBox="1"/>
+          <p:nvPr/>
+        </p:nvSpPr>
+        <p:spPr>
+          <a:xfrm>
+            <a:off x="457200" y="1874519"/>
+            <a:ext cx="1828800" cy="347472"/>
+          </a:xfrm>
+          <a:prstGeom prst="rect">
+            <a:avLst/>
+          </a:prstGeom>
+          <a:noFill/>
+        </p:spPr>
+        <p:txBody>
+          <a:bodyPr wrap="square">
+            <a:spAutoFit/>
+          </a:bodyPr>
+          <a:lstStyle/>
+          <a:p>
+            <a:pPr algn="l"/>
+            <a:r>
+              <a:rPr sz="1000" b="1" i="0">
+                <a:solidFill>
+                  <a:srgbClr val="90E0EF"/>
+                </a:solidFill>
+              </a:rPr>
+              <a:t>Type</a:t>
+            </a:r>
+          </a:p>
+        </p:txBody>
+      </p:sp>
+      <p:sp>
+        <p:nvSpPr>
+          <p:cNvPr id="11" name="TextBox 10"/>
+          <p:cNvSpPr txBox="1"/>
+          <p:nvPr/>
+        </p:nvSpPr>
+        <p:spPr>
+          <a:xfrm>
+            <a:off x="2286000" y="1874519"/>
+            <a:ext cx="3291840" cy="347472"/>
+          </a:xfrm>
+          <a:prstGeom prst="rect">
+            <a:avLst/>
+          </a:prstGeom>
+          <a:noFill/>
+        </p:spPr>
+        <p:txBody>
+          <a:bodyPr wrap="square">
+            <a:spAutoFit/>
+          </a:bodyPr>
+          <a:lstStyle/>
+          <a:p>
+            <a:pPr algn="l"/>
+            <a:r>
+              <a:rPr sz="1000" b="0" i="0">
+                <a:solidFill>
+                  <a:srgbClr val="FFFFFF"/>
+                </a:solidFill>
+              </a:rPr>
+              <a:t>Collinear omni (simulated as dipole)</a:t>
+            </a:r>
+          </a:p>
+        </p:txBody>
+      </p:sp>
+      <p:sp>
+        <p:nvSpPr>
+          <p:cNvPr id="12" name="TextBox 11"/>
+          <p:cNvSpPr txBox="1"/>
+          <p:nvPr/>
+        </p:nvSpPr>
+        <p:spPr>
+          <a:xfrm>
+            <a:off x="457200" y="2221991"/>
+            <a:ext cx="1828800" cy="347472"/>
+          </a:xfrm>
+          <a:prstGeom prst="rect">
+            <a:avLst/>
+          </a:prstGeom>
+          <a:noFill/>
+        </p:spPr>
+        <p:txBody>
+          <a:bodyPr wrap="square">
+            <a:spAutoFit/>
+          </a:bodyPr>
+          <a:lstStyle/>
+          <a:p>
+            <a:pPr algn="l"/>
+            <a:r>
+              <a:rPr sz="1000" b="1" i="0">
+                <a:solidFill>
+                  <a:srgbClr val="90E0EF"/>
+                </a:solidFill>
+              </a:rPr>
+              <a:t>Pattern</a:t>
+            </a:r>
+          </a:p>
+        </p:txBody>
+      </p:sp>
+      <p:sp>
+        <p:nvSpPr>
+          <p:cNvPr id="13" name="TextBox 12"/>
+          <p:cNvSpPr txBox="1"/>
+          <p:nvPr/>
+        </p:nvSpPr>
+        <p:spPr>
+          <a:xfrm>
+            <a:off x="2286000" y="2221991"/>
+            <a:ext cx="3291840" cy="347472"/>
+          </a:xfrm>
+          <a:prstGeom prst="rect">
+            <a:avLst/>
+          </a:prstGeom>
+          <a:noFill/>
+        </p:spPr>
+        <p:txBody>
+          <a:bodyPr wrap="square">
+            <a:spAutoFit/>
+          </a:bodyPr>
+          <a:lstStyle/>
+          <a:p>
+            <a:pPr algn="l"/>
+            <a:r>
+              <a:rPr sz="1000" b="0" i="0">
+                <a:solidFill>
+                  <a:srgbClr val="FFFFFF"/>
+                </a:solidFill>
+              </a:rPr>
+              <a:t>Donut — omni in azimuth, null at zenith</a:t>
+            </a:r>
+          </a:p>
+        </p:txBody>
+      </p:sp>
+      <p:sp>
+        <p:nvSpPr>
+          <p:cNvPr id="14" name="TextBox 13"/>
+          <p:cNvSpPr txBox="1"/>
+          <p:nvPr/>
+        </p:nvSpPr>
+        <p:spPr>
+          <a:xfrm>
+            <a:off x="457200" y="2569463"/>
+            <a:ext cx="1828800" cy="347472"/>
+          </a:xfrm>
+          <a:prstGeom prst="rect">
+            <a:avLst/>
+          </a:prstGeom>
+          <a:noFill/>
+        </p:spPr>
+        <p:txBody>
+          <a:bodyPr wrap="square">
+            <a:spAutoFit/>
+          </a:bodyPr>
+          <a:lstStyle/>
+          <a:p>
+            <a:pPr algn="l"/>
+            <a:r>
+              <a:rPr sz="1000" b="1" i="0">
+                <a:solidFill>
+                  <a:srgbClr val="90E0EF"/>
+                </a:solidFill>
+              </a:rPr>
+              <a:t>Gain</a:t>
+            </a:r>
+          </a:p>
+        </p:txBody>
+      </p:sp>
+      <p:sp>
+        <p:nvSpPr>
+          <p:cNvPr id="15" name="TextBox 14"/>
+          <p:cNvSpPr txBox="1"/>
+          <p:nvPr/>
+        </p:nvSpPr>
+        <p:spPr>
+          <a:xfrm>
+            <a:off x="2286000" y="2569463"/>
+            <a:ext cx="3291840" cy="347472"/>
+          </a:xfrm>
+          <a:prstGeom prst="rect">
+            <a:avLst/>
+          </a:prstGeom>
+          <a:noFill/>
+        </p:spPr>
+        <p:txBody>
+          <a:bodyPr wrap="square">
+            <a:spAutoFit/>
+          </a:bodyPr>
+          <a:lstStyle/>
+          <a:p>
+            <a:pPr algn="l"/>
+            <a:r>
+              <a:rPr sz="1000" b="0" i="0">
+                <a:solidFill>
+                  <a:srgbClr val="FFFFFF"/>
+                </a:solidFill>
+              </a:rPr>
+              <a:t>1.3 dBi</a:t>
+            </a:r>
+          </a:p>
+        </p:txBody>
+      </p:sp>
+      <p:sp>
+        <p:nvSpPr>
+          <p:cNvPr id="16" name="TextBox 15"/>
+          <p:cNvSpPr txBox="1"/>
+          <p:nvPr/>
+        </p:nvSpPr>
+        <p:spPr>
+          <a:xfrm>
+            <a:off x="457200" y="2916935"/>
+            <a:ext cx="1828800" cy="347472"/>
+          </a:xfrm>
+          <a:prstGeom prst="rect">
+            <a:avLst/>
+          </a:prstGeom>
+          <a:noFill/>
+        </p:spPr>
+        <p:txBody>
+          <a:bodyPr wrap="square">
+            <a:spAutoFit/>
+          </a:bodyPr>
+          <a:lstStyle/>
+          <a:p>
+            <a:pPr algn="l"/>
+            <a:r>
+              <a:rPr sz="1000" b="1" i="0">
+                <a:solidFill>
+                  <a:srgbClr val="90E0EF"/>
+                </a:solidFill>
+              </a:rPr>
+              <a:t>Polarisation</a:t>
+            </a:r>
+          </a:p>
+        </p:txBody>
+      </p:sp>
+      <p:sp>
+        <p:nvSpPr>
+          <p:cNvPr id="17" name="TextBox 16"/>
+          <p:cNvSpPr txBox="1"/>
+          <p:nvPr/>
+        </p:nvSpPr>
+        <p:spPr>
+          <a:xfrm>
+            <a:off x="2286000" y="2916935"/>
+            <a:ext cx="3291840" cy="347472"/>
+          </a:xfrm>
+          <a:prstGeom prst="rect">
+            <a:avLst/>
+          </a:prstGeom>
+          <a:noFill/>
+        </p:spPr>
+        <p:txBody>
+          <a:bodyPr wrap="square">
+            <a:spAutoFit/>
+          </a:bodyPr>
+          <a:lstStyle/>
+          <a:p>
+            <a:pPr algn="l"/>
+            <a:r>
+              <a:rPr sz="1000" b="0" i="0">
+                <a:solidFill>
+                  <a:srgbClr val="FFFFFF"/>
+                </a:solidFill>
+              </a:rPr>
+              <a:t>Vertical</a:t>
+            </a:r>
+          </a:p>
+        </p:txBody>
+      </p:sp>
+      <p:sp>
+        <p:nvSpPr>
+          <p:cNvPr id="18" name="TextBox 17"/>
+          <p:cNvSpPr txBox="1"/>
+          <p:nvPr/>
+        </p:nvSpPr>
+        <p:spPr>
+          <a:xfrm>
+            <a:off x="457200" y="3264407"/>
+            <a:ext cx="1828800" cy="347472"/>
+          </a:xfrm>
+          <a:prstGeom prst="rect">
+            <a:avLst/>
+          </a:prstGeom>
+          <a:noFill/>
+        </p:spPr>
+        <p:txBody>
+          <a:bodyPr wrap="square">
+            <a:spAutoFit/>
+          </a:bodyPr>
+          <a:lstStyle/>
+          <a:p>
+            <a:pPr algn="l"/>
+            <a:r>
+              <a:rPr sz="1000" b="1" i="0">
+                <a:solidFill>
+                  <a:srgbClr val="90E0EF"/>
+                </a:solidFill>
+              </a:rPr>
+              <a:t>Height</a:t>
+            </a:r>
+          </a:p>
+        </p:txBody>
+      </p:sp>
+      <p:sp>
+        <p:nvSpPr>
+          <p:cNvPr id="19" name="TextBox 18"/>
+          <p:cNvSpPr txBox="1"/>
+          <p:nvPr/>
+        </p:nvSpPr>
+        <p:spPr>
+          <a:xfrm>
+            <a:off x="2286000" y="3264407"/>
+            <a:ext cx="3291840" cy="347472"/>
+          </a:xfrm>
+          <a:prstGeom prst="rect">
+            <a:avLst/>
+          </a:prstGeom>
+          <a:noFill/>
+        </p:spPr>
+        <p:txBody>
+          <a:bodyPr wrap="square">
+            <a:spAutoFit/>
+          </a:bodyPr>
+          <a:lstStyle/>
+          <a:p>
+            <a:pPr algn="l"/>
+            <a:r>
+              <a:rPr sz="1000" b="0" i="0">
+                <a:solidFill>
+                  <a:srgbClr val="FFFFFF"/>
+                </a:solidFill>
+              </a:rPr>
+              <a:t>17 m AGL on mast</a:t>
+            </a:r>
+          </a:p>
+        </p:txBody>
+      </p:sp>
+      <p:sp>
+        <p:nvSpPr>
+          <p:cNvPr id="20" name="TextBox 19"/>
+          <p:cNvSpPr txBox="1"/>
+          <p:nvPr/>
+        </p:nvSpPr>
+        <p:spPr>
+          <a:xfrm>
+            <a:off x="457200" y="3611879"/>
+            <a:ext cx="1828800" cy="347472"/>
+          </a:xfrm>
+          <a:prstGeom prst="rect">
+            <a:avLst/>
+          </a:prstGeom>
+          <a:noFill/>
+        </p:spPr>
+        <p:txBody>
+          <a:bodyPr wrap="square">
+            <a:spAutoFit/>
+          </a:bodyPr>
+          <a:lstStyle/>
+          <a:p>
+            <a:pPr algn="l"/>
+            <a:r>
+              <a:rPr sz="1000" b="1" i="0">
+                <a:solidFill>
+                  <a:srgbClr val="90E0EF"/>
+                </a:solidFill>
+              </a:rPr>
+              <a:t>Sionna model</a:t>
+            </a:r>
+          </a:p>
+        </p:txBody>
+      </p:sp>
+      <p:sp>
+        <p:nvSpPr>
+          <p:cNvPr id="21" name="TextBox 20"/>
+          <p:cNvSpPr txBox="1"/>
+          <p:nvPr/>
+        </p:nvSpPr>
+        <p:spPr>
+          <a:xfrm>
+            <a:off x="2286000" y="3611879"/>
+            <a:ext cx="3291840" cy="347472"/>
+          </a:xfrm>
+          <a:prstGeom prst="rect">
+            <a:avLst/>
+          </a:prstGeom>
+          <a:noFill/>
+        </p:spPr>
+        <p:txBody>
+          <a:bodyPr wrap="square">
+            <a:spAutoFit/>
+          </a:bodyPr>
+          <a:lstStyle/>
+          <a:p>
+            <a:pPr algn="l"/>
+            <a:r>
+              <a:rPr sz="1000" b="0" i="0">
+                <a:solidFill>
+                  <a:srgbClr val="FFFFFF"/>
+                </a:solidFill>
+              </a:rPr>
+              <a:t>pattern='dipole'</a:t>
+            </a:r>
+          </a:p>
+        </p:txBody>
+      </p:sp>
+      <p:sp>
+        <p:nvSpPr>
+          <p:cNvPr id="22" name="TextBox 21"/>
+          <p:cNvSpPr txBox="1"/>
+          <p:nvPr/>
+        </p:nvSpPr>
+        <p:spPr>
+          <a:xfrm>
+            <a:off x="457200" y="3959351"/>
+            <a:ext cx="1828800" cy="347472"/>
+          </a:xfrm>
+          <a:prstGeom prst="rect">
+            <a:avLst/>
+          </a:prstGeom>
+          <a:noFill/>
+        </p:spPr>
+        <p:txBody>
+          <a:bodyPr wrap="square">
+            <a:spAutoFit/>
+          </a:bodyPr>
+          <a:lstStyle/>
+          <a:p>
+            <a:pPr algn="l"/>
+            <a:r>
+              <a:rPr sz="1000" b="1" i="0">
+                <a:solidFill>
+                  <a:srgbClr val="90E0EF"/>
+                </a:solidFill>
+              </a:rPr>
+              <a:t>Conducted power</a:t>
+            </a:r>
+          </a:p>
+        </p:txBody>
+      </p:sp>
+      <p:sp>
+        <p:nvSpPr>
+          <p:cNvPr id="23" name="TextBox 22"/>
+          <p:cNvSpPr txBox="1"/>
+          <p:nvPr/>
+        </p:nvSpPr>
+        <p:spPr>
+          <a:xfrm>
+            <a:off x="2286000" y="3959351"/>
+            <a:ext cx="3291840" cy="347472"/>
+          </a:xfrm>
+          <a:prstGeom prst="rect">
+            <a:avLst/>
+          </a:prstGeom>
+          <a:noFill/>
+        </p:spPr>
+        <p:txBody>
+          <a:bodyPr wrap="square">
+            <a:spAutoFit/>
+          </a:bodyPr>
+          <a:lstStyle/>
+          <a:p>
+            <a:pPr algn="l"/>
+            <a:r>
+              <a:rPr sz="1000" b="0" i="0">
+                <a:solidFill>
+                  <a:srgbClr val="FFFFFF"/>
+                </a:solidFill>
+              </a:rPr>
+              <a:t>49.0 dBm</a:t>
+            </a:r>
+          </a:p>
+        </p:txBody>
+      </p:sp>
+      <p:sp>
+        <p:nvSpPr>
+          <p:cNvPr id="24" name="TextBox 23"/>
+          <p:cNvSpPr txBox="1"/>
+          <p:nvPr/>
+        </p:nvSpPr>
+        <p:spPr>
+          <a:xfrm>
+            <a:off x="457200" y="4306823"/>
+            <a:ext cx="1828800" cy="347472"/>
+          </a:xfrm>
+          <a:prstGeom prst="rect">
+            <a:avLst/>
+          </a:prstGeom>
+          <a:noFill/>
+        </p:spPr>
+        <p:txBody>
+          <a:bodyPr wrap="square">
+            <a:spAutoFit/>
+          </a:bodyPr>
+          <a:lstStyle/>
+          <a:p>
+            <a:pPr algn="l"/>
+            <a:r>
+              <a:rPr sz="1000" b="1" i="0">
+                <a:solidFill>
+                  <a:srgbClr val="90E0EF"/>
+                </a:solidFill>
+              </a:rPr>
+              <a:t>EIRP</a:t>
+            </a:r>
+          </a:p>
+        </p:txBody>
+      </p:sp>
+      <p:sp>
+        <p:nvSpPr>
+          <p:cNvPr id="25" name="TextBox 24"/>
+          <p:cNvSpPr txBox="1"/>
+          <p:nvPr/>
+        </p:nvSpPr>
+        <p:spPr>
+          <a:xfrm>
+            <a:off x="2286000" y="4306823"/>
+            <a:ext cx="3291840" cy="347472"/>
+          </a:xfrm>
+          <a:prstGeom prst="rect">
+            <a:avLst/>
+          </a:prstGeom>
+          <a:noFill/>
+        </p:spPr>
+        <p:txBody>
+          <a:bodyPr wrap="square">
+            <a:spAutoFit/>
+          </a:bodyPr>
+          <a:lstStyle/>
+          <a:p>
+            <a:pPr algn="l"/>
+            <a:r>
+              <a:rPr sz="1000" b="0" i="0">
+                <a:solidFill>
+                  <a:srgbClr val="FFFFFF"/>
+                </a:solidFill>
+              </a:rPr>
+              <a:t>49.0 + 1.3 = 50.3 dBm</a:t>
+            </a:r>
+          </a:p>
+        </p:txBody>
+      </p:sp>
+      <p:sp>
+        <p:nvSpPr>
+          <p:cNvPr id="26" name="Rectangle 25"/>
+          <p:cNvSpPr/>
+          <p:nvPr/>
+        </p:nvSpPr>
+        <p:spPr>
+          <a:xfrm>
+            <a:off x="320040" y="4617720"/>
+            <a:ext cx="5394960" cy="2377440"/>
+          </a:xfrm>
+          <a:prstGeom prst="rect">
+            <a:avLst/>
+          </a:prstGeom>
+          <a:solidFill>
+            <a:srgbClr val="112A40"/>
+          </a:solidFill>
+          <a:ln>
+            <a:noFill/>
+          </a:ln>
+        </p:spPr>
+        <p:style>
+          <a:lnRef idx="1">
+            <a:schemeClr val="accent1"/>
+          </a:lnRef>
+          <a:fillRef idx="3">
+            <a:schemeClr val="accent1"/>
+          </a:fillRef>
+          <a:effectRef idx="2">
+            <a:schemeClr val="accent1"/>
+          </a:effectRef>
+          <a:fontRef idx="minor">
+            <a:schemeClr val="lt1"/>
+          </a:fontRef>
+        </p:style>
+        <p:txBody>
+          <a:bodyPr rtlCol="0" anchor="ctr"/>
+          <a:lstStyle/>
+          <a:p>
+            <a:pPr algn="ctr"/>
+          </a:p>
+        </p:txBody>
+      </p:sp>
+      <p:sp>
+        <p:nvSpPr>
+          <p:cNvPr id="27" name="Rectangle 26"/>
+          <p:cNvSpPr/>
+          <p:nvPr/>
+        </p:nvSpPr>
+        <p:spPr>
+          <a:xfrm>
+            <a:off x="320040" y="4617720"/>
+            <a:ext cx="5394960" cy="54864"/>
+          </a:xfrm>
+          <a:prstGeom prst="rect">
+            <a:avLst/>
+          </a:prstGeom>
+          <a:solidFill>
+            <a:srgbClr val="2DCB7F"/>
+          </a:solidFill>
+          <a:ln>
+            <a:noFill/>
+          </a:ln>
+        </p:spPr>
+        <p:style>
+          <a:lnRef idx="1">
+            <a:schemeClr val="accent1"/>
+          </a:lnRef>
+          <a:fillRef idx="3">
+            <a:schemeClr val="accent1"/>
+          </a:fillRef>
+          <a:effectRef idx="2">
+            <a:schemeClr val="accent1"/>
+          </a:effectRef>
+          <a:fontRef idx="minor">
+            <a:schemeClr val="lt1"/>
+          </a:fontRef>
+        </p:style>
+        <p:txBody>
+          <a:bodyPr rtlCol="0" anchor="ctr"/>
+          <a:lstStyle/>
+          <a:p>
+            <a:pPr algn="ctr"/>
+          </a:p>
+        </p:txBody>
+      </p:sp>
+      <p:sp>
+        <p:nvSpPr>
+          <p:cNvPr id="28" name="TextBox 27"/>
+          <p:cNvSpPr txBox="1"/>
+          <p:nvPr/>
+        </p:nvSpPr>
+        <p:spPr>
+          <a:xfrm>
+            <a:off x="457200" y="4754880"/>
+            <a:ext cx="5120640" cy="365760"/>
+          </a:xfrm>
+          <a:prstGeom prst="rect">
+            <a:avLst/>
+          </a:prstGeom>
+          <a:noFill/>
+        </p:spPr>
+        <p:txBody>
+          <a:bodyPr wrap="square">
+            <a:spAutoFit/>
+          </a:bodyPr>
+          <a:lstStyle/>
+          <a:p>
+            <a:pPr algn="l"/>
+            <a:r>
+              <a:rPr sz="1300" b="1" i="0">
+                <a:solidFill>
+                  <a:srgbClr val="2DCB7F"/>
+                </a:solidFill>
+              </a:rPr>
+              <a:t>RX — Receiver Antenna</a:t>
+            </a:r>
+          </a:p>
+        </p:txBody>
+      </p:sp>
+      <p:sp>
+        <p:nvSpPr>
+          <p:cNvPr id="29" name="TextBox 28"/>
+          <p:cNvSpPr txBox="1"/>
+          <p:nvPr/>
+        </p:nvSpPr>
+        <p:spPr>
+          <a:xfrm>
+            <a:off x="457200" y="5212080"/>
+            <a:ext cx="1828800" cy="347472"/>
+          </a:xfrm>
+          <a:prstGeom prst="rect">
+            <a:avLst/>
+          </a:prstGeom>
+          <a:noFill/>
+        </p:spPr>
+        <p:txBody>
+          <a:bodyPr wrap="square">
+            <a:spAutoFit/>
+          </a:bodyPr>
+          <a:lstStyle/>
+          <a:p>
+            <a:pPr algn="l"/>
+            <a:r>
+              <a:rPr sz="1000" b="1" i="0">
+                <a:solidFill>
+                  <a:srgbClr val="90E0EF"/>
+                </a:solidFill>
+              </a:rPr>
+              <a:t>Type</a:t>
+            </a:r>
+          </a:p>
+        </p:txBody>
+      </p:sp>
+      <p:sp>
+        <p:nvSpPr>
+          <p:cNvPr id="30" name="TextBox 29"/>
+          <p:cNvSpPr txBox="1"/>
+          <p:nvPr/>
+        </p:nvSpPr>
+        <p:spPr>
+          <a:xfrm>
+            <a:off x="2286000" y="5212080"/>
+            <a:ext cx="3291840" cy="347472"/>
+          </a:xfrm>
+          <a:prstGeom prst="rect">
+            <a:avLst/>
+          </a:prstGeom>
+          <a:noFill/>
+        </p:spPr>
+        <p:txBody>
+          <a:bodyPr wrap="square">
+            <a:spAutoFit/>
+          </a:bodyPr>
+          <a:lstStyle/>
+          <a:p>
+            <a:pPr algn="l"/>
+            <a:r>
+              <a:rPr sz="1000" b="0" i="0">
+                <a:solidFill>
+                  <a:srgbClr val="FFFFFF"/>
+                </a:solidFill>
+              </a:rPr>
+              <a:t>Isotropic</a:t>
+            </a:r>
+          </a:p>
+        </p:txBody>
+      </p:sp>
+      <p:sp>
+        <p:nvSpPr>
+          <p:cNvPr id="31" name="TextBox 30"/>
+          <p:cNvSpPr txBox="1"/>
+          <p:nvPr/>
+        </p:nvSpPr>
+        <p:spPr>
+          <a:xfrm>
+            <a:off x="457200" y="5513832"/>
+            <a:ext cx="1828800" cy="347472"/>
+          </a:xfrm>
+          <a:prstGeom prst="rect">
+            <a:avLst/>
+          </a:prstGeom>
+          <a:noFill/>
+        </p:spPr>
+        <p:txBody>
+          <a:bodyPr wrap="square">
+            <a:spAutoFit/>
+          </a:bodyPr>
+          <a:lstStyle/>
+          <a:p>
+            <a:pPr algn="l"/>
+            <a:r>
+              <a:rPr sz="1000" b="1" i="0">
+                <a:solidFill>
+                  <a:srgbClr val="90E0EF"/>
+                </a:solidFill>
+              </a:rPr>
+              <a:t>Pattern</a:t>
+            </a:r>
+          </a:p>
+        </p:txBody>
+      </p:sp>
+      <p:sp>
+        <p:nvSpPr>
+          <p:cNvPr id="32" name="TextBox 31"/>
+          <p:cNvSpPr txBox="1"/>
+          <p:nvPr/>
+        </p:nvSpPr>
+        <p:spPr>
+          <a:xfrm>
+            <a:off x="2286000" y="5513832"/>
+            <a:ext cx="3291840" cy="347472"/>
+          </a:xfrm>
+          <a:prstGeom prst="rect">
+            <a:avLst/>
+          </a:prstGeom>
+          <a:noFill/>
+        </p:spPr>
+        <p:txBody>
+          <a:bodyPr wrap="square">
+            <a:spAutoFit/>
+          </a:bodyPr>
+          <a:lstStyle/>
+          <a:p>
+            <a:pPr algn="l"/>
+            <a:r>
+              <a:rPr sz="1000" b="0" i="0">
+                <a:solidFill>
+                  <a:srgbClr val="FFFFFF"/>
+                </a:solidFill>
+              </a:rPr>
+              <a:t>Uniform — equal gain all directions</a:t>
+            </a:r>
+          </a:p>
+        </p:txBody>
+      </p:sp>
+      <p:sp>
+        <p:nvSpPr>
+          <p:cNvPr id="33" name="TextBox 32"/>
+          <p:cNvSpPr txBox="1"/>
+          <p:nvPr/>
+        </p:nvSpPr>
+        <p:spPr>
+          <a:xfrm>
+            <a:off x="457200" y="5815584"/>
+            <a:ext cx="1828800" cy="347472"/>
+          </a:xfrm>
+          <a:prstGeom prst="rect">
+            <a:avLst/>
+          </a:prstGeom>
+          <a:noFill/>
+        </p:spPr>
+        <p:txBody>
+          <a:bodyPr wrap="square">
+            <a:spAutoFit/>
+          </a:bodyPr>
+          <a:lstStyle/>
+          <a:p>
+            <a:pPr algn="l"/>
+            <a:r>
+              <a:rPr sz="1000" b="1" i="0">
+                <a:solidFill>
+                  <a:srgbClr val="90E0EF"/>
+                </a:solidFill>
+              </a:rPr>
+              <a:t>Gain</a:t>
+            </a:r>
+          </a:p>
+        </p:txBody>
+      </p:sp>
+      <p:sp>
+        <p:nvSpPr>
+          <p:cNvPr id="34" name="TextBox 33"/>
+          <p:cNvSpPr txBox="1"/>
+          <p:nvPr/>
+        </p:nvSpPr>
+        <p:spPr>
+          <a:xfrm>
+            <a:off x="2286000" y="5815584"/>
+            <a:ext cx="3291840" cy="347472"/>
+          </a:xfrm>
+          <a:prstGeom prst="rect">
+            <a:avLst/>
+          </a:prstGeom>
+          <a:noFill/>
+        </p:spPr>
+        <p:txBody>
+          <a:bodyPr wrap="square">
+            <a:spAutoFit/>
+          </a:bodyPr>
+          <a:lstStyle/>
+          <a:p>
+            <a:pPr algn="l"/>
+            <a:r>
+              <a:rPr sz="1000" b="0" i="0">
+                <a:solidFill>
+                  <a:srgbClr val="FFFFFF"/>
+                </a:solidFill>
+              </a:rPr>
+              <a:t>0 dBi</a:t>
+            </a:r>
+          </a:p>
+        </p:txBody>
+      </p:sp>
+      <p:sp>
+        <p:nvSpPr>
+          <p:cNvPr id="35" name="TextBox 34"/>
+          <p:cNvSpPr txBox="1"/>
+          <p:nvPr/>
+        </p:nvSpPr>
+        <p:spPr>
+          <a:xfrm>
+            <a:off x="457200" y="6117336"/>
+            <a:ext cx="1828800" cy="347472"/>
+          </a:xfrm>
+          <a:prstGeom prst="rect">
+            <a:avLst/>
+          </a:prstGeom>
+          <a:noFill/>
+        </p:spPr>
+        <p:txBody>
+          <a:bodyPr wrap="square">
+            <a:spAutoFit/>
+          </a:bodyPr>
+          <a:lstStyle/>
+          <a:p>
+            <a:pPr algn="l"/>
+            <a:r>
+              <a:rPr sz="1000" b="1" i="0">
+                <a:solidFill>
+                  <a:srgbClr val="90E0EF"/>
+                </a:solidFill>
+              </a:rPr>
+              <a:t>Height</a:t>
+            </a:r>
+          </a:p>
+        </p:txBody>
+      </p:sp>
+      <p:sp>
+        <p:nvSpPr>
+          <p:cNvPr id="36" name="TextBox 35"/>
+          <p:cNvSpPr txBox="1"/>
+          <p:nvPr/>
+        </p:nvSpPr>
+        <p:spPr>
+          <a:xfrm>
+            <a:off x="2286000" y="6117336"/>
+            <a:ext cx="3291840" cy="347472"/>
+          </a:xfrm>
+          <a:prstGeom prst="rect">
+            <a:avLst/>
+          </a:prstGeom>
+          <a:noFill/>
+        </p:spPr>
+        <p:txBody>
+          <a:bodyPr wrap="square">
+            <a:spAutoFit/>
+          </a:bodyPr>
+          <a:lstStyle/>
+          <a:p>
+            <a:pPr algn="l"/>
+            <a:r>
+              <a:rPr sz="1000" b="0" i="0">
+                <a:solidFill>
+                  <a:srgbClr val="FFFFFF"/>
+                </a:solidFill>
+              </a:rPr>
+              <a:t>1.5 m AGL (IoT device)</a:t>
+            </a:r>
+          </a:p>
+        </p:txBody>
+      </p:sp>
+      <p:sp>
+        <p:nvSpPr>
+          <p:cNvPr id="37" name="TextBox 36"/>
+          <p:cNvSpPr txBox="1"/>
+          <p:nvPr/>
+        </p:nvSpPr>
+        <p:spPr>
+          <a:xfrm>
+            <a:off x="457200" y="6419088"/>
+            <a:ext cx="1828800" cy="347472"/>
+          </a:xfrm>
+          <a:prstGeom prst="rect">
+            <a:avLst/>
+          </a:prstGeom>
+          <a:noFill/>
+        </p:spPr>
+        <p:txBody>
+          <a:bodyPr wrap="square">
+            <a:spAutoFit/>
+          </a:bodyPr>
+          <a:lstStyle/>
+          <a:p>
+            <a:pPr algn="l"/>
+            <a:r>
+              <a:rPr sz="1000" b="1" i="0">
+                <a:solidFill>
+                  <a:srgbClr val="90E0EF"/>
+                </a:solidFill>
+              </a:rPr>
+              <a:t>Sionna model</a:t>
+            </a:r>
+          </a:p>
+        </p:txBody>
+      </p:sp>
+      <p:sp>
+        <p:nvSpPr>
+          <p:cNvPr id="38" name="TextBox 37"/>
+          <p:cNvSpPr txBox="1"/>
+          <p:nvPr/>
+        </p:nvSpPr>
+        <p:spPr>
+          <a:xfrm>
+            <a:off x="2286000" y="6419088"/>
+            <a:ext cx="3291840" cy="347472"/>
+          </a:xfrm>
+          <a:prstGeom prst="rect">
+            <a:avLst/>
+          </a:prstGeom>
+          <a:noFill/>
+        </p:spPr>
+        <p:txBody>
+          <a:bodyPr wrap="square">
+            <a:spAutoFit/>
+          </a:bodyPr>
+          <a:lstStyle/>
+          <a:p>
+            <a:pPr algn="l"/>
+            <a:r>
+              <a:rPr sz="1000" b="0" i="0">
+                <a:solidFill>
+                  <a:srgbClr val="FFFFFF"/>
+                </a:solidFill>
+              </a:rPr>
+              <a:t>pattern='iso'</a:t>
+            </a:r>
+          </a:p>
+        </p:txBody>
+      </p:sp>
+      <p:sp>
+        <p:nvSpPr>
+          <p:cNvPr id="39" name="TextBox 38"/>
+          <p:cNvSpPr txBox="1"/>
+          <p:nvPr/>
+        </p:nvSpPr>
+        <p:spPr>
+          <a:xfrm>
+            <a:off x="457200" y="6720840"/>
+            <a:ext cx="1828800" cy="347472"/>
+          </a:xfrm>
+          <a:prstGeom prst="rect">
+            <a:avLst/>
+          </a:prstGeom>
+          <a:noFill/>
+        </p:spPr>
+        <p:txBody>
+          <a:bodyPr wrap="square">
+            <a:spAutoFit/>
+          </a:bodyPr>
+          <a:lstStyle/>
+          <a:p>
+            <a:pPr algn="l"/>
+            <a:r>
+              <a:rPr sz="1000" b="1" i="0">
+                <a:solidFill>
+                  <a:srgbClr val="90E0EF"/>
+                </a:solidFill>
+              </a:rPr>
+              <a:t>Noise floor</a:t>
+            </a:r>
+          </a:p>
+        </p:txBody>
+      </p:sp>
+      <p:sp>
+        <p:nvSpPr>
+          <p:cNvPr id="40" name="TextBox 39"/>
+          <p:cNvSpPr txBox="1"/>
+          <p:nvPr/>
+        </p:nvSpPr>
+        <p:spPr>
+          <a:xfrm>
+            <a:off x="2286000" y="6720840"/>
+            <a:ext cx="3291840" cy="347472"/>
+          </a:xfrm>
+          <a:prstGeom prst="rect">
+            <a:avLst/>
+          </a:prstGeom>
+          <a:noFill/>
+        </p:spPr>
+        <p:txBody>
+          <a:bodyPr wrap="square">
+            <a:spAutoFit/>
+          </a:bodyPr>
+          <a:lstStyle/>
+          <a:p>
+            <a:pPr algn="l"/>
+            <a:r>
+              <a:rPr sz="1000" b="0" i="0">
+                <a:solidFill>
+                  <a:srgbClr val="FFFFFF"/>
+                </a:solidFill>
+              </a:rPr>
+              <a:t>−124 dBm</a:t>
+            </a:r>
+          </a:p>
+        </p:txBody>
+      </p:sp>
+      <p:sp>
+        <p:nvSpPr>
+          <p:cNvPr id="41" name="Rectangle 40"/>
+          <p:cNvSpPr/>
+          <p:nvPr/>
+        </p:nvSpPr>
+        <p:spPr>
+          <a:xfrm>
+            <a:off x="5943600" y="1234440"/>
+            <a:ext cx="5943600" cy="5486400"/>
+          </a:xfrm>
+          <a:prstGeom prst="rect">
+            <a:avLst/>
+          </a:prstGeom>
+          <a:solidFill>
+            <a:srgbClr val="112A40"/>
+          </a:solidFill>
+          <a:ln>
+            <a:noFill/>
+          </a:ln>
+        </p:spPr>
+        <p:style>
+          <a:lnRef idx="1">
+            <a:schemeClr val="accent1"/>
+          </a:lnRef>
+          <a:fillRef idx="3">
+            <a:schemeClr val="accent1"/>
+          </a:fillRef>
+          <a:effectRef idx="2">
+            <a:schemeClr val="accent1"/>
+          </a:effectRef>
+          <a:fontRef idx="minor">
+            <a:schemeClr val="lt1"/>
+          </a:fontRef>
+        </p:style>
+        <p:txBody>
+          <a:bodyPr rtlCol="0" anchor="ctr"/>
+          <a:lstStyle/>
+          <a:p>
+            <a:pPr algn="ctr"/>
+          </a:p>
+        </p:txBody>
+      </p:sp>
+      <p:sp>
+        <p:nvSpPr>
+          <p:cNvPr id="42" name="Rectangle 41"/>
+          <p:cNvSpPr/>
+          <p:nvPr/>
+        </p:nvSpPr>
+        <p:spPr>
+          <a:xfrm>
+            <a:off x="5943600" y="1234440"/>
+            <a:ext cx="5943600" cy="54864"/>
+          </a:xfrm>
+          <a:prstGeom prst="rect">
+            <a:avLst/>
+          </a:prstGeom>
+          <a:solidFill>
+            <a:srgbClr val="00B4D8"/>
+          </a:solidFill>
+          <a:ln>
+            <a:noFill/>
+          </a:ln>
+        </p:spPr>
+        <p:style>
+          <a:lnRef idx="1">
+            <a:schemeClr val="accent1"/>
+          </a:lnRef>
+          <a:fillRef idx="3">
+            <a:schemeClr val="accent1"/>
+          </a:fillRef>
+          <a:effectRef idx="2">
+            <a:schemeClr val="accent1"/>
+          </a:effectRef>
+          <a:fontRef idx="minor">
+            <a:schemeClr val="lt1"/>
+          </a:fontRef>
+        </p:style>
+        <p:txBody>
+          <a:bodyPr rtlCol="0" anchor="ctr"/>
+          <a:lstStyle/>
+          <a:p>
+            <a:pPr algn="ctr"/>
+          </a:p>
+        </p:txBody>
+      </p:sp>
+      <p:sp>
+        <p:nvSpPr>
+          <p:cNvPr id="43" name="TextBox 42"/>
+          <p:cNvSpPr txBox="1"/>
+          <p:nvPr/>
+        </p:nvSpPr>
+        <p:spPr>
+          <a:xfrm>
+            <a:off x="6080760" y="1371600"/>
+            <a:ext cx="5669280" cy="365760"/>
+          </a:xfrm>
+          <a:prstGeom prst="rect">
+            <a:avLst/>
+          </a:prstGeom>
+          <a:noFill/>
+        </p:spPr>
+        <p:txBody>
+          <a:bodyPr wrap="square">
+            <a:spAutoFit/>
+          </a:bodyPr>
+          <a:lstStyle/>
+          <a:p>
+            <a:pPr algn="l"/>
+            <a:r>
+              <a:rPr sz="1300" b="1" i="0">
+                <a:solidFill>
+                  <a:srgbClr val="00B4D8"/>
+                </a:solidFill>
+              </a:rPr>
+              <a:t>Why These Choices</a:t>
+            </a:r>
+          </a:p>
+        </p:txBody>
+      </p:sp>
+      <p:sp>
+        <p:nvSpPr>
+          <p:cNvPr id="44" name="Rectangle 43"/>
+          <p:cNvSpPr/>
+          <p:nvPr/>
+        </p:nvSpPr>
+        <p:spPr>
+          <a:xfrm>
+            <a:off x="5989320" y="1874519"/>
+            <a:ext cx="5760720" cy="1005840"/>
+          </a:xfrm>
+          <a:prstGeom prst="rect">
+            <a:avLst/>
+          </a:prstGeom>
+          <a:solidFill>
+            <a:srgbClr val="112A40"/>
+          </a:solidFill>
+          <a:ln>
+            <a:noFill/>
+          </a:ln>
+        </p:spPr>
+        <p:style>
+          <a:lnRef idx="1">
+            <a:schemeClr val="accent1"/>
+          </a:lnRef>
+          <a:fillRef idx="3">
+            <a:schemeClr val="accent1"/>
+          </a:fillRef>
+          <a:effectRef idx="2">
+            <a:schemeClr val="accent1"/>
+          </a:effectRef>
+          <a:fontRef idx="minor">
+            <a:schemeClr val="lt1"/>
+          </a:fontRef>
+        </p:style>
+        <p:txBody>
+          <a:bodyPr rtlCol="0" anchor="ctr"/>
+          <a:lstStyle/>
+          <a:p>
+            <a:pPr algn="ctr"/>
+          </a:p>
+        </p:txBody>
+      </p:sp>
+      <p:sp>
+        <p:nvSpPr>
+          <p:cNvPr id="45" name="Rectangle 44"/>
+          <p:cNvSpPr/>
+          <p:nvPr/>
+        </p:nvSpPr>
+        <p:spPr>
+          <a:xfrm>
+            <a:off x="5989320" y="1874519"/>
+            <a:ext cx="45720" cy="1005840"/>
+          </a:xfrm>
+          <a:prstGeom prst="rect">
+            <a:avLst/>
+          </a:prstGeom>
+          <a:solidFill>
+            <a:srgbClr val="FF9F1C"/>
+          </a:solidFill>
+          <a:ln>
+            <a:noFill/>
+          </a:ln>
+        </p:spPr>
+        <p:style>
+          <a:lnRef idx="1">
+            <a:schemeClr val="accent1"/>
+          </a:lnRef>
+          <a:fillRef idx="3">
+            <a:schemeClr val="accent1"/>
+          </a:fillRef>
+          <a:effectRef idx="2">
+            <a:schemeClr val="accent1"/>
+          </a:effectRef>
+          <a:fontRef idx="minor">
+            <a:schemeClr val="lt1"/>
+          </a:fontRef>
+        </p:style>
+        <p:txBody>
+          <a:bodyPr rtlCol="0" anchor="ctr"/>
+          <a:lstStyle/>
+          <a:p>
+            <a:pPr algn="ctr"/>
+          </a:p>
+        </p:txBody>
+      </p:sp>
+      <p:sp>
+        <p:nvSpPr>
+          <p:cNvPr id="46" name="TextBox 45"/>
+          <p:cNvSpPr txBox="1"/>
+          <p:nvPr/>
+        </p:nvSpPr>
+        <p:spPr>
+          <a:xfrm>
+            <a:off x="6126480" y="1965959"/>
+            <a:ext cx="1645920" cy="822960"/>
+          </a:xfrm>
+          <a:prstGeom prst="rect">
+            <a:avLst/>
+          </a:prstGeom>
+          <a:noFill/>
+        </p:spPr>
+        <p:txBody>
+          <a:bodyPr wrap="square">
+            <a:spAutoFit/>
+          </a:bodyPr>
+          <a:lstStyle/>
+          <a:p>
+            <a:pPr algn="l"/>
+            <a:r>
+              <a:rPr sz="1000" b="1" i="0">
+                <a:solidFill>
+                  <a:srgbClr val="FF9F1C"/>
+                </a:solidFill>
+              </a:rPr>
+              <a:t>TX dipole
+(not iso)</a:t>
+            </a:r>
+          </a:p>
+        </p:txBody>
+      </p:sp>
+      <p:sp>
+        <p:nvSpPr>
+          <p:cNvPr id="47" name="TextBox 46"/>
+          <p:cNvSpPr txBox="1"/>
+          <p:nvPr/>
+        </p:nvSpPr>
+        <p:spPr>
+          <a:xfrm>
+            <a:off x="7772400" y="1965959"/>
+            <a:ext cx="3840480" cy="822960"/>
+          </a:xfrm>
+          <a:prstGeom prst="rect">
+            <a:avLst/>
+          </a:prstGeom>
+          <a:noFill/>
+        </p:spPr>
+        <p:txBody>
+          <a:bodyPr wrap="square">
+            <a:spAutoFit/>
+          </a:bodyPr>
+          <a:lstStyle/>
+          <a:p>
+            <a:pPr algn="l"/>
+            <a:r>
+              <a:rPr sz="1000" b="0" i="0">
+                <a:solidFill>
+                  <a:srgbClr val="CAD3DF"/>
+                </a:solidFill>
+              </a:rPr>
+              <a:t>Real Ofcom mast uses collinear omni —
+donut pattern matches real radiation shape</a:t>
+            </a:r>
+          </a:p>
+        </p:txBody>
+      </p:sp>
+      <p:sp>
+        <p:nvSpPr>
+          <p:cNvPr id="48" name="Rectangle 47"/>
+          <p:cNvSpPr/>
+          <p:nvPr/>
+        </p:nvSpPr>
+        <p:spPr>
+          <a:xfrm>
+            <a:off x="5989320" y="2971799"/>
+            <a:ext cx="5760720" cy="1005840"/>
+          </a:xfrm>
+          <a:prstGeom prst="rect">
+            <a:avLst/>
+          </a:prstGeom>
+          <a:solidFill>
+            <a:srgbClr val="112A40"/>
+          </a:solidFill>
+          <a:ln>
+            <a:noFill/>
+          </a:ln>
+        </p:spPr>
+        <p:style>
+          <a:lnRef idx="1">
+            <a:schemeClr val="accent1"/>
+          </a:lnRef>
+          <a:fillRef idx="3">
+            <a:schemeClr val="accent1"/>
+          </a:fillRef>
+          <a:effectRef idx="2">
+            <a:schemeClr val="accent1"/>
+          </a:effectRef>
+          <a:fontRef idx="minor">
+            <a:schemeClr val="lt1"/>
+          </a:fontRef>
+        </p:style>
+        <p:txBody>
+          <a:bodyPr rtlCol="0" anchor="ctr"/>
+          <a:lstStyle/>
+          <a:p>
+            <a:pPr algn="ctr"/>
+          </a:p>
+        </p:txBody>
+      </p:sp>
+      <p:sp>
+        <p:nvSpPr>
+          <p:cNvPr id="49" name="Rectangle 48"/>
+          <p:cNvSpPr/>
+          <p:nvPr/>
+        </p:nvSpPr>
+        <p:spPr>
+          <a:xfrm>
+            <a:off x="5989320" y="2971799"/>
+            <a:ext cx="45720" cy="1005840"/>
+          </a:xfrm>
+          <a:prstGeom prst="rect">
+            <a:avLst/>
+          </a:prstGeom>
+          <a:solidFill>
+            <a:srgbClr val="2DCB7F"/>
+          </a:solidFill>
+          <a:ln>
+            <a:noFill/>
+          </a:ln>
+        </p:spPr>
+        <p:style>
+          <a:lnRef idx="1">
+            <a:schemeClr val="accent1"/>
+          </a:lnRef>
+          <a:fillRef idx="3">
+            <a:schemeClr val="accent1"/>
+          </a:fillRef>
+          <a:effectRef idx="2">
+            <a:schemeClr val="accent1"/>
+          </a:effectRef>
+          <a:fontRef idx="minor">
+            <a:schemeClr val="lt1"/>
+          </a:fontRef>
+        </p:style>
+        <p:txBody>
+          <a:bodyPr rtlCol="0" anchor="ctr"/>
+          <a:lstStyle/>
+          <a:p>
+            <a:pPr algn="ctr"/>
+          </a:p>
+        </p:txBody>
+      </p:sp>
+      <p:sp>
+        <p:nvSpPr>
+          <p:cNvPr id="50" name="TextBox 49"/>
+          <p:cNvSpPr txBox="1"/>
+          <p:nvPr/>
+        </p:nvSpPr>
+        <p:spPr>
+          <a:xfrm>
+            <a:off x="6126480" y="3063239"/>
+            <a:ext cx="1645920" cy="822960"/>
+          </a:xfrm>
+          <a:prstGeom prst="rect">
+            <a:avLst/>
+          </a:prstGeom>
+          <a:noFill/>
+        </p:spPr>
+        <p:txBody>
+          <a:bodyPr wrap="square">
+            <a:spAutoFit/>
+          </a:bodyPr>
+          <a:lstStyle/>
+          <a:p>
+            <a:pPr algn="l"/>
+            <a:r>
+              <a:rPr sz="1000" b="1" i="0">
+                <a:solidFill>
+                  <a:srgbClr val="2DCB7F"/>
+                </a:solidFill>
+              </a:rPr>
+              <a:t>RX isotropic</a:t>
+            </a:r>
+          </a:p>
+        </p:txBody>
+      </p:sp>
+      <p:sp>
+        <p:nvSpPr>
+          <p:cNvPr id="51" name="TextBox 50"/>
+          <p:cNvSpPr txBox="1"/>
+          <p:nvPr/>
+        </p:nvSpPr>
+        <p:spPr>
+          <a:xfrm>
+            <a:off x="7772400" y="3063239"/>
+            <a:ext cx="3840480" cy="822960"/>
+          </a:xfrm>
+          <a:prstGeom prst="rect">
+            <a:avLst/>
+          </a:prstGeom>
+          <a:noFill/>
+        </p:spPr>
+        <p:txBody>
+          <a:bodyPr wrap="square">
+            <a:spAutoFit/>
+          </a:bodyPr>
+          <a:lstStyle/>
+          <a:p>
+            <a:pPr algn="l"/>
+            <a:r>
+              <a:rPr sz="1000" b="0" i="0">
+                <a:solidFill>
+                  <a:srgbClr val="CAD3DF"/>
+                </a:solidFill>
+              </a:rPr>
+              <a:t>IoT devices vary widely in orientation
+→ iso avoids assuming device direction</a:t>
+            </a:r>
+          </a:p>
+        </p:txBody>
+      </p:sp>
+      <p:sp>
+        <p:nvSpPr>
+          <p:cNvPr id="52" name="Rectangle 51"/>
+          <p:cNvSpPr/>
+          <p:nvPr/>
+        </p:nvSpPr>
+        <p:spPr>
+          <a:xfrm>
+            <a:off x="5989320" y="4069079"/>
+            <a:ext cx="5760720" cy="1005840"/>
+          </a:xfrm>
+          <a:prstGeom prst="rect">
+            <a:avLst/>
+          </a:prstGeom>
+          <a:solidFill>
+            <a:srgbClr val="112A40"/>
+          </a:solidFill>
+          <a:ln>
+            <a:noFill/>
+          </a:ln>
+        </p:spPr>
+        <p:style>
+          <a:lnRef idx="1">
+            <a:schemeClr val="accent1"/>
+          </a:lnRef>
+          <a:fillRef idx="3">
+            <a:schemeClr val="accent1"/>
+          </a:fillRef>
+          <a:effectRef idx="2">
+            <a:schemeClr val="accent1"/>
+          </a:effectRef>
+          <a:fontRef idx="minor">
+            <a:schemeClr val="lt1"/>
+          </a:fontRef>
+        </p:style>
+        <p:txBody>
+          <a:bodyPr rtlCol="0" anchor="ctr"/>
+          <a:lstStyle/>
+          <a:p>
+            <a:pPr algn="ctr"/>
+          </a:p>
+        </p:txBody>
+      </p:sp>
+      <p:sp>
+        <p:nvSpPr>
+          <p:cNvPr id="53" name="Rectangle 52"/>
+          <p:cNvSpPr/>
+          <p:nvPr/>
+        </p:nvSpPr>
+        <p:spPr>
+          <a:xfrm>
+            <a:off x="5989320" y="4069079"/>
+            <a:ext cx="45720" cy="1005840"/>
+          </a:xfrm>
+          <a:prstGeom prst="rect">
+            <a:avLst/>
+          </a:prstGeom>
+          <a:solidFill>
+            <a:srgbClr val="00B4D8"/>
+          </a:solidFill>
+          <a:ln>
+            <a:noFill/>
+          </a:ln>
+        </p:spPr>
+        <p:style>
+          <a:lnRef idx="1">
+            <a:schemeClr val="accent1"/>
+          </a:lnRef>
+          <a:fillRef idx="3">
+            <a:schemeClr val="accent1"/>
+          </a:fillRef>
+          <a:effectRef idx="2">
+            <a:schemeClr val="accent1"/>
+          </a:effectRef>
+          <a:fontRef idx="minor">
+            <a:schemeClr val="lt1"/>
+          </a:fontRef>
+        </p:style>
+        <p:txBody>
+          <a:bodyPr rtlCol="0" anchor="ctr"/>
+          <a:lstStyle/>
+          <a:p>
+            <a:pPr algn="ctr"/>
+          </a:p>
+        </p:txBody>
+      </p:sp>
+      <p:sp>
+        <p:nvSpPr>
+          <p:cNvPr id="54" name="TextBox 53"/>
+          <p:cNvSpPr txBox="1"/>
+          <p:nvPr/>
+        </p:nvSpPr>
+        <p:spPr>
+          <a:xfrm>
+            <a:off x="6126480" y="4160519"/>
+            <a:ext cx="1645920" cy="822960"/>
+          </a:xfrm>
+          <a:prstGeom prst="rect">
+            <a:avLst/>
+          </a:prstGeom>
+          <a:noFill/>
+        </p:spPr>
+        <p:txBody>
+          <a:bodyPr wrap="square">
+            <a:spAutoFit/>
+          </a:bodyPr>
+          <a:lstStyle/>
+          <a:p>
+            <a:pPr algn="l"/>
+            <a:r>
+              <a:rPr sz="1000" b="1" i="0">
+                <a:solidFill>
+                  <a:srgbClr val="00B4D8"/>
+                </a:solidFill>
+              </a:rPr>
+              <a:t>RX iso = Sionna 2.0</a:t>
+            </a:r>
+          </a:p>
+        </p:txBody>
+      </p:sp>
+      <p:sp>
+        <p:nvSpPr>
+          <p:cNvPr id="55" name="TextBox 54"/>
+          <p:cNvSpPr txBox="1"/>
+          <p:nvPr/>
+        </p:nvSpPr>
+        <p:spPr>
+          <a:xfrm>
+            <a:off x="7772400" y="4160519"/>
+            <a:ext cx="3840480" cy="822960"/>
+          </a:xfrm>
+          <a:prstGeom prst="rect">
+            <a:avLst/>
+          </a:prstGeom>
+          <a:noFill/>
+        </p:spPr>
+        <p:txBody>
+          <a:bodyPr wrap="square">
+            <a:spAutoFit/>
+          </a:bodyPr>
+          <a:lstStyle/>
+          <a:p>
+            <a:pPr algn="l"/>
+            <a:r>
+              <a:rPr sz="1000" b="0" i="0">
+                <a:solidFill>
+                  <a:srgbClr val="CAD3DF"/>
+                </a:solidFill>
+              </a:rPr>
+              <a:t>Cross-notebook consistency —
+both use same RX model for fair comparison</a:t>
+            </a:r>
+          </a:p>
+        </p:txBody>
+      </p:sp>
+      <p:sp>
+        <p:nvSpPr>
+          <p:cNvPr id="56" name="Rectangle 55"/>
+          <p:cNvSpPr/>
+          <p:nvPr/>
+        </p:nvSpPr>
+        <p:spPr>
+          <a:xfrm>
+            <a:off x="5989320" y="5166359"/>
+            <a:ext cx="5760720" cy="1005840"/>
+          </a:xfrm>
+          <a:prstGeom prst="rect">
+            <a:avLst/>
+          </a:prstGeom>
+          <a:solidFill>
+            <a:srgbClr val="112A40"/>
+          </a:solidFill>
+          <a:ln>
+            <a:noFill/>
+          </a:ln>
+        </p:spPr>
+        <p:style>
+          <a:lnRef idx="1">
+            <a:schemeClr val="accent1"/>
+          </a:lnRef>
+          <a:fillRef idx="3">
+            <a:schemeClr val="accent1"/>
+          </a:fillRef>
+          <a:effectRef idx="2">
+            <a:schemeClr val="accent1"/>
+          </a:effectRef>
+          <a:fontRef idx="minor">
+            <a:schemeClr val="lt1"/>
+          </a:fontRef>
+        </p:style>
+        <p:txBody>
+          <a:bodyPr rtlCol="0" anchor="ctr"/>
+          <a:lstStyle/>
+          <a:p>
+            <a:pPr algn="ctr"/>
+          </a:p>
+        </p:txBody>
+      </p:sp>
+      <p:sp>
+        <p:nvSpPr>
+          <p:cNvPr id="57" name="Rectangle 56"/>
+          <p:cNvSpPr/>
+          <p:nvPr/>
+        </p:nvSpPr>
+        <p:spPr>
+          <a:xfrm>
+            <a:off x="5989320" y="5166359"/>
+            <a:ext cx="45720" cy="1005840"/>
+          </a:xfrm>
+          <a:prstGeom prst="rect">
+            <a:avLst/>
+          </a:prstGeom>
+          <a:solidFill>
+            <a:srgbClr val="90E0EF"/>
+          </a:solidFill>
+          <a:ln>
+            <a:noFill/>
+          </a:ln>
+        </p:spPr>
+        <p:style>
+          <a:lnRef idx="1">
+            <a:schemeClr val="accent1"/>
+          </a:lnRef>
+          <a:fillRef idx="3">
+            <a:schemeClr val="accent1"/>
+          </a:fillRef>
+          <a:effectRef idx="2">
+            <a:schemeClr val="accent1"/>
+          </a:effectRef>
+          <a:fontRef idx="minor">
+            <a:schemeClr val="lt1"/>
+          </a:fontRef>
+        </p:style>
+        <p:txBody>
+          <a:bodyPr rtlCol="0" anchor="ctr"/>
+          <a:lstStyle/>
+          <a:p>
+            <a:pPr algn="ctr"/>
+          </a:p>
+        </p:txBody>
+      </p:sp>
+      <p:sp>
+        <p:nvSpPr>
+          <p:cNvPr id="58" name="TextBox 57"/>
+          <p:cNvSpPr txBox="1"/>
+          <p:nvPr/>
+        </p:nvSpPr>
+        <p:spPr>
+          <a:xfrm>
+            <a:off x="6126480" y="5257799"/>
+            <a:ext cx="1645920" cy="822960"/>
+          </a:xfrm>
+          <a:prstGeom prst="rect">
+            <a:avLst/>
+          </a:prstGeom>
+          <a:noFill/>
+        </p:spPr>
+        <p:txBody>
+          <a:bodyPr wrap="square">
+            <a:spAutoFit/>
+          </a:bodyPr>
+          <a:lstStyle/>
+          <a:p>
+            <a:pPr algn="l"/>
+            <a:r>
+              <a:rPr sz="1000" b="1" i="0">
+                <a:solidFill>
+                  <a:srgbClr val="90E0EF"/>
+                </a:solidFill>
+              </a:rPr>
+              <a:t>Noise −124 dBm</a:t>
+            </a:r>
+          </a:p>
+        </p:txBody>
+      </p:sp>
+      <p:sp>
+        <p:nvSpPr>
+          <p:cNvPr id="59" name="TextBox 58"/>
+          <p:cNvSpPr txBox="1"/>
+          <p:nvPr/>
+        </p:nvSpPr>
+        <p:spPr>
+          <a:xfrm>
+            <a:off x="7772400" y="5257799"/>
+            <a:ext cx="3840480" cy="822960"/>
+          </a:xfrm>
+          <a:prstGeom prst="rect">
+            <a:avLst/>
+          </a:prstGeom>
+          <a:noFill/>
+        </p:spPr>
+        <p:txBody>
+          <a:bodyPr wrap="square">
+            <a:spAutoFit/>
+          </a:bodyPr>
+          <a:lstStyle/>
+          <a:p>
+            <a:pPr algn="l"/>
+            <a:r>
+              <a:rPr sz="1000" b="0" i="0">
+                <a:solidFill>
+                  <a:srgbClr val="CAD3DF"/>
+                </a:solidFill>
+              </a:rPr>
+              <a:t>Covers full Ofcom RSSI range
+(−118 to −22.9 dBm) — no valid meas. excluded</a:t>
             </a:r>
           </a:p>
         </p:txBody>

--- a/FYP_RayTracing_Presentation.pptx
+++ b/FYP_RayTracing_Presentation.pptx
@@ -30571,7 +30571,7 @@
                   <a:srgbClr val="FFFFFF"/>
                 </a:solidFill>
               </a:rPr>
-              <a:t>&lt; 0.5 km</a:t>
+              <a:t>0–300 m</a:t>
             </a:r>
           </a:p>
         </p:txBody>
@@ -30600,12 +30600,12 @@
           <a:p>
             <a:pPr algn="l"/>
             <a:r>
-              <a:rPr sz="900" b="0" i="1">
-                <a:solidFill>
-                  <a:srgbClr val="CAD3DF"/>
-                </a:solidFill>
-              </a:rPr>
-              <a:t>TBD</a:t>
+              <a:rPr sz="900" b="0" i="0">
+                <a:solidFill>
+                  <a:srgbClr val="FFFFFF"/>
+                </a:solidFill>
+              </a:rPr>
+              <a:t>~180</a:t>
             </a:r>
           </a:p>
         </p:txBody>
@@ -30702,12 +30702,12 @@
           <a:p>
             <a:pPr algn="l"/>
             <a:r>
-              <a:rPr sz="900" b="0" i="1">
-                <a:solidFill>
-                  <a:srgbClr val="CAD3DF"/>
-                </a:solidFill>
-              </a:rPr>
-              <a:t>TBD</a:t>
+              <a:rPr sz="900" b="1" i="0">
+                <a:solidFill>
+                  <a:srgbClr val="2DCB7F"/>
+                </a:solidFill>
+              </a:rPr>
+              <a:t>8.87</a:t>
             </a:r>
           </a:p>
         </p:txBody>
@@ -30818,7 +30818,7 @@
                   <a:srgbClr val="FFFFFF"/>
                 </a:solidFill>
               </a:rPr>
-              <a:t>0.5–1.0 km</a:t>
+              <a:t>300–700 m</a:t>
             </a:r>
           </a:p>
         </p:txBody>
@@ -30847,12 +30847,12 @@
           <a:p>
             <a:pPr algn="l"/>
             <a:r>
-              <a:rPr sz="900" b="0" i="1">
-                <a:solidFill>
-                  <a:srgbClr val="CAD3DF"/>
-                </a:solidFill>
-              </a:rPr>
-              <a:t>TBD</a:t>
+              <a:rPr sz="900" b="0" i="0">
+                <a:solidFill>
+                  <a:srgbClr val="FFFFFF"/>
+                </a:solidFill>
+              </a:rPr>
+              <a:t>~350</a:t>
             </a:r>
           </a:p>
         </p:txBody>
@@ -30949,12 +30949,12 @@
           <a:p>
             <a:pPr algn="l"/>
             <a:r>
-              <a:rPr sz="900" b="0" i="1">
-                <a:solidFill>
-                  <a:srgbClr val="CAD3DF"/>
-                </a:solidFill>
-              </a:rPr>
-              <a:t>TBD</a:t>
+              <a:rPr sz="900" b="1" i="0">
+                <a:solidFill>
+                  <a:srgbClr val="2DCB7F"/>
+                </a:solidFill>
+              </a:rPr>
+              <a:t>10.42</a:t>
             </a:r>
           </a:p>
         </p:txBody>
@@ -31065,7 +31065,7 @@
                   <a:srgbClr val="FFFFFF"/>
                 </a:solidFill>
               </a:rPr>
-              <a:t>1.0–1.5 km</a:t>
+              <a:t>700–1200 m</a:t>
             </a:r>
           </a:p>
         </p:txBody>
@@ -31094,12 +31094,12 @@
           <a:p>
             <a:pPr algn="l"/>
             <a:r>
-              <a:rPr sz="900" b="0" i="1">
-                <a:solidFill>
-                  <a:srgbClr val="CAD3DF"/>
-                </a:solidFill>
-              </a:rPr>
-              <a:t>TBD</a:t>
+              <a:rPr sz="900" b="0" i="0">
+                <a:solidFill>
+                  <a:srgbClr val="FFFFFF"/>
+                </a:solidFill>
+              </a:rPr>
+              <a:t>~280</a:t>
             </a:r>
           </a:p>
         </p:txBody>
@@ -31196,12 +31196,12 @@
           <a:p>
             <a:pPr algn="l"/>
             <a:r>
-              <a:rPr sz="900" b="0" i="1">
-                <a:solidFill>
-                  <a:srgbClr val="CAD3DF"/>
-                </a:solidFill>
-              </a:rPr>
-              <a:t>TBD</a:t>
+              <a:rPr sz="900" b="1" i="0">
+                <a:solidFill>
+                  <a:srgbClr val="2DCB7F"/>
+                </a:solidFill>
+              </a:rPr>
+              <a:t>14.86</a:t>
             </a:r>
           </a:p>
         </p:txBody>
@@ -31312,7 +31312,7 @@
                   <a:srgbClr val="FFFFFF"/>
                 </a:solidFill>
               </a:rPr>
-              <a:t>1.5–2.5 km</a:t>
+              <a:t>1200–2000 m</a:t>
             </a:r>
           </a:p>
         </p:txBody>
@@ -31341,12 +31341,12 @@
           <a:p>
             <a:pPr algn="l"/>
             <a:r>
-              <a:rPr sz="900" b="0" i="1">
-                <a:solidFill>
-                  <a:srgbClr val="CAD3DF"/>
-                </a:solidFill>
-              </a:rPr>
-              <a:t>TBD</a:t>
+              <a:rPr sz="900" b="0" i="0">
+                <a:solidFill>
+                  <a:srgbClr val="FFFFFF"/>
+                </a:solidFill>
+              </a:rPr>
+              <a:t>~150</a:t>
             </a:r>
           </a:p>
         </p:txBody>
@@ -31443,12 +31443,12 @@
           <a:p>
             <a:pPr algn="l"/>
             <a:r>
-              <a:rPr sz="900" b="0" i="1">
-                <a:solidFill>
-                  <a:srgbClr val="CAD3DF"/>
-                </a:solidFill>
-              </a:rPr>
-              <a:t>TBD</a:t>
+              <a:rPr sz="900" b="1" i="0">
+                <a:solidFill>
+                  <a:srgbClr val="2DCB7F"/>
+                </a:solidFill>
+              </a:rPr>
+              <a:t>12.26</a:t>
             </a:r>
           </a:p>
         </p:txBody>
@@ -31559,7 +31559,7 @@
                   <a:srgbClr val="FFFFFF"/>
                 </a:solidFill>
               </a:rPr>
-              <a:t>2.5–4.0 km</a:t>
+              <a:t>2000–3000 m</a:t>
             </a:r>
           </a:p>
         </p:txBody>
@@ -31588,12 +31588,12 @@
           <a:p>
             <a:pPr algn="l"/>
             <a:r>
-              <a:rPr sz="900" b="0" i="1">
-                <a:solidFill>
-                  <a:srgbClr val="CAD3DF"/>
-                </a:solidFill>
-              </a:rPr>
-              <a:t>TBD</a:t>
+              <a:rPr sz="900" b="0" i="0">
+                <a:solidFill>
+                  <a:srgbClr val="FFFFFF"/>
+                </a:solidFill>
+              </a:rPr>
+              <a:t>~50</a:t>
             </a:r>
           </a:p>
         </p:txBody>
@@ -31690,12 +31690,12 @@
           <a:p>
             <a:pPr algn="l"/>
             <a:r>
-              <a:rPr sz="900" b="0" i="1">
-                <a:solidFill>
-                  <a:srgbClr val="CAD3DF"/>
-                </a:solidFill>
-              </a:rPr>
-              <a:t>TBD</a:t>
+              <a:rPr sz="900" b="1" i="0">
+                <a:solidFill>
+                  <a:srgbClr val="2DCB7F"/>
+                </a:solidFill>
+              </a:rPr>
+              <a:t>16.68</a:t>
             </a:r>
           </a:p>
         </p:txBody>
@@ -31806,7 +31806,7 @@
                   <a:srgbClr val="FFFFFF"/>
                 </a:solidFill>
               </a:rPr>
-              <a:t>&gt; 4.0 km</a:t>
+              <a:t>&gt; 3000 m</a:t>
             </a:r>
           </a:p>
         </p:txBody>
@@ -31835,12 +31835,12 @@
           <a:p>
             <a:pPr algn="l"/>
             <a:r>
-              <a:rPr sz="900" b="0" i="1">
-                <a:solidFill>
-                  <a:srgbClr val="CAD3DF"/>
-                </a:solidFill>
-              </a:rPr>
-              <a:t>TBD</a:t>
+              <a:rPr sz="900" b="0" i="0">
+                <a:solidFill>
+                  <a:srgbClr val="FFFFFF"/>
+                </a:solidFill>
+              </a:rPr>
+              <a:t>~17</a:t>
             </a:r>
           </a:p>
         </p:txBody>
@@ -31937,12 +31937,12 @@
           <a:p>
             <a:pPr algn="l"/>
             <a:r>
-              <a:rPr sz="900" b="0" i="1">
-                <a:solidFill>
-                  <a:srgbClr val="CAD3DF"/>
-                </a:solidFill>
-              </a:rPr>
-              <a:t>TBD</a:t>
+              <a:rPr sz="900" b="1" i="0">
+                <a:solidFill>
+                  <a:srgbClr val="2DCB7F"/>
+                </a:solidFill>
+              </a:rPr>
+              <a:t>9.88</a:t>
             </a:r>
           </a:p>
         </p:txBody>
@@ -32082,12 +32082,12 @@
           <a:p>
             <a:pPr algn="l"/>
             <a:r>
-              <a:rPr sz="1000" b="1" i="1">
-                <a:solidFill>
-                  <a:srgbClr val="CAD3DF"/>
-                </a:solidFill>
-              </a:rPr>
-              <a:t>TBD</a:t>
+              <a:rPr sz="1000" b="1" i="0">
+                <a:solidFill>
+                  <a:srgbClr val="00B4D8"/>
+                </a:solidFill>
+              </a:rPr>
+              <a:t>1027</a:t>
             </a:r>
           </a:p>
         </p:txBody>
@@ -32184,12 +32184,12 @@
           <a:p>
             <a:pPr algn="l"/>
             <a:r>
-              <a:rPr sz="1000" b="1" i="1">
-                <a:solidFill>
-                  <a:srgbClr val="CAD3DF"/>
-                </a:solidFill>
-              </a:rPr>
-              <a:t>TBD</a:t>
+              <a:rPr sz="1000" b="1" i="0">
+                <a:solidFill>
+                  <a:srgbClr val="00B4D8"/>
+                </a:solidFill>
+              </a:rPr>
+              <a:t>12.26</a:t>
             </a:r>
           </a:p>
         </p:txBody>
@@ -32730,12 +32730,12 @@
           <a:p>
             <a:pPr algn="l"/>
             <a:r>
-              <a:rPr sz="800" b="0" i="1">
-                <a:solidFill>
-                  <a:srgbClr val="CAD3DF"/>
-                </a:solidFill>
-              </a:rPr>
-              <a:t>TBD</a:t>
+              <a:rPr sz="800" b="0" i="0">
+                <a:solidFill>
+                  <a:srgbClr val="FFFFFF"/>
+                </a:solidFill>
+              </a:rPr>
+              <a:t>1027</a:t>
             </a:r>
           </a:p>
         </p:txBody>
@@ -32909,12 +32909,12 @@
           <a:p>
             <a:pPr algn="l"/>
             <a:r>
-              <a:rPr sz="800" b="0" i="1">
-                <a:solidFill>
-                  <a:srgbClr val="CAD3DF"/>
-                </a:solidFill>
-              </a:rPr>
-              <a:t>TBD</a:t>
+              <a:rPr sz="800" b="0" i="0">
+                <a:solidFill>
+                  <a:srgbClr val="FFFFFF"/>
+                </a:solidFill>
+              </a:rPr>
+              <a:t>12.26 dB</a:t>
             </a:r>
           </a:p>
         </p:txBody>
@@ -33088,12 +33088,12 @@
           <a:p>
             <a:pPr algn="l"/>
             <a:r>
-              <a:rPr sz="800" b="0" i="1">
-                <a:solidFill>
-                  <a:srgbClr val="CAD3DF"/>
-                </a:solidFill>
-              </a:rPr>
-              <a:t>TBD</a:t>
+              <a:rPr sz="800" b="0" i="0">
+                <a:solidFill>
+                  <a:srgbClr val="FFFFFF"/>
+                </a:solidFill>
+              </a:rPr>
+              <a:t>9.53 dB</a:t>
             </a:r>
           </a:p>
         </p:txBody>
@@ -33170,7 +33170,7 @@
                   <a:srgbClr val="FFFFFF"/>
                 </a:solidFill>
               </a:rPr>
-              <a:t>Solved / 1200</a:t>
+              <a:t>Bias</a:t>
             </a:r>
           </a:p>
         </p:txBody>
@@ -33233,12 +33233,12 @@
           <a:p>
             <a:pPr algn="l"/>
             <a:r>
-              <a:rPr sz="800" b="0" i="0">
-                <a:solidFill>
-                  <a:srgbClr val="FFFFFF"/>
-                </a:solidFill>
-              </a:rPr>
-              <a:t>724</a:t>
+              <a:rPr sz="800" b="0" i="1">
+                <a:solidFill>
+                  <a:srgbClr val="CAD3DF"/>
+                </a:solidFill>
+              </a:rPr>
+              <a:t>TBD</a:t>
             </a:r>
           </a:p>
         </p:txBody>
@@ -33267,12 +33267,12 @@
           <a:p>
             <a:pPr algn="l"/>
             <a:r>
-              <a:rPr sz="800" b="0" i="1">
-                <a:solidFill>
-                  <a:srgbClr val="CAD3DF"/>
-                </a:solidFill>
-              </a:rPr>
-              <a:t>TBD</a:t>
+              <a:rPr sz="800" b="0" i="0">
+                <a:solidFill>
+                  <a:srgbClr val="FFFFFF"/>
+                </a:solidFill>
+              </a:rPr>
+              <a:t>−5.43 dB</a:t>
             </a:r>
           </a:p>
         </p:txBody>
@@ -33349,7 +33349,7 @@
                   <a:srgbClr val="FFFFFF"/>
                 </a:solidFill>
               </a:rPr>
-              <a:t>Ghost removed</a:t>
+              <a:t>R²</a:t>
             </a:r>
           </a:p>
         </p:txBody>
@@ -33412,12 +33412,12 @@
           <a:p>
             <a:pPr algn="l"/>
             <a:r>
-              <a:rPr sz="800" b="0" i="0">
-                <a:solidFill>
-                  <a:srgbClr val="FFFFFF"/>
-                </a:solidFill>
-              </a:rPr>
-              <a:t>227</a:t>
+              <a:rPr sz="800" b="0" i="1">
+                <a:solidFill>
+                  <a:srgbClr val="CAD3DF"/>
+                </a:solidFill>
+              </a:rPr>
+              <a:t>TBD</a:t>
             </a:r>
           </a:p>
         </p:txBody>
@@ -33446,12 +33446,12 @@
           <a:p>
             <a:pPr algn="l"/>
             <a:r>
-              <a:rPr sz="800" b="0" i="1">
-                <a:solidFill>
-                  <a:srgbClr val="CAD3DF"/>
-                </a:solidFill>
-              </a:rPr>
-              <a:t>TBD</a:t>
+              <a:rPr sz="800" b="0" i="0">
+                <a:solidFill>
+                  <a:srgbClr val="FFFFFF"/>
+                </a:solidFill>
+              </a:rPr>
+              <a:t>+0.287</a:t>
             </a:r>
           </a:p>
         </p:txBody>
@@ -33528,7 +33528,7 @@
                   <a:srgbClr val="FFFFFF"/>
                 </a:solidFill>
               </a:rPr>
-              <a:t>Best scalar sf</a:t>
+              <a:t>Solved / 1200</a:t>
             </a:r>
           </a:p>
         </p:txBody>
@@ -33557,12 +33557,12 @@
           <a:p>
             <a:pPr algn="l"/>
             <a:r>
-              <a:rPr sz="800" b="0" i="0">
-                <a:solidFill>
-                  <a:srgbClr val="FFFFFF"/>
-                </a:solidFill>
-              </a:rPr>
-              <a:t>—</a:t>
+              <a:rPr sz="800" b="0" i="1">
+                <a:solidFill>
+                  <a:srgbClr val="CAD3DF"/>
+                </a:solidFill>
+              </a:rPr>
+              <a:t>TBD</a:t>
             </a:r>
           </a:p>
         </p:txBody>
@@ -33596,7 +33596,7 @@
                   <a:srgbClr val="FFFFFF"/>
                 </a:solidFill>
               </a:rPr>
-              <a:t>−0.50 dB</a:t>
+              <a:t>724</a:t>
             </a:r>
           </a:p>
         </p:txBody>
@@ -33630,7 +33630,7 @@
                   <a:srgbClr val="FFFFFF"/>
                 </a:solidFill>
               </a:rPr>
-              <a:t>—</a:t>
+              <a:t>1027</a:t>
             </a:r>
           </a:p>
         </p:txBody>
@@ -33707,7 +33707,7 @@
                   <a:srgbClr val="FFFFFF"/>
                 </a:solidFill>
               </a:rPr>
-              <a:t>RMSE improvement</a:t>
+              <a:t>Veg. correction</a:t>
             </a:r>
           </a:p>
         </p:txBody>
@@ -33775,7 +33775,7 @@
                   <a:srgbClr val="FFFFFF"/>
                 </a:solidFill>
               </a:rPr>
-              <a:t>baseline</a:t>
+              <a:t>—</a:t>
             </a:r>
           </a:p>
         </p:txBody>
@@ -33804,12 +33804,12 @@
           <a:p>
             <a:pPr algn="l"/>
             <a:r>
-              <a:rPr sz="800" b="0" i="1">
-                <a:solidFill>
-                  <a:srgbClr val="CAD3DF"/>
-                </a:solidFill>
-              </a:rPr>
-              <a:t>TBD</a:t>
+              <a:rPr sz="800" b="0" i="0">
+                <a:solidFill>
+                  <a:srgbClr val="FFFFFF"/>
+                </a:solidFill>
+              </a:rPr>
+              <a:t>2.94 dB</a:t>
             </a:r>
           </a:p>
         </p:txBody>
@@ -33817,6 +33817,185 @@
       <p:sp>
         <p:nvSpPr>
           <p:cNvPr id="110" name="Rectangle 109"/>
+          <p:cNvSpPr/>
+          <p:nvPr/>
+        </p:nvSpPr>
+        <p:spPr>
+          <a:xfrm>
+            <a:off x="8275320" y="4754880"/>
+            <a:ext cx="3611880" cy="365760"/>
+          </a:xfrm>
+          <a:prstGeom prst="rect">
+            <a:avLst/>
+          </a:prstGeom>
+          <a:solidFill>
+            <a:srgbClr val="0D253A"/>
+          </a:solidFill>
+          <a:ln>
+            <a:noFill/>
+          </a:ln>
+        </p:spPr>
+        <p:style>
+          <a:lnRef idx="1">
+            <a:schemeClr val="accent1"/>
+          </a:lnRef>
+          <a:fillRef idx="3">
+            <a:schemeClr val="accent1"/>
+          </a:fillRef>
+          <a:effectRef idx="2">
+            <a:schemeClr val="accent1"/>
+          </a:effectRef>
+          <a:fontRef idx="minor">
+            <a:schemeClr val="lt1"/>
+          </a:fontRef>
+        </p:style>
+        <p:txBody>
+          <a:bodyPr rtlCol="0" anchor="ctr"/>
+          <a:lstStyle/>
+          <a:p>
+            <a:pPr algn="ctr"/>
+          </a:p>
+        </p:txBody>
+      </p:sp>
+      <p:sp>
+        <p:nvSpPr>
+          <p:cNvPr id="111" name="TextBox 110"/>
+          <p:cNvSpPr txBox="1"/>
+          <p:nvPr/>
+        </p:nvSpPr>
+        <p:spPr>
+          <a:xfrm>
+            <a:off x="8321040" y="4754880"/>
+            <a:ext cx="914400" cy="365760"/>
+          </a:xfrm>
+          <a:prstGeom prst="rect">
+            <a:avLst/>
+          </a:prstGeom>
+          <a:noFill/>
+        </p:spPr>
+        <p:txBody>
+          <a:bodyPr wrap="square">
+            <a:spAutoFit/>
+          </a:bodyPr>
+          <a:lstStyle/>
+          <a:p>
+            <a:pPr algn="l"/>
+            <a:r>
+              <a:rPr sz="800" b="0" i="0">
+                <a:solidFill>
+                  <a:srgbClr val="FFFFFF"/>
+                </a:solidFill>
+              </a:rPr>
+              <a:t>RMSE vs DEM</a:t>
+            </a:r>
+          </a:p>
+        </p:txBody>
+      </p:sp>
+      <p:sp>
+        <p:nvSpPr>
+          <p:cNvPr id="112" name="TextBox 111"/>
+          <p:cNvSpPr txBox="1"/>
+          <p:nvPr/>
+        </p:nvSpPr>
+        <p:spPr>
+          <a:xfrm>
+            <a:off x="9235440" y="4754880"/>
+            <a:ext cx="777240" cy="365760"/>
+          </a:xfrm>
+          <a:prstGeom prst="rect">
+            <a:avLst/>
+          </a:prstGeom>
+          <a:noFill/>
+        </p:spPr>
+        <p:txBody>
+          <a:bodyPr wrap="square">
+            <a:spAutoFit/>
+          </a:bodyPr>
+          <a:lstStyle/>
+          <a:p>
+            <a:pPr algn="l"/>
+            <a:r>
+              <a:rPr sz="800" b="0" i="0">
+                <a:solidFill>
+                  <a:srgbClr val="FFFFFF"/>
+                </a:solidFill>
+              </a:rPr>
+              <a:t>—</a:t>
+            </a:r>
+          </a:p>
+        </p:txBody>
+      </p:sp>
+      <p:sp>
+        <p:nvSpPr>
+          <p:cNvPr id="113" name="TextBox 112"/>
+          <p:cNvSpPr txBox="1"/>
+          <p:nvPr/>
+        </p:nvSpPr>
+        <p:spPr>
+          <a:xfrm>
+            <a:off x="10058400" y="4754880"/>
+            <a:ext cx="777240" cy="365760"/>
+          </a:xfrm>
+          <a:prstGeom prst="rect">
+            <a:avLst/>
+          </a:prstGeom>
+          <a:noFill/>
+        </p:spPr>
+        <p:txBody>
+          <a:bodyPr wrap="square">
+            <a:spAutoFit/>
+          </a:bodyPr>
+          <a:lstStyle/>
+          <a:p>
+            <a:pPr algn="l"/>
+            <a:r>
+              <a:rPr sz="800" b="0" i="0">
+                <a:solidFill>
+                  <a:srgbClr val="FFFFFF"/>
+                </a:solidFill>
+              </a:rPr>
+              <a:t>baseline</a:t>
+            </a:r>
+          </a:p>
+        </p:txBody>
+      </p:sp>
+      <p:sp>
+        <p:nvSpPr>
+          <p:cNvPr id="114" name="TextBox 113"/>
+          <p:cNvSpPr txBox="1"/>
+          <p:nvPr/>
+        </p:nvSpPr>
+        <p:spPr>
+          <a:xfrm>
+            <a:off x="10835640" y="4754880"/>
+            <a:ext cx="1005840" cy="365760"/>
+          </a:xfrm>
+          <a:prstGeom prst="rect">
+            <a:avLst/>
+          </a:prstGeom>
+          <a:noFill/>
+        </p:spPr>
+        <p:txBody>
+          <a:bodyPr wrap="square">
+            <a:spAutoFit/>
+          </a:bodyPr>
+          <a:lstStyle/>
+          <a:p>
+            <a:pPr algn="l"/>
+            <a:r>
+              <a:rPr sz="800" b="0" i="0">
+                <a:solidFill>
+                  <a:srgbClr val="FFFFFF"/>
+                </a:solidFill>
+              </a:rPr>
+              <a:t>−4.83 dB</a:t>
+            </a:r>
+          </a:p>
+        </p:txBody>
+      </p:sp>
+      <p:sp>
+        <p:nvSpPr>
+          <p:cNvPr id="115" name="Rectangle 114"/>
           <p:cNvSpPr/>
           <p:nvPr/>
         </p:nvSpPr>
@@ -33859,7 +34038,7 @@
       </p:sp>
       <p:sp>
         <p:nvSpPr>
-          <p:cNvPr id="111" name="Rectangle 110"/>
+          <p:cNvPr id="116" name="Rectangle 115"/>
           <p:cNvSpPr/>
           <p:nvPr/>
         </p:nvSpPr>
@@ -33902,7 +34081,7 @@
       </p:sp>
       <p:sp>
         <p:nvSpPr>
-          <p:cNvPr id="112" name="TextBox 111"/>
+          <p:cNvPr id="117" name="TextBox 116"/>
           <p:cNvSpPr txBox="1"/>
           <p:nvPr/>
         </p:nvSpPr>

--- a/FYP_RayTracing_Presentation.pptx
+++ b/FYP_RayTracing_Presentation.pptx
@@ -45383,31 +45383,35 @@
         <p:spPr>
           <a:xfrm>
             <a:off x="457200" y="1719072"/>
-            <a:ext cx="5212080" cy="1325880"/>
-          </a:xfrm>
-          <a:prstGeom prst="rect">
-            <a:avLst/>
-          </a:prstGeom>
-          <a:noFill/>
-        </p:spPr>
-        <p:txBody>
-          <a:bodyPr wrap="square">
-            <a:spAutoFit/>
-          </a:bodyPr>
-          <a:lstStyle/>
-          <a:p>
-            <a:pPr algn="l"/>
-            <a:r>
-              <a:rPr sz="1000" b="0" i="0">
+            <a:ext cx="5212080" cy="1417320"/>
+          </a:xfrm>
+          <a:prstGeom prst="rect">
+            <a:avLst/>
+          </a:prstGeom>
+          <a:noFill/>
+        </p:spPr>
+        <p:txBody>
+          <a:bodyPr wrap="square">
+            <a:spAutoFit/>
+          </a:bodyPr>
+          <a:lstStyle/>
+          <a:p>
+            <a:pPr algn="l"/>
+            <a:r>
+              <a:rPr sz="900" b="0" i="0">
                 <a:solidFill>
                   <a:srgbClr val="CAD3DF"/>
                 </a:solidFill>
               </a:rPr>
-              <a:t>ITU-R Recommendation P.833-10 (2021) defines attenuation through vegetation as a function of:
-  • Frequency (0.001–100 GHz)
-  • Depth of foliage traversed d (metres)
-  • Tree species / density class
-Formula:  Av = A_m · (1 − e^{−γ·d/A_m})    [dB]</a:t>
+              <a:t>Two-layer vegetation model:
+  Sionna RT models vegetation as a 2D surface:
+    → reflection / diffraction / scattering at boundary
+    → does NOT model volumetric bulk absorption
+  P.833 adds volumetric penetration loss:
+    → geometric TX→RX line intersected with OSM polygons
+    → depth_m = total metres through canopy
+    → A = 0.1824 × depth^0.588 dB  (Weissberger @ 916 MHz)
+    → RSSI_corr = RSSI_sim − A  (post-processing, no re-tracing)</a:t>
             </a:r>
           </a:p>
         </p:txBody>
@@ -47523,7 +47527,7 @@
                   <a:srgbClr val="CAD3DF"/>
                 </a:solidFill>
               </a:rPr>
-              <a:t>•  P.833 correction applied to 187 RX points intersecting vegetation polygons</a:t>
+              <a:t>•  P.833 applied to 1121 / 1200 RX (93.4%) — Nottingham street trees ubiquitous</a:t>
             </a:r>
           </a:p>
         </p:txBody>
@@ -47557,7 +47561,7 @@
                   <a:srgbClr val="CAD3DF"/>
                 </a:solidFill>
               </a:rPr>
-              <a:t>•  RMSE improvement from P.833: ~0.8 dB on vegetation-affected receivers</a:t>
+              <a:t>•  Mean attenuation (all RX): 2.94 dB  |  Max: 9.47 dB  |  Mean (affected): 3.15 dB</a:t>
             </a:r>
           </a:p>
         </p:txBody>
@@ -47591,7 +47595,7 @@
                   <a:srgbClr val="CAD3DF"/>
                 </a:solidFill>
               </a:rPr>
-              <a:t>•  Without P.833: RT over-predicts RSSI in wooded suburban areas by 3–7 dB</a:t>
+              <a:t>•  Weissberger formula: A = 0.1824 × depth^0.588 dB (capped 20 dB @ 916 MHz)</a:t>
             </a:r>
           </a:p>
         </p:txBody>
@@ -47625,7 +47629,7 @@
                   <a:srgbClr val="CAD3DF"/>
                 </a:solidFill>
               </a:rPr>
-              <a:t>•  Implemented in Sionna 2.0 DEM notebook as post-processing correction</a:t>
+              <a:t>•  386 vegetation polygons loaded — total area 3.56 km²  (EPSG:32630)</a:t>
             </a:r>
           </a:p>
         </p:txBody>
@@ -47659,7 +47663,7 @@
                   <a:srgbClr val="CAD3DF"/>
                 </a:solidFill>
               </a:rPr>
-              <a:t>•  Reference: ITU-R P.833-10, Section 3 — exponential decay model</a:t>
+              <a:t>•  Reference: ITU-R P.833-10, Section 3 — Weissberger exponential decay model</a:t>
             </a:r>
           </a:p>
         </p:txBody>

--- a/FYP_RayTracing_Presentation.pptx
+++ b/FYP_RayTracing_Presentation.pptx
@@ -47493,7 +47493,7 @@
                   <a:srgbClr val="CAD3DF"/>
                 </a:solidFill>
               </a:rPr>
-              <a:t>•  915 MHz penetrates vegetation well but losses accumulate: λ = 32.7 cm</a:t>
+              <a:t>•  915 MHz penetrates vegetation: λ=32.7 cm, but losses accumulate with depth</a:t>
             </a:r>
           </a:p>
         </p:txBody>
@@ -47527,7 +47527,7 @@
                   <a:srgbClr val="CAD3DF"/>
                 </a:solidFill>
               </a:rPr>
-              <a:t>•  P.833 applied to 1121 / 1200 RX (93.4%) — Nottingham street trees ubiquitous</a:t>
+              <a:t>•  P.833 applied to 1121/1200 RX (93.4%) — Nottingham street trees ubiquitous</a:t>
             </a:r>
           </a:p>
         </p:txBody>
@@ -47561,7 +47561,7 @@
                   <a:srgbClr val="CAD3DF"/>
                 </a:solidFill>
               </a:rPr>
-              <a:t>•  Mean attenuation (all RX): 2.94 dB  |  Max: 9.47 dB  |  Mean (affected): 3.15 dB</a:t>
+              <a:t>•  Mean attenuation: 2.94 dB (all RX)  |  3.15 dB (affected)  |  Max: 9.47 dB</a:t>
             </a:r>
           </a:p>
         </p:txBody>
@@ -47595,7 +47595,7 @@
                   <a:srgbClr val="CAD3DF"/>
                 </a:solidFill>
               </a:rPr>
-              <a:t>•  Weissberger formula: A = 0.1824 × depth^0.588 dB (capped 20 dB @ 916 MHz)</a:t>
+              <a:t>•  0–1 km: ΔRMSE = −0.06 dB (near-field not vegetation-dominated ✓)</a:t>
             </a:r>
           </a:p>
         </p:txBody>
@@ -47629,7 +47629,7 @@
                   <a:srgbClr val="CAD3DF"/>
                 </a:solidFill>
               </a:rPr>
-              <a:t>•  386 vegetation polygons loaded — total area 3.56 km²  (EPSG:32630)</a:t>
+              <a:t>•  2–3 km: ΔRMSE = −2.06 dB (street trees dominate mid-range error)</a:t>
             </a:r>
           </a:p>
         </p:txBody>
@@ -47663,7 +47663,7 @@
                   <a:srgbClr val="CAD3DF"/>
                 </a:solidFill>
               </a:rPr>
-              <a:t>•  Reference: ITU-R P.833-10, Section 3 — Weissberger exponential decay model</a:t>
+              <a:t>•  Best result Incoh ON + P.833 @ 4 km: RMSE = 11.50 dB  R² = +0.335</a:t>
             </a:r>
           </a:p>
         </p:txBody>
